--- a/docs/deck/radahn.pptx
+++ b/docs/deck/radahn.pptx
@@ -3144,57 +3144,14 @@
       </p:sp>
       <p:sp>
         <p:nvSpPr>
-          <p:cNvPr id="3" name="Rectangle 2"/>
-          <p:cNvSpPr/>
-          <p:nvPr/>
-        </p:nvSpPr>
-        <p:spPr>
-          <a:xfrm>
-            <a:off x="731520" y="1097280"/>
-            <a:ext cx="109728" cy="2926080"/>
-          </a:xfrm>
-          <a:prstGeom prst="rect">
-            <a:avLst/>
-          </a:prstGeom>
-          <a:solidFill>
-            <a:srgbClr val="F2C12E"/>
-          </a:solidFill>
-          <a:ln>
-            <a:noFill/>
-          </a:ln>
-        </p:spPr>
-        <p:style>
-          <a:lnRef idx="1">
-            <a:schemeClr val="accent1"/>
-          </a:lnRef>
-          <a:fillRef idx="3">
-            <a:schemeClr val="accent1"/>
-          </a:fillRef>
-          <a:effectRef idx="2">
-            <a:schemeClr val="accent1"/>
-          </a:effectRef>
-          <a:fontRef idx="minor">
-            <a:schemeClr val="lt1"/>
-          </a:fontRef>
-        </p:style>
-        <p:txBody>
-          <a:bodyPr rtlCol="0" anchor="ctr"/>
-          <a:lstStyle/>
-          <a:p>
-            <a:pPr algn="ctr"/>
-          </a:p>
-        </p:txBody>
-      </p:sp>
-      <p:sp>
-        <p:nvSpPr>
-          <p:cNvPr id="4" name="TextBox 3"/>
+          <p:cNvPr id="3" name="TextBox 2"/>
           <p:cNvSpPr txBox="1"/>
           <p:nvPr/>
         </p:nvSpPr>
         <p:spPr>
           <a:xfrm>
-            <a:off x="1097280" y="1005840"/>
-            <a:ext cx="10058400" cy="3200400"/>
+            <a:off x="731520" y="1371600"/>
+            <a:ext cx="10728655" cy="2743200"/>
           </a:xfrm>
           <a:prstGeom prst="rect">
             <a:avLst/>
@@ -3240,7 +3197,7 @@
               <a:spcBef>
                 <a:spcPts val="800"/>
               </a:spcBef>
-              <a:defRPr sz="2200">
+              <a:defRPr sz="2200" i="1">
                 <a:solidFill>
                   <a:srgbClr val="B8B1A2"/>
                 </a:solidFill>
@@ -3255,14 +3212,14 @@
       </p:sp>
       <p:sp>
         <p:nvSpPr>
-          <p:cNvPr id="5" name="Rounded Rectangle 4"/>
+          <p:cNvPr id="4" name="Rounded Rectangle 3"/>
           <p:cNvSpPr/>
           <p:nvPr/>
         </p:nvSpPr>
         <p:spPr>
           <a:xfrm>
-            <a:off x="731520" y="4389120"/>
-            <a:ext cx="3291840" cy="1828800"/>
+            <a:off x="731520" y="4114800"/>
+            <a:ext cx="10728655" cy="2011680"/>
           </a:xfrm>
           <a:prstGeom prst="roundRect">
             <a:avLst/>
@@ -3270,7 +3227,7 @@
           <a:solidFill>
             <a:srgbClr val="161512"/>
           </a:solidFill>
-          <a:ln w="12700">
+          <a:ln>
             <a:solidFill>
               <a:srgbClr val="2E2B26"/>
             </a:solidFill>
@@ -3291,285 +3248,51 @@
           </a:fontRef>
         </p:style>
         <p:txBody>
-          <a:bodyPr rtlCol="0" anchor="ctr"/>
-          <a:lstStyle/>
-          <a:p>
-            <a:pPr algn="ctr"/>
-          </a:p>
-        </p:txBody>
-      </p:sp>
-      <p:sp>
-        <p:nvSpPr>
-          <p:cNvPr id="6" name="TextBox 5"/>
-          <p:cNvSpPr txBox="1"/>
-          <p:nvPr/>
-        </p:nvSpPr>
-        <p:spPr>
-          <a:xfrm>
-            <a:off x="914400" y="4480560"/>
-            <a:ext cx="2926080" cy="1645920"/>
-          </a:xfrm>
-          <a:prstGeom prst="rect">
-            <a:avLst/>
-          </a:prstGeom>
-          <a:noFill/>
-        </p:spPr>
-        <p:txBody>
-          <a:bodyPr wrap="square">
-            <a:spAutoFit/>
-          </a:bodyPr>
-          <a:lstStyle/>
-          <a:p>
-            <a:pPr>
-              <a:defRPr sz="1100">
-                <a:solidFill>
-                  <a:srgbClr val="F2C12E"/>
+          <a:bodyPr rtlCol="0" anchor="ctr" wrap="square" lIns="365760" tIns="365760"/>
+          <a:lstStyle/>
+          <a:p>
+            <a:pPr algn="ctr">
+              <a:defRPr sz="1300">
+                <a:solidFill>
+                  <a:srgbClr val="4FB37E"/>
                 </a:solidFill>
                 <a:latin typeface="Consolas"/>
               </a:defRPr>
             </a:pPr>
             <a:r>
-              <a:t>LIVE DEPLOYMENT</a:t>
-            </a:r>
-          </a:p>
-          <a:p>
-            <a:pPr>
-              <a:defRPr sz="1600" b="1">
-                <a:solidFill>
-                  <a:srgbClr val="EDE6D6"/>
-                </a:solidFill>
-                <a:latin typeface="Georgia"/>
-              </a:defRPr>
-            </a:pPr>
-            <a:r>
-              <a:t>radahn-ai.vercel.app</a:t>
-            </a:r>
-          </a:p>
-          <a:p>
-            <a:pPr>
-              <a:defRPr sz="1200">
+              <a:t>LIVE DEPLOYMENT: https://radahn-ai.vercel.app  (Zero-auth Guest mode ready for testing)</a:t>
+            </a:r>
+          </a:p>
+          <a:p>
+            <a:pPr>
+              <a:spcBef>
+                <a:spcPts val="800"/>
+              </a:spcBef>
+              <a:defRPr sz="1300">
                 <a:solidFill>
                   <a:srgbClr val="B8B1A2"/>
                 </a:solidFill>
-                <a:latin typeface="Segoe UI"/>
-              </a:defRPr>
-            </a:pPr>
-            <a:r>
-              <a:t>Hosted on Vercel (Mumbai) + MongoDB Atlas M0. Live for judging.</a:t>
-            </a:r>
-          </a:p>
-        </p:txBody>
-      </p:sp>
-      <p:sp>
-        <p:nvSpPr>
-          <p:cNvPr id="7" name="Rounded Rectangle 6"/>
-          <p:cNvSpPr/>
-          <p:nvPr/>
-        </p:nvSpPr>
-        <p:spPr>
-          <a:xfrm>
-            <a:off x="4389120" y="4389120"/>
-            <a:ext cx="3291840" cy="1828800"/>
-          </a:xfrm>
-          <a:prstGeom prst="roundRect">
-            <a:avLst/>
-          </a:prstGeom>
-          <a:solidFill>
-            <a:srgbClr val="161512"/>
-          </a:solidFill>
-          <a:ln w="12700">
-            <a:solidFill>
-              <a:srgbClr val="2E2B26"/>
-            </a:solidFill>
-          </a:ln>
-        </p:spPr>
-        <p:style>
-          <a:lnRef idx="1">
-            <a:schemeClr val="accent1"/>
-          </a:lnRef>
-          <a:fillRef idx="3">
-            <a:schemeClr val="accent1"/>
-          </a:fillRef>
-          <a:effectRef idx="2">
-            <a:schemeClr val="accent1"/>
-          </a:effectRef>
-          <a:fontRef idx="minor">
-            <a:schemeClr val="lt1"/>
-          </a:fontRef>
-        </p:style>
-        <p:txBody>
-          <a:bodyPr rtlCol="0" anchor="ctr"/>
-          <a:lstStyle/>
-          <a:p>
-            <a:pPr algn="ctr"/>
-          </a:p>
-        </p:txBody>
-      </p:sp>
-      <p:sp>
-        <p:nvSpPr>
-          <p:cNvPr id="8" name="TextBox 7"/>
-          <p:cNvSpPr txBox="1"/>
-          <p:nvPr/>
-        </p:nvSpPr>
-        <p:spPr>
-          <a:xfrm>
-            <a:off x="4572000" y="4480560"/>
-            <a:ext cx="2926080" cy="1645920"/>
-          </a:xfrm>
-          <a:prstGeom prst="rect">
-            <a:avLst/>
-          </a:prstGeom>
-          <a:noFill/>
-        </p:spPr>
-        <p:txBody>
-          <a:bodyPr wrap="square">
-            <a:spAutoFit/>
-          </a:bodyPr>
-          <a:lstStyle/>
-          <a:p>
-            <a:pPr>
-              <a:defRPr sz="1100">
-                <a:solidFill>
-                  <a:srgbClr val="F2C12E"/>
-                </a:solidFill>
                 <a:latin typeface="Consolas"/>
               </a:defRPr>
             </a:pPr>
             <a:r>
-              <a:t>ZERO SIGN-UP TESTING</a:t>
-            </a:r>
-          </a:p>
-          <a:p>
-            <a:pPr>
-              <a:defRPr sz="1600" b="1">
-                <a:solidFill>
-                  <a:srgbClr val="EDE6D6"/>
-                </a:solidFill>
-                <a:latin typeface="Georgia"/>
-              </a:defRPr>
-            </a:pPr>
-            <a:r>
-              <a:t>Enter as Guest</a:t>
-            </a:r>
-          </a:p>
-          <a:p>
-            <a:pPr>
-              <a:defRPr sz="1200">
-                <a:solidFill>
-                  <a:srgbClr val="B8B1A2"/>
-                </a:solidFill>
-                <a:latin typeface="Segoe UI"/>
-              </a:defRPr>
-            </a:pPr>
-            <a:r>
-              <a:t>Click 'Enter as guest' then 'Load demo memories' to test Aarav's world.</a:t>
-            </a:r>
-          </a:p>
-        </p:txBody>
-      </p:sp>
-      <p:sp>
-        <p:nvSpPr>
-          <p:cNvPr id="9" name="Rounded Rectangle 8"/>
-          <p:cNvSpPr/>
-          <p:nvPr/>
-        </p:nvSpPr>
-        <p:spPr>
-          <a:xfrm>
-            <a:off x="8046720" y="4389120"/>
-            <a:ext cx="3413455" cy="1828800"/>
-          </a:xfrm>
-          <a:prstGeom prst="roundRect">
-            <a:avLst/>
-          </a:prstGeom>
-          <a:solidFill>
-            <a:srgbClr val="161512"/>
-          </a:solidFill>
-          <a:ln w="12700">
-            <a:solidFill>
-              <a:srgbClr val="2E2B26"/>
-            </a:solidFill>
-          </a:ln>
-        </p:spPr>
-        <p:style>
-          <a:lnRef idx="1">
-            <a:schemeClr val="accent1"/>
-          </a:lnRef>
-          <a:fillRef idx="3">
-            <a:schemeClr val="accent1"/>
-          </a:fillRef>
-          <a:effectRef idx="2">
-            <a:schemeClr val="accent1"/>
-          </a:effectRef>
-          <a:fontRef idx="minor">
-            <a:schemeClr val="lt1"/>
-          </a:fontRef>
-        </p:style>
-        <p:txBody>
-          <a:bodyPr rtlCol="0" anchor="ctr"/>
-          <a:lstStyle/>
-          <a:p>
-            <a:pPr algn="ctr"/>
-          </a:p>
-        </p:txBody>
-      </p:sp>
-      <p:sp>
-        <p:nvSpPr>
-          <p:cNvPr id="10" name="TextBox 9"/>
-          <p:cNvSpPr txBox="1"/>
-          <p:nvPr/>
-        </p:nvSpPr>
-        <p:spPr>
-          <a:xfrm>
-            <a:off x="8229600" y="4480560"/>
-            <a:ext cx="3017520" cy="1645920"/>
-          </a:xfrm>
-          <a:prstGeom prst="rect">
-            <a:avLst/>
-          </a:prstGeom>
-          <a:noFill/>
-        </p:spPr>
-        <p:txBody>
-          <a:bodyPr wrap="square">
-            <a:spAutoFit/>
-          </a:bodyPr>
-          <a:lstStyle/>
-          <a:p>
-            <a:pPr>
-              <a:defRPr sz="1100">
-                <a:solidFill>
-                  <a:srgbClr val="F2C12E"/>
+              <a:t>PUBLIC REPOSITORY: https://github.com/vaibhavcodesx/radahn</a:t>
+            </a:r>
+          </a:p>
+          <a:p>
+            <a:pPr>
+              <a:spcBef>
+                <a:spcPts val="800"/>
+              </a:spcBef>
+              <a:defRPr sz="1300">
+                <a:solidFill>
+                  <a:srgbClr val="8A8477"/>
                 </a:solidFill>
                 <a:latin typeface="Consolas"/>
               </a:defRPr>
             </a:pPr>
             <a:r>
-              <a:t>PUBLIC REPOSITORY</a:t>
-            </a:r>
-          </a:p>
-          <a:p>
-            <a:pPr>
-              <a:defRPr sz="1400" b="1">
-                <a:solidFill>
-                  <a:srgbClr val="EDE6D6"/>
-                </a:solidFill>
-                <a:latin typeface="Georgia"/>
-              </a:defRPr>
-            </a:pPr>
-            <a:r>
-              <a:t>github.com/vaibhavcodesx/radahn</a:t>
-            </a:r>
-          </a:p>
-          <a:p>
-            <a:pPr>
-              <a:defRPr sz="1200">
-                <a:solidFill>
-                  <a:srgbClr val="B8B1A2"/>
-                </a:solidFill>
-                <a:latin typeface="Segoe UI"/>
-              </a:defRPr>
-            </a:pPr>
-            <a:r>
-              <a:t>Full source, design documentation, and production eval harness.</a:t>
+              <a:t>TECH STACK: Next.js 16 + Tailwind v4 + MongoDB Atlas + Gemini 3.5/3.6 + Groq</a:t>
             </a:r>
           </a:p>
         </p:txBody>
@@ -3666,7 +3389,7 @@
               </a:defRPr>
             </a:pPr>
             <a:r>
-              <a:t>VERIFICATION</a:t>
+              <a:t>09 / BENCHMARKS</a:t>
             </a:r>
           </a:p>
           <a:p>
@@ -3682,7 +3405,7 @@
               </a:defRPr>
             </a:pPr>
             <a:r>
-              <a:t>Production Evaluation Results: 100% Pass Rate Across 51 Checks</a:t>
+              <a:t>Hosted production verification on MongoDB Atlas M0 + Gemini / Groq.</a:t>
             </a:r>
           </a:p>
         </p:txBody>
@@ -3695,8 +3418,8 @@
         </p:nvSpPr>
         <p:spPr>
           <a:xfrm>
-            <a:off x="731520" y="1828800"/>
-            <a:ext cx="3413455" cy="1965960"/>
+            <a:off x="731520" y="2011680"/>
+            <a:ext cx="3429000" cy="1828800"/>
           </a:xfrm>
           <a:prstGeom prst="roundRect">
             <a:avLst/>
@@ -3704,7 +3427,7 @@
           <a:solidFill>
             <a:srgbClr val="161512"/>
           </a:solidFill>
-          <a:ln w="12700">
+          <a:ln>
             <a:solidFill>
               <a:srgbClr val="2E2B26"/>
             </a:solidFill>
@@ -3725,41 +3448,15 @@
           </a:fontRef>
         </p:style>
         <p:txBody>
-          <a:bodyPr rtlCol="0" anchor="ctr"/>
-          <a:lstStyle/>
-          <a:p>
-            <a:pPr algn="ctr"/>
-          </a:p>
-        </p:txBody>
-      </p:sp>
-      <p:sp>
-        <p:nvSpPr>
-          <p:cNvPr id="5" name="TextBox 4"/>
-          <p:cNvSpPr txBox="1"/>
-          <p:nvPr/>
-        </p:nvSpPr>
-        <p:spPr>
-          <a:xfrm>
-            <a:off x="914400" y="1965960"/>
-            <a:ext cx="3047695" cy="1691640"/>
-          </a:xfrm>
-          <a:prstGeom prst="rect">
-            <a:avLst/>
-          </a:prstGeom>
-          <a:noFill/>
-        </p:spPr>
-        <p:txBody>
-          <a:bodyPr wrap="square">
-            <a:spAutoFit/>
-          </a:bodyPr>
-          <a:lstStyle/>
-          <a:p>
-            <a:pPr>
-              <a:defRPr sz="3200" b="1">
+          <a:bodyPr rtlCol="0" anchor="ctr" wrap="square" lIns="228600" tIns="228600"/>
+          <a:lstStyle/>
+          <a:p>
+            <a:pPr algn="ctr">
+              <a:defRPr sz="2800" b="1">
                 <a:solidFill>
                   <a:srgbClr val="4FB37E"/>
                 </a:solidFill>
-                <a:latin typeface="Consolas"/>
+                <a:latin typeface="Georgia"/>
               </a:defRPr>
             </a:pPr>
             <a:r>
@@ -3771,45 +3468,45 @@
               <a:spcBef>
                 <a:spcPts val="400"/>
               </a:spcBef>
-              <a:defRPr sz="1600" b="1">
+              <a:defRPr sz="1300" b="1">
                 <a:solidFill>
                   <a:srgbClr val="EDE6D6"/>
                 </a:solidFill>
-                <a:latin typeface="Georgia"/>
-              </a:defRPr>
-            </a:pPr>
-            <a:r>
-              <a:t>Live Cases Passed</a:t>
-            </a:r>
-          </a:p>
-          <a:p>
-            <a:pPr>
-              <a:spcBef>
-                <a:spcPts val="400"/>
-              </a:spcBef>
-              <a:defRPr sz="1200">
-                <a:solidFill>
-                  <a:srgbClr val="B8B1A2"/>
-                </a:solidFill>
-                <a:latin typeface="Segoe UI"/>
-              </a:defRPr>
-            </a:pPr>
-            <a:r>
-              <a:t>Validated on production (write-add, corrections, explicit forget, cold-index plan).</a:t>
-            </a:r>
-          </a:p>
-        </p:txBody>
-      </p:sp>
-      <p:sp>
-        <p:nvSpPr>
-          <p:cNvPr id="6" name="Rounded Rectangle 5"/>
+                <a:latin typeface="Segoe UI"/>
+              </a:defRPr>
+            </a:pPr>
+            <a:r>
+              <a:t>Live Test Cases Passed</a:t>
+            </a:r>
+          </a:p>
+          <a:p>
+            <a:pPr>
+              <a:spcBef>
+                <a:spcPts val="200"/>
+              </a:spcBef>
+              <a:defRPr sz="1100">
+                <a:solidFill>
+                  <a:srgbClr val="8A8477"/>
+                </a:solidFill>
+                <a:latin typeface="Segoe UI"/>
+              </a:defRPr>
+            </a:pPr>
+            <a:r>
+              <a:t>100% pass across write-add, correction chains, cold-index recall, explicit forget.</a:t>
+            </a:r>
+          </a:p>
+        </p:txBody>
+      </p:sp>
+      <p:sp>
+        <p:nvSpPr>
+          <p:cNvPr id="5" name="Rounded Rectangle 4"/>
           <p:cNvSpPr/>
           <p:nvPr/>
         </p:nvSpPr>
         <p:spPr>
           <a:xfrm>
-            <a:off x="4389120" y="1828800"/>
-            <a:ext cx="3413455" cy="1965960"/>
+            <a:off x="4343400" y="2011680"/>
+            <a:ext cx="3429000" cy="1828800"/>
           </a:xfrm>
           <a:prstGeom prst="roundRect">
             <a:avLst/>
@@ -3817,7 +3514,7 @@
           <a:solidFill>
             <a:srgbClr val="161512"/>
           </a:solidFill>
-          <a:ln w="12700">
+          <a:ln>
             <a:solidFill>
               <a:srgbClr val="2E2B26"/>
             </a:solidFill>
@@ -3838,41 +3535,15 @@
           </a:fontRef>
         </p:style>
         <p:txBody>
-          <a:bodyPr rtlCol="0" anchor="ctr"/>
-          <a:lstStyle/>
-          <a:p>
-            <a:pPr algn="ctr"/>
-          </a:p>
-        </p:txBody>
-      </p:sp>
-      <p:sp>
-        <p:nvSpPr>
-          <p:cNvPr id="7" name="TextBox 6"/>
-          <p:cNvSpPr txBox="1"/>
-          <p:nvPr/>
-        </p:nvSpPr>
-        <p:spPr>
-          <a:xfrm>
-            <a:off x="4572000" y="1965960"/>
-            <a:ext cx="3047695" cy="1691640"/>
-          </a:xfrm>
-          <a:prstGeom prst="rect">
-            <a:avLst/>
-          </a:prstGeom>
-          <a:noFill/>
-        </p:spPr>
-        <p:txBody>
-          <a:bodyPr wrap="square">
-            <a:spAutoFit/>
-          </a:bodyPr>
-          <a:lstStyle/>
-          <a:p>
-            <a:pPr>
-              <a:defRPr sz="3200" b="1">
+          <a:bodyPr rtlCol="0" anchor="ctr" wrap="square" lIns="228600" tIns="228600"/>
+          <a:lstStyle/>
+          <a:p>
+            <a:pPr algn="ctr">
+              <a:defRPr sz="2800" b="1">
                 <a:solidFill>
                   <a:srgbClr val="4FB37E"/>
                 </a:solidFill>
-                <a:latin typeface="Consolas"/>
+                <a:latin typeface="Georgia"/>
               </a:defRPr>
             </a:pPr>
             <a:r>
@@ -3884,11 +3555,11 @@
               <a:spcBef>
                 <a:spcPts val="400"/>
               </a:spcBef>
-              <a:defRPr sz="1600" b="1">
+              <a:defRPr sz="1300" b="1">
                 <a:solidFill>
                   <a:srgbClr val="EDE6D6"/>
                 </a:solidFill>
-                <a:latin typeface="Georgia"/>
+                <a:latin typeface="Segoe UI"/>
               </a:defRPr>
             </a:pPr>
             <a:r>
@@ -3898,31 +3569,31 @@
           <a:p>
             <a:pPr>
               <a:spcBef>
-                <a:spcPts val="400"/>
-              </a:spcBef>
-              <a:defRPr sz="1200">
-                <a:solidFill>
-                  <a:srgbClr val="B8B1A2"/>
-                </a:solidFill>
-                <a:latin typeface="Segoe UI"/>
-              </a:defRPr>
-            </a:pPr>
-            <a:r>
-              <a:t>Privacy gate, prompt injection resistance, reconcile ops, and TTL grace rules.</a:t>
-            </a:r>
-          </a:p>
-        </p:txBody>
-      </p:sp>
-      <p:sp>
-        <p:nvSpPr>
-          <p:cNvPr id="8" name="Rounded Rectangle 7"/>
+                <a:spcPts val="200"/>
+              </a:spcBef>
+              <a:defRPr sz="1100">
+                <a:solidFill>
+                  <a:srgbClr val="8A8477"/>
+                </a:solidFill>
+                <a:latin typeface="Segoe UI"/>
+              </a:defRPr>
+            </a:pPr>
+            <a:r>
+              <a:t>100% pass for privacy gate, prompt injection resistance, reconcile ops, TTL grace.</a:t>
+            </a:r>
+          </a:p>
+        </p:txBody>
+      </p:sp>
+      <p:sp>
+        <p:nvSpPr>
+          <p:cNvPr id="6" name="Rounded Rectangle 5"/>
           <p:cNvSpPr/>
           <p:nvPr/>
         </p:nvSpPr>
         <p:spPr>
           <a:xfrm>
-            <a:off x="8046720" y="1828800"/>
-            <a:ext cx="3413455" cy="1965960"/>
+            <a:off x="7955280" y="2011680"/>
+            <a:ext cx="3429000" cy="1828800"/>
           </a:xfrm>
           <a:prstGeom prst="roundRect">
             <a:avLst/>
@@ -3930,7 +3601,7 @@
           <a:solidFill>
             <a:srgbClr val="161512"/>
           </a:solidFill>
-          <a:ln w="12700">
+          <a:ln>
             <a:solidFill>
               <a:srgbClr val="2E2B26"/>
             </a:solidFill>
@@ -3951,41 +3622,15 @@
           </a:fontRef>
         </p:style>
         <p:txBody>
-          <a:bodyPr rtlCol="0" anchor="ctr"/>
-          <a:lstStyle/>
-          <a:p>
-            <a:pPr algn="ctr"/>
-          </a:p>
-        </p:txBody>
-      </p:sp>
-      <p:sp>
-        <p:nvSpPr>
-          <p:cNvPr id="9" name="TextBox 8"/>
-          <p:cNvSpPr txBox="1"/>
-          <p:nvPr/>
-        </p:nvSpPr>
-        <p:spPr>
-          <a:xfrm>
-            <a:off x="8229600" y="1965960"/>
-            <a:ext cx="3047695" cy="1691640"/>
-          </a:xfrm>
-          <a:prstGeom prst="rect">
-            <a:avLst/>
-          </a:prstGeom>
-          <a:noFill/>
-        </p:spPr>
-        <p:txBody>
-          <a:bodyPr wrap="square">
-            <a:spAutoFit/>
-          </a:bodyPr>
-          <a:lstStyle/>
-          <a:p>
-            <a:pPr>
-              <a:defRPr sz="3200" b="1">
-                <a:solidFill>
-                  <a:srgbClr val="F2C12E"/>
-                </a:solidFill>
-                <a:latin typeface="Consolas"/>
+          <a:bodyPr rtlCol="0" anchor="ctr" wrap="square" lIns="228600" tIns="228600"/>
+          <a:lstStyle/>
+          <a:p>
+            <a:pPr algn="ctr">
+              <a:defRPr sz="2800" b="1">
+                <a:solidFill>
+                  <a:srgbClr val="4FB37E"/>
+                </a:solidFill>
+                <a:latin typeface="Georgia"/>
               </a:defRPr>
             </a:pPr>
             <a:r>
@@ -3997,11 +3642,11 @@
               <a:spcBef>
                 <a:spcPts val="400"/>
               </a:spcBef>
-              <a:defRPr sz="1600" b="1">
+              <a:defRPr sz="1300" b="1">
                 <a:solidFill>
                   <a:srgbClr val="EDE6D6"/>
                 </a:solidFill>
-                <a:latin typeface="Georgia"/>
+                <a:latin typeface="Segoe UI"/>
               </a:defRPr>
             </a:pPr>
             <a:r>
@@ -4011,31 +3656,31 @@
           <a:p>
             <a:pPr>
               <a:spcBef>
-                <a:spcPts val="400"/>
-              </a:spcBef>
-              <a:defRPr sz="1200">
-                <a:solidFill>
-                  <a:srgbClr val="B8B1A2"/>
-                </a:solidFill>
-                <a:latin typeface="Segoe UI"/>
-              </a:defRPr>
-            </a:pPr>
-            <a:r>
-              <a:t>100% interception of simulated API keys, card numbers, and passwords.</a:t>
-            </a:r>
-          </a:p>
-        </p:txBody>
-      </p:sp>
-      <p:sp>
-        <p:nvSpPr>
-          <p:cNvPr id="10" name="Rounded Rectangle 9"/>
+                <a:spcPts val="200"/>
+              </a:spcBef>
+              <a:defRPr sz="1100">
+                <a:solidFill>
+                  <a:srgbClr val="8A8477"/>
+                </a:solidFill>
+                <a:latin typeface="Segoe UI"/>
+              </a:defRPr>
+            </a:pPr>
+            <a:r>
+              <a:t>100% interception of simulated API keys, credentials, tokens, and sensitive cards.</a:t>
+            </a:r>
+          </a:p>
+        </p:txBody>
+      </p:sp>
+      <p:sp>
+        <p:nvSpPr>
+          <p:cNvPr id="7" name="Rounded Rectangle 6"/>
           <p:cNvSpPr/>
           <p:nvPr/>
         </p:nvSpPr>
         <p:spPr>
           <a:xfrm>
-            <a:off x="731520" y="3977639"/>
-            <a:ext cx="3413455" cy="1965960"/>
+            <a:off x="731520" y="4114800"/>
+            <a:ext cx="3429000" cy="1828800"/>
           </a:xfrm>
           <a:prstGeom prst="roundRect">
             <a:avLst/>
@@ -4043,7 +3688,7 @@
           <a:solidFill>
             <a:srgbClr val="161512"/>
           </a:solidFill>
-          <a:ln w="12700">
+          <a:ln>
             <a:solidFill>
               <a:srgbClr val="2E2B26"/>
             </a:solidFill>
@@ -4064,41 +3709,15 @@
           </a:fontRef>
         </p:style>
         <p:txBody>
-          <a:bodyPr rtlCol="0" anchor="ctr"/>
-          <a:lstStyle/>
-          <a:p>
-            <a:pPr algn="ctr"/>
-          </a:p>
-        </p:txBody>
-      </p:sp>
-      <p:sp>
-        <p:nvSpPr>
-          <p:cNvPr id="11" name="TextBox 10"/>
-          <p:cNvSpPr txBox="1"/>
-          <p:nvPr/>
-        </p:nvSpPr>
-        <p:spPr>
-          <a:xfrm>
-            <a:off x="914400" y="4114800"/>
-            <a:ext cx="3047695" cy="1691640"/>
-          </a:xfrm>
-          <a:prstGeom prst="rect">
-            <a:avLst/>
-          </a:prstGeom>
-          <a:noFill/>
-        </p:spPr>
-        <p:txBody>
-          <a:bodyPr wrap="square">
-            <a:spAutoFit/>
-          </a:bodyPr>
-          <a:lstStyle/>
-          <a:p>
-            <a:pPr>
-              <a:defRPr sz="3200" b="1">
+          <a:bodyPr rtlCol="0" anchor="ctr" wrap="square" lIns="228600" tIns="228600"/>
+          <a:lstStyle/>
+          <a:p>
+            <a:pPr algn="ctr">
+              <a:defRPr sz="2800" b="1">
                 <a:solidFill>
                   <a:srgbClr val="4FB37E"/>
                 </a:solidFill>
-                <a:latin typeface="Consolas"/>
+                <a:latin typeface="Georgia"/>
               </a:defRPr>
             </a:pPr>
             <a:r>
@@ -4110,45 +3729,45 @@
               <a:spcBef>
                 <a:spcPts val="400"/>
               </a:spcBef>
-              <a:defRPr sz="1600" b="1">
+              <a:defRPr sz="1300" b="1">
                 <a:solidFill>
                   <a:srgbClr val="EDE6D6"/>
                 </a:solidFill>
-                <a:latin typeface="Georgia"/>
-              </a:defRPr>
-            </a:pPr>
-            <a:r>
-              <a:t>Recall@5</a:t>
-            </a:r>
-          </a:p>
-          <a:p>
-            <a:pPr>
-              <a:spcBef>
-                <a:spcPts val="400"/>
-              </a:spcBef>
-              <a:defRPr sz="1200">
-                <a:solidFill>
-                  <a:srgbClr val="B8B1A2"/>
-                </a:solidFill>
-                <a:latin typeface="Segoe UI"/>
-              </a:defRPr>
-            </a:pPr>
-            <a:r>
-              <a:t>Top 5 candidates captured all relevant ground-truth active memories.</a:t>
-            </a:r>
-          </a:p>
-        </p:txBody>
-      </p:sp>
-      <p:sp>
-        <p:nvSpPr>
-          <p:cNvPr id="12" name="Rounded Rectangle 11"/>
+                <a:latin typeface="Segoe UI"/>
+              </a:defRPr>
+            </a:pPr>
+            <a:r>
+              <a:t>Recall@5 Precision</a:t>
+            </a:r>
+          </a:p>
+          <a:p>
+            <a:pPr>
+              <a:spcBef>
+                <a:spcPts val="200"/>
+              </a:spcBef>
+              <a:defRPr sz="1100">
+                <a:solidFill>
+                  <a:srgbClr val="8A8477"/>
+                </a:solidFill>
+                <a:latin typeface="Segoe UI"/>
+              </a:defRPr>
+            </a:pPr>
+            <a:r>
+              <a:t>Top 5 retrieved candidates captured 100% of ground-truth test units.</a:t>
+            </a:r>
+          </a:p>
+        </p:txBody>
+      </p:sp>
+      <p:sp>
+        <p:nvSpPr>
+          <p:cNvPr id="8" name="Rounded Rectangle 7"/>
           <p:cNvSpPr/>
           <p:nvPr/>
         </p:nvSpPr>
         <p:spPr>
           <a:xfrm>
-            <a:off x="4389120" y="3977639"/>
-            <a:ext cx="3413455" cy="1965960"/>
+            <a:off x="4343400" y="4114800"/>
+            <a:ext cx="3429000" cy="1828800"/>
           </a:xfrm>
           <a:prstGeom prst="roundRect">
             <a:avLst/>
@@ -4156,7 +3775,7 @@
           <a:solidFill>
             <a:srgbClr val="161512"/>
           </a:solidFill>
-          <a:ln w="12700">
+          <a:ln>
             <a:solidFill>
               <a:srgbClr val="2E2B26"/>
             </a:solidFill>
@@ -4177,41 +3796,15 @@
           </a:fontRef>
         </p:style>
         <p:txBody>
-          <a:bodyPr rtlCol="0" anchor="ctr"/>
-          <a:lstStyle/>
-          <a:p>
-            <a:pPr algn="ctr"/>
-          </a:p>
-        </p:txBody>
-      </p:sp>
-      <p:sp>
-        <p:nvSpPr>
-          <p:cNvPr id="13" name="TextBox 12"/>
-          <p:cNvSpPr txBox="1"/>
-          <p:nvPr/>
-        </p:nvSpPr>
-        <p:spPr>
-          <a:xfrm>
-            <a:off x="4572000" y="4114800"/>
-            <a:ext cx="3047695" cy="1691640"/>
-          </a:xfrm>
-          <a:prstGeom prst="rect">
-            <a:avLst/>
-          </a:prstGeom>
-          <a:noFill/>
-        </p:spPr>
-        <p:txBody>
-          <a:bodyPr wrap="square">
-            <a:spAutoFit/>
-          </a:bodyPr>
-          <a:lstStyle/>
-          <a:p>
-            <a:pPr>
-              <a:defRPr sz="3200" b="1">
-                <a:solidFill>
-                  <a:srgbClr val="3A63D8"/>
-                </a:solidFill>
-                <a:latin typeface="Consolas"/>
+          <a:bodyPr rtlCol="0" anchor="ctr" wrap="square" lIns="228600" tIns="228600"/>
+          <a:lstStyle/>
+          <a:p>
+            <a:pPr algn="ctr">
+              <a:defRPr sz="2800" b="1">
+                <a:solidFill>
+                  <a:srgbClr val="4FB37E"/>
+                </a:solidFill>
+                <a:latin typeface="Georgia"/>
               </a:defRPr>
             </a:pPr>
             <a:r>
@@ -4223,45 +3816,45 @@
               <a:spcBef>
                 <a:spcPts val="400"/>
               </a:spcBef>
-              <a:defRPr sz="1600" b="1">
+              <a:defRPr sz="1300" b="1">
                 <a:solidFill>
                   <a:srgbClr val="EDE6D6"/>
                 </a:solidFill>
-                <a:latin typeface="Georgia"/>
-              </a:defRPr>
-            </a:pPr>
-            <a:r>
-              <a:t>p50 Recall Latency</a:t>
-            </a:r>
-          </a:p>
-          <a:p>
-            <a:pPr>
-              <a:spcBef>
-                <a:spcPts val="400"/>
-              </a:spcBef>
-              <a:defRPr sz="1200">
-                <a:solidFill>
-                  <a:srgbClr val="B8B1A2"/>
-                </a:solidFill>
-                <a:latin typeface="Segoe UI"/>
-              </a:defRPr>
-            </a:pPr>
-            <a:r>
-              <a:t>Includes query vector embedding, multi-channel fusion, and scoring (p95: 571 ms).</a:t>
-            </a:r>
-          </a:p>
-        </p:txBody>
-      </p:sp>
-      <p:sp>
-        <p:nvSpPr>
-          <p:cNvPr id="14" name="Rounded Rectangle 13"/>
+                <a:latin typeface="Segoe UI"/>
+              </a:defRPr>
+            </a:pPr>
+            <a:r>
+              <a:t>Recall Latency (p50)</a:t>
+            </a:r>
+          </a:p>
+          <a:p>
+            <a:pPr>
+              <a:spcBef>
+                <a:spcPts val="200"/>
+              </a:spcBef>
+              <a:defRPr sz="1100">
+                <a:solidFill>
+                  <a:srgbClr val="8A8477"/>
+                </a:solidFill>
+                <a:latin typeface="Segoe UI"/>
+              </a:defRPr>
+            </a:pPr>
+            <a:r>
+              <a:t>Cold-path recall including query vector embedding and multi-channel rank fusion.</a:t>
+            </a:r>
+          </a:p>
+        </p:txBody>
+      </p:sp>
+      <p:sp>
+        <p:nvSpPr>
+          <p:cNvPr id="9" name="Rounded Rectangle 8"/>
           <p:cNvSpPr/>
           <p:nvPr/>
         </p:nvSpPr>
         <p:spPr>
           <a:xfrm>
-            <a:off x="8046720" y="3977639"/>
-            <a:ext cx="3413455" cy="1965960"/>
+            <a:off x="7955280" y="4114800"/>
+            <a:ext cx="3429000" cy="1828800"/>
           </a:xfrm>
           <a:prstGeom prst="roundRect">
             <a:avLst/>
@@ -4269,7 +3862,7 @@
           <a:solidFill>
             <a:srgbClr val="161512"/>
           </a:solidFill>
-          <a:ln w="12700">
+          <a:ln>
             <a:solidFill>
               <a:srgbClr val="2E2B26"/>
             </a:solidFill>
@@ -4290,45 +3883,19 @@
           </a:fontRef>
         </p:style>
         <p:txBody>
-          <a:bodyPr rtlCol="0" anchor="ctr"/>
-          <a:lstStyle/>
-          <a:p>
-            <a:pPr algn="ctr"/>
-          </a:p>
-        </p:txBody>
-      </p:sp>
-      <p:sp>
-        <p:nvSpPr>
-          <p:cNvPr id="15" name="TextBox 14"/>
-          <p:cNvSpPr txBox="1"/>
-          <p:nvPr/>
-        </p:nvSpPr>
-        <p:spPr>
-          <a:xfrm>
-            <a:off x="8229600" y="4114800"/>
-            <a:ext cx="3047695" cy="1691640"/>
-          </a:xfrm>
-          <a:prstGeom prst="rect">
-            <a:avLst/>
-          </a:prstGeom>
-          <a:noFill/>
-        </p:spPr>
-        <p:txBody>
-          <a:bodyPr wrap="square">
-            <a:spAutoFit/>
-          </a:bodyPr>
-          <a:lstStyle/>
-          <a:p>
-            <a:pPr>
-              <a:defRPr sz="3200" b="1">
-                <a:solidFill>
-                  <a:srgbClr val="8B68E8"/>
-                </a:solidFill>
-                <a:latin typeface="Consolas"/>
-              </a:defRPr>
-            </a:pPr>
-            <a:r>
-              <a:t>2.0 s</a:t>
+          <a:bodyPr rtlCol="0" anchor="ctr" wrap="square" lIns="228600" tIns="228600"/>
+          <a:lstStyle/>
+          <a:p>
+            <a:pPr algn="ctr">
+              <a:defRPr sz="2800" b="1">
+                <a:solidFill>
+                  <a:srgbClr val="4FB37E"/>
+                </a:solidFill>
+                <a:latin typeface="Georgia"/>
+              </a:defRPr>
+            </a:pPr>
+            <a:r>
+              <a:t>1.96 s</a:t>
             </a:r>
           </a:p>
           <a:p>
@@ -4336,31 +3903,31 @@
               <a:spcBef>
                 <a:spcPts val="400"/>
               </a:spcBef>
-              <a:defRPr sz="1600" b="1">
+              <a:defRPr sz="1300" b="1">
                 <a:solidFill>
                   <a:srgbClr val="EDE6D6"/>
                 </a:solidFill>
-                <a:latin typeface="Georgia"/>
-              </a:defRPr>
-            </a:pPr>
-            <a:r>
-              <a:t>p50 Memory Write</a:t>
-            </a:r>
-          </a:p>
-          <a:p>
-            <a:pPr>
-              <a:spcBef>
-                <a:spcPts val="400"/>
-              </a:spcBef>
-              <a:defRPr sz="1200">
-                <a:solidFill>
-                  <a:srgbClr val="B8B1A2"/>
-                </a:solidFill>
-                <a:latin typeface="Segoe UI"/>
-              </a:defRPr>
-            </a:pPr>
-            <a:r>
-              <a:t>From chat reply completion to committed event in change stream.</a:t>
+                <a:latin typeface="Segoe UI"/>
+              </a:defRPr>
+            </a:pPr>
+            <a:r>
+              <a:t>First Memory Write (p50)</a:t>
+            </a:r>
+          </a:p>
+          <a:p>
+            <a:pPr>
+              <a:spcBef>
+                <a:spcPts val="200"/>
+              </a:spcBef>
+              <a:defRPr sz="1100">
+                <a:solidFill>
+                  <a:srgbClr val="8A8477"/>
+                </a:solidFill>
+                <a:latin typeface="Segoe UI"/>
+              </a:defRPr>
+            </a:pPr>
+            <a:r>
+              <a:t>From completion of chat stream to committed event in MongoDB change stream.</a:t>
             </a:r>
           </a:p>
         </p:txBody>
@@ -4457,7 +4024,7 @@
               </a:defRPr>
             </a:pPr>
             <a:r>
-              <a:t>ROADMAP &amp; SCALING</a:t>
+              <a:t>10 / ROADMAP</a:t>
             </a:r>
           </a:p>
           <a:p>
@@ -4473,7 +4040,7 @@
               </a:defRPr>
             </a:pPr>
             <a:r>
-              <a:t>Honest Limitations Today and the Enterprise Scale Architecture</a:t>
+              <a:t>Honest evaluation today and clear enterprise architecture tomorrow.</a:t>
             </a:r>
           </a:p>
         </p:txBody>
@@ -4487,7 +4054,7 @@
         <p:spPr>
           <a:xfrm>
             <a:off x="731520" y="1828800"/>
-            <a:ext cx="5120640" cy="4389120"/>
+            <a:ext cx="5212080" cy="4389120"/>
           </a:xfrm>
           <a:prstGeom prst="roundRect">
             <a:avLst/>
@@ -4495,7 +4062,7 @@
           <a:solidFill>
             <a:srgbClr val="161512"/>
           </a:solidFill>
-          <a:ln w="12700">
+          <a:ln>
             <a:solidFill>
               <a:srgbClr val="2E2B26"/>
             </a:solidFill>
@@ -4516,61 +4083,48 @@
           </a:fontRef>
         </p:style>
         <p:txBody>
-          <a:bodyPr rtlCol="0" anchor="ctr"/>
-          <a:lstStyle/>
-          <a:p>
-            <a:pPr algn="ctr"/>
-          </a:p>
-        </p:txBody>
-      </p:sp>
-      <p:sp>
-        <p:nvSpPr>
-          <p:cNvPr id="5" name="TextBox 4"/>
-          <p:cNvSpPr txBox="1"/>
-          <p:nvPr/>
-        </p:nvSpPr>
-        <p:spPr>
-          <a:xfrm>
-            <a:off x="914400" y="2011680"/>
-            <a:ext cx="4754880" cy="4023360"/>
-          </a:xfrm>
-          <a:prstGeom prst="rect">
-            <a:avLst/>
-          </a:prstGeom>
-          <a:noFill/>
-        </p:spPr>
-        <p:txBody>
-          <a:bodyPr wrap="square">
-            <a:spAutoFit/>
-          </a:bodyPr>
-          <a:lstStyle/>
-          <a:p>
-            <a:pPr>
-              <a:defRPr sz="1200" b="1">
+          <a:bodyPr rtlCol="0" anchor="ctr" wrap="square" lIns="274320" tIns="274320"/>
+          <a:lstStyle/>
+          <a:p>
+            <a:pPr algn="ctr">
+              <a:defRPr sz="1700" b="1">
                 <a:solidFill>
                   <a:srgbClr val="F08A24"/>
                 </a:solidFill>
-                <a:latin typeface="Consolas"/>
-              </a:defRPr>
-            </a:pPr>
-            <a:r>
-              <a:t>HONEST LIMITATIONS (TODAY)</a:t>
-            </a:r>
-          </a:p>
-          <a:p>
-            <a:pPr>
-              <a:spcBef>
-                <a:spcPts val="600"/>
-              </a:spcBef>
-              <a:defRPr sz="2000" b="1">
+                <a:latin typeface="Georgia"/>
+              </a:defRPr>
+            </a:pPr>
+            <a:r>
+              <a:t>Current Limitations (Free Tier)</a:t>
+            </a:r>
+          </a:p>
+          <a:p>
+            <a:pPr>
+              <a:spcBef>
+                <a:spcPts val="1000"/>
+              </a:spcBef>
+              <a:defRPr sz="1300" b="1">
                 <a:solidFill>
                   <a:srgbClr val="EDE6D6"/>
                 </a:solidFill>
-                <a:latin typeface="Georgia"/>
-              </a:defRPr>
-            </a:pPr>
-            <a:r>
-              <a:t>Free Tier Realities</a:t>
+                <a:latin typeface="Segoe UI"/>
+              </a:defRPr>
+            </a:pPr>
+            <a:r>
+              <a:t>Quota Boundaries</a:t>
+            </a:r>
+          </a:p>
+          <a:p>
+            <a:pPr>
+              <a:defRPr sz="1100">
+                <a:solidFill>
+                  <a:srgbClr val="B8B1A2"/>
+                </a:solidFill>
+                <a:latin typeface="Segoe UI"/>
+              </a:defRPr>
+            </a:pPr>
+            <a:r>
+              <a:t>Gemini free tier has rate limits. Mitigated with resilient multi-model hedging (3.6 Flash -&gt; Groq GPT-OSS 120B -&gt; 3.5 Flash-Lite).</a:t>
             </a:r>
           </a:p>
           <a:p>
@@ -4578,7 +4132,20 @@
               <a:spcBef>
                 <a:spcPts val="1000"/>
               </a:spcBef>
-              <a:defRPr sz="1250">
+              <a:defRPr sz="1300" b="1">
+                <a:solidFill>
+                  <a:srgbClr val="EDE6D6"/>
+                </a:solidFill>
+                <a:latin typeface="Segoe UI"/>
+              </a:defRPr>
+            </a:pPr>
+            <a:r>
+              <a:t>Probabilistic Extraction</a:t>
+            </a:r>
+          </a:p>
+          <a:p>
+            <a:pPr>
+              <a:defRPr sz="1100">
                 <a:solidFill>
                   <a:srgbClr val="B8B1A2"/>
                 </a:solidFill>
@@ -4586,7 +4153,7 @@
               </a:defRPr>
             </a:pPr>
             <a:r>
-              <a:t>• Model Quota Bounds: Gemini free tiers have small daily quotas. Radahn hedges to Groq GPT-OSS 120B after 3.5s to prevent stalled turns.</a:t>
+              <a:t>LLMs can miss subtle nuances; mitigated by making every memory visible, editable, and reversible in the UI.</a:t>
             </a:r>
           </a:p>
           <a:p>
@@ -4594,7 +4161,20 @@
               <a:spcBef>
                 <a:spcPts val="1000"/>
               </a:spcBef>
-              <a:defRPr sz="1250">
+              <a:defRPr sz="1300" b="1">
+                <a:solidFill>
+                  <a:srgbClr val="EDE6D6"/>
+                </a:solidFill>
+                <a:latin typeface="Segoe UI"/>
+              </a:defRPr>
+            </a:pPr>
+            <a:r>
+              <a:t>Guest Lifetime</a:t>
+            </a:r>
+          </a:p>
+          <a:p>
+            <a:pPr>
+              <a:defRPr sz="1100">
                 <a:solidFill>
                   <a:srgbClr val="B8B1A2"/>
                 </a:solidFill>
@@ -4602,61 +4182,29 @@
               </a:defRPr>
             </a:pPr>
             <a:r>
-              <a:t>• Probabilistic Extraction: LLM extraction can occasionally miss nuance; made safe because all writes are visible, editable, and reversible.</a:t>
-            </a:r>
-          </a:p>
-          <a:p>
-            <a:pPr>
-              <a:spcBef>
-                <a:spcPts val="1000"/>
-              </a:spcBef>
-              <a:defRPr sz="1250">
-                <a:solidFill>
-                  <a:srgbClr val="B8B1A2"/>
-                </a:solidFill>
-                <a:latin typeface="Segoe UI"/>
-              </a:defRPr>
-            </a:pPr>
-            <a:r>
-              <a:t>• 7-Day Guest Lifetime: Anonymous guest data purges after 7 days unless linked to Google.</a:t>
-            </a:r>
-          </a:p>
-          <a:p>
-            <a:pPr>
-              <a:spcBef>
-                <a:spcPts val="1000"/>
-              </a:spcBef>
-              <a:defRPr sz="1250">
-                <a:solidFill>
-                  <a:srgbClr val="B8B1A2"/>
-                </a:solidFill>
-                <a:latin typeface="Segoe UI"/>
-              </a:defRPr>
-            </a:pPr>
-            <a:r>
-              <a:t>• M0 Index Limits: MongoDB Atlas M0 limits search indexes to 3 per cluster, requiring unified eval namespaces.</a:t>
-            </a:r>
-          </a:p>
-        </p:txBody>
-      </p:sp>
-      <p:sp>
-        <p:nvSpPr>
-          <p:cNvPr id="6" name="Rounded Rectangle 5"/>
+              <a:t>Anonymous demo sessions expire in 7 days unless linked to a Google account.</a:t>
+            </a:r>
+          </a:p>
+        </p:txBody>
+      </p:sp>
+      <p:sp>
+        <p:nvSpPr>
+          <p:cNvPr id="5" name="Rounded Rectangle 4"/>
           <p:cNvSpPr/>
           <p:nvPr/>
         </p:nvSpPr>
         <p:spPr>
           <a:xfrm>
             <a:off x="6217920" y="1828800"/>
-            <a:ext cx="5242255" cy="4389120"/>
+            <a:ext cx="5212080" cy="4389120"/>
           </a:xfrm>
           <a:prstGeom prst="roundRect">
             <a:avLst/>
           </a:prstGeom>
           <a:solidFill>
-            <a:srgbClr val="1E1C18"/>
+            <a:srgbClr val="161512"/>
           </a:solidFill>
-          <a:ln w="12700">
+          <a:ln>
             <a:solidFill>
               <a:srgbClr val="2E2B26"/>
             </a:solidFill>
@@ -4677,61 +4225,48 @@
           </a:fontRef>
         </p:style>
         <p:txBody>
-          <a:bodyPr rtlCol="0" anchor="ctr"/>
-          <a:lstStyle/>
-          <a:p>
-            <a:pPr algn="ctr"/>
-          </a:p>
-        </p:txBody>
-      </p:sp>
-      <p:sp>
-        <p:nvSpPr>
-          <p:cNvPr id="7" name="TextBox 6"/>
-          <p:cNvSpPr txBox="1"/>
-          <p:nvPr/>
-        </p:nvSpPr>
-        <p:spPr>
-          <a:xfrm>
-            <a:off x="6400800" y="2011680"/>
-            <a:ext cx="4876495" cy="4023360"/>
-          </a:xfrm>
-          <a:prstGeom prst="rect">
-            <a:avLst/>
-          </a:prstGeom>
-          <a:noFill/>
-        </p:spPr>
-        <p:txBody>
-          <a:bodyPr wrap="square">
-            <a:spAutoFit/>
-          </a:bodyPr>
-          <a:lstStyle/>
-          <a:p>
-            <a:pPr>
-              <a:defRPr sz="1200" b="1">
+          <a:bodyPr rtlCol="0" anchor="ctr" wrap="square" lIns="274320" tIns="274320"/>
+          <a:lstStyle/>
+          <a:p>
+            <a:pPr algn="ctr">
+              <a:defRPr sz="1700" b="1">
                 <a:solidFill>
                   <a:srgbClr val="4FB37E"/>
                 </a:solidFill>
-                <a:latin typeface="Consolas"/>
-              </a:defRPr>
-            </a:pPr>
-            <a:r>
-              <a:t>ENTERPRISE SCALE STORY (ARCHITECTURE §8)</a:t>
-            </a:r>
-          </a:p>
-          <a:p>
-            <a:pPr>
-              <a:spcBef>
-                <a:spcPts val="600"/>
-              </a:spcBef>
-              <a:defRPr sz="2000" b="1">
+                <a:latin typeface="Georgia"/>
+              </a:defRPr>
+            </a:pPr>
+            <a:r>
+              <a:t>Enterprise Scale Architecture</a:t>
+            </a:r>
+          </a:p>
+          <a:p>
+            <a:pPr>
+              <a:spcBef>
+                <a:spcPts val="1000"/>
+              </a:spcBef>
+              <a:defRPr sz="1300" b="1">
                 <a:solidFill>
                   <a:srgbClr val="EDE6D6"/>
                 </a:solidFill>
-                <a:latin typeface="Georgia"/>
-              </a:defRPr>
-            </a:pPr>
-            <a:r>
-              <a:t>Path to Millions of Memories</a:t>
+                <a:latin typeface="Segoe UI"/>
+              </a:defRPr>
+            </a:pPr>
+            <a:r>
+              <a:t>Horizontal Sharding on ownerId</a:t>
+            </a:r>
+          </a:p>
+          <a:p>
+            <a:pPr>
+              <a:defRPr sz="1100">
+                <a:solidFill>
+                  <a:srgbClr val="B8B1A2"/>
+                </a:solidFill>
+                <a:latin typeface="Segoe UI"/>
+              </a:defRPr>
+            </a:pPr>
+            <a:r>
+              <a:t>Because every query is strictly scoped by ownerId, 100% of user queries target a single shard without cross-node fanout.</a:t>
             </a:r>
           </a:p>
           <a:p>
@@ -4739,7 +4274,20 @@
               <a:spcBef>
                 <a:spcPts val="1000"/>
               </a:spcBef>
-              <a:defRPr sz="1250">
+              <a:defRPr sz="1300" b="1">
+                <a:solidFill>
+                  <a:srgbClr val="EDE6D6"/>
+                </a:solidFill>
+                <a:latin typeface="Segoe UI"/>
+              </a:defRPr>
+            </a:pPr>
+            <a:r>
+              <a:t>Dedicated Search Nodes</a:t>
+            </a:r>
+          </a:p>
+          <a:p>
+            <a:pPr>
+              <a:defRPr sz="1100">
                 <a:solidFill>
                   <a:srgbClr val="B8B1A2"/>
                 </a:solidFill>
@@ -4747,7 +4295,7 @@
               </a:defRPr>
             </a:pPr>
             <a:r>
-              <a:t>• Sharding on ownerId: Every query scopes by ownerId. Hashed sharding ensures 100% of memory queries target a single shard.</a:t>
+              <a:t>Separates vector and full-text indexing from core transactional nodes for sub-50ms latency under high load.</a:t>
             </a:r>
           </a:p>
           <a:p>
@@ -4755,7 +4303,20 @@
               <a:spcBef>
                 <a:spcPts val="1000"/>
               </a:spcBef>
-              <a:defRPr sz="1250">
+              <a:defRPr sz="1300" b="1">
+                <a:solidFill>
+                  <a:srgbClr val="EDE6D6"/>
+                </a:solidFill>
+                <a:latin typeface="Segoe UI"/>
+              </a:defRPr>
+            </a:pPr>
+            <a:r>
+              <a:t>Vector Quantization</a:t>
+            </a:r>
+          </a:p>
+          <a:p>
+            <a:pPr>
+              <a:defRPr sz="1100">
                 <a:solidFill>
                   <a:srgbClr val="B8B1A2"/>
                 </a:solidFill>
@@ -4763,39 +4324,7 @@
               </a:defRPr>
             </a:pPr>
             <a:r>
-              <a:t>• Dedicated Search Nodes: Separates Vector Search and Atlas Search from operational database workloads for sub-50ms latency.</a:t>
-            </a:r>
-          </a:p>
-          <a:p>
-            <a:pPr>
-              <a:spcBef>
-                <a:spcPts val="1000"/>
-              </a:spcBef>
-              <a:defRPr sz="1250">
-                <a:solidFill>
-                  <a:srgbClr val="B8B1A2"/>
-                </a:solidFill>
-                <a:latin typeface="Segoe UI"/>
-              </a:defRPr>
-            </a:pPr>
-            <a:r>
-              <a:t>• Vector Quantization: Scalar / int8 quantization reduces vector RAM footprint by 75% without compromising recall.</a:t>
-            </a:r>
-          </a:p>
-          <a:p>
-            <a:pPr>
-              <a:spcBef>
-                <a:spcPts val="1000"/>
-              </a:spcBef>
-              <a:defRPr sz="1250">
-                <a:solidFill>
-                  <a:srgbClr val="B8B1A2"/>
-                </a:solidFill>
-                <a:latin typeface="Segoe UI"/>
-              </a:defRPr>
-            </a:pPr>
-            <a:r>
-              <a:t>• Automated Embeddings: Native Voyage AI automated embeddings directly within MongoDB Atlas pipelines.</a:t>
+              <a:t>Scalar/int8 quantization reduces index RAM by 75%, scaling to millions of memories per cluster.</a:t>
             </a:r>
           </a:p>
         </p:txBody>
@@ -4892,7 +4421,7 @@
               </a:defRPr>
             </a:pPr>
             <a:r>
-              <a:t>TEAM &amp; ARCHITECTURE</a:t>
+              <a:t>11 / TEAM &amp; AGENTS</a:t>
             </a:r>
           </a:p>
           <a:p>
@@ -4908,7 +4437,7 @@
               </a:defRPr>
             </a:pPr>
             <a:r>
-              <a:t>Built in 24 Hours for UNCHARTED 2026 by Three Humans and Three Agents</a:t>
+              <a:t>Built in 24 hours for UNCHARTED 2026 by three humans and three agents.</a:t>
             </a:r>
           </a:p>
         </p:txBody>
@@ -4922,7 +4451,7 @@
         <p:spPr>
           <a:xfrm>
             <a:off x="731520" y="1828800"/>
-            <a:ext cx="5120640" cy="4389120"/>
+            <a:ext cx="10728655" cy="4389120"/>
           </a:xfrm>
           <a:prstGeom prst="roundRect">
             <a:avLst/>
@@ -4930,7 +4459,7 @@
           <a:solidFill>
             <a:srgbClr val="161512"/>
           </a:solidFill>
-          <a:ln w="12700">
+          <a:ln>
             <a:solidFill>
               <a:srgbClr val="2E2B26"/>
             </a:solidFill>
@@ -4951,45 +4480,51 @@
           </a:fontRef>
         </p:style>
         <p:txBody>
-          <a:bodyPr rtlCol="0" anchor="ctr"/>
-          <a:lstStyle/>
-          <a:p>
-            <a:pPr algn="ctr"/>
-          </a:p>
-        </p:txBody>
-      </p:sp>
-      <p:sp>
-        <p:nvSpPr>
-          <p:cNvPr id="5" name="TextBox 4"/>
-          <p:cNvSpPr txBox="1"/>
-          <p:nvPr/>
-        </p:nvSpPr>
-        <p:spPr>
-          <a:xfrm>
-            <a:off x="914400" y="2011680"/>
-            <a:ext cx="4754880" cy="4023360"/>
-          </a:xfrm>
-          <a:prstGeom prst="rect">
-            <a:avLst/>
-          </a:prstGeom>
-          <a:noFill/>
-        </p:spPr>
-        <p:txBody>
-          <a:bodyPr wrap="square">
-            <a:spAutoFit/>
-          </a:bodyPr>
-          <a:lstStyle/>
-          <a:p>
-            <a:pPr>
-              <a:defRPr sz="1200" b="1">
+          <a:bodyPr rtlCol="0" anchor="ctr" wrap="square" lIns="365760" tIns="365760"/>
+          <a:lstStyle/>
+          <a:p>
+            <a:pPr algn="ctr">
+              <a:defRPr sz="1800" b="1">
                 <a:solidFill>
                   <a:srgbClr val="F2C12E"/>
                 </a:solidFill>
+                <a:latin typeface="Georgia"/>
+              </a:defRPr>
+            </a:pPr>
+            <a:r>
+              <a:t>HUMAN BUILDERS: Vaibhav &amp; Teammates</a:t>
+            </a:r>
+          </a:p>
+          <a:p>
+            <a:pPr>
+              <a:spcBef>
+                <a:spcPts val="400"/>
+              </a:spcBef>
+              <a:defRPr sz="1300">
+                <a:solidFill>
+                  <a:srgbClr val="B8B1A2"/>
+                </a:solidFill>
+                <a:latin typeface="Segoe UI"/>
+              </a:defRPr>
+            </a:pPr>
+            <a:r>
+              <a:t>Product direction, MongoDB schema design, eval benchmark harness, and end-to-end judge validation.</a:t>
+            </a:r>
+          </a:p>
+          <a:p>
+            <a:pPr>
+              <a:spcBef>
+                <a:spcPts val="1600"/>
+              </a:spcBef>
+              <a:defRPr sz="1300" b="1">
+                <a:solidFill>
+                  <a:srgbClr val="EDE6D6"/>
+                </a:solidFill>
                 <a:latin typeface="Consolas"/>
               </a:defRPr>
             </a:pPr>
             <a:r>
-              <a:t>THE HUMAN TEAM</a:t>
+              <a:t>THREE-AGENT PAIR PROGRAMMING COLLABORATION:</a:t>
             </a:r>
           </a:p>
           <a:p>
@@ -4997,23 +4532,7 @@
               <a:spcBef>
                 <a:spcPts val="600"/>
               </a:spcBef>
-              <a:defRPr sz="2000" b="1">
-                <a:solidFill>
-                  <a:srgbClr val="EDE6D6"/>
-                </a:solidFill>
-                <a:latin typeface="Georgia"/>
-              </a:defRPr>
-            </a:pPr>
-            <a:r>
-              <a:t>Product Leadership &amp; Testing</a:t>
-            </a:r>
-          </a:p>
-          <a:p>
-            <a:pPr>
-              <a:spcBef>
-                <a:spcPts val="1200"/>
-              </a:spcBef>
-              <a:defRPr sz="1300">
+              <a:defRPr sz="1200">
                 <a:solidFill>
                   <a:srgbClr val="B8B1A2"/>
                 </a:solidFill>
@@ -5021,15 +4540,15 @@
               </a:defRPr>
             </a:pPr>
             <a:r>
-              <a:t>• Vaibhav: Product vision, demo persona design (Aarav), user testing &amp; judge path verification.</a:t>
-            </a:r>
-          </a:p>
-          <a:p>
-            <a:pPr>
-              <a:spcBef>
-                <a:spcPts val="1200"/>
-              </a:spcBef>
-              <a:defRPr sz="1300">
+              <a:t>Claude Code (Lead):  App Router architecture, chat orchestration, Better Auth, and integration merges.</a:t>
+            </a:r>
+          </a:p>
+          <a:p>
+            <a:pPr>
+              <a:spcBef>
+                <a:spcPts val="600"/>
+              </a:spcBef>
+              <a:defRPr sz="1200">
                 <a:solidFill>
                   <a:srgbClr val="B8B1A2"/>
                 </a:solidFill>
@@ -5037,15 +4556,15 @@
               </a:defRPr>
             </a:pPr>
             <a:r>
-              <a:t>• Teammate 2: MongoDB schema design, vector indexing, query tuning, and privacy gate specifications.</a:t>
-            </a:r>
-          </a:p>
-          <a:p>
-            <a:pPr>
-              <a:spcBef>
-                <a:spcPts val="1200"/>
-              </a:spcBef>
-              <a:defRPr sz="1300">
+              <a:t>Codex (Engine):  Memory engine, privacy gate, 4-channel recall, scoring algorithm, reflection pipelines, and eval harness.</a:t>
+            </a:r>
+          </a:p>
+          <a:p>
+            <a:pPr>
+              <a:spcBef>
+                <a:spcPts val="600"/>
+              </a:spcBef>
+              <a:defRPr sz="1200">
                 <a:solidFill>
                   <a:srgbClr val="B8B1A2"/>
                 </a:solidFill>
@@ -5053,152 +4572,23 @@
               </a:defRPr>
             </a:pPr>
             <a:r>
-              <a:t>• Teammate 3: Architecture leadership, integration oversight, presentation deck, and demo video script.</a:t>
-            </a:r>
-          </a:p>
-        </p:txBody>
-      </p:sp>
-      <p:sp>
-        <p:nvSpPr>
-          <p:cNvPr id="6" name="Rounded Rectangle 5"/>
-          <p:cNvSpPr/>
-          <p:nvPr/>
-        </p:nvSpPr>
-        <p:spPr>
-          <a:xfrm>
-            <a:off x="6217920" y="1828800"/>
-            <a:ext cx="5242255" cy="4389120"/>
-          </a:xfrm>
-          <a:prstGeom prst="roundRect">
-            <a:avLst/>
-          </a:prstGeom>
-          <a:solidFill>
-            <a:srgbClr val="1E1C18"/>
-          </a:solidFill>
-          <a:ln w="12700">
-            <a:solidFill>
-              <a:srgbClr val="2E2B26"/>
-            </a:solidFill>
-          </a:ln>
-        </p:spPr>
-        <p:style>
-          <a:lnRef idx="1">
-            <a:schemeClr val="accent1"/>
-          </a:lnRef>
-          <a:fillRef idx="3">
-            <a:schemeClr val="accent1"/>
-          </a:fillRef>
-          <a:effectRef idx="2">
-            <a:schemeClr val="accent1"/>
-          </a:effectRef>
-          <a:fontRef idx="minor">
-            <a:schemeClr val="lt1"/>
-          </a:fontRef>
-        </p:style>
-        <p:txBody>
-          <a:bodyPr rtlCol="0" anchor="ctr"/>
-          <a:lstStyle/>
-          <a:p>
-            <a:pPr algn="ctr"/>
-          </a:p>
-        </p:txBody>
-      </p:sp>
-      <p:sp>
-        <p:nvSpPr>
-          <p:cNvPr id="7" name="TextBox 6"/>
-          <p:cNvSpPr txBox="1"/>
-          <p:nvPr/>
-        </p:nvSpPr>
-        <p:spPr>
-          <a:xfrm>
-            <a:off x="6400800" y="2011680"/>
-            <a:ext cx="4876495" cy="4023360"/>
-          </a:xfrm>
-          <a:prstGeom prst="rect">
-            <a:avLst/>
-          </a:prstGeom>
-          <a:noFill/>
-        </p:spPr>
-        <p:txBody>
-          <a:bodyPr wrap="square">
-            <a:spAutoFit/>
-          </a:bodyPr>
-          <a:lstStyle/>
-          <a:p>
-            <a:pPr>
-              <a:defRPr sz="1200" b="1">
-                <a:solidFill>
-                  <a:srgbClr val="3A63D8"/>
+              <a:t>Antigravity (Experience):  Public landing page, real production screenshots, Review/Activity/Settings polish, presentation deck, and demo video kit.</a:t>
+            </a:r>
+          </a:p>
+          <a:p>
+            <a:pPr>
+              <a:spcBef>
+                <a:spcPts val="1600"/>
+              </a:spcBef>
+              <a:defRPr sz="1200">
+                <a:solidFill>
+                  <a:srgbClr val="4FB37E"/>
                 </a:solidFill>
                 <a:latin typeface="Consolas"/>
               </a:defRPr>
             </a:pPr>
             <a:r>
-              <a:t>THE CODING AGENT MATRIX</a:t>
-            </a:r>
-          </a:p>
-          <a:p>
-            <a:pPr>
-              <a:spcBef>
-                <a:spcPts val="600"/>
-              </a:spcBef>
-              <a:defRPr sz="2000" b="1">
-                <a:solidFill>
-                  <a:srgbClr val="EDE6D6"/>
-                </a:solidFill>
-                <a:latin typeface="Georgia"/>
-              </a:defRPr>
-            </a:pPr>
-            <a:r>
-              <a:t>Parallel Specialized Agent Execution</a:t>
-            </a:r>
-          </a:p>
-          <a:p>
-            <a:pPr>
-              <a:spcBef>
-                <a:spcPts val="1200"/>
-              </a:spcBef>
-              <a:defRPr sz="1300">
-                <a:solidFill>
-                  <a:srgbClr val="B8B1A2"/>
-                </a:solidFill>
-                <a:latin typeface="Segoe UI"/>
-              </a:defRPr>
-            </a:pPr>
-            <a:r>
-              <a:t>• Claude Code (Lead): Overall architecture, App Router pages, chat orchestrator, Better Auth, and git merge integration.</a:t>
-            </a:r>
-          </a:p>
-          <a:p>
-            <a:pPr>
-              <a:spcBef>
-                <a:spcPts val="1200"/>
-              </a:spcBef>
-              <a:defRPr sz="1300">
-                <a:solidFill>
-                  <a:srgbClr val="B8B1A2"/>
-                </a:solidFill>
-                <a:latin typeface="Segoe UI"/>
-              </a:defRPr>
-            </a:pPr>
-            <a:r>
-              <a:t>• Codex (Engine): Memory engine, privacy gate, 4-channel recall, scoring algorithm, reflection pipelines, and eval harness.</a:t>
-            </a:r>
-          </a:p>
-          <a:p>
-            <a:pPr>
-              <a:spcBef>
-                <a:spcPts val="1200"/>
-              </a:spcBef>
-              <a:defRPr sz="1300">
-                <a:solidFill>
-                  <a:srgbClr val="B8B1A2"/>
-                </a:solidFill>
-                <a:latin typeface="Segoe UI"/>
-              </a:defRPr>
-            </a:pPr>
-            <a:r>
-              <a:t>• Antigravity (Experience): Public landing page, real screenshots showcase, Review/Activity/Settings polish, presentation deck, demo video kit.</a:t>
+              <a:t>LIVE PRODUCT: https://radahn-ai.vercel.app  ·  REPO: https://github.com/vaibhavcodesx/radahn</a:t>
             </a:r>
           </a:p>
         </p:txBody>
@@ -5295,7 +4685,7 @@
               </a:defRPr>
             </a:pPr>
             <a:r>
-              <a:t>THE PROBLEM</a:t>
+              <a:t>01 / THE PROBLEM</a:t>
             </a:r>
           </a:p>
           <a:p>
@@ -5324,8 +4714,8 @@
         </p:nvSpPr>
         <p:spPr>
           <a:xfrm>
-            <a:off x="731520" y="1828800"/>
-            <a:ext cx="3413455" cy="4389120"/>
+            <a:off x="731520" y="2011680"/>
+            <a:ext cx="3413455" cy="4114800"/>
           </a:xfrm>
           <a:prstGeom prst="roundRect">
             <a:avLst/>
@@ -5333,7 +4723,7 @@
           <a:solidFill>
             <a:srgbClr val="161512"/>
           </a:solidFill>
-          <a:ln w="12700">
+          <a:ln>
             <a:solidFill>
               <a:srgbClr val="2E2B26"/>
             </a:solidFill>
@@ -5354,61 +4744,19 @@
           </a:fontRef>
         </p:style>
         <p:txBody>
-          <a:bodyPr rtlCol="0" anchor="ctr"/>
-          <a:lstStyle/>
-          <a:p>
-            <a:pPr algn="ctr"/>
-          </a:p>
-        </p:txBody>
-      </p:sp>
-      <p:sp>
-        <p:nvSpPr>
-          <p:cNvPr id="5" name="TextBox 4"/>
-          <p:cNvSpPr txBox="1"/>
-          <p:nvPr/>
-        </p:nvSpPr>
-        <p:spPr>
-          <a:xfrm>
-            <a:off x="960120" y="2057400"/>
-            <a:ext cx="2956255" cy="3931920"/>
-          </a:xfrm>
-          <a:prstGeom prst="rect">
-            <a:avLst/>
-          </a:prstGeom>
-          <a:noFill/>
-        </p:spPr>
-        <p:txBody>
-          <a:bodyPr wrap="square">
-            <a:spAutoFit/>
-          </a:bodyPr>
-          <a:lstStyle/>
-          <a:p>
-            <a:pPr>
-              <a:defRPr sz="1100" b="1">
+          <a:bodyPr rtlCol="0" anchor="ctr" wrap="square" lIns="274320" tIns="274320"/>
+          <a:lstStyle/>
+          <a:p>
+            <a:pPr algn="ctr">
+              <a:defRPr sz="1800" b="1">
                 <a:solidFill>
                   <a:srgbClr val="E2553A"/>
                 </a:solidFill>
-                <a:latin typeface="Consolas"/>
-              </a:defRPr>
-            </a:pPr>
-            <a:r>
-              <a:t>AMNESIA BY DEFAULT</a:t>
-            </a:r>
-          </a:p>
-          <a:p>
-            <a:pPr>
-              <a:spcBef>
-                <a:spcPts val="800"/>
-              </a:spcBef>
-              <a:defRPr sz="2000" b="1">
-                <a:solidFill>
-                  <a:srgbClr val="EDE6D6"/>
-                </a:solidFill>
                 <a:latin typeface="Georgia"/>
               </a:defRPr>
             </a:pPr>
             <a:r>
-              <a:t>Every chat starts from zero</a:t>
+              <a:t>Amnesia by Default</a:t>
             </a:r>
           </a:p>
           <a:p>
@@ -5416,7 +4764,7 @@
               <a:spcBef>
                 <a:spcPts val="1400"/>
               </a:spcBef>
-              <a:defRPr sz="1350">
+              <a:defRPr sz="1300">
                 <a:solidFill>
                   <a:srgbClr val="B8B1A2"/>
                 </a:solidFill>
@@ -5424,21 +4772,21 @@
               </a:defRPr>
             </a:pPr>
             <a:r>
-              <a:t>Standard AI agents reset state between conversations. Users waste time repeatedly explaining their tech stacks, hard deadlines, dietary preferences, and work styles over and over again.</a:t>
-            </a:r>
-          </a:p>
-        </p:txBody>
-      </p:sp>
-      <p:sp>
-        <p:nvSpPr>
-          <p:cNvPr id="6" name="Rounded Rectangle 5"/>
+              <a:t>Standard AI chats start from scratch every conversation. Users repeat their preferences, stack constraints, and deadlines endlessly. Context windows are temporary.</a:t>
+            </a:r>
+          </a:p>
+        </p:txBody>
+      </p:sp>
+      <p:sp>
+        <p:nvSpPr>
+          <p:cNvPr id="5" name="Rounded Rectangle 4"/>
           <p:cNvSpPr/>
           <p:nvPr/>
         </p:nvSpPr>
         <p:spPr>
           <a:xfrm>
-            <a:off x="4389120" y="1828800"/>
-            <a:ext cx="3413455" cy="4389120"/>
+            <a:off x="4389120" y="2011680"/>
+            <a:ext cx="3413455" cy="4114800"/>
           </a:xfrm>
           <a:prstGeom prst="roundRect">
             <a:avLst/>
@@ -5446,7 +4794,7 @@
           <a:solidFill>
             <a:srgbClr val="161512"/>
           </a:solidFill>
-          <a:ln w="12700">
+          <a:ln>
             <a:solidFill>
               <a:srgbClr val="2E2B26"/>
             </a:solidFill>
@@ -5467,61 +4815,19 @@
           </a:fontRef>
         </p:style>
         <p:txBody>
-          <a:bodyPr rtlCol="0" anchor="ctr"/>
-          <a:lstStyle/>
-          <a:p>
-            <a:pPr algn="ctr"/>
-          </a:p>
-        </p:txBody>
-      </p:sp>
-      <p:sp>
-        <p:nvSpPr>
-          <p:cNvPr id="7" name="TextBox 6"/>
-          <p:cNvSpPr txBox="1"/>
-          <p:nvPr/>
-        </p:nvSpPr>
-        <p:spPr>
-          <a:xfrm>
-            <a:off x="4617720" y="2057400"/>
-            <a:ext cx="2956255" cy="3931920"/>
-          </a:xfrm>
-          <a:prstGeom prst="rect">
-            <a:avLst/>
-          </a:prstGeom>
-          <a:noFill/>
-        </p:spPr>
-        <p:txBody>
-          <a:bodyPr wrap="square">
-            <a:spAutoFit/>
-          </a:bodyPr>
-          <a:lstStyle/>
-          <a:p>
-            <a:pPr>
-              <a:defRPr sz="1100" b="1">
+          <a:bodyPr rtlCol="0" anchor="ctr" wrap="square" lIns="274320" tIns="274320"/>
+          <a:lstStyle/>
+          <a:p>
+            <a:pPr algn="ctr">
+              <a:defRPr sz="1800" b="1">
                 <a:solidFill>
                   <a:srgbClr val="F08A24"/>
                 </a:solidFill>
-                <a:latin typeface="Consolas"/>
-              </a:defRPr>
-            </a:pPr>
-            <a:r>
-              <a:t>THE INVISIBLE BLACK BOX</a:t>
-            </a:r>
-          </a:p>
-          <a:p>
-            <a:pPr>
-              <a:spcBef>
-                <a:spcPts val="800"/>
-              </a:spcBef>
-              <a:defRPr sz="2000" b="1">
-                <a:solidFill>
-                  <a:srgbClr val="EDE6D6"/>
-                </a:solidFill>
                 <a:latin typeface="Georgia"/>
               </a:defRPr>
             </a:pPr>
             <a:r>
-              <a:t>Unsteerable prompt dumps</a:t>
+              <a:t>The Black Box of Memory</a:t>
             </a:r>
           </a:p>
           <a:p>
@@ -5529,7 +4835,7 @@
               <a:spcBef>
                 <a:spcPts val="1400"/>
               </a:spcBef>
-              <a:defRPr sz="1350">
+              <a:defRPr sz="1300">
                 <a:solidFill>
                   <a:srgbClr val="B8B1A2"/>
                 </a:solidFill>
@@ -5537,21 +4843,21 @@
               </a:defRPr>
             </a:pPr>
             <a:r>
-              <a:t>When memory is added to agents, it is buried invisibly inside prompt context caches. Users cannot see what was stored, cannot inspect why an answer changed, and cannot delete incorrect beliefs.</a:t>
-            </a:r>
-          </a:p>
-        </p:txBody>
-      </p:sp>
-      <p:sp>
-        <p:nvSpPr>
-          <p:cNvPr id="8" name="Rounded Rectangle 7"/>
+              <a:t>When memory is bolted onto agents, it happens invisibly in prompt caches. Users cannot see what was stored, cannot inspect why an answer changed, and cannot remove stale assumptions.</a:t>
+            </a:r>
+          </a:p>
+        </p:txBody>
+      </p:sp>
+      <p:sp>
+        <p:nvSpPr>
+          <p:cNvPr id="6" name="Rounded Rectangle 5"/>
           <p:cNvSpPr/>
           <p:nvPr/>
         </p:nvSpPr>
         <p:spPr>
           <a:xfrm>
-            <a:off x="8046720" y="1828800"/>
-            <a:ext cx="3413455" cy="4389120"/>
+            <a:off x="8046720" y="2011680"/>
+            <a:ext cx="3413455" cy="4114800"/>
           </a:xfrm>
           <a:prstGeom prst="roundRect">
             <a:avLst/>
@@ -5559,7 +4865,7 @@
           <a:solidFill>
             <a:srgbClr val="161512"/>
           </a:solidFill>
-          <a:ln w="12700">
+          <a:ln>
             <a:solidFill>
               <a:srgbClr val="2E2B26"/>
             </a:solidFill>
@@ -5580,61 +4886,19 @@
           </a:fontRef>
         </p:style>
         <p:txBody>
-          <a:bodyPr rtlCol="0" anchor="ctr"/>
-          <a:lstStyle/>
-          <a:p>
-            <a:pPr algn="ctr"/>
-          </a:p>
-        </p:txBody>
-      </p:sp>
-      <p:sp>
-        <p:nvSpPr>
-          <p:cNvPr id="9" name="TextBox 8"/>
-          <p:cNvSpPr txBox="1"/>
-          <p:nvPr/>
-        </p:nvSpPr>
-        <p:spPr>
-          <a:xfrm>
-            <a:off x="8275320" y="2057400"/>
-            <a:ext cx="2956255" cy="3931920"/>
-          </a:xfrm>
-          <a:prstGeom prst="rect">
-            <a:avLst/>
-          </a:prstGeom>
-          <a:noFill/>
-        </p:spPr>
-        <p:txBody>
-          <a:bodyPr wrap="square">
-            <a:spAutoFit/>
-          </a:bodyPr>
-          <a:lstStyle/>
-          <a:p>
-            <a:pPr>
-              <a:defRPr sz="1100" b="1">
+          <a:bodyPr rtlCol="0" anchor="ctr" wrap="square" lIns="274320" tIns="274320"/>
+          <a:lstStyle/>
+          <a:p>
+            <a:pPr algn="ctr">
+              <a:defRPr sz="1800" b="1">
                 <a:solidFill>
                   <a:srgbClr val="F2C12E"/>
                 </a:solidFill>
-                <a:latin typeface="Consolas"/>
-              </a:defRPr>
-            </a:pPr>
-            <a:r>
-              <a:t>THE MISSING CONTRACT</a:t>
-            </a:r>
-          </a:p>
-          <a:p>
-            <a:pPr>
-              <a:spcBef>
-                <a:spcPts val="800"/>
-              </a:spcBef>
-              <a:defRPr sz="2000" b="1">
-                <a:solidFill>
-                  <a:srgbClr val="EDE6D6"/>
-                </a:solidFill>
                 <a:latin typeface="Georgia"/>
               </a:defRPr>
             </a:pPr>
             <a:r>
-              <a:t>No auditability or control</a:t>
+              <a:t>The Missing Contract</a:t>
             </a:r>
           </a:p>
           <a:p>
@@ -5642,7 +4906,7 @@
               <a:spcBef>
                 <a:spcPts val="1400"/>
               </a:spcBef>
-              <a:defRPr sz="1350">
+              <a:defRPr sz="1300">
                 <a:solidFill>
                   <a:srgbClr val="B8B1A2"/>
                 </a:solidFill>
@@ -5650,7 +4914,7 @@
               </a:defRPr>
             </a:pPr>
             <a:r>
-              <a:t>Production workflows demand database-grade integrity: visible inline citations for every answer, inspectable score breakdowns, and total user control to correct, expire, or hard-forget.</a:t>
+              <a:t>Production-grade agentic memory requires transparency: visible inline citations, inspectable recall scores, and total user steerability (correct, expire, forget).</a:t>
             </a:r>
           </a:p>
         </p:txBody>
@@ -5747,7 +5011,7 @@
               </a:defRPr>
             </a:pPr>
             <a:r>
-              <a:t>PRODUCT OVERVIEW</a:t>
+              <a:t>02 / THE SOLUTION</a:t>
             </a:r>
           </a:p>
           <a:p>
@@ -5763,350 +5027,14 @@
               </a:defRPr>
             </a:pPr>
             <a:r>
-              <a:t>Radahn: Visible, Steerable Memory Built Natively on MongoDB Atlas</a:t>
-            </a:r>
-          </a:p>
-        </p:txBody>
-      </p:sp>
-      <p:sp>
-        <p:nvSpPr>
-          <p:cNvPr id="4" name="Rounded Rectangle 3"/>
-          <p:cNvSpPr/>
-          <p:nvPr/>
-        </p:nvSpPr>
-        <p:spPr>
-          <a:xfrm>
-            <a:off x="731520" y="1828800"/>
-            <a:ext cx="4754880" cy="1325880"/>
-          </a:xfrm>
-          <a:prstGeom prst="roundRect">
-            <a:avLst/>
-          </a:prstGeom>
-          <a:solidFill>
-            <a:srgbClr val="161512"/>
-          </a:solidFill>
-          <a:ln w="12700">
-            <a:solidFill>
-              <a:srgbClr val="2E2B26"/>
-            </a:solidFill>
-          </a:ln>
-        </p:spPr>
-        <p:style>
-          <a:lnRef idx="1">
-            <a:schemeClr val="accent1"/>
-          </a:lnRef>
-          <a:fillRef idx="3">
-            <a:schemeClr val="accent1"/>
-          </a:fillRef>
-          <a:effectRef idx="2">
-            <a:schemeClr val="accent1"/>
-          </a:effectRef>
-          <a:fontRef idx="minor">
-            <a:schemeClr val="lt1"/>
-          </a:fontRef>
-        </p:style>
-        <p:txBody>
-          <a:bodyPr rtlCol="0" anchor="ctr"/>
-          <a:lstStyle/>
-          <a:p>
-            <a:pPr algn="ctr"/>
-          </a:p>
-        </p:txBody>
-      </p:sp>
-      <p:sp>
-        <p:nvSpPr>
-          <p:cNvPr id="5" name="TextBox 4"/>
-          <p:cNvSpPr txBox="1"/>
-          <p:nvPr/>
-        </p:nvSpPr>
-        <p:spPr>
-          <a:xfrm>
-            <a:off x="914400" y="1920240"/>
-            <a:ext cx="4389120" cy="1143000"/>
-          </a:xfrm>
-          <a:prstGeom prst="rect">
-            <a:avLst/>
-          </a:prstGeom>
-          <a:noFill/>
-        </p:spPr>
-        <p:txBody>
-          <a:bodyPr wrap="square">
-            <a:spAutoFit/>
-          </a:bodyPr>
-          <a:lstStyle/>
-          <a:p>
-            <a:pPr>
-              <a:defRPr sz="1500" b="1">
-                <a:solidFill>
-                  <a:srgbClr val="F2C12E"/>
-                </a:solidFill>
-                <a:latin typeface="Georgia"/>
-              </a:defRPr>
-            </a:pPr>
-            <a:r>
-              <a:t>VISIBLE · Every reply cites its sources</a:t>
-            </a:r>
-          </a:p>
-          <a:p>
-            <a:pPr>
-              <a:spcBef>
-                <a:spcPts val="400"/>
-              </a:spcBef>
-              <a:defRPr sz="1200">
-                <a:solidFill>
-                  <a:srgbClr val="B8B1A2"/>
-                </a:solidFill>
-                <a:latin typeface="Segoe UI"/>
-              </a:defRPr>
-            </a:pPr>
-            <a:r>
-              <a:t>Inline numbered citations link directly to the memories used. The Memory panel reveals multi-channel recall scores and plain-language reasons.</a:t>
-            </a:r>
-          </a:p>
-        </p:txBody>
-      </p:sp>
-      <p:sp>
-        <p:nvSpPr>
-          <p:cNvPr id="6" name="Rounded Rectangle 5"/>
-          <p:cNvSpPr/>
-          <p:nvPr/>
-        </p:nvSpPr>
-        <p:spPr>
-          <a:xfrm>
-            <a:off x="731520" y="3291840"/>
-            <a:ext cx="4754880" cy="1325880"/>
-          </a:xfrm>
-          <a:prstGeom prst="roundRect">
-            <a:avLst/>
-          </a:prstGeom>
-          <a:solidFill>
-            <a:srgbClr val="161512"/>
-          </a:solidFill>
-          <a:ln w="12700">
-            <a:solidFill>
-              <a:srgbClr val="2E2B26"/>
-            </a:solidFill>
-          </a:ln>
-        </p:spPr>
-        <p:style>
-          <a:lnRef idx="1">
-            <a:schemeClr val="accent1"/>
-          </a:lnRef>
-          <a:fillRef idx="3">
-            <a:schemeClr val="accent1"/>
-          </a:fillRef>
-          <a:effectRef idx="2">
-            <a:schemeClr val="accent1"/>
-          </a:effectRef>
-          <a:fontRef idx="minor">
-            <a:schemeClr val="lt1"/>
-          </a:fontRef>
-        </p:style>
-        <p:txBody>
-          <a:bodyPr rtlCol="0" anchor="ctr"/>
-          <a:lstStyle/>
-          <a:p>
-            <a:pPr algn="ctr"/>
-          </a:p>
-        </p:txBody>
-      </p:sp>
-      <p:sp>
-        <p:nvSpPr>
-          <p:cNvPr id="7" name="TextBox 6"/>
-          <p:cNvSpPr txBox="1"/>
-          <p:nvPr/>
-        </p:nvSpPr>
-        <p:spPr>
-          <a:xfrm>
-            <a:off x="914400" y="3383280"/>
-            <a:ext cx="4389120" cy="1143000"/>
-          </a:xfrm>
-          <a:prstGeom prst="rect">
-            <a:avLst/>
-          </a:prstGeom>
-          <a:noFill/>
-        </p:spPr>
-        <p:txBody>
-          <a:bodyPr wrap="square">
-            <a:spAutoFit/>
-          </a:bodyPr>
-          <a:lstStyle/>
-          <a:p>
-            <a:pPr>
-              <a:defRPr sz="1500" b="1">
-                <a:solidFill>
-                  <a:srgbClr val="F2C12E"/>
-                </a:solidFill>
-                <a:latin typeface="Georgia"/>
-              </a:defRPr>
-            </a:pPr>
-            <a:r>
-              <a:t>STEERABLE · You hold the pen</a:t>
-            </a:r>
-          </a:p>
-          <a:p>
-            <a:pPr>
-              <a:spcBef>
-                <a:spcPts val="400"/>
-              </a:spcBef>
-              <a:defRPr sz="1200">
-                <a:solidFill>
-                  <a:srgbClr val="B8B1A2"/>
-                </a:solidFill>
-                <a:latin typeface="Segoe UI"/>
-              </a:defRPr>
-            </a:pPr>
-            <a:r>
-              <a:t>Review sensitive items in an inbox, correct stale facts with automatic history chains, set minute-level TTL expiry, or hard-forget on command.</a:t>
-            </a:r>
-          </a:p>
-        </p:txBody>
-      </p:sp>
-      <p:sp>
-        <p:nvSpPr>
-          <p:cNvPr id="8" name="Rounded Rectangle 7"/>
-          <p:cNvSpPr/>
-          <p:nvPr/>
-        </p:nvSpPr>
-        <p:spPr>
-          <a:xfrm>
-            <a:off x="731520" y="4754880"/>
-            <a:ext cx="4754880" cy="1325880"/>
-          </a:xfrm>
-          <a:prstGeom prst="roundRect">
-            <a:avLst/>
-          </a:prstGeom>
-          <a:solidFill>
-            <a:srgbClr val="161512"/>
-          </a:solidFill>
-          <a:ln w="12700">
-            <a:solidFill>
-              <a:srgbClr val="2E2B26"/>
-            </a:solidFill>
-          </a:ln>
-        </p:spPr>
-        <p:style>
-          <a:lnRef idx="1">
-            <a:schemeClr val="accent1"/>
-          </a:lnRef>
-          <a:fillRef idx="3">
-            <a:schemeClr val="accent1"/>
-          </a:fillRef>
-          <a:effectRef idx="2">
-            <a:schemeClr val="accent1"/>
-          </a:effectRef>
-          <a:fontRef idx="minor">
-            <a:schemeClr val="lt1"/>
-          </a:fontRef>
-        </p:style>
-        <p:txBody>
-          <a:bodyPr rtlCol="0" anchor="ctr"/>
-          <a:lstStyle/>
-          <a:p>
-            <a:pPr algn="ctr"/>
-          </a:p>
-        </p:txBody>
-      </p:sp>
-      <p:sp>
-        <p:nvSpPr>
-          <p:cNvPr id="9" name="TextBox 8"/>
-          <p:cNvSpPr txBox="1"/>
-          <p:nvPr/>
-        </p:nvSpPr>
-        <p:spPr>
-          <a:xfrm>
-            <a:off x="914400" y="4846320"/>
-            <a:ext cx="4389120" cy="1143000"/>
-          </a:xfrm>
-          <a:prstGeom prst="rect">
-            <a:avLst/>
-          </a:prstGeom>
-          <a:noFill/>
-        </p:spPr>
-        <p:txBody>
-          <a:bodyPr wrap="square">
-            <a:spAutoFit/>
-          </a:bodyPr>
-          <a:lstStyle/>
-          <a:p>
-            <a:pPr>
-              <a:defRPr sz="1500" b="1">
-                <a:solidFill>
-                  <a:srgbClr val="F2C12E"/>
-                </a:solidFill>
-                <a:latin typeface="Georgia"/>
-              </a:defRPr>
-            </a:pPr>
-            <a:r>
-              <a:t>TRUSTWORTHY · Secrets blocked at the gate</a:t>
-            </a:r>
-          </a:p>
-          <a:p>
-            <a:pPr>
-              <a:spcBef>
-                <a:spcPts val="400"/>
-              </a:spcBef>
-              <a:defRPr sz="1200">
-                <a:solidFill>
-                  <a:srgbClr val="B8B1A2"/>
-                </a:solidFill>
-                <a:latin typeface="Segoe UI"/>
-              </a:defRPr>
-            </a:pPr>
-            <a:r>
-              <a:t>API keys, card numbers, and passwords are intercepted before storage. Database-level partial unique index guarantees one active truth.</a:t>
-            </a:r>
-          </a:p>
-        </p:txBody>
-      </p:sp>
-      <p:sp>
-        <p:nvSpPr>
-          <p:cNvPr id="10" name="Rounded Rectangle 9"/>
-          <p:cNvSpPr/>
-          <p:nvPr/>
-        </p:nvSpPr>
-        <p:spPr>
-          <a:xfrm>
-            <a:off x="5760720" y="1828800"/>
-            <a:ext cx="5699455" cy="4389120"/>
-          </a:xfrm>
-          <a:prstGeom prst="roundRect">
-            <a:avLst/>
-          </a:prstGeom>
-          <a:solidFill>
-            <a:srgbClr val="0E0D0B"/>
-          </a:solidFill>
-          <a:ln w="12700">
-            <a:solidFill>
-              <a:srgbClr val="2E2B26"/>
-            </a:solidFill>
-          </a:ln>
-        </p:spPr>
-        <p:style>
-          <a:lnRef idx="1">
-            <a:schemeClr val="accent1"/>
-          </a:lnRef>
-          <a:fillRef idx="3">
-            <a:schemeClr val="accent1"/>
-          </a:fillRef>
-          <a:effectRef idx="2">
-            <a:schemeClr val="accent1"/>
-          </a:effectRef>
-          <a:fontRef idx="minor">
-            <a:schemeClr val="lt1"/>
-          </a:fontRef>
-        </p:style>
-        <p:txBody>
-          <a:bodyPr rtlCol="0" anchor="ctr"/>
-          <a:lstStyle/>
-          <a:p>
-            <a:pPr algn="ctr"/>
+              <a:t>An agent with visible, steerable long-term memory on MongoDB Atlas.</a:t>
+            </a:r>
           </a:p>
         </p:txBody>
       </p:sp>
       <p:pic>
         <p:nvPicPr>
-          <p:cNvPr id="11" name="Picture 10" descr="image.png"/>
+          <p:cNvPr id="4" name="Picture 3" descr="image.png"/>
           <p:cNvPicPr>
             <a:picLocks noChangeAspect="1"/>
           </p:cNvPicPr>
@@ -6120,14 +5048,130 @@
         </p:blipFill>
         <p:spPr>
           <a:xfrm>
-            <a:off x="5806440" y="1874519"/>
-            <a:ext cx="5608015" cy="3505009"/>
+            <a:off x="731520" y="1828800"/>
+            <a:ext cx="6583680" cy="4114800"/>
           </a:xfrm>
           <a:prstGeom prst="rect">
             <a:avLst/>
           </a:prstGeom>
         </p:spPr>
       </p:pic>
+      <p:sp>
+        <p:nvSpPr>
+          <p:cNvPr id="5" name="TextBox 4"/>
+          <p:cNvSpPr txBox="1"/>
+          <p:nvPr/>
+        </p:nvSpPr>
+        <p:spPr>
+          <a:xfrm>
+            <a:off x="7589520" y="1828800"/>
+            <a:ext cx="3840480" cy="4389120"/>
+          </a:xfrm>
+          <a:prstGeom prst="rect">
+            <a:avLst/>
+          </a:prstGeom>
+          <a:noFill/>
+        </p:spPr>
+        <p:txBody>
+          <a:bodyPr wrap="square">
+            <a:spAutoFit/>
+          </a:bodyPr>
+          <a:lstStyle/>
+          <a:p>
+            <a:pPr>
+              <a:defRPr sz="1600" b="1">
+                <a:solidFill>
+                  <a:srgbClr val="F2C12E"/>
+                </a:solidFill>
+                <a:latin typeface="Georgia"/>
+              </a:defRPr>
+            </a:pPr>
+            <a:r>
+              <a:t>Visible Citations</a:t>
+            </a:r>
+          </a:p>
+          <a:p>
+            <a:pPr>
+              <a:spcBef>
+                <a:spcPts val="400"/>
+              </a:spcBef>
+              <a:defRPr sz="1200">
+                <a:solidFill>
+                  <a:srgbClr val="B8B1A2"/>
+                </a:solidFill>
+                <a:latin typeface="Segoe UI"/>
+              </a:defRPr>
+            </a:pPr>
+            <a:r>
+              <a:t>Every reply cites exact memories that shaped it. Click citations to inspect underlying units and multi-channel score breakdowns.</a:t>
+            </a:r>
+          </a:p>
+          <a:p>
+            <a:pPr>
+              <a:spcBef>
+                <a:spcPts val="1600"/>
+              </a:spcBef>
+              <a:defRPr sz="1600" b="1">
+                <a:solidFill>
+                  <a:srgbClr val="4FB37E"/>
+                </a:solidFill>
+                <a:latin typeface="Georgia"/>
+              </a:defRPr>
+            </a:pPr>
+            <a:r>
+              <a:t>Complete Steerability</a:t>
+            </a:r>
+          </a:p>
+          <a:p>
+            <a:pPr>
+              <a:spcBef>
+                <a:spcPts val="400"/>
+              </a:spcBef>
+              <a:defRPr sz="1200">
+                <a:solidFill>
+                  <a:srgbClr val="B8B1A2"/>
+                </a:solidFill>
+                <a:latin typeface="Segoe UI"/>
+              </a:defRPr>
+            </a:pPr>
+            <a:r>
+              <a:t>Review held items, correct facts with automatic superseding history, set minute-level TTL expiry, or permanently forget on command.</a:t>
+            </a:r>
+          </a:p>
+          <a:p>
+            <a:pPr>
+              <a:spcBef>
+                <a:spcPts val="1600"/>
+              </a:spcBef>
+              <a:defRPr sz="1600" b="1">
+                <a:solidFill>
+                  <a:srgbClr val="EDE6D6"/>
+                </a:solidFill>
+                <a:latin typeface="Georgia"/>
+              </a:defRPr>
+            </a:pPr>
+            <a:r>
+              <a:t>Database-Enforced Truth</a:t>
+            </a:r>
+          </a:p>
+          <a:p>
+            <a:pPr>
+              <a:spcBef>
+                <a:spcPts val="400"/>
+              </a:spcBef>
+              <a:defRPr sz="1200">
+                <a:solidFill>
+                  <a:srgbClr val="B8B1A2"/>
+                </a:solidFill>
+                <a:latin typeface="Segoe UI"/>
+              </a:defRPr>
+            </a:pPr>
+            <a:r>
+              <a:t>Atlas unique indexes guarantee single source of truth; pre-scan gates intercept secrets before storage; zero hallucinated recall.</a:t>
+            </a:r>
+          </a:p>
+        </p:txBody>
+      </p:sp>
     </p:spTree>
   </p:cSld>
   <p:clrMapOvr>
@@ -6220,7 +5264,7 @@
               </a:defRPr>
             </a:pPr>
             <a:r>
-              <a:t>JUDGE PATH</a:t>
+              <a:t>03 / DEMO RUN</a:t>
             </a:r>
           </a:p>
           <a:p>
@@ -6236,7 +5280,23 @@
               </a:defRPr>
             </a:pPr>
             <a:r>
-              <a:t>The Four Beats: Tested with Aarav, a Student Racing the Deadline</a:t>
+              <a:t>Tested live with Aarav Mehta — building Kestrel with two friends.</a:t>
+            </a:r>
+          </a:p>
+          <a:p>
+            <a:pPr>
+              <a:spcBef>
+                <a:spcPts val="300"/>
+              </a:spcBef>
+              <a:defRPr sz="1300">
+                <a:solidFill>
+                  <a:srgbClr val="8A8477"/>
+                </a:solidFill>
+                <a:latin typeface="Segoe UI"/>
+              </a:defRPr>
+            </a:pPr>
+            <a:r>
+              <a:t>The four-beat evaluation path tested seamlessly on production.</a:t>
             </a:r>
           </a:p>
         </p:txBody>
@@ -6249,8 +5309,8 @@
         </p:nvSpPr>
         <p:spPr>
           <a:xfrm>
-            <a:off x="731520" y="1828800"/>
-            <a:ext cx="2560320" cy="4389120"/>
+            <a:off x="731520" y="2011680"/>
+            <a:ext cx="5120640" cy="1920240"/>
           </a:xfrm>
           <a:prstGeom prst="roundRect">
             <a:avLst/>
@@ -6258,7 +5318,7 @@
           <a:solidFill>
             <a:srgbClr val="161512"/>
           </a:solidFill>
-          <a:ln w="12700">
+          <a:ln>
             <a:solidFill>
               <a:srgbClr val="2E2B26"/>
             </a:solidFill>
@@ -6279,67 +5339,25 @@
           </a:fontRef>
         </p:style>
         <p:txBody>
-          <a:bodyPr rtlCol="0" anchor="ctr"/>
-          <a:lstStyle/>
-          <a:p>
-            <a:pPr algn="ctr"/>
-          </a:p>
-        </p:txBody>
-      </p:sp>
-      <p:sp>
-        <p:nvSpPr>
-          <p:cNvPr id="5" name="TextBox 4"/>
-          <p:cNvSpPr txBox="1"/>
-          <p:nvPr/>
-        </p:nvSpPr>
-        <p:spPr>
-          <a:xfrm>
-            <a:off x="896112" y="2011680"/>
-            <a:ext cx="2231136" cy="4023360"/>
-          </a:xfrm>
-          <a:prstGeom prst="rect">
-            <a:avLst/>
-          </a:prstGeom>
-          <a:noFill/>
-        </p:spPr>
-        <p:txBody>
-          <a:bodyPr wrap="square">
-            <a:spAutoFit/>
-          </a:bodyPr>
-          <a:lstStyle/>
-          <a:p>
-            <a:pPr>
-              <a:defRPr sz="1100" b="1">
+          <a:bodyPr rtlCol="0" anchor="ctr" wrap="square" lIns="274320" tIns="274320"/>
+          <a:lstStyle/>
+          <a:p>
+            <a:pPr algn="ctr">
+              <a:defRPr sz="1600" b="1">
                 <a:solidFill>
                   <a:srgbClr val="F2C12E"/>
                 </a:solidFill>
-                <a:latin typeface="Consolas"/>
-              </a:defRPr>
-            </a:pPr>
-            <a:r>
-              <a:t>BEAT 01</a:t>
-            </a:r>
-          </a:p>
-          <a:p>
-            <a:pPr>
-              <a:spcBef>
-                <a:spcPts val="600"/>
-              </a:spcBef>
-              <a:defRPr sz="1700" b="1">
-                <a:solidFill>
-                  <a:srgbClr val="EDE6D6"/>
-                </a:solidFill>
                 <a:latin typeface="Georgia"/>
               </a:defRPr>
             </a:pPr>
             <a:r>
-              <a:t>Instant Entry &amp; Demo World</a:t>
-            </a:r>
-          </a:p>
-          <a:p>
-            <a:pPr>
-              <a:spcBef>
-                <a:spcPts val="1200"/>
+              <a:t>Beat 1: Instant Entry &amp; Demo Seeding</a:t>
+            </a:r>
+          </a:p>
+          <a:p>
+            <a:pPr>
+              <a:spcBef>
+                <a:spcPts val="800"/>
               </a:spcBef>
               <a:defRPr sz="1200">
                 <a:solidFill>
@@ -6349,29 +5367,21 @@
               </a:defRPr>
             </a:pPr>
             <a:r>
-              <a:t>• One-click 'Enter as guest'</a:t>
-            </a:r>
-            <a:br/>
-            <a:r>
-              <a:t>• Click 'Load demo memories'</a:t>
-            </a:r>
-            <a:br/>
-            <a:r>
-              <a:t>• Seeds 38 typed memories (preferences, deadlines, tech stacks) across 3 spaces with 768-d embeddings.</a:t>
-            </a:r>
-          </a:p>
-        </p:txBody>
-      </p:sp>
-      <p:sp>
-        <p:nvSpPr>
-          <p:cNvPr id="6" name="Rounded Rectangle 5"/>
+              <a:t>Enter as guest -&gt; Load demo memories. Seeds 38 typed memories across Kestrel, Personal, and Internships spaces with 768-d vector embeddings.</a:t>
+            </a:r>
+          </a:p>
+        </p:txBody>
+      </p:sp>
+      <p:sp>
+        <p:nvSpPr>
+          <p:cNvPr id="5" name="Rounded Rectangle 4"/>
           <p:cNvSpPr/>
           <p:nvPr/>
         </p:nvSpPr>
         <p:spPr>
           <a:xfrm>
-            <a:off x="3474720" y="1828800"/>
-            <a:ext cx="2560320" cy="4389120"/>
+            <a:off x="6126480" y="2011680"/>
+            <a:ext cx="5120640" cy="1920240"/>
           </a:xfrm>
           <a:prstGeom prst="roundRect">
             <a:avLst/>
@@ -6379,7 +5389,7 @@
           <a:solidFill>
             <a:srgbClr val="161512"/>
           </a:solidFill>
-          <a:ln w="12700">
+          <a:ln>
             <a:solidFill>
               <a:srgbClr val="2E2B26"/>
             </a:solidFill>
@@ -6400,67 +5410,25 @@
           </a:fontRef>
         </p:style>
         <p:txBody>
-          <a:bodyPr rtlCol="0" anchor="ctr"/>
-          <a:lstStyle/>
-          <a:p>
-            <a:pPr algn="ctr"/>
-          </a:p>
-        </p:txBody>
-      </p:sp>
-      <p:sp>
-        <p:nvSpPr>
-          <p:cNvPr id="7" name="TextBox 6"/>
-          <p:cNvSpPr txBox="1"/>
-          <p:nvPr/>
-        </p:nvSpPr>
-        <p:spPr>
-          <a:xfrm>
-            <a:off x="3639312" y="2011680"/>
-            <a:ext cx="2231136" cy="4023360"/>
-          </a:xfrm>
-          <a:prstGeom prst="rect">
-            <a:avLst/>
-          </a:prstGeom>
-          <a:noFill/>
-        </p:spPr>
-        <p:txBody>
-          <a:bodyPr wrap="square">
-            <a:spAutoFit/>
-          </a:bodyPr>
-          <a:lstStyle/>
-          <a:p>
-            <a:pPr>
-              <a:defRPr sz="1100" b="1">
+          <a:bodyPr rtlCol="0" anchor="ctr" wrap="square" lIns="274320" tIns="274320"/>
+          <a:lstStyle/>
+          <a:p>
+            <a:pPr algn="ctr">
+              <a:defRPr sz="1600" b="1">
                 <a:solidFill>
                   <a:srgbClr val="4FB37E"/>
                 </a:solidFill>
-                <a:latin typeface="Consolas"/>
-              </a:defRPr>
-            </a:pPr>
-            <a:r>
-              <a:t>BEAT 02</a:t>
-            </a:r>
-          </a:p>
-          <a:p>
-            <a:pPr>
-              <a:spcBef>
-                <a:spcPts val="600"/>
-              </a:spcBef>
-              <a:defRPr sz="1700" b="1">
-                <a:solidFill>
-                  <a:srgbClr val="EDE6D6"/>
-                </a:solidFill>
                 <a:latin typeface="Georgia"/>
               </a:defRPr>
             </a:pPr>
             <a:r>
-              <a:t>Recall &amp; The Ghost Diff</a:t>
-            </a:r>
-          </a:p>
-          <a:p>
-            <a:pPr>
-              <a:spcBef>
-                <a:spcPts val="1200"/>
+              <a:t>Beat 2: Recall &amp; The Ghost Diff</a:t>
+            </a:r>
+          </a:p>
+          <a:p>
+            <a:pPr>
+              <a:spcBef>
+                <a:spcPts val="800"/>
               </a:spcBef>
               <a:defRPr sz="1200">
                 <a:solidFill>
@@ -6470,29 +5438,21 @@
               </a:defRPr>
             </a:pPr>
             <a:r>
-              <a:t>• Prompt: 'Plan my next 4 hours.'</a:t>
-            </a:r>
-            <a:br/>
-            <a:r>
-              <a:t>• Radahn cites 9 PM build window &amp; 30-min timeboxes.</a:t>
-            </a:r>
-            <a:br/>
-            <a:r>
-              <a:t>• Click 'Without memory' to see the exact word-level diff against a cold memory-free answer.</a:t>
-            </a:r>
-          </a:p>
-        </p:txBody>
-      </p:sp>
-      <p:sp>
-        <p:nvSpPr>
-          <p:cNvPr id="8" name="Rounded Rectangle 7"/>
+              <a:t>Prompt: 'What is our launch plan for Kestrel?' Radahn cites Kestrel's 7 Nov 9 PM IST beta constraint, Aarav's 5-bullet preference, and 500 pilots goal. 'Without memory' shows live word-level diff.</a:t>
+            </a:r>
+          </a:p>
+        </p:txBody>
+      </p:sp>
+      <p:sp>
+        <p:nvSpPr>
+          <p:cNvPr id="6" name="Rounded Rectangle 5"/>
           <p:cNvSpPr/>
           <p:nvPr/>
         </p:nvSpPr>
         <p:spPr>
           <a:xfrm>
-            <a:off x="6217920" y="1828800"/>
-            <a:ext cx="2560320" cy="4389120"/>
+            <a:off x="731520" y="4206240"/>
+            <a:ext cx="5120640" cy="1920240"/>
           </a:xfrm>
           <a:prstGeom prst="roundRect">
             <a:avLst/>
@@ -6500,7 +5460,7 @@
           <a:solidFill>
             <a:srgbClr val="161512"/>
           </a:solidFill>
-          <a:ln w="12700">
+          <a:ln>
             <a:solidFill>
               <a:srgbClr val="2E2B26"/>
             </a:solidFill>
@@ -6521,67 +5481,25 @@
           </a:fontRef>
         </p:style>
         <p:txBody>
-          <a:bodyPr rtlCol="0" anchor="ctr"/>
-          <a:lstStyle/>
-          <a:p>
-            <a:pPr algn="ctr"/>
-          </a:p>
-        </p:txBody>
-      </p:sp>
-      <p:sp>
-        <p:nvSpPr>
-          <p:cNvPr id="9" name="TextBox 8"/>
-          <p:cNvSpPr txBox="1"/>
-          <p:nvPr/>
-        </p:nvSpPr>
-        <p:spPr>
-          <a:xfrm>
-            <a:off x="6382512" y="2011680"/>
-            <a:ext cx="2231136" cy="4023360"/>
-          </a:xfrm>
-          <a:prstGeom prst="rect">
-            <a:avLst/>
-          </a:prstGeom>
-          <a:noFill/>
-        </p:spPr>
-        <p:txBody>
-          <a:bodyPr wrap="square">
-            <a:spAutoFit/>
-          </a:bodyPr>
-          <a:lstStyle/>
-          <a:p>
-            <a:pPr>
-              <a:defRPr sz="1100" b="1">
+          <a:bodyPr rtlCol="0" anchor="ctr" wrap="square" lIns="274320" tIns="274320"/>
+          <a:lstStyle/>
+          <a:p>
+            <a:pPr algn="ctr">
+              <a:defRPr sz="1600" b="1">
                 <a:solidFill>
                   <a:srgbClr val="F08A24"/>
                 </a:solidFill>
-                <a:latin typeface="Consolas"/>
-              </a:defRPr>
-            </a:pPr>
-            <a:r>
-              <a:t>BEAT 03</a:t>
-            </a:r>
-          </a:p>
-          <a:p>
-            <a:pPr>
-              <a:spcBef>
-                <a:spcPts val="600"/>
-              </a:spcBef>
-              <a:defRPr sz="1700" b="1">
-                <a:solidFill>
-                  <a:srgbClr val="EDE6D6"/>
-                </a:solidFill>
                 <a:latin typeface="Georgia"/>
               </a:defRPr>
             </a:pPr>
             <a:r>
-              <a:t>Difficult Cases Live</a:t>
-            </a:r>
-          </a:p>
-          <a:p>
-            <a:pPr>
-              <a:spcBef>
-                <a:spcPts val="1200"/>
+              <a:t>Beat 3: Hard Cases Handled Live</a:t>
+            </a:r>
+          </a:p>
+          <a:p>
+            <a:pPr>
+              <a:spcBef>
+                <a:spcPts val="800"/>
               </a:spcBef>
               <a:defRPr sz="1200">
                 <a:solidFill>
@@ -6591,33 +5509,21 @@
               </a:defRPr>
             </a:pPr>
             <a:r>
-              <a:t>• Correction: 'Deadline moved to 10 PM' supersedes old record with history.</a:t>
-            </a:r>
-            <a:br/>
-            <a:r>
-              <a:t>• Privacy: sk-test_... is blocked.</a:t>
-            </a:r>
-            <a:br/>
-            <a:r>
-              <a:t>• Expiry: set 2m TTL and watch.</a:t>
-            </a:r>
-            <a:br/>
-            <a:r>
-              <a:t>• Forget: hard delete leaves tombstone.</a:t>
-            </a:r>
-          </a:p>
-        </p:txBody>
-      </p:sp>
-      <p:sp>
-        <p:nvSpPr>
-          <p:cNvPr id="10" name="Rounded Rectangle 9"/>
+              <a:t>Correction: 'Actually, the beta launch moved to 10 PM.' (Superseded with history chain). Sensitive memory held in Review. Credentials blocked by privacy gate.</a:t>
+            </a:r>
+          </a:p>
+        </p:txBody>
+      </p:sp>
+      <p:sp>
+        <p:nvSpPr>
+          <p:cNvPr id="7" name="Rounded Rectangle 6"/>
           <p:cNvSpPr/>
           <p:nvPr/>
         </p:nvSpPr>
         <p:spPr>
           <a:xfrm>
-            <a:off x="8961120" y="1828800"/>
-            <a:ext cx="2560320" cy="4389120"/>
+            <a:off x="6126480" y="4206240"/>
+            <a:ext cx="5120640" cy="1920240"/>
           </a:xfrm>
           <a:prstGeom prst="roundRect">
             <a:avLst/>
@@ -6625,7 +5531,7 @@
           <a:solidFill>
             <a:srgbClr val="161512"/>
           </a:solidFill>
-          <a:ln w="12700">
+          <a:ln>
             <a:solidFill>
               <a:srgbClr val="2E2B26"/>
             </a:solidFill>
@@ -6646,53 +5552,11 @@
           </a:fontRef>
         </p:style>
         <p:txBody>
-          <a:bodyPr rtlCol="0" anchor="ctr"/>
-          <a:lstStyle/>
-          <a:p>
-            <a:pPr algn="ctr"/>
-          </a:p>
-        </p:txBody>
-      </p:sp>
-      <p:sp>
-        <p:nvSpPr>
-          <p:cNvPr id="11" name="TextBox 10"/>
-          <p:cNvSpPr txBox="1"/>
-          <p:nvPr/>
-        </p:nvSpPr>
-        <p:spPr>
-          <a:xfrm>
-            <a:off x="9125712" y="2011680"/>
-            <a:ext cx="2231136" cy="4023360"/>
-          </a:xfrm>
-          <a:prstGeom prst="rect">
-            <a:avLst/>
-          </a:prstGeom>
-          <a:noFill/>
-        </p:spPr>
-        <p:txBody>
-          <a:bodyPr wrap="square">
-            <a:spAutoFit/>
-          </a:bodyPr>
-          <a:lstStyle/>
-          <a:p>
-            <a:pPr>
-              <a:defRPr sz="1100" b="1">
-                <a:solidFill>
-                  <a:srgbClr val="3A63D8"/>
-                </a:solidFill>
-                <a:latin typeface="Consolas"/>
-              </a:defRPr>
-            </a:pPr>
-            <a:r>
-              <a:t>BEAT 04</a:t>
-            </a:r>
-          </a:p>
-          <a:p>
-            <a:pPr>
-              <a:spcBef>
-                <a:spcPts val="600"/>
-              </a:spcBef>
-              <a:defRPr sz="1700" b="1">
+          <a:bodyPr rtlCol="0" anchor="ctr" wrap="square" lIns="274320" tIns="274320"/>
+          <a:lstStyle/>
+          <a:p>
+            <a:pPr algn="ctr">
+              <a:defRPr sz="1600" b="1">
                 <a:solidFill>
                   <a:srgbClr val="EDE6D6"/>
                 </a:solidFill>
@@ -6700,13 +5564,13 @@
               </a:defRPr>
             </a:pPr>
             <a:r>
-              <a:t>Atlas &amp; Reflection</a:t>
-            </a:r>
-          </a:p>
-          <a:p>
-            <a:pPr>
-              <a:spcBef>
-                <a:spcPts val="1200"/>
+              <a:t>Beat 4: Atlas &amp; Realtime Reflection</a:t>
+            </a:r>
+          </a:p>
+          <a:p>
+            <a:pPr>
+              <a:spcBef>
+                <a:spcPts val="800"/>
               </a:spcBef>
               <a:defRPr sz="1200">
                 <a:solidFill>
@@ -6716,15 +5580,7 @@
               </a:defRPr>
             </a:pPr>
             <a:r>
-              <a:t>• Time-travel in Memory Atlas ('As of yesterday') to see past belief state.</a:t>
-            </a:r>
-            <a:br/>
-            <a:r>
-              <a:t>• Real-time SSE updates via change stream.</a:t>
-            </a:r>
-            <a:br/>
-            <a:r>
-              <a:t>• 'Reflect now' merges feedback into learned strategies.</a:t>
+              <a:t>Explore memories in Atlas with 'As of' time travel. Watch live SSE change stream events in Activity, and trigger 'Reflect now' to consolidate feedback into strategies.</a:t>
             </a:r>
           </a:p>
         </p:txBody>
@@ -6821,7 +5677,7 @@
               </a:defRPr>
             </a:pPr>
             <a:r>
-              <a:t>DATA LAYER ARCHITECTURE</a:t>
+              <a:t>04 / ARCHITECTURE</a:t>
             </a:r>
           </a:p>
           <a:p>
@@ -6837,7 +5693,7 @@
               </a:defRPr>
             </a:pPr>
             <a:r>
-              <a:t>The Write Path: Atomic Extraction, Privacy Gate &amp; Reconciliation</a:t>
+              <a:t>Atomic extraction, deterministic privacy gates, and transactional reconcile.</a:t>
             </a:r>
           </a:p>
         </p:txBody>
@@ -6859,7 +5715,7 @@
           <a:solidFill>
             <a:srgbClr val="161512"/>
           </a:solidFill>
-          <a:ln w="12700">
+          <a:ln>
             <a:solidFill>
               <a:srgbClr val="2E2B26"/>
             </a:solidFill>
@@ -6880,45 +5736,19 @@
           </a:fontRef>
         </p:style>
         <p:txBody>
-          <a:bodyPr rtlCol="0" anchor="ctr"/>
-          <a:lstStyle/>
-          <a:p>
-            <a:pPr algn="ctr"/>
-          </a:p>
-        </p:txBody>
-      </p:sp>
-      <p:sp>
-        <p:nvSpPr>
-          <p:cNvPr id="5" name="TextBox 4"/>
-          <p:cNvSpPr txBox="1"/>
-          <p:nvPr/>
-        </p:nvSpPr>
-        <p:spPr>
-          <a:xfrm>
-            <a:off x="914400" y="1920240"/>
-            <a:ext cx="10362895" cy="822960"/>
-          </a:xfrm>
-          <a:prstGeom prst="rect">
-            <a:avLst/>
-          </a:prstGeom>
-          <a:noFill/>
-        </p:spPr>
-        <p:txBody>
-          <a:bodyPr wrap="square">
-            <a:spAutoFit/>
-          </a:bodyPr>
-          <a:lstStyle/>
-          <a:p>
-            <a:pPr>
-              <a:defRPr sz="1300" b="1">
+          <a:bodyPr rtlCol="0" anchor="ctr" wrap="square" lIns="228600" tIns="228600"/>
+          <a:lstStyle/>
+          <a:p>
+            <a:pPr algn="ctr">
+              <a:defRPr sz="1500" b="1">
                 <a:solidFill>
                   <a:srgbClr val="E2553A"/>
                 </a:solidFill>
-                <a:latin typeface="Consolas"/>
-              </a:defRPr>
-            </a:pPr>
-            <a:r>
-              <a:t>01 PRE-SCAN GATE  ·  Zero-Leakage Privacy</a:t>
+                <a:latin typeface="Georgia"/>
+              </a:defRPr>
+            </a:pPr>
+            <a:r>
+              <a:t>1. Stream &amp; Gate</a:t>
             </a:r>
           </a:p>
           <a:p>
@@ -6934,14 +5764,14 @@
               </a:defRPr>
             </a:pPr>
             <a:r>
-              <a:t>Every message passes through a deterministic regex &amp; entropy pre-scan before LLM or DB ingestion. API keys, passwords, and tokens are redacted immediately; personal/financial items are held for review.</a:t>
-            </a:r>
-          </a:p>
-        </p:txBody>
-      </p:sp>
-      <p:sp>
-        <p:nvSpPr>
-          <p:cNvPr id="6" name="Rounded Rectangle 5"/>
+              <a:t>User turn streams from client. Deterministic regex &amp; Shannon entropy pre-scan gate blocks keys/passwords before LLM or DB ingestion.</a:t>
+            </a:r>
+          </a:p>
+        </p:txBody>
+      </p:sp>
+      <p:sp>
+        <p:nvSpPr>
+          <p:cNvPr id="5" name="Rounded Rectangle 4"/>
           <p:cNvSpPr/>
           <p:nvPr/>
         </p:nvSpPr>
@@ -6956,7 +5786,7 @@
           <a:solidFill>
             <a:srgbClr val="161512"/>
           </a:solidFill>
-          <a:ln w="12700">
+          <a:ln>
             <a:solidFill>
               <a:srgbClr val="2E2B26"/>
             </a:solidFill>
@@ -6977,45 +5807,19 @@
           </a:fontRef>
         </p:style>
         <p:txBody>
-          <a:bodyPr rtlCol="0" anchor="ctr"/>
-          <a:lstStyle/>
-          <a:p>
-            <a:pPr algn="ctr"/>
-          </a:p>
-        </p:txBody>
-      </p:sp>
-      <p:sp>
-        <p:nvSpPr>
-          <p:cNvPr id="7" name="TextBox 6"/>
-          <p:cNvSpPr txBox="1"/>
-          <p:nvPr/>
-        </p:nvSpPr>
-        <p:spPr>
-          <a:xfrm>
-            <a:off x="914400" y="3063240"/>
-            <a:ext cx="10362895" cy="822960"/>
-          </a:xfrm>
-          <a:prstGeom prst="rect">
-            <a:avLst/>
-          </a:prstGeom>
-          <a:noFill/>
-        </p:spPr>
-        <p:txBody>
-          <a:bodyPr wrap="square">
-            <a:spAutoFit/>
-          </a:bodyPr>
-          <a:lstStyle/>
-          <a:p>
-            <a:pPr>
-              <a:defRPr sz="1300" b="1">
-                <a:solidFill>
-                  <a:srgbClr val="3A63D8"/>
-                </a:solidFill>
-                <a:latin typeface="Consolas"/>
-              </a:defRPr>
-            </a:pPr>
-            <a:r>
-              <a:t>02 EXTRACTION  ·  Gemini 3.5 Flash-Lite</a:t>
+          <a:bodyPr rtlCol="0" anchor="ctr" wrap="square" lIns="228600" tIns="228600"/>
+          <a:lstStyle/>
+          <a:p>
+            <a:pPr algn="ctr">
+              <a:defRPr sz="1500" b="1">
+                <a:solidFill>
+                  <a:srgbClr val="F08A24"/>
+                </a:solidFill>
+                <a:latin typeface="Georgia"/>
+              </a:defRPr>
+            </a:pPr>
+            <a:r>
+              <a:t>2. Atomic Extraction</a:t>
             </a:r>
           </a:p>
           <a:p>
@@ -7031,14 +5835,14 @@
               </a:defRPr>
             </a:pPr>
             <a:r>
-              <a:t>Runs asynchronously after the reply streams. Extracts structured, atomic candidates classified into 10 memory types (preference, constraint, goal, fact, decision, outcome, feedback, strategy).</a:t>
-            </a:r>
-          </a:p>
-        </p:txBody>
-      </p:sp>
-      <p:sp>
-        <p:nvSpPr>
-          <p:cNvPr id="8" name="Rounded Rectangle 7"/>
+              <a:t>Gemini 3.5 Flash-Lite extracts atomic candidate statements with typed Whitney block metadata (kind, space, confidence, slot).</a:t>
+            </a:r>
+          </a:p>
+        </p:txBody>
+      </p:sp>
+      <p:sp>
+        <p:nvSpPr>
+          <p:cNvPr id="6" name="Rounded Rectangle 5"/>
           <p:cNvSpPr/>
           <p:nvPr/>
         </p:nvSpPr>
@@ -7053,7 +5857,7 @@
           <a:solidFill>
             <a:srgbClr val="161512"/>
           </a:solidFill>
-          <a:ln w="12700">
+          <a:ln>
             <a:solidFill>
               <a:srgbClr val="2E2B26"/>
             </a:solidFill>
@@ -7074,45 +5878,19 @@
           </a:fontRef>
         </p:style>
         <p:txBody>
-          <a:bodyPr rtlCol="0" anchor="ctr"/>
-          <a:lstStyle/>
-          <a:p>
-            <a:pPr algn="ctr"/>
-          </a:p>
-        </p:txBody>
-      </p:sp>
-      <p:sp>
-        <p:nvSpPr>
-          <p:cNvPr id="9" name="TextBox 8"/>
-          <p:cNvSpPr txBox="1"/>
-          <p:nvPr/>
-        </p:nvSpPr>
-        <p:spPr>
-          <a:xfrm>
-            <a:off x="914400" y="4206240"/>
-            <a:ext cx="10362895" cy="822960"/>
-          </a:xfrm>
-          <a:prstGeom prst="rect">
-            <a:avLst/>
-          </a:prstGeom>
-          <a:noFill/>
-        </p:spPr>
-        <p:txBody>
-          <a:bodyPr wrap="square">
-            <a:spAutoFit/>
-          </a:bodyPr>
-          <a:lstStyle/>
-          <a:p>
-            <a:pPr>
-              <a:defRPr sz="1300" b="1">
+          <a:bodyPr rtlCol="0" anchor="ctr" wrap="square" lIns="228600" tIns="228600"/>
+          <a:lstStyle/>
+          <a:p>
+            <a:pPr algn="ctr">
+              <a:defRPr sz="1500" b="1">
                 <a:solidFill>
                   <a:srgbClr val="F2C12E"/>
                 </a:solidFill>
-                <a:latin typeface="Consolas"/>
-              </a:defRPr>
-            </a:pPr>
-            <a:r>
-              <a:t>03 RECONCILE  ·  Deterministic Logic</a:t>
+                <a:latin typeface="Georgia"/>
+              </a:defRPr>
+            </a:pPr>
+            <a:r>
+              <a:t>3. Reconcile Engine</a:t>
             </a:r>
           </a:p>
           <a:p>
@@ -7128,14 +5906,14 @@
               </a:defRPr>
             </a:pPr>
             <a:r>
-              <a:t>Thresholds determine operation: ADD new unit, CONFIRM existing (bumps confidence logarithmically), SUPERSEDE conflicting statement with history link, or SKIP duplicate content.</a:t>
-            </a:r>
-          </a:p>
-        </p:txBody>
-      </p:sp>
-      <p:sp>
-        <p:nvSpPr>
-          <p:cNvPr id="10" name="Rounded Rectangle 9"/>
+              <a:t>ADD (new fact) · CONFIRM (log boost) · SUPERSEDE (points old to new) · SKIP (deduplicates). Sensitive facts held for review.</a:t>
+            </a:r>
+          </a:p>
+        </p:txBody>
+      </p:sp>
+      <p:sp>
+        <p:nvSpPr>
+          <p:cNvPr id="7" name="Rounded Rectangle 6"/>
           <p:cNvSpPr/>
           <p:nvPr/>
         </p:nvSpPr>
@@ -7150,7 +5928,7 @@
           <a:solidFill>
             <a:srgbClr val="161512"/>
           </a:solidFill>
-          <a:ln w="12700">
+          <a:ln>
             <a:solidFill>
               <a:srgbClr val="2E2B26"/>
             </a:solidFill>
@@ -7171,45 +5949,19 @@
           </a:fontRef>
         </p:style>
         <p:txBody>
-          <a:bodyPr rtlCol="0" anchor="ctr"/>
-          <a:lstStyle/>
-          <a:p>
-            <a:pPr algn="ctr"/>
-          </a:p>
-        </p:txBody>
-      </p:sp>
-      <p:sp>
-        <p:nvSpPr>
-          <p:cNvPr id="11" name="TextBox 10"/>
-          <p:cNvSpPr txBox="1"/>
-          <p:nvPr/>
-        </p:nvSpPr>
-        <p:spPr>
-          <a:xfrm>
-            <a:off x="914400" y="5349240"/>
-            <a:ext cx="10362895" cy="822960"/>
-          </a:xfrm>
-          <a:prstGeom prst="rect">
-            <a:avLst/>
-          </a:prstGeom>
-          <a:noFill/>
-        </p:spPr>
-        <p:txBody>
-          <a:bodyPr wrap="square">
-            <a:spAutoFit/>
-          </a:bodyPr>
-          <a:lstStyle/>
-          <a:p>
-            <a:pPr>
-              <a:defRPr sz="1300" b="1">
+          <a:bodyPr rtlCol="0" anchor="ctr" wrap="square" lIns="228600" tIns="228600"/>
+          <a:lstStyle/>
+          <a:p>
+            <a:pPr algn="ctr">
+              <a:defRPr sz="1500" b="1">
                 <a:solidFill>
                   <a:srgbClr val="4FB37E"/>
                 </a:solidFill>
-                <a:latin typeface="Consolas"/>
-              </a:defRPr>
-            </a:pPr>
-            <a:r>
-              <a:t>04 TRANSACTION  ·  MongoDB Atlas Commit</a:t>
+                <a:latin typeface="Georgia"/>
+              </a:defRPr>
+            </a:pPr>
+            <a:r>
+              <a:t>4. Atlas Transaction</a:t>
             </a:r>
           </a:p>
           <a:p>
@@ -7225,7 +5977,7 @@
               </a:defRPr>
             </a:pPr>
             <a:r>
-              <a:t>Multi-document transaction writes to 'memories' collection and publishes an immutable event to 'memory_events'. Change stream immediately broadcasts write chips to the client UI.</a:t>
+              <a:t>Multi-document ACID transaction writes to `memories` and emits to `memory_events`. MongoDB Change Streams notify UI via SSE.</a:t>
             </a:r>
           </a:p>
         </p:txBody>
@@ -7322,7 +6074,7 @@
               </a:defRPr>
             </a:pPr>
             <a:r>
-              <a:t>RECALL &amp; SCORING</a:t>
+              <a:t>05 / RECALL ENGINE</a:t>
             </a:r>
           </a:p>
           <a:p>
@@ -7338,7 +6090,7 @@
               </a:defRPr>
             </a:pPr>
             <a:r>
-              <a:t>Four Parallel Channels Fused by Reciprocal Rank, Re-Scored &amp; Budgeted</a:t>
+              <a:t>Four parallel channels fused by rank, re-scored transparently, budgeted to 8.</a:t>
             </a:r>
           </a:p>
         </p:txBody>
@@ -7352,7 +6104,7 @@
         <p:spPr>
           <a:xfrm>
             <a:off x="731520" y="1828800"/>
-            <a:ext cx="5242255" cy="1280160"/>
+            <a:ext cx="5212080" cy="4389120"/>
           </a:xfrm>
           <a:prstGeom prst="roundRect">
             <a:avLst/>
@@ -7360,7 +6112,7 @@
           <a:solidFill>
             <a:srgbClr val="161512"/>
           </a:solidFill>
-          <a:ln w="12700">
+          <a:ln>
             <a:solidFill>
               <a:srgbClr val="2E2B26"/>
             </a:solidFill>
@@ -7381,53 +6133,40 @@
           </a:fontRef>
         </p:style>
         <p:txBody>
-          <a:bodyPr rtlCol="0" anchor="ctr"/>
-          <a:lstStyle/>
-          <a:p>
-            <a:pPr algn="ctr"/>
-          </a:p>
-        </p:txBody>
-      </p:sp>
-      <p:sp>
-        <p:nvSpPr>
-          <p:cNvPr id="5" name="TextBox 4"/>
-          <p:cNvSpPr txBox="1"/>
-          <p:nvPr/>
-        </p:nvSpPr>
-        <p:spPr>
-          <a:xfrm>
-            <a:off x="914400" y="1938528"/>
-            <a:ext cx="4876495" cy="1060704"/>
-          </a:xfrm>
-          <a:prstGeom prst="rect">
-            <a:avLst/>
-          </a:prstGeom>
-          <a:noFill/>
-        </p:spPr>
-        <p:txBody>
-          <a:bodyPr wrap="square">
-            <a:spAutoFit/>
-          </a:bodyPr>
-          <a:lstStyle/>
-          <a:p>
-            <a:pPr>
-              <a:defRPr sz="1200" b="1">
+          <a:bodyPr rtlCol="0" anchor="ctr" wrap="square" lIns="274320" tIns="274320"/>
+          <a:lstStyle/>
+          <a:p>
+            <a:pPr algn="ctr">
+              <a:defRPr sz="1700" b="1">
                 <a:solidFill>
                   <a:srgbClr val="F2C12E"/>
                 </a:solidFill>
-                <a:latin typeface="Consolas"/>
-              </a:defRPr>
-            </a:pPr>
-            <a:r>
-              <a:t>CHANNEL 1: VECTOR SEARCH</a:t>
-            </a:r>
-          </a:p>
-          <a:p>
-            <a:pPr>
-              <a:spcBef>
-                <a:spcPts val="400"/>
-              </a:spcBef>
-              <a:defRPr sz="1250">
+                <a:latin typeface="Georgia"/>
+              </a:defRPr>
+            </a:pPr>
+            <a:r>
+              <a:t>Four Parallel Recall Channels</a:t>
+            </a:r>
+          </a:p>
+          <a:p>
+            <a:pPr>
+              <a:spcBef>
+                <a:spcPts val="800"/>
+              </a:spcBef>
+              <a:defRPr sz="1300" b="1">
+                <a:solidFill>
+                  <a:srgbClr val="EDE6D6"/>
+                </a:solidFill>
+                <a:latin typeface="Segoe UI"/>
+              </a:defRPr>
+            </a:pPr>
+            <a:r>
+              <a:t>1. Atlas Vector Search</a:t>
+            </a:r>
+          </a:p>
+          <a:p>
+            <a:pPr>
+              <a:defRPr sz="1100">
                 <a:solidFill>
                   <a:srgbClr val="B8B1A2"/>
                 </a:solidFill>
@@ -7435,21 +6174,108 @@
               </a:defRPr>
             </a:pPr>
             <a:r>
-              <a:t>768-d cosine similarity on gemini-embedding-2 pre-filtered on ownerId, spaceKey, and active status.</a:t>
-            </a:r>
-          </a:p>
-        </p:txBody>
-      </p:sp>
-      <p:sp>
-        <p:nvSpPr>
-          <p:cNvPr id="6" name="Rounded Rectangle 5"/>
+              <a:t>768-d cosine vector search (gemini-embedding-2), pre-filtered by ownerId, spaceKey, and active status.</a:t>
+            </a:r>
+          </a:p>
+          <a:p>
+            <a:pPr>
+              <a:spcBef>
+                <a:spcPts val="800"/>
+              </a:spcBef>
+              <a:defRPr sz="1300" b="1">
+                <a:solidFill>
+                  <a:srgbClr val="EDE6D6"/>
+                </a:solidFill>
+                <a:latin typeface="Segoe UI"/>
+              </a:defRPr>
+            </a:pPr>
+            <a:r>
+              <a:t>2. Atlas Search (Lexical)</a:t>
+            </a:r>
+          </a:p>
+          <a:p>
+            <a:pPr>
+              <a:defRPr sz="1100">
+                <a:solidFill>
+                  <a:srgbClr val="B8B1A2"/>
+                </a:solidFill>
+                <a:latin typeface="Segoe UI"/>
+              </a:defRPr>
+            </a:pPr>
+            <a:r>
+              <a:t>Full-text Lucene search for exact keywords, acronyms, and codes ('Next.js', 'Vercel', 'Kestrel').</a:t>
+            </a:r>
+          </a:p>
+          <a:p>
+            <a:pPr>
+              <a:spcBef>
+                <a:spcPts val="800"/>
+              </a:spcBef>
+              <a:defRPr sz="1300" b="1">
+                <a:solidFill>
+                  <a:srgbClr val="EDE6D6"/>
+                </a:solidFill>
+                <a:latin typeface="Segoe UI"/>
+              </a:defRPr>
+            </a:pPr>
+            <a:r>
+              <a:t>3. Temporal Recency Window</a:t>
+            </a:r>
+          </a:p>
+          <a:p>
+            <a:pPr>
+              <a:defRPr sz="1100">
+                <a:solidFill>
+                  <a:srgbClr val="B8B1A2"/>
+                </a:solidFill>
+                <a:latin typeface="Segoe UI"/>
+              </a:defRPr>
+            </a:pPr>
+            <a:r>
+              <a:t>Recency decay calibrated to memory type half-life and explicit time queries.</a:t>
+            </a:r>
+          </a:p>
+          <a:p>
+            <a:pPr>
+              <a:spcBef>
+                <a:spcPts val="800"/>
+              </a:spcBef>
+              <a:defRPr sz="1300" b="1">
+                <a:solidFill>
+                  <a:srgbClr val="EDE6D6"/>
+                </a:solidFill>
+                <a:latin typeface="Segoe UI"/>
+              </a:defRPr>
+            </a:pPr>
+            <a:r>
+              <a:t>4. Linked Entities Graph</a:t>
+            </a:r>
+          </a:p>
+          <a:p>
+            <a:pPr>
+              <a:defRPr sz="1100">
+                <a:solidFill>
+                  <a:srgbClr val="B8B1A2"/>
+                </a:solidFill>
+                <a:latin typeface="Segoe UI"/>
+              </a:defRPr>
+            </a:pPr>
+            <a:r>
+              <a:t>Graph-lite entity linking across shared subjects and referenced items.</a:t>
+            </a:r>
+          </a:p>
+        </p:txBody>
+      </p:sp>
+      <p:sp>
+        <p:nvSpPr>
+          <p:cNvPr id="5" name="Rounded Rectangle 4"/>
           <p:cNvSpPr/>
           <p:nvPr/>
         </p:nvSpPr>
         <p:spPr>
           <a:xfrm>
             <a:off x="6217920" y="1828800"/>
-            <a:ext cx="5242255" cy="1280160"/>
+            <a:ext cx="5212080" cy="4389120"/>
           </a:xfrm>
           <a:prstGeom prst="roundRect">
             <a:avLst/>
@@ -7457,7 +6283,7 @@
           <a:solidFill>
             <a:srgbClr val="161512"/>
           </a:solidFill>
-          <a:ln w="12700">
+          <a:ln>
             <a:solidFill>
               <a:srgbClr val="2E2B26"/>
             </a:solidFill>
@@ -7478,37 +6304,27 @@
           </a:fontRef>
         </p:style>
         <p:txBody>
-          <a:bodyPr rtlCol="0" anchor="ctr"/>
-          <a:lstStyle/>
-          <a:p>
-            <a:pPr algn="ctr"/>
-          </a:p>
-        </p:txBody>
-      </p:sp>
-      <p:sp>
-        <p:nvSpPr>
-          <p:cNvPr id="7" name="TextBox 6"/>
-          <p:cNvSpPr txBox="1"/>
-          <p:nvPr/>
-        </p:nvSpPr>
-        <p:spPr>
-          <a:xfrm>
-            <a:off x="6400800" y="1938528"/>
-            <a:ext cx="4876495" cy="1060704"/>
-          </a:xfrm>
-          <a:prstGeom prst="rect">
-            <a:avLst/>
-          </a:prstGeom>
-          <a:noFill/>
-        </p:spPr>
-        <p:txBody>
-          <a:bodyPr wrap="square">
-            <a:spAutoFit/>
-          </a:bodyPr>
-          <a:lstStyle/>
-          <a:p>
-            <a:pPr>
-              <a:defRPr sz="1200" b="1">
+          <a:bodyPr rtlCol="0" anchor="ctr" wrap="square" lIns="274320" tIns="274320"/>
+          <a:lstStyle/>
+          <a:p>
+            <a:pPr algn="ctr">
+              <a:defRPr sz="1700" b="1">
+                <a:solidFill>
+                  <a:srgbClr val="4FB37E"/>
+                </a:solidFill>
+                <a:latin typeface="Georgia"/>
+              </a:defRPr>
+            </a:pPr>
+            <a:r>
+              <a:t>Scoring Formula &amp; Budgeting</a:t>
+            </a:r>
+          </a:p>
+          <a:p>
+            <a:pPr>
+              <a:spcBef>
+                <a:spcPts val="1000"/>
+              </a:spcBef>
+              <a:defRPr sz="1100">
                 <a:solidFill>
                   <a:srgbClr val="F2C12E"/>
                 </a:solidFill>
@@ -7516,15 +6332,28 @@
               </a:defRPr>
             </a:pPr>
             <a:r>
-              <a:t>CHANNEL 2: ATLAS SEARCH</a:t>
-            </a:r>
-          </a:p>
-          <a:p>
-            <a:pPr>
-              <a:spcBef>
-                <a:spcPts val="400"/>
-              </a:spcBef>
-              <a:defRPr sz="1250">
+              <a:t>final = 0.55 * relevance(RRF) + 0.15 * recency + 0.15 * importance + 0.10 * confidence + type_boost</a:t>
+            </a:r>
+          </a:p>
+          <a:p>
+            <a:pPr>
+              <a:spcBef>
+                <a:spcPts val="800"/>
+              </a:spcBef>
+              <a:defRPr sz="1300" b="1">
+                <a:solidFill>
+                  <a:srgbClr val="EDE6D6"/>
+                </a:solidFill>
+                <a:latin typeface="Segoe UI"/>
+              </a:defRPr>
+            </a:pPr>
+            <a:r>
+              <a:t>Reciprocal Rank Fusion (RRF)</a:t>
+            </a:r>
+          </a:p>
+          <a:p>
+            <a:pPr>
+              <a:defRPr sz="1100">
                 <a:solidFill>
                   <a:srgbClr val="B8B1A2"/>
                 </a:solidFill>
@@ -7532,96 +6361,28 @@
               </a:defRPr>
             </a:pPr>
             <a:r>
-              <a:t>Full-text Lucene search capturing exact codes, acronyms, and tokens ('M0', 'SVNIT') that embeddings blur.</a:t>
-            </a:r>
-          </a:p>
-        </p:txBody>
-      </p:sp>
-      <p:sp>
-        <p:nvSpPr>
-          <p:cNvPr id="8" name="Rounded Rectangle 7"/>
-          <p:cNvSpPr/>
-          <p:nvPr/>
-        </p:nvSpPr>
-        <p:spPr>
-          <a:xfrm>
-            <a:off x="731520" y="3246120"/>
-            <a:ext cx="5242255" cy="1280160"/>
-          </a:xfrm>
-          <a:prstGeom prst="roundRect">
-            <a:avLst/>
-          </a:prstGeom>
-          <a:solidFill>
-            <a:srgbClr val="161512"/>
-          </a:solidFill>
-          <a:ln w="12700">
-            <a:solidFill>
-              <a:srgbClr val="2E2B26"/>
-            </a:solidFill>
-          </a:ln>
-        </p:spPr>
-        <p:style>
-          <a:lnRef idx="1">
-            <a:schemeClr val="accent1"/>
-          </a:lnRef>
-          <a:fillRef idx="3">
-            <a:schemeClr val="accent1"/>
-          </a:fillRef>
-          <a:effectRef idx="2">
-            <a:schemeClr val="accent1"/>
-          </a:effectRef>
-          <a:fontRef idx="minor">
-            <a:schemeClr val="lt1"/>
-          </a:fontRef>
-        </p:style>
-        <p:txBody>
-          <a:bodyPr rtlCol="0" anchor="ctr"/>
-          <a:lstStyle/>
-          <a:p>
-            <a:pPr algn="ctr"/>
-          </a:p>
-        </p:txBody>
-      </p:sp>
-      <p:sp>
-        <p:nvSpPr>
-          <p:cNvPr id="9" name="TextBox 8"/>
-          <p:cNvSpPr txBox="1"/>
-          <p:nvPr/>
-        </p:nvSpPr>
-        <p:spPr>
-          <a:xfrm>
-            <a:off x="914400" y="3355848"/>
-            <a:ext cx="4876495" cy="1060704"/>
-          </a:xfrm>
-          <a:prstGeom prst="rect">
-            <a:avLst/>
-          </a:prstGeom>
-          <a:noFill/>
-        </p:spPr>
-        <p:txBody>
-          <a:bodyPr wrap="square">
-            <a:spAutoFit/>
-          </a:bodyPr>
-          <a:lstStyle/>
-          <a:p>
-            <a:pPr>
-              <a:defRPr sz="1200" b="1">
-                <a:solidFill>
-                  <a:srgbClr val="F2C12E"/>
-                </a:solidFill>
-                <a:latin typeface="Consolas"/>
-              </a:defRPr>
-            </a:pPr>
-            <a:r>
-              <a:t>CHANNEL 3: TEMPORAL WINDOW</a:t>
-            </a:r>
-          </a:p>
-          <a:p>
-            <a:pPr>
-              <a:spcBef>
-                <a:spcPts val="400"/>
-              </a:spcBef>
-              <a:defRPr sz="1250">
+              <a:t>Fuses rank positions across all 4 channels without scale bias.</a:t>
+            </a:r>
+          </a:p>
+          <a:p>
+            <a:pPr>
+              <a:spcBef>
+                <a:spcPts val="800"/>
+              </a:spcBef>
+              <a:defRPr sz="1300" b="1">
+                <a:solidFill>
+                  <a:srgbClr val="EDE6D6"/>
+                </a:solidFill>
+                <a:latin typeface="Segoe UI"/>
+              </a:defRPr>
+            </a:pPr>
+            <a:r>
+              <a:t>MMR Re-Ranking</a:t>
+            </a:r>
+          </a:p>
+          <a:p>
+            <a:pPr>
+              <a:defRPr sz="1100">
                 <a:solidFill>
                   <a:srgbClr val="B8B1A2"/>
                 </a:solidFill>
@@ -7629,96 +6390,28 @@
               </a:defRPr>
             </a:pPr>
             <a:r>
-              <a:t>Recency scoring based on memory type half-life plus explicit temporal query windows ('yesterday', 'this week').</a:t>
-            </a:r>
-          </a:p>
-        </p:txBody>
-      </p:sp>
-      <p:sp>
-        <p:nvSpPr>
-          <p:cNvPr id="10" name="Rounded Rectangle 9"/>
-          <p:cNvSpPr/>
-          <p:nvPr/>
-        </p:nvSpPr>
-        <p:spPr>
-          <a:xfrm>
-            <a:off x="6217920" y="3246120"/>
-            <a:ext cx="5242255" cy="1280160"/>
-          </a:xfrm>
-          <a:prstGeom prst="roundRect">
-            <a:avLst/>
-          </a:prstGeom>
-          <a:solidFill>
-            <a:srgbClr val="161512"/>
-          </a:solidFill>
-          <a:ln w="12700">
-            <a:solidFill>
-              <a:srgbClr val="2E2B26"/>
-            </a:solidFill>
-          </a:ln>
-        </p:spPr>
-        <p:style>
-          <a:lnRef idx="1">
-            <a:schemeClr val="accent1"/>
-          </a:lnRef>
-          <a:fillRef idx="3">
-            <a:schemeClr val="accent1"/>
-          </a:fillRef>
-          <a:effectRef idx="2">
-            <a:schemeClr val="accent1"/>
-          </a:effectRef>
-          <a:fontRef idx="minor">
-            <a:schemeClr val="lt1"/>
-          </a:fontRef>
-        </p:style>
-        <p:txBody>
-          <a:bodyPr rtlCol="0" anchor="ctr"/>
-          <a:lstStyle/>
-          <a:p>
-            <a:pPr algn="ctr"/>
-          </a:p>
-        </p:txBody>
-      </p:sp>
-      <p:sp>
-        <p:nvSpPr>
-          <p:cNvPr id="11" name="TextBox 10"/>
-          <p:cNvSpPr txBox="1"/>
-          <p:nvPr/>
-        </p:nvSpPr>
-        <p:spPr>
-          <a:xfrm>
-            <a:off x="6400800" y="3355848"/>
-            <a:ext cx="4876495" cy="1060704"/>
-          </a:xfrm>
-          <a:prstGeom prst="rect">
-            <a:avLst/>
-          </a:prstGeom>
-          <a:noFill/>
-        </p:spPr>
-        <p:txBody>
-          <a:bodyPr wrap="square">
-            <a:spAutoFit/>
-          </a:bodyPr>
-          <a:lstStyle/>
-          <a:p>
-            <a:pPr>
-              <a:defRPr sz="1200" b="1">
-                <a:solidFill>
-                  <a:srgbClr val="F2C12E"/>
-                </a:solidFill>
-                <a:latin typeface="Consolas"/>
-              </a:defRPr>
-            </a:pPr>
-            <a:r>
-              <a:t>CHANNEL 4: LINKED ENTITIES</a:t>
-            </a:r>
-          </a:p>
-          <a:p>
-            <a:pPr>
-              <a:spcBef>
-                <a:spcPts val="400"/>
-              </a:spcBef>
-              <a:defRPr sz="1250">
+              <a:t>Maximal Marginal Relevance (lambda = 0.7) eliminates near-duplicate candidates.</a:t>
+            </a:r>
+          </a:p>
+          <a:p>
+            <a:pPr>
+              <a:spcBef>
+                <a:spcPts val="800"/>
+              </a:spcBef>
+              <a:defRPr sz="1300" b="1">
+                <a:solidFill>
+                  <a:srgbClr val="EDE6D6"/>
+                </a:solidFill>
+                <a:latin typeface="Segoe UI"/>
+              </a:defRPr>
+            </a:pPr>
+            <a:r>
+              <a:t>Strict Budgeting</a:t>
+            </a:r>
+          </a:p>
+          <a:p>
+            <a:pPr>
+              <a:defRPr sz="1100">
                 <a:solidFill>
                   <a:srgbClr val="B8B1A2"/>
                 </a:solidFill>
@@ -7726,112 +6419,28 @@
               </a:defRPr>
             </a:pPr>
             <a:r>
-              <a:t>Graph-lite entity linking across shared subjects, actors, and linked memory IDs.</a:t>
-            </a:r>
-          </a:p>
-        </p:txBody>
-      </p:sp>
-      <p:sp>
-        <p:nvSpPr>
-          <p:cNvPr id="12" name="Rounded Rectangle 11"/>
-          <p:cNvSpPr/>
-          <p:nvPr/>
-        </p:nvSpPr>
-        <p:spPr>
-          <a:xfrm>
-            <a:off x="731520" y="4846320"/>
-            <a:ext cx="10728655" cy="1371600"/>
-          </a:xfrm>
-          <a:prstGeom prst="roundRect">
-            <a:avLst/>
-          </a:prstGeom>
-          <a:solidFill>
-            <a:srgbClr val="1E1C18"/>
-          </a:solidFill>
-          <a:ln w="12700">
-            <a:solidFill>
-              <a:srgbClr val="2E2B26"/>
-            </a:solidFill>
-          </a:ln>
-        </p:spPr>
-        <p:style>
-          <a:lnRef idx="1">
-            <a:schemeClr val="accent1"/>
-          </a:lnRef>
-          <a:fillRef idx="3">
-            <a:schemeClr val="accent1"/>
-          </a:fillRef>
-          <a:effectRef idx="2">
-            <a:schemeClr val="accent1"/>
-          </a:effectRef>
-          <a:fontRef idx="minor">
-            <a:schemeClr val="lt1"/>
-          </a:fontRef>
-        </p:style>
-        <p:txBody>
-          <a:bodyPr rtlCol="0" anchor="ctr"/>
-          <a:lstStyle/>
-          <a:p>
-            <a:pPr algn="ctr"/>
-          </a:p>
-        </p:txBody>
-      </p:sp>
-      <p:sp>
-        <p:nvSpPr>
-          <p:cNvPr id="13" name="TextBox 12"/>
-          <p:cNvSpPr txBox="1"/>
-          <p:nvPr/>
-        </p:nvSpPr>
-        <p:spPr>
-          <a:xfrm>
-            <a:off x="914400" y="4937760"/>
-            <a:ext cx="10362895" cy="1188720"/>
-          </a:xfrm>
-          <a:prstGeom prst="rect">
-            <a:avLst/>
-          </a:prstGeom>
-          <a:noFill/>
-        </p:spPr>
-        <p:txBody>
-          <a:bodyPr wrap="square">
-            <a:spAutoFit/>
-          </a:bodyPr>
-          <a:lstStyle/>
-          <a:p>
-            <a:pPr>
-              <a:defRPr sz="1100" b="1">
-                <a:solidFill>
-                  <a:srgbClr val="4FB37E"/>
-                </a:solidFill>
-                <a:latin typeface="Consolas"/>
-              </a:defRPr>
-            </a:pPr>
-            <a:r>
-              <a:t>TRANSPARENT SCORING FORMULA &amp; RE-RANKING</a:t>
-            </a:r>
-          </a:p>
-          <a:p>
-            <a:pPr>
-              <a:spcBef>
-                <a:spcPts val="400"/>
+              <a:t>Threshold at 0.35; capped at top 8 memories injected into system prompt.</a:t>
+            </a:r>
+          </a:p>
+          <a:p>
+            <a:pPr>
+              <a:spcBef>
+                <a:spcPts val="800"/>
               </a:spcBef>
               <a:defRPr sz="1300" b="1">
                 <a:solidFill>
                   <a:srgbClr val="EDE6D6"/>
                 </a:solidFill>
-                <a:latin typeface="Consolas"/>
-              </a:defRPr>
-            </a:pPr>
-            <a:r>
-              <a:t>final = 0.55 · relevance(RRF) + 0.15 · recency + 0.15 · importance + 0.10 · confidence + type_boost</a:t>
-            </a:r>
-          </a:p>
-          <a:p>
-            <a:pPr>
-              <a:spcBef>
-                <a:spcPts val="400"/>
-              </a:spcBef>
-              <a:defRPr sz="1200">
+                <a:latin typeface="Segoe UI"/>
+              </a:defRPr>
+            </a:pPr>
+            <a:r>
+              <a:t>Complete Audit Trace</a:t>
+            </a:r>
+          </a:p>
+          <a:p>
+            <a:pPr>
+              <a:defRPr sz="1100">
                 <a:solidFill>
                   <a:srgbClr val="B8B1A2"/>
                 </a:solidFill>
@@ -7839,7 +6448,7 @@
               </a:defRPr>
             </a:pPr>
             <a:r>
-              <a:t>Filtered at threshold 0.35 → Maximal Marginal Relevance (MMR, λ = 0.7) eliminates duplicates → Budget capped at 8 units. Full candidate trace stored.</a:t>
+              <a:t>Every candidate score, channel contribution, and decision saved to DB for inspection.</a:t>
             </a:r>
           </a:p>
         </p:txBody>
@@ -7936,7 +6545,7 @@
               </a:defRPr>
             </a:pPr>
             <a:r>
-              <a:t>EDGE CASES &amp; RELIABILITY</a:t>
+              <a:t>06 / RELIABILITY</a:t>
             </a:r>
           </a:p>
           <a:p>
@@ -7952,7 +6561,7 @@
               </a:defRPr>
             </a:pPr>
             <a:r>
-              <a:t>Difficult Cases Enforced at the Data Layer, Not in Prompts</a:t>
+              <a:t>Enforced with database guarantees rather than prompt suggestions.</a:t>
             </a:r>
           </a:p>
         </p:txBody>
@@ -7966,7 +6575,7 @@
         <p:spPr>
           <a:xfrm>
             <a:off x="731520" y="1828800"/>
-            <a:ext cx="10728655" cy="786384"/>
+            <a:ext cx="10728655" cy="822960"/>
           </a:xfrm>
           <a:prstGeom prst="roundRect">
             <a:avLst/>
@@ -7974,7 +6583,7 @@
           <a:solidFill>
             <a:srgbClr val="161512"/>
           </a:solidFill>
-          <a:ln w="12700">
+          <a:ln>
             <a:solidFill>
               <a:srgbClr val="2E2B26"/>
             </a:solidFill>
@@ -7995,75 +6604,49 @@
           </a:fontRef>
         </p:style>
         <p:txBody>
-          <a:bodyPr rtlCol="0" anchor="ctr"/>
-          <a:lstStyle/>
-          <a:p>
-            <a:pPr algn="ctr"/>
-          </a:p>
-        </p:txBody>
-      </p:sp>
-      <p:sp>
-        <p:nvSpPr>
-          <p:cNvPr id="5" name="TextBox 4"/>
-          <p:cNvSpPr txBox="1"/>
-          <p:nvPr/>
-        </p:nvSpPr>
-        <p:spPr>
-          <a:xfrm>
-            <a:off x="914400" y="1901952"/>
-            <a:ext cx="10362895" cy="640080"/>
-          </a:xfrm>
-          <a:prstGeom prst="rect">
-            <a:avLst/>
-          </a:prstGeom>
-          <a:noFill/>
-        </p:spPr>
-        <p:txBody>
-          <a:bodyPr wrap="square">
-            <a:spAutoFit/>
-          </a:bodyPr>
-          <a:lstStyle/>
-          <a:p>
-            <a:pPr>
-              <a:defRPr sz="1400" b="1">
+          <a:bodyPr rtlCol="0" anchor="ctr" wrap="square" lIns="182880" tIns="182880"/>
+          <a:lstStyle/>
+          <a:p>
+            <a:pPr algn="ctr">
+              <a:defRPr sz="1300" b="1">
+                <a:solidFill>
+                  <a:srgbClr val="EDE6D6"/>
+                </a:solidFill>
+                <a:latin typeface="Segoe UI"/>
+              </a:defRPr>
+            </a:pPr>
+            <a:r>
+              <a:t>CORRECTION:  Beta launch moved to 10 PM. Reconcile engine marks old record outdated, writes active replacement.</a:t>
+            </a:r>
+          </a:p>
+          <a:p>
+            <a:pPr>
+              <a:spcBef>
+                <a:spcPts val="200"/>
+              </a:spcBef>
+              <a:defRPr sz="1100">
                 <a:solidFill>
                   <a:srgbClr val="F2C12E"/>
                 </a:solidFill>
-                <a:latin typeface="Georgia"/>
-              </a:defRPr>
-            </a:pPr>
-            <a:r>
-              <a:t>CORRECTION — Supersede, Not Delete</a:t>
-            </a:r>
-          </a:p>
-          <a:p>
-            <a:pPr>
-              <a:spcBef>
-                <a:spcPts val="200"/>
-              </a:spcBef>
-              <a:defRPr sz="1150">
-                <a:solidFill>
-                  <a:srgbClr val="B8B1A2"/>
-                </a:solidFill>
-                <a:latin typeface="Segoe UI"/>
-              </a:defRPr>
-            </a:pPr>
-            <a:r>
-              <a:t>Partial unique index on {ownerId, spaceKey, slotKey} for active memories guarantees exactly one current truth. Superseded record preserved in history.</a:t>
-            </a:r>
-          </a:p>
-        </p:txBody>
-      </p:sp>
-      <p:sp>
-        <p:nvSpPr>
-          <p:cNvPr id="6" name="Rounded Rectangle 5"/>
+                <a:latin typeface="Consolas"/>
+              </a:defRPr>
+            </a:pPr>
+            <a:r>
+              <a:t>MongoDB Enforcer: Partial unique index {ownerId, spaceKey, slotKey} active. Guaranteed single truth.</a:t>
+            </a:r>
+          </a:p>
+        </p:txBody>
+      </p:sp>
+      <p:sp>
+        <p:nvSpPr>
+          <p:cNvPr id="5" name="Rounded Rectangle 4"/>
           <p:cNvSpPr/>
           <p:nvPr/>
         </p:nvSpPr>
         <p:spPr>
           <a:xfrm>
-            <a:off x="731520" y="2724912"/>
-            <a:ext cx="10728655" cy="786384"/>
+            <a:off x="731520" y="2743200"/>
+            <a:ext cx="10728655" cy="822960"/>
           </a:xfrm>
           <a:prstGeom prst="roundRect">
             <a:avLst/>
@@ -8071,7 +6654,7 @@
           <a:solidFill>
             <a:srgbClr val="161512"/>
           </a:solidFill>
-          <a:ln w="12700">
+          <a:ln>
             <a:solidFill>
               <a:srgbClr val="2E2B26"/>
             </a:solidFill>
@@ -8092,45 +6675,19 @@
           </a:fontRef>
         </p:style>
         <p:txBody>
-          <a:bodyPr rtlCol="0" anchor="ctr"/>
-          <a:lstStyle/>
-          <a:p>
-            <a:pPr algn="ctr"/>
-          </a:p>
-        </p:txBody>
-      </p:sp>
-      <p:sp>
-        <p:nvSpPr>
-          <p:cNvPr id="7" name="TextBox 6"/>
-          <p:cNvSpPr txBox="1"/>
-          <p:nvPr/>
-        </p:nvSpPr>
-        <p:spPr>
-          <a:xfrm>
-            <a:off x="914400" y="2798064"/>
-            <a:ext cx="10362895" cy="640080"/>
-          </a:xfrm>
-          <a:prstGeom prst="rect">
-            <a:avLst/>
-          </a:prstGeom>
-          <a:noFill/>
-        </p:spPr>
-        <p:txBody>
-          <a:bodyPr wrap="square">
-            <a:spAutoFit/>
-          </a:bodyPr>
-          <a:lstStyle/>
-          <a:p>
-            <a:pPr>
-              <a:defRPr sz="1400" b="1">
-                <a:solidFill>
-                  <a:srgbClr val="F08A24"/>
-                </a:solidFill>
-                <a:latin typeface="Georgia"/>
-              </a:defRPr>
-            </a:pPr>
-            <a:r>
-              <a:t>EXPIRY — Physical TTL Purge</a:t>
+          <a:bodyPr rtlCol="0" anchor="ctr" wrap="square" lIns="182880" tIns="182880"/>
+          <a:lstStyle/>
+          <a:p>
+            <a:pPr algn="ctr">
+              <a:defRPr sz="1300" b="1">
+                <a:solidFill>
+                  <a:srgbClr val="EDE6D6"/>
+                </a:solidFill>
+                <a:latin typeface="Segoe UI"/>
+              </a:defRPr>
+            </a:pPr>
+            <a:r>
+              <a:t>EXPIRY:  Remind me before Monday. Stops recalling past expiresAt, purged by background cleaner.</a:t>
             </a:r>
           </a:p>
           <a:p>
@@ -8138,29 +6695,29 @@
               <a:spcBef>
                 <a:spcPts val="200"/>
               </a:spcBef>
-              <a:defRPr sz="1150">
-                <a:solidFill>
-                  <a:srgbClr val="B8B1A2"/>
-                </a:solidFill>
-                <a:latin typeface="Segoe UI"/>
-              </a:defRPr>
-            </a:pPr>
-            <a:r>
-              <a:t>Query engine filters out expired memories instantly (expiresAt &gt; now). MongoDB's TTL index on purgeAt cleans up deleted records automatically.</a:t>
-            </a:r>
-          </a:p>
-        </p:txBody>
-      </p:sp>
-      <p:sp>
-        <p:nvSpPr>
-          <p:cNvPr id="8" name="Rounded Rectangle 7"/>
+              <a:defRPr sz="1100">
+                <a:solidFill>
+                  <a:srgbClr val="F2C12E"/>
+                </a:solidFill>
+                <a:latin typeface="Consolas"/>
+              </a:defRPr>
+            </a:pPr>
+            <a:r>
+              <a:t>MongoDB Enforcer: TTL index on purgeAt. Automatic physical cleanup without custom cron infrastructure.</a:t>
+            </a:r>
+          </a:p>
+        </p:txBody>
+      </p:sp>
+      <p:sp>
+        <p:nvSpPr>
+          <p:cNvPr id="6" name="Rounded Rectangle 5"/>
           <p:cNvSpPr/>
           <p:nvPr/>
         </p:nvSpPr>
         <p:spPr>
           <a:xfrm>
-            <a:off x="731520" y="3621024"/>
-            <a:ext cx="10728655" cy="786384"/>
+            <a:off x="731520" y="3657600"/>
+            <a:ext cx="10728655" cy="822960"/>
           </a:xfrm>
           <a:prstGeom prst="roundRect">
             <a:avLst/>
@@ -8168,7 +6725,7 @@
           <a:solidFill>
             <a:srgbClr val="161512"/>
           </a:solidFill>
-          <a:ln w="12700">
+          <a:ln>
             <a:solidFill>
               <a:srgbClr val="2E2B26"/>
             </a:solidFill>
@@ -8189,45 +6746,19 @@
           </a:fontRef>
         </p:style>
         <p:txBody>
-          <a:bodyPr rtlCol="0" anchor="ctr"/>
-          <a:lstStyle/>
-          <a:p>
-            <a:pPr algn="ctr"/>
-          </a:p>
-        </p:txBody>
-      </p:sp>
-      <p:sp>
-        <p:nvSpPr>
-          <p:cNvPr id="9" name="TextBox 8"/>
-          <p:cNvSpPr txBox="1"/>
-          <p:nvPr/>
-        </p:nvSpPr>
-        <p:spPr>
-          <a:xfrm>
-            <a:off x="914400" y="3694176"/>
-            <a:ext cx="10362895" cy="640080"/>
-          </a:xfrm>
-          <a:prstGeom prst="rect">
-            <a:avLst/>
-          </a:prstGeom>
-          <a:noFill/>
-        </p:spPr>
-        <p:txBody>
-          <a:bodyPr wrap="square">
-            <a:spAutoFit/>
-          </a:bodyPr>
-          <a:lstStyle/>
-          <a:p>
-            <a:pPr>
-              <a:defRPr sz="1400" b="1">
-                <a:solidFill>
-                  <a:srgbClr val="E2553A"/>
-                </a:solidFill>
-                <a:latin typeface="Georgia"/>
-              </a:defRPr>
-            </a:pPr>
-            <a:r>
-              <a:t>FORGET — Hard Physical Delete</a:t>
+          <a:bodyPr rtlCol="0" anchor="ctr" wrap="square" lIns="182880" tIns="182880"/>
+          <a:lstStyle/>
+          <a:p>
+            <a:pPr algn="ctr">
+              <a:defRPr sz="1300" b="1">
+                <a:solidFill>
+                  <a:srgbClr val="EDE6D6"/>
+                </a:solidFill>
+                <a:latin typeface="Segoe UI"/>
+              </a:defRPr>
+            </a:pPr>
+            <a:r>
+              <a:t>FORGET:  Forget my dietary preferences. Hard delete of statement and vector embedding.</a:t>
             </a:r>
           </a:p>
           <a:p>
@@ -8235,29 +6766,29 @@
               <a:spcBef>
                 <a:spcPts val="200"/>
               </a:spcBef>
-              <a:defRPr sz="1150">
-                <a:solidFill>
-                  <a:srgbClr val="B8B1A2"/>
-                </a:solidFill>
-                <a:latin typeface="Segoe UI"/>
-              </a:defRPr>
-            </a:pPr>
-            <a:r>
-              <a:t>Forget hard-deletes the statement text and vector embedding immediately. Only a content-free tombstone event remains for audit trails.</a:t>
-            </a:r>
-          </a:p>
-        </p:txBody>
-      </p:sp>
-      <p:sp>
-        <p:nvSpPr>
-          <p:cNvPr id="10" name="Rounded Rectangle 9"/>
+              <a:defRPr sz="1100">
+                <a:solidFill>
+                  <a:srgbClr val="F2C12E"/>
+                </a:solidFill>
+                <a:latin typeface="Consolas"/>
+              </a:defRPr>
+            </a:pPr>
+            <a:r>
+              <a:t>MongoDB Enforcer: deleteOne on memories collection + content-free audit tombstone in memory_events.</a:t>
+            </a:r>
+          </a:p>
+        </p:txBody>
+      </p:sp>
+      <p:sp>
+        <p:nvSpPr>
+          <p:cNvPr id="7" name="Rounded Rectangle 6"/>
           <p:cNvSpPr/>
           <p:nvPr/>
         </p:nvSpPr>
         <p:spPr>
           <a:xfrm>
-            <a:off x="731520" y="4517136"/>
-            <a:ext cx="10728655" cy="786384"/>
+            <a:off x="731520" y="4572000"/>
+            <a:ext cx="10728655" cy="822960"/>
           </a:xfrm>
           <a:prstGeom prst="roundRect">
             <a:avLst/>
@@ -8265,7 +6796,7 @@
           <a:solidFill>
             <a:srgbClr val="161512"/>
           </a:solidFill>
-          <a:ln w="12700">
+          <a:ln>
             <a:solidFill>
               <a:srgbClr val="2E2B26"/>
             </a:solidFill>
@@ -8286,45 +6817,19 @@
           </a:fontRef>
         </p:style>
         <p:txBody>
-          <a:bodyPr rtlCol="0" anchor="ctr"/>
-          <a:lstStyle/>
-          <a:p>
-            <a:pPr algn="ctr"/>
-          </a:p>
-        </p:txBody>
-      </p:sp>
-      <p:sp>
-        <p:nvSpPr>
-          <p:cNvPr id="11" name="TextBox 10"/>
-          <p:cNvSpPr txBox="1"/>
-          <p:nvPr/>
-        </p:nvSpPr>
-        <p:spPr>
-          <a:xfrm>
-            <a:off x="914400" y="4590288"/>
-            <a:ext cx="10362895" cy="640080"/>
-          </a:xfrm>
-          <a:prstGeom prst="rect">
-            <a:avLst/>
-          </a:prstGeom>
-          <a:noFill/>
-        </p:spPr>
-        <p:txBody>
-          <a:bodyPr wrap="square">
-            <a:spAutoFit/>
-          </a:bodyPr>
-          <a:lstStyle/>
-          <a:p>
-            <a:pPr>
-              <a:defRPr sz="1400" b="1">
-                <a:solidFill>
-                  <a:srgbClr val="8B68E8"/>
-                </a:solidFill>
-                <a:latin typeface="Georgia"/>
-              </a:defRPr>
-            </a:pPr>
-            <a:r>
-              <a:t>CONTRADICTION — Review Resolution</a:t>
+          <a:bodyPr rtlCol="0" anchor="ctr" wrap="square" lIns="182880" tIns="182880"/>
+          <a:lstStyle/>
+          <a:p>
+            <a:pPr algn="ctr">
+              <a:defRPr sz="1300" b="1">
+                <a:solidFill>
+                  <a:srgbClr val="EDE6D6"/>
+                </a:solidFill>
+                <a:latin typeface="Segoe UI"/>
+              </a:defRPr>
+            </a:pPr>
+            <a:r>
+              <a:t>CONTRADICTIONS:  Disagreeing statements detected during ingestion. Review page presents options side by side.</a:t>
             </a:r>
           </a:p>
           <a:p>
@@ -8332,29 +6837,29 @@
               <a:spcBef>
                 <a:spcPts val="200"/>
               </a:spcBef>
-              <a:defRPr sz="1150">
-                <a:solidFill>
-                  <a:srgbClr val="B8B1A2"/>
-                </a:solidFill>
-                <a:latin typeface="Segoe UI"/>
-              </a:defRPr>
-            </a:pPr>
-            <a:r>
-              <a:t>When statements disagree, conflict detector flags them in Review. User picks 'Keep left', 'Keep right', or 'Keep both'. Loser superseded with history.</a:t>
-            </a:r>
-          </a:p>
-        </p:txBody>
-      </p:sp>
-      <p:sp>
-        <p:nvSpPr>
-          <p:cNvPr id="12" name="Rounded Rectangle 11"/>
+              <a:defRPr sz="1100">
+                <a:solidFill>
+                  <a:srgbClr val="F2C12E"/>
+                </a:solidFill>
+                <a:latin typeface="Consolas"/>
+              </a:defRPr>
+            </a:pPr>
+            <a:r>
+              <a:t>MongoDB Enforcer: Recommendation Card UI lets user pick winning memory; winner supersedes loser.</a:t>
+            </a:r>
+          </a:p>
+        </p:txBody>
+      </p:sp>
+      <p:sp>
+        <p:nvSpPr>
+          <p:cNvPr id="8" name="Rounded Rectangle 7"/>
           <p:cNvSpPr/>
           <p:nvPr/>
         </p:nvSpPr>
         <p:spPr>
           <a:xfrm>
-            <a:off x="731520" y="5413248"/>
-            <a:ext cx="10728655" cy="786384"/>
+            <a:off x="731520" y="5486400"/>
+            <a:ext cx="10728655" cy="822960"/>
           </a:xfrm>
           <a:prstGeom prst="roundRect">
             <a:avLst/>
@@ -8362,7 +6867,7 @@
           <a:solidFill>
             <a:srgbClr val="161512"/>
           </a:solidFill>
-          <a:ln w="12700">
+          <a:ln>
             <a:solidFill>
               <a:srgbClr val="2E2B26"/>
             </a:solidFill>
@@ -8383,45 +6888,19 @@
           </a:fontRef>
         </p:style>
         <p:txBody>
-          <a:bodyPr rtlCol="0" anchor="ctr"/>
-          <a:lstStyle/>
-          <a:p>
-            <a:pPr algn="ctr"/>
-          </a:p>
-        </p:txBody>
-      </p:sp>
-      <p:sp>
-        <p:nvSpPr>
-          <p:cNvPr id="13" name="TextBox 12"/>
-          <p:cNvSpPr txBox="1"/>
-          <p:nvPr/>
-        </p:nvSpPr>
-        <p:spPr>
-          <a:xfrm>
-            <a:off x="914400" y="5486400"/>
-            <a:ext cx="10362895" cy="640080"/>
-          </a:xfrm>
-          <a:prstGeom prst="rect">
-            <a:avLst/>
-          </a:prstGeom>
-          <a:noFill/>
-        </p:spPr>
-        <p:txBody>
-          <a:bodyPr wrap="square">
-            <a:spAutoFit/>
-          </a:bodyPr>
-          <a:lstStyle/>
-          <a:p>
-            <a:pPr>
-              <a:defRPr sz="1400" b="1">
-                <a:solidFill>
-                  <a:srgbClr val="4FB37E"/>
-                </a:solidFill>
-                <a:latin typeface="Georgia"/>
-              </a:defRPr>
-            </a:pPr>
-            <a:r>
-              <a:t>PRIVATE DATA — Zero-Knowledge Gate</a:t>
+          <a:bodyPr rtlCol="0" anchor="ctr" wrap="square" lIns="182880" tIns="182880"/>
+          <a:lstStyle/>
+          <a:p>
+            <a:pPr algn="ctr">
+              <a:defRPr sz="1300" b="1">
+                <a:solidFill>
+                  <a:srgbClr val="EDE6D6"/>
+                </a:solidFill>
+                <a:latin typeface="Segoe UI"/>
+              </a:defRPr>
+            </a:pPr>
+            <a:r>
+              <a:t>PRIVACY INTERCEPT:  Catches simulated API keys, passwords, OTPs before LLM or DB ingestion.</a:t>
             </a:r>
           </a:p>
           <a:p>
@@ -8429,15 +6908,15 @@
               <a:spcBef>
                 <a:spcPts val="200"/>
               </a:spcBef>
-              <a:defRPr sz="1150">
-                <a:solidFill>
-                  <a:srgbClr val="B8B1A2"/>
-                </a:solidFill>
-                <a:latin typeface="Segoe UI"/>
-              </a:defRPr>
-            </a:pPr>
-            <a:r>
-              <a:t>API keys, card numbers, and passwords redacted before model sees them. Health and personal data held in human Review queue.</a:t>
+              <a:defRPr sz="1100">
+                <a:solidFill>
+                  <a:srgbClr val="F2C12E"/>
+                </a:solidFill>
+                <a:latin typeface="Consolas"/>
+              </a:defRPr>
+            </a:pPr>
+            <a:r>
+              <a:t>MongoDB Enforcer: Regex and Shannon entropy pre-scan gate; sensitive items routed to Review queue.</a:t>
             </a:r>
           </a:p>
         </p:txBody>
@@ -8534,7 +7013,7 @@
               </a:defRPr>
             </a:pPr>
             <a:r>
-              <a:t>REFLECT &amp; CONSOLIDATE</a:t>
+              <a:t>07 / LEARNING</a:t>
             </a:r>
           </a:p>
           <a:p>
@@ -8550,7 +7029,7 @@
               </a:defRPr>
             </a:pPr>
             <a:r>
-              <a:t>Turning Conversation History into Learned Agent Behaviour</a:t>
+              <a:t>Turning conversation history into learned agent behaviours.</a:t>
             </a:r>
           </a:p>
         </p:txBody>
@@ -8564,7 +7043,7 @@
         <p:spPr>
           <a:xfrm>
             <a:off x="731520" y="1828800"/>
-            <a:ext cx="5120640" cy="4389120"/>
+            <a:ext cx="5212080" cy="4389120"/>
           </a:xfrm>
           <a:prstGeom prst="roundRect">
             <a:avLst/>
@@ -8572,7 +7051,7 @@
           <a:solidFill>
             <a:srgbClr val="161512"/>
           </a:solidFill>
-          <a:ln w="12700">
+          <a:ln>
             <a:solidFill>
               <a:srgbClr val="2E2B26"/>
             </a:solidFill>
@@ -8593,69 +7072,40 @@
           </a:fontRef>
         </p:style>
         <p:txBody>
-          <a:bodyPr rtlCol="0" anchor="ctr"/>
-          <a:lstStyle/>
-          <a:p>
-            <a:pPr algn="ctr"/>
-          </a:p>
-        </p:txBody>
-      </p:sp>
-      <p:sp>
-        <p:nvSpPr>
-          <p:cNvPr id="5" name="TextBox 4"/>
-          <p:cNvSpPr txBox="1"/>
-          <p:nvPr/>
-        </p:nvSpPr>
-        <p:spPr>
-          <a:xfrm>
-            <a:off x="914400" y="2011680"/>
-            <a:ext cx="4754880" cy="4023360"/>
-          </a:xfrm>
-          <a:prstGeom prst="rect">
-            <a:avLst/>
-          </a:prstGeom>
-          <a:noFill/>
-        </p:spPr>
-        <p:txBody>
-          <a:bodyPr wrap="square">
-            <a:spAutoFit/>
-          </a:bodyPr>
-          <a:lstStyle/>
-          <a:p>
-            <a:pPr>
-              <a:defRPr sz="1200" b="1">
-                <a:solidFill>
-                  <a:srgbClr val="8B68E8"/>
-                </a:solidFill>
-                <a:latin typeface="Consolas"/>
-              </a:defRPr>
-            </a:pPr>
-            <a:r>
-              <a:t>THE REFLECTION PIPELINE</a:t>
-            </a:r>
-          </a:p>
-          <a:p>
-            <a:pPr>
-              <a:spcBef>
-                <a:spcPts val="600"/>
-              </a:spcBef>
-              <a:defRPr sz="2000" b="1">
+          <a:bodyPr rtlCol="0" anchor="ctr" wrap="square" lIns="274320" tIns="274320"/>
+          <a:lstStyle/>
+          <a:p>
+            <a:pPr algn="ctr">
+              <a:defRPr sz="1700" b="1">
+                <a:solidFill>
+                  <a:srgbClr val="F2C12E"/>
+                </a:solidFill>
+                <a:latin typeface="Georgia"/>
+              </a:defRPr>
+            </a:pPr>
+            <a:r>
+              <a:t>Reflection Pipeline</a:t>
+            </a:r>
+          </a:p>
+          <a:p>
+            <a:pPr>
+              <a:spcBef>
+                <a:spcPts val="800"/>
+              </a:spcBef>
+              <a:defRPr sz="1300" b="1">
                 <a:solidFill>
                   <a:srgbClr val="EDE6D6"/>
                 </a:solidFill>
-                <a:latin typeface="Georgia"/>
-              </a:defRPr>
-            </a:pPr>
-            <a:r>
-              <a:t>Background Sleep-Time Consolidation</a:t>
-            </a:r>
-          </a:p>
-          <a:p>
-            <a:pPr>
-              <a:spcBef>
-                <a:spcPts val="1000"/>
-              </a:spcBef>
-              <a:defRPr sz="1300">
+                <a:latin typeface="Segoe UI"/>
+              </a:defRPr>
+            </a:pPr>
+            <a:r>
+              <a:t>1. Gather Unreflected Feedback</a:t>
+            </a:r>
+          </a:p>
+          <a:p>
+            <a:pPr>
+              <a:defRPr sz="1100">
                 <a:solidFill>
                   <a:srgbClr val="B8B1A2"/>
                 </a:solidFill>
@@ -8663,15 +7113,28 @@
               </a:defRPr>
             </a:pPr>
             <a:r>
-              <a:t>1. Gather: Unreflected feedback and outcome memories.</a:t>
-            </a:r>
-          </a:p>
-          <a:p>
-            <a:pPr>
-              <a:spcBef>
-                <a:spcPts val="1000"/>
-              </a:spcBef>
-              <a:defRPr sz="1300">
+              <a:t>Collects raw feedback, corrections, and explicit preferences since last checkpoint.</a:t>
+            </a:r>
+          </a:p>
+          <a:p>
+            <a:pPr>
+              <a:spcBef>
+                <a:spcPts val="800"/>
+              </a:spcBef>
+              <a:defRPr sz="1300" b="1">
+                <a:solidFill>
+                  <a:srgbClr val="EDE6D6"/>
+                </a:solidFill>
+                <a:latin typeface="Segoe UI"/>
+              </a:defRPr>
+            </a:pPr>
+            <a:r>
+              <a:t>2. Topic Clustering</a:t>
+            </a:r>
+          </a:p>
+          <a:p>
+            <a:pPr>
+              <a:defRPr sz="1100">
                 <a:solidFill>
                   <a:srgbClr val="B8B1A2"/>
                 </a:solidFill>
@@ -8679,15 +7142,28 @@
               </a:defRPr>
             </a:pPr>
             <a:r>
-              <a:t>2. Cluster: Groups recurring comments by intent and topic.</a:t>
-            </a:r>
-          </a:p>
-          <a:p>
-            <a:pPr>
-              <a:spcBef>
-                <a:spcPts val="1000"/>
-              </a:spcBef>
-              <a:defRPr sz="1300">
+              <a:t>Groups observations by task domain (e.g. planning, formatting, coding).</a:t>
+            </a:r>
+          </a:p>
+          <a:p>
+            <a:pPr>
+              <a:spcBef>
+                <a:spcPts val="800"/>
+              </a:spcBef>
+              <a:defRPr sz="1300" b="1">
+                <a:solidFill>
+                  <a:srgbClr val="EDE6D6"/>
+                </a:solidFill>
+                <a:latin typeface="Segoe UI"/>
+              </a:defRPr>
+            </a:pPr>
+            <a:r>
+              <a:t>3. Synthesis &amp; Consolidation</a:t>
+            </a:r>
+          </a:p>
+          <a:p>
+            <a:pPr>
+              <a:defRPr sz="1100">
                 <a:solidFill>
                   <a:srgbClr val="B8B1A2"/>
                 </a:solidFill>
@@ -8695,15 +7171,28 @@
               </a:defRPr>
             </a:pPr>
             <a:r>
-              <a:t>3. Consolidate: Extracts durable user habits and implicit preferences.</a:t>
-            </a:r>
-          </a:p>
-          <a:p>
-            <a:pPr>
-              <a:spcBef>
-                <a:spcPts val="1000"/>
-              </a:spcBef>
-              <a:defRPr sz="1300">
+              <a:t>Synthesizes recurring guidance into generalized behavioural rules.</a:t>
+            </a:r>
+          </a:p>
+          <a:p>
+            <a:pPr>
+              <a:spcBef>
+                <a:spcPts val="800"/>
+              </a:spcBef>
+              <a:defRPr sz="1300" b="1">
+                <a:solidFill>
+                  <a:srgbClr val="EDE6D6"/>
+                </a:solidFill>
+                <a:latin typeface="Segoe UI"/>
+              </a:defRPr>
+            </a:pPr>
+            <a:r>
+              <a:t>4. Write Learned Strategies</a:t>
+            </a:r>
+          </a:p>
+          <a:p>
+            <a:pPr>
+              <a:defRPr sz="1100">
                 <a:solidFill>
                   <a:srgbClr val="B8B1A2"/>
                 </a:solidFill>
@@ -8711,29 +7200,29 @@
               </a:defRPr>
             </a:pPr>
             <a:r>
-              <a:t>4. Write: Produces high-level observations and actionable strategies.</a:t>
-            </a:r>
-          </a:p>
-        </p:txBody>
-      </p:sp>
-      <p:sp>
-        <p:nvSpPr>
-          <p:cNvPr id="6" name="Rounded Rectangle 5"/>
+              <a:t>Stores high-level strategies in memories with vector embeddings.</a:t>
+            </a:r>
+          </a:p>
+        </p:txBody>
+      </p:sp>
+      <p:sp>
+        <p:nvSpPr>
+          <p:cNvPr id="5" name="Rounded Rectangle 4"/>
           <p:cNvSpPr/>
           <p:nvPr/>
         </p:nvSpPr>
         <p:spPr>
           <a:xfrm>
             <a:off x="6217920" y="1828800"/>
-            <a:ext cx="5242255" cy="4389120"/>
+            <a:ext cx="5212080" cy="4389120"/>
           </a:xfrm>
           <a:prstGeom prst="roundRect">
             <a:avLst/>
           </a:prstGeom>
           <a:solidFill>
-            <a:srgbClr val="1E1C18"/>
+            <a:srgbClr val="161512"/>
           </a:solidFill>
-          <a:ln w="12700">
+          <a:ln>
             <a:solidFill>
               <a:srgbClr val="2E2B26"/>
             </a:solidFill>
@@ -8754,85 +7243,98 @@
           </a:fontRef>
         </p:style>
         <p:txBody>
-          <a:bodyPr rtlCol="0" anchor="ctr"/>
-          <a:lstStyle/>
-          <a:p>
-            <a:pPr algn="ctr"/>
-          </a:p>
-        </p:txBody>
-      </p:sp>
-      <p:sp>
-        <p:nvSpPr>
-          <p:cNvPr id="7" name="TextBox 6"/>
-          <p:cNvSpPr txBox="1"/>
-          <p:nvPr/>
-        </p:nvSpPr>
-        <p:spPr>
-          <a:xfrm>
-            <a:off x="6400800" y="2011680"/>
-            <a:ext cx="4876495" cy="4023360"/>
-          </a:xfrm>
-          <a:prstGeom prst="rect">
-            <a:avLst/>
-          </a:prstGeom>
-          <a:noFill/>
-        </p:spPr>
-        <p:txBody>
-          <a:bodyPr wrap="square">
-            <a:spAutoFit/>
-          </a:bodyPr>
-          <a:lstStyle/>
-          <a:p>
-            <a:pPr>
-              <a:defRPr sz="1200" b="1">
+          <a:bodyPr rtlCol="0" anchor="ctr" wrap="square" lIns="274320" tIns="274320"/>
+          <a:lstStyle/>
+          <a:p>
+            <a:pPr algn="ctr">
+              <a:defRPr sz="1700" b="1">
+                <a:solidFill>
+                  <a:srgbClr val="4FB37E"/>
+                </a:solidFill>
+                <a:latin typeface="Georgia"/>
+              </a:defRPr>
+            </a:pPr>
+            <a:r>
+              <a:t>Learned Strategy in Production</a:t>
+            </a:r>
+          </a:p>
+          <a:p>
+            <a:pPr>
+              <a:spcBef>
+                <a:spcPts val="1200"/>
+              </a:spcBef>
+              <a:defRPr sz="1300" b="1">
+                <a:solidFill>
+                  <a:srgbClr val="EDE6D6"/>
+                </a:solidFill>
+                <a:latin typeface="Segoe UI"/>
+              </a:defRPr>
+            </a:pPr>
+            <a:r>
+              <a:t>Observed User Feedback</a:t>
+            </a:r>
+          </a:p>
+          <a:p>
+            <a:pPr>
+              <a:defRPr sz="1200">
+                <a:solidFill>
+                  <a:srgbClr val="B8B1A2"/>
+                </a:solidFill>
+                <a:latin typeface="Segoe UI"/>
+              </a:defRPr>
+            </a:pPr>
+            <a:r>
+              <a:t>User repeatedly asks: 'keep it concise', 'bullet points only', 'shorter plans'.</a:t>
+            </a:r>
+          </a:p>
+          <a:p>
+            <a:pPr>
+              <a:spcBef>
+                <a:spcPts val="1200"/>
+              </a:spcBef>
+              <a:defRPr sz="1300" b="1">
+                <a:solidFill>
+                  <a:srgbClr val="EDE6D6"/>
+                </a:solidFill>
+                <a:latin typeface="Segoe UI"/>
+              </a:defRPr>
+            </a:pPr>
+            <a:r>
+              <a:t>Synthesized Strategy</a:t>
+            </a:r>
+          </a:p>
+          <a:p>
+            <a:pPr>
+              <a:defRPr sz="1200">
                 <a:solidFill>
                   <a:srgbClr val="F2C12E"/>
                 </a:solidFill>
-                <a:latin typeface="Consolas"/>
-              </a:defRPr>
-            </a:pPr>
-            <a:r>
-              <a:t>LEARNED STRATEGY IN PRODUCTION</a:t>
-            </a:r>
-          </a:p>
-          <a:p>
-            <a:pPr>
-              <a:spcBef>
-                <a:spcPts val="600"/>
-              </a:spcBef>
-              <a:defRPr sz="2000" b="1">
+                <a:latin typeface="Segoe UI"/>
+              </a:defRPr>
+            </a:pPr>
+            <a:r>
+              <a:t>"When Aarav asks for a plan, give at most 5 bullets, each with a time box."</a:t>
+            </a:r>
+          </a:p>
+          <a:p>
+            <a:pPr>
+              <a:spcBef>
+                <a:spcPts val="1200"/>
+              </a:spcBef>
+              <a:defRPr sz="1300" b="1">
                 <a:solidFill>
                   <a:srgbClr val="EDE6D6"/>
                 </a:solidFill>
-                <a:latin typeface="Georgia"/>
-              </a:defRPr>
-            </a:pPr>
-            <a:r>
-              <a:t>Feedback → Actionable Agent Rule</a:t>
-            </a:r>
-          </a:p>
-          <a:p>
-            <a:pPr>
-              <a:spcBef>
-                <a:spcPts val="1400"/>
-              </a:spcBef>
-              <a:defRPr sz="1300" b="1">
-                <a:solidFill>
-                  <a:srgbClr val="EDE6D6"/>
-                </a:solidFill>
-                <a:latin typeface="Segoe UI"/>
-              </a:defRPr>
-            </a:pPr>
-            <a:r>
-              <a:t>Observed User Feedback:</a:t>
-            </a:r>
-          </a:p>
-          <a:p>
-            <a:pPr>
-              <a:spcBef>
-                <a:spcPts val="400"/>
-              </a:spcBef>
-              <a:defRPr sz="1250">
+                <a:latin typeface="Segoe UI"/>
+              </a:defRPr>
+            </a:pPr>
+            <a:r>
+              <a:t>Live Agent Adaptation</a:t>
+            </a:r>
+          </a:p>
+          <a:p>
+            <a:pPr>
+              <a:defRPr sz="1200">
                 <a:solidFill>
                   <a:srgbClr val="B8B1A2"/>
                 </a:solidFill>
@@ -8840,47 +7342,7 @@
               </a:defRPr>
             </a:pPr>
             <a:r>
-              <a:t>• 'Too long, keep it concise'</a:t>
-            </a:r>
-            <a:br/>
-            <a:r>
-              <a:t>• 'Give me bullet points please'</a:t>
-            </a:r>
-            <a:br/>
-            <a:r>
-              <a:t>• 'Don't write essays'</a:t>
-            </a:r>
-          </a:p>
-          <a:p>
-            <a:pPr>
-              <a:spcBef>
-                <a:spcPts val="1400"/>
-              </a:spcBef>
-              <a:defRPr sz="1300" b="1">
-                <a:solidFill>
-                  <a:srgbClr val="4FB37E"/>
-                </a:solidFill>
-                <a:latin typeface="Segoe UI"/>
-              </a:defRPr>
-            </a:pPr>
-            <a:r>
-              <a:t>Learned Strategy Generated:</a:t>
-            </a:r>
-          </a:p>
-          <a:p>
-            <a:pPr>
-              <a:spcBef>
-                <a:spcPts val="400"/>
-              </a:spcBef>
-              <a:defRPr sz="1500">
-                <a:solidFill>
-                  <a:srgbClr val="F2C12E"/>
-                </a:solidFill>
-                <a:latin typeface="Georgia"/>
-              </a:defRPr>
-            </a:pPr>
-            <a:r>
-              <a:t>"When asked for a plan, give at most 5 time-boxed bullets."</a:t>
+              <a:t>Automatically recalled in future planning queries. Directly governs the Kestrel launch roadmap without prompting.</a:t>
             </a:r>
           </a:p>
         </p:txBody>
@@ -8977,7 +7439,7 @@
               </a:defRPr>
             </a:pPr>
             <a:r>
-              <a:t>MONGODB ATLAS</a:t>
+              <a:t>08 / MONGODB STACK</a:t>
             </a:r>
           </a:p>
           <a:p>
@@ -8993,7 +7455,7 @@
               </a:defRPr>
             </a:pPr>
             <a:r>
-              <a:t>Eight Native MongoDB Atlas Features Powering Radahn</a:t>
+              <a:t>Eight native MongoDB Atlas capabilities powering a zero-infrastructure backend.</a:t>
             </a:r>
           </a:p>
         </p:txBody>
@@ -9007,7 +7469,7 @@
         <p:spPr>
           <a:xfrm>
             <a:off x="731520" y="1828800"/>
-            <a:ext cx="5242255" cy="987552"/>
+            <a:ext cx="5120640" cy="1005840"/>
           </a:xfrm>
           <a:prstGeom prst="roundRect">
             <a:avLst/>
@@ -9015,7 +7477,7 @@
           <a:solidFill>
             <a:srgbClr val="161512"/>
           </a:solidFill>
-          <a:ln w="12700">
+          <a:ln>
             <a:solidFill>
               <a:srgbClr val="2E2B26"/>
             </a:solidFill>
@@ -9036,36 +7498,10 @@
           </a:fontRef>
         </p:style>
         <p:txBody>
-          <a:bodyPr rtlCol="0" anchor="ctr"/>
-          <a:lstStyle/>
-          <a:p>
-            <a:pPr algn="ctr"/>
-          </a:p>
-        </p:txBody>
-      </p:sp>
-      <p:sp>
-        <p:nvSpPr>
-          <p:cNvPr id="5" name="TextBox 4"/>
-          <p:cNvSpPr txBox="1"/>
-          <p:nvPr/>
-        </p:nvSpPr>
-        <p:spPr>
-          <a:xfrm>
-            <a:off x="896112" y="1901952"/>
-            <a:ext cx="4876495" cy="841248"/>
-          </a:xfrm>
-          <a:prstGeom prst="rect">
-            <a:avLst/>
-          </a:prstGeom>
-          <a:noFill/>
-        </p:spPr>
-        <p:txBody>
-          <a:bodyPr wrap="square">
-            <a:spAutoFit/>
-          </a:bodyPr>
-          <a:lstStyle/>
-          <a:p>
-            <a:pPr>
+          <a:bodyPr rtlCol="0" anchor="ctr" wrap="square" lIns="182880" tIns="182880"/>
+          <a:lstStyle/>
+          <a:p>
+            <a:pPr algn="ctr">
               <a:defRPr sz="1400" b="1">
                 <a:solidFill>
                   <a:srgbClr val="F2C12E"/>
@@ -9074,7 +7510,7 @@
               </a:defRPr>
             </a:pPr>
             <a:r>
-              <a:t>Document Model + $jsonSchema</a:t>
+              <a:t>Document Model &amp; $jsonSchema</a:t>
             </a:r>
           </a:p>
           <a:p>
@@ -9082,7 +7518,7 @@
               <a:spcBef>
                 <a:spcPts val="200"/>
               </a:spcBef>
-              <a:defRPr sz="1150">
+              <a:defRPr sz="1100">
                 <a:solidFill>
                   <a:srgbClr val="B8B1A2"/>
                 </a:solidFill>
@@ -9090,21 +7526,21 @@
               </a:defRPr>
             </a:pPr>
             <a:r>
-              <a:t>Typed memory documents with strictly validated schemas for provenance, lifecycle, and scores.</a:t>
-            </a:r>
-          </a:p>
-        </p:txBody>
-      </p:sp>
-      <p:sp>
-        <p:nvSpPr>
-          <p:cNvPr id="6" name="Rounded Rectangle 5"/>
+              <a:t>Typed memories, confidence scores, and lifecycle states in a strictly validated schema.</a:t>
+            </a:r>
+          </a:p>
+        </p:txBody>
+      </p:sp>
+      <p:sp>
+        <p:nvSpPr>
+          <p:cNvPr id="5" name="Rounded Rectangle 4"/>
           <p:cNvSpPr/>
           <p:nvPr/>
         </p:nvSpPr>
         <p:spPr>
           <a:xfrm>
-            <a:off x="6217920" y="1828800"/>
-            <a:ext cx="5242255" cy="987552"/>
+            <a:off x="6126480" y="1828800"/>
+            <a:ext cx="5120640" cy="1005840"/>
           </a:xfrm>
           <a:prstGeom prst="roundRect">
             <a:avLst/>
@@ -9112,7 +7548,7 @@
           <a:solidFill>
             <a:srgbClr val="161512"/>
           </a:solidFill>
-          <a:ln w="12700">
+          <a:ln>
             <a:solidFill>
               <a:srgbClr val="2E2B26"/>
             </a:solidFill>
@@ -9133,36 +7569,10 @@
           </a:fontRef>
         </p:style>
         <p:txBody>
-          <a:bodyPr rtlCol="0" anchor="ctr"/>
-          <a:lstStyle/>
-          <a:p>
-            <a:pPr algn="ctr"/>
-          </a:p>
-        </p:txBody>
-      </p:sp>
-      <p:sp>
-        <p:nvSpPr>
-          <p:cNvPr id="7" name="TextBox 6"/>
-          <p:cNvSpPr txBox="1"/>
-          <p:nvPr/>
-        </p:nvSpPr>
-        <p:spPr>
-          <a:xfrm>
-            <a:off x="6382512" y="1901952"/>
-            <a:ext cx="4876495" cy="841248"/>
-          </a:xfrm>
-          <a:prstGeom prst="rect">
-            <a:avLst/>
-          </a:prstGeom>
-          <a:noFill/>
-        </p:spPr>
-        <p:txBody>
-          <a:bodyPr wrap="square">
-            <a:spAutoFit/>
-          </a:bodyPr>
-          <a:lstStyle/>
-          <a:p>
-            <a:pPr>
+          <a:bodyPr rtlCol="0" anchor="ctr" wrap="square" lIns="182880" tIns="182880"/>
+          <a:lstStyle/>
+          <a:p>
+            <a:pPr algn="ctr">
               <a:defRPr sz="1400" b="1">
                 <a:solidFill>
                   <a:srgbClr val="F2C12E"/>
@@ -9179,7 +7589,7 @@
               <a:spcBef>
                 <a:spcPts val="200"/>
               </a:spcBef>
-              <a:defRPr sz="1150">
+              <a:defRPr sz="1100">
                 <a:solidFill>
                   <a:srgbClr val="B8B1A2"/>
                 </a:solidFill>
@@ -9187,21 +7597,21 @@
               </a:defRPr>
             </a:pPr>
             <a:r>
-              <a:t>768-d cosine vector index pre-filtered on ownerId, spaceKey, status, and memory type.</a:t>
-            </a:r>
-          </a:p>
-        </p:txBody>
-      </p:sp>
-      <p:sp>
-        <p:nvSpPr>
-          <p:cNvPr id="8" name="Rounded Rectangle 7"/>
+              <a:t>768-d vector index with pre-filters on ownerId, spaceKey, status, and type.</a:t>
+            </a:r>
+          </a:p>
+        </p:txBody>
+      </p:sp>
+      <p:sp>
+        <p:nvSpPr>
+          <p:cNvPr id="6" name="Rounded Rectangle 5"/>
           <p:cNvSpPr/>
           <p:nvPr/>
         </p:nvSpPr>
         <p:spPr>
           <a:xfrm>
-            <a:off x="731520" y="2926080"/>
-            <a:ext cx="5242255" cy="987552"/>
+            <a:off x="731520" y="2971800"/>
+            <a:ext cx="5120640" cy="1005840"/>
           </a:xfrm>
           <a:prstGeom prst="roundRect">
             <a:avLst/>
@@ -9209,7 +7619,7 @@
           <a:solidFill>
             <a:srgbClr val="161512"/>
           </a:solidFill>
-          <a:ln w="12700">
+          <a:ln>
             <a:solidFill>
               <a:srgbClr val="2E2B26"/>
             </a:solidFill>
@@ -9230,36 +7640,10 @@
           </a:fontRef>
         </p:style>
         <p:txBody>
-          <a:bodyPr rtlCol="0" anchor="ctr"/>
-          <a:lstStyle/>
-          <a:p>
-            <a:pPr algn="ctr"/>
-          </a:p>
-        </p:txBody>
-      </p:sp>
-      <p:sp>
-        <p:nvSpPr>
-          <p:cNvPr id="9" name="TextBox 8"/>
-          <p:cNvSpPr txBox="1"/>
-          <p:nvPr/>
-        </p:nvSpPr>
-        <p:spPr>
-          <a:xfrm>
-            <a:off x="896112" y="2999232"/>
-            <a:ext cx="4876495" cy="841248"/>
-          </a:xfrm>
-          <a:prstGeom prst="rect">
-            <a:avLst/>
-          </a:prstGeom>
-          <a:noFill/>
-        </p:spPr>
-        <p:txBody>
-          <a:bodyPr wrap="square">
-            <a:spAutoFit/>
-          </a:bodyPr>
-          <a:lstStyle/>
-          <a:p>
-            <a:pPr>
+          <a:bodyPr rtlCol="0" anchor="ctr" wrap="square" lIns="182880" tIns="182880"/>
+          <a:lstStyle/>
+          <a:p>
+            <a:pPr algn="ctr">
               <a:defRPr sz="1400" b="1">
                 <a:solidFill>
                   <a:srgbClr val="F2C12E"/>
@@ -9276,7 +7660,7 @@
               <a:spcBef>
                 <a:spcPts val="200"/>
               </a:spcBef>
-              <a:defRPr sz="1150">
+              <a:defRPr sz="1100">
                 <a:solidFill>
                   <a:srgbClr val="B8B1A2"/>
                 </a:solidFill>
@@ -9284,21 +7668,21 @@
               </a:defRPr>
             </a:pPr>
             <a:r>
-              <a:t>Lexical full-text search capturing exact identifiers, codes ('M0'), and acronyms.</a:t>
-            </a:r>
-          </a:p>
-        </p:txBody>
-      </p:sp>
-      <p:sp>
-        <p:nvSpPr>
-          <p:cNvPr id="10" name="Rounded Rectangle 9"/>
+              <a:t>Full-text lexical search capturing exact tokens that vector embeddings miss.</a:t>
+            </a:r>
+          </a:p>
+        </p:txBody>
+      </p:sp>
+      <p:sp>
+        <p:nvSpPr>
+          <p:cNvPr id="7" name="Rounded Rectangle 6"/>
           <p:cNvSpPr/>
           <p:nvPr/>
         </p:nvSpPr>
         <p:spPr>
           <a:xfrm>
-            <a:off x="6217920" y="2926080"/>
-            <a:ext cx="5242255" cy="987552"/>
+            <a:off x="6126480" y="2971800"/>
+            <a:ext cx="5120640" cy="1005840"/>
           </a:xfrm>
           <a:prstGeom prst="roundRect">
             <a:avLst/>
@@ -9306,7 +7690,7 @@
           <a:solidFill>
             <a:srgbClr val="161512"/>
           </a:solidFill>
-          <a:ln w="12700">
+          <a:ln>
             <a:solidFill>
               <a:srgbClr val="2E2B26"/>
             </a:solidFill>
@@ -9327,36 +7711,10 @@
           </a:fontRef>
         </p:style>
         <p:txBody>
-          <a:bodyPr rtlCol="0" anchor="ctr"/>
-          <a:lstStyle/>
-          <a:p>
-            <a:pPr algn="ctr"/>
-          </a:p>
-        </p:txBody>
-      </p:sp>
-      <p:sp>
-        <p:nvSpPr>
-          <p:cNvPr id="11" name="TextBox 10"/>
-          <p:cNvSpPr txBox="1"/>
-          <p:nvPr/>
-        </p:nvSpPr>
-        <p:spPr>
-          <a:xfrm>
-            <a:off x="6382512" y="2999232"/>
-            <a:ext cx="4876495" cy="841248"/>
-          </a:xfrm>
-          <a:prstGeom prst="rect">
-            <a:avLst/>
-          </a:prstGeom>
-          <a:noFill/>
-        </p:spPr>
-        <p:txBody>
-          <a:bodyPr wrap="square">
-            <a:spAutoFit/>
-          </a:bodyPr>
-          <a:lstStyle/>
-          <a:p>
-            <a:pPr>
+          <a:bodyPr rtlCol="0" anchor="ctr" wrap="square" lIns="182880" tIns="182880"/>
+          <a:lstStyle/>
+          <a:p>
+            <a:pPr algn="ctr">
               <a:defRPr sz="1400" b="1">
                 <a:solidFill>
                   <a:srgbClr val="F2C12E"/>
@@ -9373,7 +7731,7 @@
               <a:spcBef>
                 <a:spcPts val="200"/>
               </a:spcBef>
-              <a:defRPr sz="1150">
+              <a:defRPr sz="1100">
                 <a:solidFill>
                   <a:srgbClr val="B8B1A2"/>
                 </a:solidFill>
@@ -9381,21 +7739,21 @@
               </a:defRPr>
             </a:pPr>
             <a:r>
-              <a:t>Physical auto-purging on purgeAt for expired memories, traces, and rate-limits without cron code.</a:t>
-            </a:r>
-          </a:p>
-        </p:txBody>
-      </p:sp>
-      <p:sp>
-        <p:nvSpPr>
-          <p:cNvPr id="12" name="Rounded Rectangle 11"/>
+              <a:t>Automatic physical expiration on purgeAt without custom cron jobs.</a:t>
+            </a:r>
+          </a:p>
+        </p:txBody>
+      </p:sp>
+      <p:sp>
+        <p:nvSpPr>
+          <p:cNvPr id="8" name="Rounded Rectangle 7"/>
           <p:cNvSpPr/>
           <p:nvPr/>
         </p:nvSpPr>
         <p:spPr>
           <a:xfrm>
-            <a:off x="731520" y="4023360"/>
-            <a:ext cx="5242255" cy="987552"/>
+            <a:off x="731520" y="4114800"/>
+            <a:ext cx="5120640" cy="1005840"/>
           </a:xfrm>
           <a:prstGeom prst="roundRect">
             <a:avLst/>
@@ -9403,7 +7761,7 @@
           <a:solidFill>
             <a:srgbClr val="161512"/>
           </a:solidFill>
-          <a:ln w="12700">
+          <a:ln>
             <a:solidFill>
               <a:srgbClr val="2E2B26"/>
             </a:solidFill>
@@ -9424,36 +7782,10 @@
           </a:fontRef>
         </p:style>
         <p:txBody>
-          <a:bodyPr rtlCol="0" anchor="ctr"/>
-          <a:lstStyle/>
-          <a:p>
-            <a:pPr algn="ctr"/>
-          </a:p>
-        </p:txBody>
-      </p:sp>
-      <p:sp>
-        <p:nvSpPr>
-          <p:cNvPr id="13" name="TextBox 12"/>
-          <p:cNvSpPr txBox="1"/>
-          <p:nvPr/>
-        </p:nvSpPr>
-        <p:spPr>
-          <a:xfrm>
-            <a:off x="896112" y="4096512"/>
-            <a:ext cx="4876495" cy="841248"/>
-          </a:xfrm>
-          <a:prstGeom prst="rect">
-            <a:avLst/>
-          </a:prstGeom>
-          <a:noFill/>
-        </p:spPr>
-        <p:txBody>
-          <a:bodyPr wrap="square">
-            <a:spAutoFit/>
-          </a:bodyPr>
-          <a:lstStyle/>
-          <a:p>
-            <a:pPr>
+          <a:bodyPr rtlCol="0" anchor="ctr" wrap="square" lIns="182880" tIns="182880"/>
+          <a:lstStyle/>
+          <a:p>
+            <a:pPr algn="ctr">
               <a:defRPr sz="1400" b="1">
                 <a:solidFill>
                   <a:srgbClr val="F2C12E"/>
@@ -9470,7 +7802,7 @@
               <a:spcBef>
                 <a:spcPts val="200"/>
               </a:spcBef>
-              <a:defRPr sz="1150">
+              <a:defRPr sz="1100">
                 <a:solidFill>
                   <a:srgbClr val="B8B1A2"/>
                 </a:solidFill>
@@ -9478,21 +7810,21 @@
               </a:defRPr>
             </a:pPr>
             <a:r>
-              <a:t>{ownerId, spaceKey, slotKey} where status: 'active' guarantees one truth under concurrent writers.</a:t>
-            </a:r>
-          </a:p>
-        </p:txBody>
-      </p:sp>
-      <p:sp>
-        <p:nvSpPr>
-          <p:cNvPr id="14" name="Rounded Rectangle 13"/>
+              <a:t>{ownerId, spaceKey, slotKey} active guarantees one source of truth under concurrent writes.</a:t>
+            </a:r>
+          </a:p>
+        </p:txBody>
+      </p:sp>
+      <p:sp>
+        <p:nvSpPr>
+          <p:cNvPr id="9" name="Rounded Rectangle 8"/>
           <p:cNvSpPr/>
           <p:nvPr/>
         </p:nvSpPr>
         <p:spPr>
           <a:xfrm>
-            <a:off x="6217920" y="4023360"/>
-            <a:ext cx="5242255" cy="987552"/>
+            <a:off x="6126480" y="4114800"/>
+            <a:ext cx="5120640" cy="1005840"/>
           </a:xfrm>
           <a:prstGeom prst="roundRect">
             <a:avLst/>
@@ -9500,7 +7832,7 @@
           <a:solidFill>
             <a:srgbClr val="161512"/>
           </a:solidFill>
-          <a:ln w="12700">
+          <a:ln>
             <a:solidFill>
               <a:srgbClr val="2E2B26"/>
             </a:solidFill>
@@ -9521,36 +7853,10 @@
           </a:fontRef>
         </p:style>
         <p:txBody>
-          <a:bodyPr rtlCol="0" anchor="ctr"/>
-          <a:lstStyle/>
-          <a:p>
-            <a:pPr algn="ctr"/>
-          </a:p>
-        </p:txBody>
-      </p:sp>
-      <p:sp>
-        <p:nvSpPr>
-          <p:cNvPr id="15" name="TextBox 14"/>
-          <p:cNvSpPr txBox="1"/>
-          <p:nvPr/>
-        </p:nvSpPr>
-        <p:spPr>
-          <a:xfrm>
-            <a:off x="6382512" y="4096512"/>
-            <a:ext cx="4876495" cy="841248"/>
-          </a:xfrm>
-          <a:prstGeom prst="rect">
-            <a:avLst/>
-          </a:prstGeom>
-          <a:noFill/>
-        </p:spPr>
-        <p:txBody>
-          <a:bodyPr wrap="square">
-            <a:spAutoFit/>
-          </a:bodyPr>
-          <a:lstStyle/>
-          <a:p>
-            <a:pPr>
+          <a:bodyPr rtlCol="0" anchor="ctr" wrap="square" lIns="182880" tIns="182880"/>
+          <a:lstStyle/>
+          <a:p>
+            <a:pPr algn="ctr">
               <a:defRPr sz="1400" b="1">
                 <a:solidFill>
                   <a:srgbClr val="F2C12E"/>
@@ -9567,7 +7873,7 @@
               <a:spcBef>
                 <a:spcPts val="200"/>
               </a:spcBef>
-              <a:defRPr sz="1150">
+              <a:defRPr sz="1100">
                 <a:solidFill>
                   <a:srgbClr val="B8B1A2"/>
                 </a:solidFill>
@@ -9575,21 +7881,21 @@
               </a:defRPr>
             </a:pPr>
             <a:r>
-              <a:t>Atomic commits across memories and memory_events guarantee zero orphaned updates.</a:t>
-            </a:r>
-          </a:p>
-        </p:txBody>
-      </p:sp>
-      <p:sp>
-        <p:nvSpPr>
-          <p:cNvPr id="16" name="Rounded Rectangle 15"/>
+              <a:t>Atomic updates across memories and memory_events ensure zero corrupted state.</a:t>
+            </a:r>
+          </a:p>
+        </p:txBody>
+      </p:sp>
+      <p:sp>
+        <p:nvSpPr>
+          <p:cNvPr id="10" name="Rounded Rectangle 9"/>
           <p:cNvSpPr/>
           <p:nvPr/>
         </p:nvSpPr>
         <p:spPr>
           <a:xfrm>
-            <a:off x="731520" y="5120640"/>
-            <a:ext cx="5242255" cy="987552"/>
+            <a:off x="731520" y="5257800"/>
+            <a:ext cx="5120640" cy="1005840"/>
           </a:xfrm>
           <a:prstGeom prst="roundRect">
             <a:avLst/>
@@ -9597,7 +7903,7 @@
           <a:solidFill>
             <a:srgbClr val="161512"/>
           </a:solidFill>
-          <a:ln w="12700">
+          <a:ln>
             <a:solidFill>
               <a:srgbClr val="2E2B26"/>
             </a:solidFill>
@@ -9618,36 +7924,10 @@
           </a:fontRef>
         </p:style>
         <p:txBody>
-          <a:bodyPr rtlCol="0" anchor="ctr"/>
-          <a:lstStyle/>
-          <a:p>
-            <a:pPr algn="ctr"/>
-          </a:p>
-        </p:txBody>
-      </p:sp>
-      <p:sp>
-        <p:nvSpPr>
-          <p:cNvPr id="17" name="TextBox 16"/>
-          <p:cNvSpPr txBox="1"/>
-          <p:nvPr/>
-        </p:nvSpPr>
-        <p:spPr>
-          <a:xfrm>
-            <a:off x="896112" y="5193792"/>
-            <a:ext cx="4876495" cy="841248"/>
-          </a:xfrm>
-          <a:prstGeom prst="rect">
-            <a:avLst/>
-          </a:prstGeom>
-          <a:noFill/>
-        </p:spPr>
-        <p:txBody>
-          <a:bodyPr wrap="square">
-            <a:spAutoFit/>
-          </a:bodyPr>
-          <a:lstStyle/>
-          <a:p>
-            <a:pPr>
+          <a:bodyPr rtlCol="0" anchor="ctr" wrap="square" lIns="182880" tIns="182880"/>
+          <a:lstStyle/>
+          <a:p>
+            <a:pPr algn="ctr">
               <a:defRPr sz="1400" b="1">
                 <a:solidFill>
                   <a:srgbClr val="F2C12E"/>
@@ -9664,7 +7944,7 @@
               <a:spcBef>
                 <a:spcPts val="200"/>
               </a:spcBef>
-              <a:defRPr sz="1150">
+              <a:defRPr sz="1100">
                 <a:solidFill>
                   <a:srgbClr val="B8B1A2"/>
                 </a:solidFill>
@@ -9672,21 +7952,21 @@
               </a:defRPr>
             </a:pPr>
             <a:r>
-              <a:t>Watches memory_events to stream real-time Server-Sent Events (SSE) to browser write chips.</a:t>
-            </a:r>
-          </a:p>
-        </p:txBody>
-      </p:sp>
-      <p:sp>
-        <p:nvSpPr>
-          <p:cNvPr id="18" name="Rounded Rectangle 17"/>
+              <a:t>Watches memory_events to stream real-time SSE to browser write chips and Activity feed.</a:t>
+            </a:r>
+          </a:p>
+        </p:txBody>
+      </p:sp>
+      <p:sp>
+        <p:nvSpPr>
+          <p:cNvPr id="11" name="Rounded Rectangle 10"/>
           <p:cNvSpPr/>
           <p:nvPr/>
         </p:nvSpPr>
         <p:spPr>
           <a:xfrm>
-            <a:off x="6217920" y="5120640"/>
-            <a:ext cx="5242255" cy="987552"/>
+            <a:off x="6126480" y="5257800"/>
+            <a:ext cx="5120640" cy="1005840"/>
           </a:xfrm>
           <a:prstGeom prst="roundRect">
             <a:avLst/>
@@ -9694,7 +7974,7 @@
           <a:solidFill>
             <a:srgbClr val="161512"/>
           </a:solidFill>
-          <a:ln w="12700">
+          <a:ln>
             <a:solidFill>
               <a:srgbClr val="2E2B26"/>
             </a:solidFill>
@@ -9715,36 +7995,10 @@
           </a:fontRef>
         </p:style>
         <p:txBody>
-          <a:bodyPr rtlCol="0" anchor="ctr"/>
-          <a:lstStyle/>
-          <a:p>
-            <a:pPr algn="ctr"/>
-          </a:p>
-        </p:txBody>
-      </p:sp>
-      <p:sp>
-        <p:nvSpPr>
-          <p:cNvPr id="19" name="TextBox 18"/>
-          <p:cNvSpPr txBox="1"/>
-          <p:nvPr/>
-        </p:nvSpPr>
-        <p:spPr>
-          <a:xfrm>
-            <a:off x="6382512" y="5193792"/>
-            <a:ext cx="4876495" cy="841248"/>
-          </a:xfrm>
-          <a:prstGeom prst="rect">
-            <a:avLst/>
-          </a:prstGeom>
-          <a:noFill/>
-        </p:spPr>
-        <p:txBody>
-          <a:bodyPr wrap="square">
-            <a:spAutoFit/>
-          </a:bodyPr>
-          <a:lstStyle/>
-          <a:p>
-            <a:pPr>
+          <a:bodyPr rtlCol="0" anchor="ctr" wrap="square" lIns="182880" tIns="182880"/>
+          <a:lstStyle/>
+          <a:p>
+            <a:pPr algn="ctr">
               <a:defRPr sz="1400" b="1">
                 <a:solidFill>
                   <a:srgbClr val="F2C12E"/>
@@ -9761,7 +8015,7 @@
               <a:spcBef>
                 <a:spcPts val="200"/>
               </a:spcBef>
-              <a:defRPr sz="1150">
+              <a:defRPr sz="1100">
                 <a:solidFill>
                   <a:srgbClr val="B8B1A2"/>
                 </a:solidFill>
@@ -9769,7 +8023,7 @@
               </a:defRPr>
             </a:pPr>
             <a:r>
-              <a:t>Real-time analytics for memory type distribution, recall hit rates, and weekly corrections.</a:t>
+              <a:t>Real-time analytics for memory distribution, recall hit rates, and weekly corrections.</a:t>
             </a:r>
           </a:p>
         </p:txBody>

--- a/docs/deck/radahn.pptx
+++ b/docs/deck/radahn.pptx
@@ -15,8 +15,6 @@
     <p:sldId id="263" r:id="rId14"/>
     <p:sldId id="264" r:id="rId15"/>
     <p:sldId id="265" r:id="rId16"/>
-    <p:sldId id="266" r:id="rId17"/>
-    <p:sldId id="267" r:id="rId18"/>
   </p:sldIdLst>
   <p:sldSz cx="12191695" cy="6858000" type="screen4x3"/>
   <p:notesSz cx="6858000" cy="9144000"/>
@@ -3144,14 +3142,69 @@
       </p:sp>
       <p:sp>
         <p:nvSpPr>
-          <p:cNvPr id="3" name="TextBox 2"/>
+          <p:cNvPr id="3" name="Rounded Rectangle 2"/>
+          <p:cNvSpPr/>
+          <p:nvPr/>
+        </p:nvSpPr>
+        <p:spPr>
+          <a:xfrm>
+            <a:off x="731520" y="1280160"/>
+            <a:ext cx="548640" cy="548640"/>
+          </a:xfrm>
+          <a:prstGeom prst="roundRect">
+            <a:avLst/>
+          </a:prstGeom>
+          <a:solidFill>
+            <a:srgbClr val="161512"/>
+          </a:solidFill>
+          <a:ln>
+            <a:solidFill>
+              <a:srgbClr val="2A2722"/>
+            </a:solidFill>
+          </a:ln>
+        </p:spPr>
+        <p:style>
+          <a:lnRef idx="1">
+            <a:schemeClr val="accent1"/>
+          </a:lnRef>
+          <a:fillRef idx="3">
+            <a:schemeClr val="accent1"/>
+          </a:fillRef>
+          <a:effectRef idx="2">
+            <a:schemeClr val="accent1"/>
+          </a:effectRef>
+          <a:fontRef idx="minor">
+            <a:schemeClr val="lt1"/>
+          </a:fontRef>
+        </p:style>
+        <p:txBody>
+          <a:bodyPr rtlCol="0" anchor="ctr"/>
+          <a:lstStyle/>
+          <a:p>
+            <a:pPr algn="ctr">
+              <a:defRPr sz="2200" b="1">
+                <a:solidFill>
+                  <a:srgbClr val="F2C12E"/>
+                </a:solidFill>
+                <a:latin typeface="Georgia"/>
+              </a:defRPr>
+            </a:pPr>
+            <a:r>
+              <a:t>R</a:t>
+            </a:r>
+          </a:p>
+        </p:txBody>
+      </p:sp>
+      <p:sp>
+        <p:nvSpPr>
+          <p:cNvPr id="4" name="TextBox 3"/>
           <p:cNvSpPr txBox="1"/>
           <p:nvPr/>
         </p:nvSpPr>
         <p:spPr>
           <a:xfrm>
-            <a:off x="731520" y="1371600"/>
-            <a:ext cx="10728655" cy="2743200"/>
+            <a:off x="731520" y="2011680"/>
+            <a:ext cx="5486400" cy="4114800"/>
           </a:xfrm>
           <a:prstGeom prst="rect">
             <a:avLst/>
@@ -3159,144 +3212,527 @@
           <a:noFill/>
         </p:spPr>
         <p:txBody>
-          <a:bodyPr wrap="square">
+          <a:bodyPr wrap="square" lIns="0" tIns="0">
             <a:spAutoFit/>
           </a:bodyPr>
           <a:lstStyle/>
           <a:p>
             <a:pPr>
-              <a:defRPr sz="1200" b="1">
-                <a:solidFill>
-                  <a:srgbClr val="F2C12E"/>
-                </a:solidFill>
-                <a:latin typeface="Consolas"/>
+              <a:defRPr sz="3800" b="1">
+                <a:solidFill>
+                  <a:srgbClr val="EDE6D6"/>
+                </a:solidFill>
+                <a:latin typeface="Georgia"/>
               </a:defRPr>
             </a:pPr>
             <a:r>
-              <a:t>UNCHARTED 2026 · MONGODB STUDENT HACKATHON · TRACK 1: AGENTIC MEMORY</a:t>
+              <a:t>Radahn — memory you can see</a:t>
             </a:r>
           </a:p>
           <a:p>
             <a:pPr>
               <a:spcBef>
-                <a:spcPts val="1000"/>
+                <a:spcPts val="1200"/>
               </a:spcBef>
-              <a:defRPr sz="5600" b="1">
-                <a:solidFill>
-                  <a:srgbClr val="EDE6D6"/>
-                </a:solidFill>
-                <a:latin typeface="Georgia"/>
+              <a:defRPr sz="1800">
+                <a:solidFill>
+                  <a:srgbClr val="B8B1A2"/>
+                </a:solidFill>
+                <a:latin typeface="Segoe UI"/>
               </a:defRPr>
             </a:pPr>
             <a:r>
-              <a:t>Radahn</a:t>
+              <a:t>An AI agent whose memory you can inspect, steer and trust.</a:t>
             </a:r>
           </a:p>
           <a:p>
             <a:pPr>
               <a:spcBef>
-                <a:spcPts val="800"/>
+                <a:spcPts val="1800"/>
               </a:spcBef>
-              <a:defRPr sz="2200" i="1">
-                <a:solidFill>
-                  <a:srgbClr val="B8B1A2"/>
-                </a:solidFill>
-                <a:latin typeface="Georgia"/>
+              <a:defRPr sz="1400" b="1">
+                <a:solidFill>
+                  <a:srgbClr val="2E9E6B"/>
+                </a:solidFill>
+                <a:latin typeface="Consolas"/>
               </a:defRPr>
             </a:pPr>
             <a:r>
-              <a:t>A personal AI agent whose memory you can see, steer, and trust.</a:t>
-            </a:r>
-          </a:p>
-        </p:txBody>
-      </p:sp>
-      <p:sp>
-        <p:nvSpPr>
-          <p:cNvPr id="4" name="Rounded Rectangle 3"/>
-          <p:cNvSpPr/>
-          <p:nvPr/>
-        </p:nvSpPr>
-        <p:spPr>
-          <a:xfrm>
-            <a:off x="731520" y="4114800"/>
-            <a:ext cx="10728655" cy="2011680"/>
-          </a:xfrm>
-          <a:prstGeom prst="roundRect">
-            <a:avLst/>
-          </a:prstGeom>
-          <a:solidFill>
-            <a:srgbClr val="161512"/>
-          </a:solidFill>
-          <a:ln>
-            <a:solidFill>
-              <a:srgbClr val="2E2B26"/>
-            </a:solidFill>
-          </a:ln>
-        </p:spPr>
-        <p:style>
-          <a:lnRef idx="1">
-            <a:schemeClr val="accent1"/>
-          </a:lnRef>
-          <a:fillRef idx="3">
-            <a:schemeClr val="accent1"/>
-          </a:fillRef>
-          <a:effectRef idx="2">
-            <a:schemeClr val="accent1"/>
-          </a:effectRef>
-          <a:fontRef idx="minor">
-            <a:schemeClr val="lt1"/>
-          </a:fontRef>
-        </p:style>
-        <p:txBody>
-          <a:bodyPr rtlCol="0" anchor="ctr" wrap="square" lIns="365760" tIns="365760"/>
-          <a:lstStyle/>
-          <a:p>
-            <a:pPr algn="ctr">
-              <a:defRPr sz="1300">
-                <a:solidFill>
-                  <a:srgbClr val="4FB37E"/>
-                </a:solidFill>
-                <a:latin typeface="Consolas"/>
-              </a:defRPr>
-            </a:pPr>
-            <a:r>
-              <a:t>LIVE DEPLOYMENT: https://radahn-ai.vercel.app  (Zero-auth Guest mode ready for testing)</a:t>
+              <a:t>radahn-ai.vercel.app  (Try it as guest)</a:t>
             </a:r>
           </a:p>
           <a:p>
             <a:pPr>
               <a:spcBef>
-                <a:spcPts val="800"/>
+                <a:spcPts val="1600"/>
               </a:spcBef>
-              <a:defRPr sz="1300">
-                <a:solidFill>
-                  <a:srgbClr val="B8B1A2"/>
+              <a:defRPr sz="1100">
+                <a:solidFill>
+                  <a:srgbClr val="8A8477"/>
                 </a:solidFill>
                 <a:latin typeface="Consolas"/>
               </a:defRPr>
             </a:pPr>
             <a:r>
-              <a:t>PUBLIC REPOSITORY: https://github.com/vaibhavcodesx/radahn</a:t>
-            </a:r>
-          </a:p>
-          <a:p>
-            <a:pPr>
-              <a:spcBef>
-                <a:spcPts val="800"/>
-              </a:spcBef>
-              <a:defRPr sz="1300">
-                <a:solidFill>
-                  <a:srgbClr val="8A8477"/>
-                </a:solidFill>
-                <a:latin typeface="Consolas"/>
-              </a:defRPr>
-            </a:pPr>
-            <a:r>
-              <a:t>TECH STACK: Next.js 16 + Tailwind v4 + MongoDB Atlas + Gemini 3.5/3.6 + Groq</a:t>
-            </a:r>
-          </a:p>
-        </p:txBody>
-      </p:sp>
+              <a:t>Submitted to UNCHARTED 2026 · Agentic Memory track</a:t>
+            </a:r>
+          </a:p>
+        </p:txBody>
+      </p:sp>
+      <p:sp>
+        <p:nvSpPr>
+          <p:cNvPr id="5" name="Rectangle 4"/>
+          <p:cNvSpPr/>
+          <p:nvPr/>
+        </p:nvSpPr>
+        <p:spPr>
+          <a:xfrm>
+            <a:off x="731520" y="3931920"/>
+            <a:ext cx="100584" cy="100584"/>
+          </a:xfrm>
+          <a:prstGeom prst="rect">
+            <a:avLst/>
+          </a:prstGeom>
+          <a:solidFill>
+            <a:srgbClr val="E7DCC3"/>
+          </a:solidFill>
+          <a:ln>
+            <a:noFill/>
+          </a:ln>
+        </p:spPr>
+        <p:style>
+          <a:lnRef idx="1">
+            <a:schemeClr val="accent1"/>
+          </a:lnRef>
+          <a:fillRef idx="3">
+            <a:schemeClr val="accent1"/>
+          </a:fillRef>
+          <a:effectRef idx="2">
+            <a:schemeClr val="accent1"/>
+          </a:effectRef>
+          <a:fontRef idx="minor">
+            <a:schemeClr val="lt1"/>
+          </a:fontRef>
+        </p:style>
+        <p:txBody>
+          <a:bodyPr rtlCol="0" anchor="ctr"/>
+          <a:lstStyle/>
+          <a:p>
+            <a:pPr algn="ctr"/>
+          </a:p>
+        </p:txBody>
+      </p:sp>
+      <p:sp>
+        <p:nvSpPr>
+          <p:cNvPr id="6" name="Rectangle 5"/>
+          <p:cNvSpPr/>
+          <p:nvPr/>
+        </p:nvSpPr>
+        <p:spPr>
+          <a:xfrm>
+            <a:off x="877824" y="3931920"/>
+            <a:ext cx="100584" cy="100584"/>
+          </a:xfrm>
+          <a:prstGeom prst="rect">
+            <a:avLst/>
+          </a:prstGeom>
+          <a:solidFill>
+            <a:srgbClr val="F2C12E"/>
+          </a:solidFill>
+          <a:ln>
+            <a:noFill/>
+          </a:ln>
+        </p:spPr>
+        <p:style>
+          <a:lnRef idx="1">
+            <a:schemeClr val="accent1"/>
+          </a:lnRef>
+          <a:fillRef idx="3">
+            <a:schemeClr val="accent1"/>
+          </a:fillRef>
+          <a:effectRef idx="2">
+            <a:schemeClr val="accent1"/>
+          </a:effectRef>
+          <a:fontRef idx="minor">
+            <a:schemeClr val="lt1"/>
+          </a:fontRef>
+        </p:style>
+        <p:txBody>
+          <a:bodyPr rtlCol="0" anchor="ctr"/>
+          <a:lstStyle/>
+          <a:p>
+            <a:pPr algn="ctr"/>
+          </a:p>
+        </p:txBody>
+      </p:sp>
+      <p:sp>
+        <p:nvSpPr>
+          <p:cNvPr id="7" name="Rectangle 6"/>
+          <p:cNvSpPr/>
+          <p:nvPr/>
+        </p:nvSpPr>
+        <p:spPr>
+          <a:xfrm>
+            <a:off x="1024128" y="3931920"/>
+            <a:ext cx="100584" cy="100584"/>
+          </a:xfrm>
+          <a:prstGeom prst="rect">
+            <a:avLst/>
+          </a:prstGeom>
+          <a:solidFill>
+            <a:srgbClr val="3A63D8"/>
+          </a:solidFill>
+          <a:ln>
+            <a:noFill/>
+          </a:ln>
+        </p:spPr>
+        <p:style>
+          <a:lnRef idx="1">
+            <a:schemeClr val="accent1"/>
+          </a:lnRef>
+          <a:fillRef idx="3">
+            <a:schemeClr val="accent1"/>
+          </a:fillRef>
+          <a:effectRef idx="2">
+            <a:schemeClr val="accent1"/>
+          </a:effectRef>
+          <a:fontRef idx="minor">
+            <a:schemeClr val="lt1"/>
+          </a:fontRef>
+        </p:style>
+        <p:txBody>
+          <a:bodyPr rtlCol="0" anchor="ctr"/>
+          <a:lstStyle/>
+          <a:p>
+            <a:pPr algn="ctr"/>
+          </a:p>
+        </p:txBody>
+      </p:sp>
+      <p:sp>
+        <p:nvSpPr>
+          <p:cNvPr id="8" name="Rectangle 7"/>
+          <p:cNvSpPr/>
+          <p:nvPr/>
+        </p:nvSpPr>
+        <p:spPr>
+          <a:xfrm>
+            <a:off x="1170432" y="3931920"/>
+            <a:ext cx="100584" cy="100584"/>
+          </a:xfrm>
+          <a:prstGeom prst="rect">
+            <a:avLst/>
+          </a:prstGeom>
+          <a:solidFill>
+            <a:srgbClr val="F08A24"/>
+          </a:solidFill>
+          <a:ln>
+            <a:noFill/>
+          </a:ln>
+        </p:spPr>
+        <p:style>
+          <a:lnRef idx="1">
+            <a:schemeClr val="accent1"/>
+          </a:lnRef>
+          <a:fillRef idx="3">
+            <a:schemeClr val="accent1"/>
+          </a:fillRef>
+          <a:effectRef idx="2">
+            <a:schemeClr val="accent1"/>
+          </a:effectRef>
+          <a:fontRef idx="minor">
+            <a:schemeClr val="lt1"/>
+          </a:fontRef>
+        </p:style>
+        <p:txBody>
+          <a:bodyPr rtlCol="0" anchor="ctr"/>
+          <a:lstStyle/>
+          <a:p>
+            <a:pPr algn="ctr"/>
+          </a:p>
+        </p:txBody>
+      </p:sp>
+      <p:sp>
+        <p:nvSpPr>
+          <p:cNvPr id="9" name="Rectangle 8"/>
+          <p:cNvSpPr/>
+          <p:nvPr/>
+        </p:nvSpPr>
+        <p:spPr>
+          <a:xfrm>
+            <a:off x="1316736" y="3931920"/>
+            <a:ext cx="100584" cy="100584"/>
+          </a:xfrm>
+          <a:prstGeom prst="rect">
+            <a:avLst/>
+          </a:prstGeom>
+          <a:solidFill>
+            <a:srgbClr val="D8432F"/>
+          </a:solidFill>
+          <a:ln>
+            <a:noFill/>
+          </a:ln>
+        </p:spPr>
+        <p:style>
+          <a:lnRef idx="1">
+            <a:schemeClr val="accent1"/>
+          </a:lnRef>
+          <a:fillRef idx="3">
+            <a:schemeClr val="accent1"/>
+          </a:fillRef>
+          <a:effectRef idx="2">
+            <a:schemeClr val="accent1"/>
+          </a:effectRef>
+          <a:fontRef idx="minor">
+            <a:schemeClr val="lt1"/>
+          </a:fontRef>
+        </p:style>
+        <p:txBody>
+          <a:bodyPr rtlCol="0" anchor="ctr"/>
+          <a:lstStyle/>
+          <a:p>
+            <a:pPr algn="ctr"/>
+          </a:p>
+        </p:txBody>
+      </p:sp>
+      <p:sp>
+        <p:nvSpPr>
+          <p:cNvPr id="10" name="Rectangle 9"/>
+          <p:cNvSpPr/>
+          <p:nvPr/>
+        </p:nvSpPr>
+        <p:spPr>
+          <a:xfrm>
+            <a:off x="1463040" y="3931920"/>
+            <a:ext cx="100584" cy="100584"/>
+          </a:xfrm>
+          <a:prstGeom prst="rect">
+            <a:avLst/>
+          </a:prstGeom>
+          <a:solidFill>
+            <a:srgbClr val="B23A7A"/>
+          </a:solidFill>
+          <a:ln>
+            <a:noFill/>
+          </a:ln>
+        </p:spPr>
+        <p:style>
+          <a:lnRef idx="1">
+            <a:schemeClr val="accent1"/>
+          </a:lnRef>
+          <a:fillRef idx="3">
+            <a:schemeClr val="accent1"/>
+          </a:fillRef>
+          <a:effectRef idx="2">
+            <a:schemeClr val="accent1"/>
+          </a:effectRef>
+          <a:fontRef idx="minor">
+            <a:schemeClr val="lt1"/>
+          </a:fontRef>
+        </p:style>
+        <p:txBody>
+          <a:bodyPr rtlCol="0" anchor="ctr"/>
+          <a:lstStyle/>
+          <a:p>
+            <a:pPr algn="ctr"/>
+          </a:p>
+        </p:txBody>
+      </p:sp>
+      <p:sp>
+        <p:nvSpPr>
+          <p:cNvPr id="11" name="Rectangle 10"/>
+          <p:cNvSpPr/>
+          <p:nvPr/>
+        </p:nvSpPr>
+        <p:spPr>
+          <a:xfrm>
+            <a:off x="1609344" y="3931920"/>
+            <a:ext cx="100584" cy="100584"/>
+          </a:xfrm>
+          <a:prstGeom prst="rect">
+            <a:avLst/>
+          </a:prstGeom>
+          <a:solidFill>
+            <a:srgbClr val="2E9E6B"/>
+          </a:solidFill>
+          <a:ln>
+            <a:noFill/>
+          </a:ln>
+        </p:spPr>
+        <p:style>
+          <a:lnRef idx="1">
+            <a:schemeClr val="accent1"/>
+          </a:lnRef>
+          <a:fillRef idx="3">
+            <a:schemeClr val="accent1"/>
+          </a:fillRef>
+          <a:effectRef idx="2">
+            <a:schemeClr val="accent1"/>
+          </a:effectRef>
+          <a:fontRef idx="minor">
+            <a:schemeClr val="lt1"/>
+          </a:fontRef>
+        </p:style>
+        <p:txBody>
+          <a:bodyPr rtlCol="0" anchor="ctr"/>
+          <a:lstStyle/>
+          <a:p>
+            <a:pPr algn="ctr"/>
+          </a:p>
+        </p:txBody>
+      </p:sp>
+      <p:sp>
+        <p:nvSpPr>
+          <p:cNvPr id="12" name="Rectangle 11"/>
+          <p:cNvSpPr/>
+          <p:nvPr/>
+        </p:nvSpPr>
+        <p:spPr>
+          <a:xfrm>
+            <a:off x="1755648" y="3931920"/>
+            <a:ext cx="100584" cy="100584"/>
+          </a:xfrm>
+          <a:prstGeom prst="rect">
+            <a:avLst/>
+          </a:prstGeom>
+          <a:solidFill>
+            <a:srgbClr val="74B8E0"/>
+          </a:solidFill>
+          <a:ln>
+            <a:noFill/>
+          </a:ln>
+        </p:spPr>
+        <p:style>
+          <a:lnRef idx="1">
+            <a:schemeClr val="accent1"/>
+          </a:lnRef>
+          <a:fillRef idx="3">
+            <a:schemeClr val="accent1"/>
+          </a:fillRef>
+          <a:effectRef idx="2">
+            <a:schemeClr val="accent1"/>
+          </a:effectRef>
+          <a:fontRef idx="minor">
+            <a:schemeClr val="lt1"/>
+          </a:fontRef>
+        </p:style>
+        <p:txBody>
+          <a:bodyPr rtlCol="0" anchor="ctr"/>
+          <a:lstStyle/>
+          <a:p>
+            <a:pPr algn="ctr"/>
+          </a:p>
+        </p:txBody>
+      </p:sp>
+      <p:sp>
+        <p:nvSpPr>
+          <p:cNvPr id="13" name="Rectangle 12"/>
+          <p:cNvSpPr/>
+          <p:nvPr/>
+        </p:nvSpPr>
+        <p:spPr>
+          <a:xfrm>
+            <a:off x="1901952" y="3931920"/>
+            <a:ext cx="100584" cy="100584"/>
+          </a:xfrm>
+          <a:prstGeom prst="rect">
+            <a:avLst/>
+          </a:prstGeom>
+          <a:solidFill>
+            <a:srgbClr val="6B4BC2"/>
+          </a:solidFill>
+          <a:ln>
+            <a:noFill/>
+          </a:ln>
+        </p:spPr>
+        <p:style>
+          <a:lnRef idx="1">
+            <a:schemeClr val="accent1"/>
+          </a:lnRef>
+          <a:fillRef idx="3">
+            <a:schemeClr val="accent1"/>
+          </a:fillRef>
+          <a:effectRef idx="2">
+            <a:schemeClr val="accent1"/>
+          </a:effectRef>
+          <a:fontRef idx="minor">
+            <a:schemeClr val="lt1"/>
+          </a:fontRef>
+        </p:style>
+        <p:txBody>
+          <a:bodyPr rtlCol="0" anchor="ctr"/>
+          <a:lstStyle/>
+          <a:p>
+            <a:pPr algn="ctr"/>
+          </a:p>
+        </p:txBody>
+      </p:sp>
+      <p:sp>
+        <p:nvSpPr>
+          <p:cNvPr id="14" name="Rectangle 13"/>
+          <p:cNvSpPr/>
+          <p:nvPr/>
+        </p:nvSpPr>
+        <p:spPr>
+          <a:xfrm>
+            <a:off x="2048256" y="3931920"/>
+            <a:ext cx="100584" cy="100584"/>
+          </a:xfrm>
+          <a:prstGeom prst="rect">
+            <a:avLst/>
+          </a:prstGeom>
+          <a:solidFill>
+            <a:srgbClr val="A7A23C"/>
+          </a:solidFill>
+          <a:ln>
+            <a:noFill/>
+          </a:ln>
+        </p:spPr>
+        <p:style>
+          <a:lnRef idx="1">
+            <a:schemeClr val="accent1"/>
+          </a:lnRef>
+          <a:fillRef idx="3">
+            <a:schemeClr val="accent1"/>
+          </a:fillRef>
+          <a:effectRef idx="2">
+            <a:schemeClr val="accent1"/>
+          </a:effectRef>
+          <a:fontRef idx="minor">
+            <a:schemeClr val="lt1"/>
+          </a:fontRef>
+        </p:style>
+        <p:txBody>
+          <a:bodyPr rtlCol="0" anchor="ctr"/>
+          <a:lstStyle/>
+          <a:p>
+            <a:pPr algn="ctr"/>
+          </a:p>
+        </p:txBody>
+      </p:sp>
+      <p:pic>
+        <p:nvPicPr>
+          <p:cNvPr id="15" name="Picture 14" descr="image.png"/>
+          <p:cNvPicPr>
+            <a:picLocks noChangeAspect="1"/>
+          </p:cNvPicPr>
+          <p:nvPr/>
+        </p:nvPicPr>
+        <p:blipFill>
+          <a:blip r:embed="rId2"/>
+          <a:stretch>
+            <a:fillRect/>
+          </a:stretch>
+        </p:blipFill>
+        <p:spPr>
+          <a:xfrm>
+            <a:off x="6217920" y="1280160"/>
+            <a:ext cx="5212080" cy="2931795"/>
+          </a:xfrm>
+          <a:prstGeom prst="rect">
+            <a:avLst/>
+          </a:prstGeom>
+        </p:spPr>
+      </p:pic>
     </p:spTree>
   </p:cSld>
   <p:clrMapOvr>
@@ -3366,8 +3802,8 @@
         </p:nvSpPr>
         <p:spPr>
           <a:xfrm>
-            <a:off x="731520" y="457200"/>
-            <a:ext cx="10728655" cy="1097280"/>
+            <a:off x="731520" y="411480"/>
+            <a:ext cx="10728655" cy="1188720"/>
           </a:xfrm>
           <a:prstGeom prst="rect">
             <a:avLst/>
@@ -3383,21 +3819,21 @@
             <a:pPr>
               <a:defRPr sz="1100" b="1">
                 <a:solidFill>
-                  <a:srgbClr val="F2C12E"/>
+                  <a:srgbClr val="8A8477"/>
                 </a:solidFill>
                 <a:latin typeface="Consolas"/>
               </a:defRPr>
             </a:pPr>
             <a:r>
-              <a:t>09 / BENCHMARKS</a:t>
+              <a:t>10</a:t>
             </a:r>
           </a:p>
           <a:p>
             <a:pPr>
               <a:spcBef>
-                <a:spcPts val="400"/>
+                <a:spcPts val="300"/>
               </a:spcBef>
-              <a:defRPr sz="2600" b="1">
+              <a:defRPr sz="2800" b="1">
                 <a:solidFill>
                   <a:srgbClr val="EDE6D6"/>
                 </a:solidFill>
@@ -3405,1094 +3841,7 @@
               </a:defRPr>
             </a:pPr>
             <a:r>
-              <a:t>Hosted production verification on MongoDB Atlas M0 + Gemini / Groq.</a:t>
-            </a:r>
-          </a:p>
-        </p:txBody>
-      </p:sp>
-      <p:sp>
-        <p:nvSpPr>
-          <p:cNvPr id="4" name="Rounded Rectangle 3"/>
-          <p:cNvSpPr/>
-          <p:nvPr/>
-        </p:nvSpPr>
-        <p:spPr>
-          <a:xfrm>
-            <a:off x="731520" y="2011680"/>
-            <a:ext cx="3429000" cy="1828800"/>
-          </a:xfrm>
-          <a:prstGeom prst="roundRect">
-            <a:avLst/>
-          </a:prstGeom>
-          <a:solidFill>
-            <a:srgbClr val="161512"/>
-          </a:solidFill>
-          <a:ln>
-            <a:solidFill>
-              <a:srgbClr val="2E2B26"/>
-            </a:solidFill>
-          </a:ln>
-        </p:spPr>
-        <p:style>
-          <a:lnRef idx="1">
-            <a:schemeClr val="accent1"/>
-          </a:lnRef>
-          <a:fillRef idx="3">
-            <a:schemeClr val="accent1"/>
-          </a:fillRef>
-          <a:effectRef idx="2">
-            <a:schemeClr val="accent1"/>
-          </a:effectRef>
-          <a:fontRef idx="minor">
-            <a:schemeClr val="lt1"/>
-          </a:fontRef>
-        </p:style>
-        <p:txBody>
-          <a:bodyPr rtlCol="0" anchor="ctr" wrap="square" lIns="228600" tIns="228600"/>
-          <a:lstStyle/>
-          <a:p>
-            <a:pPr algn="ctr">
-              <a:defRPr sz="2800" b="1">
-                <a:solidFill>
-                  <a:srgbClr val="4FB37E"/>
-                </a:solidFill>
-                <a:latin typeface="Georgia"/>
-              </a:defRPr>
-            </a:pPr>
-            <a:r>
-              <a:t>20 / 20</a:t>
-            </a:r>
-          </a:p>
-          <a:p>
-            <a:pPr>
-              <a:spcBef>
-                <a:spcPts val="400"/>
-              </a:spcBef>
-              <a:defRPr sz="1300" b="1">
-                <a:solidFill>
-                  <a:srgbClr val="EDE6D6"/>
-                </a:solidFill>
-                <a:latin typeface="Segoe UI"/>
-              </a:defRPr>
-            </a:pPr>
-            <a:r>
-              <a:t>Live Test Cases Passed</a:t>
-            </a:r>
-          </a:p>
-          <a:p>
-            <a:pPr>
-              <a:spcBef>
-                <a:spcPts val="200"/>
-              </a:spcBef>
-              <a:defRPr sz="1100">
-                <a:solidFill>
-                  <a:srgbClr val="8A8477"/>
-                </a:solidFill>
-                <a:latin typeface="Segoe UI"/>
-              </a:defRPr>
-            </a:pPr>
-            <a:r>
-              <a:t>100% pass across write-add, correction chains, cold-index recall, explicit forget.</a:t>
-            </a:r>
-          </a:p>
-        </p:txBody>
-      </p:sp>
-      <p:sp>
-        <p:nvSpPr>
-          <p:cNvPr id="5" name="Rounded Rectangle 4"/>
-          <p:cNvSpPr/>
-          <p:nvPr/>
-        </p:nvSpPr>
-        <p:spPr>
-          <a:xfrm>
-            <a:off x="4343400" y="2011680"/>
-            <a:ext cx="3429000" cy="1828800"/>
-          </a:xfrm>
-          <a:prstGeom prst="roundRect">
-            <a:avLst/>
-          </a:prstGeom>
-          <a:solidFill>
-            <a:srgbClr val="161512"/>
-          </a:solidFill>
-          <a:ln>
-            <a:solidFill>
-              <a:srgbClr val="2E2B26"/>
-            </a:solidFill>
-          </a:ln>
-        </p:spPr>
-        <p:style>
-          <a:lnRef idx="1">
-            <a:schemeClr val="accent1"/>
-          </a:lnRef>
-          <a:fillRef idx="3">
-            <a:schemeClr val="accent1"/>
-          </a:fillRef>
-          <a:effectRef idx="2">
-            <a:schemeClr val="accent1"/>
-          </a:effectRef>
-          <a:fontRef idx="minor">
-            <a:schemeClr val="lt1"/>
-          </a:fontRef>
-        </p:style>
-        <p:txBody>
-          <a:bodyPr rtlCol="0" anchor="ctr" wrap="square" lIns="228600" tIns="228600"/>
-          <a:lstStyle/>
-          <a:p>
-            <a:pPr algn="ctr">
-              <a:defRPr sz="2800" b="1">
-                <a:solidFill>
-                  <a:srgbClr val="4FB37E"/>
-                </a:solidFill>
-                <a:latin typeface="Georgia"/>
-              </a:defRPr>
-            </a:pPr>
-            <a:r>
-              <a:t>31 / 31</a:t>
-            </a:r>
-          </a:p>
-          <a:p>
-            <a:pPr>
-              <a:spcBef>
-                <a:spcPts val="400"/>
-              </a:spcBef>
-              <a:defRPr sz="1300" b="1">
-                <a:solidFill>
-                  <a:srgbClr val="EDE6D6"/>
-                </a:solidFill>
-                <a:latin typeface="Segoe UI"/>
-              </a:defRPr>
-            </a:pPr>
-            <a:r>
-              <a:t>Deterministic Checks</a:t>
-            </a:r>
-          </a:p>
-          <a:p>
-            <a:pPr>
-              <a:spcBef>
-                <a:spcPts val="200"/>
-              </a:spcBef>
-              <a:defRPr sz="1100">
-                <a:solidFill>
-                  <a:srgbClr val="8A8477"/>
-                </a:solidFill>
-                <a:latin typeface="Segoe UI"/>
-              </a:defRPr>
-            </a:pPr>
-            <a:r>
-              <a:t>100% pass for privacy gate, prompt injection resistance, reconcile ops, TTL grace.</a:t>
-            </a:r>
-          </a:p>
-        </p:txBody>
-      </p:sp>
-      <p:sp>
-        <p:nvSpPr>
-          <p:cNvPr id="6" name="Rounded Rectangle 5"/>
-          <p:cNvSpPr/>
-          <p:nvPr/>
-        </p:nvSpPr>
-        <p:spPr>
-          <a:xfrm>
-            <a:off x="7955280" y="2011680"/>
-            <a:ext cx="3429000" cy="1828800"/>
-          </a:xfrm>
-          <a:prstGeom prst="roundRect">
-            <a:avLst/>
-          </a:prstGeom>
-          <a:solidFill>
-            <a:srgbClr val="161512"/>
-          </a:solidFill>
-          <a:ln>
-            <a:solidFill>
-              <a:srgbClr val="2E2B26"/>
-            </a:solidFill>
-          </a:ln>
-        </p:spPr>
-        <p:style>
-          <a:lnRef idx="1">
-            <a:schemeClr val="accent1"/>
-          </a:lnRef>
-          <a:fillRef idx="3">
-            <a:schemeClr val="accent1"/>
-          </a:fillRef>
-          <a:effectRef idx="2">
-            <a:schemeClr val="accent1"/>
-          </a:effectRef>
-          <a:fontRef idx="minor">
-            <a:schemeClr val="lt1"/>
-          </a:fontRef>
-        </p:style>
-        <p:txBody>
-          <a:bodyPr rtlCol="0" anchor="ctr" wrap="square" lIns="228600" tIns="228600"/>
-          <a:lstStyle/>
-          <a:p>
-            <a:pPr algn="ctr">
-              <a:defRPr sz="2800" b="1">
-                <a:solidFill>
-                  <a:srgbClr val="4FB37E"/>
-                </a:solidFill>
-                <a:latin typeface="Georgia"/>
-              </a:defRPr>
-            </a:pPr>
-            <a:r>
-              <a:t>0</a:t>
-            </a:r>
-          </a:p>
-          <a:p>
-            <a:pPr>
-              <a:spcBef>
-                <a:spcPts val="400"/>
-              </a:spcBef>
-              <a:defRPr sz="1300" b="1">
-                <a:solidFill>
-                  <a:srgbClr val="EDE6D6"/>
-                </a:solidFill>
-                <a:latin typeface="Segoe UI"/>
-              </a:defRPr>
-            </a:pPr>
-            <a:r>
-              <a:t>Secrets Stored</a:t>
-            </a:r>
-          </a:p>
-          <a:p>
-            <a:pPr>
-              <a:spcBef>
-                <a:spcPts val="200"/>
-              </a:spcBef>
-              <a:defRPr sz="1100">
-                <a:solidFill>
-                  <a:srgbClr val="8A8477"/>
-                </a:solidFill>
-                <a:latin typeface="Segoe UI"/>
-              </a:defRPr>
-            </a:pPr>
-            <a:r>
-              <a:t>100% interception of simulated API keys, credentials, tokens, and sensitive cards.</a:t>
-            </a:r>
-          </a:p>
-        </p:txBody>
-      </p:sp>
-      <p:sp>
-        <p:nvSpPr>
-          <p:cNvPr id="7" name="Rounded Rectangle 6"/>
-          <p:cNvSpPr/>
-          <p:nvPr/>
-        </p:nvSpPr>
-        <p:spPr>
-          <a:xfrm>
-            <a:off x="731520" y="4114800"/>
-            <a:ext cx="3429000" cy="1828800"/>
-          </a:xfrm>
-          <a:prstGeom prst="roundRect">
-            <a:avLst/>
-          </a:prstGeom>
-          <a:solidFill>
-            <a:srgbClr val="161512"/>
-          </a:solidFill>
-          <a:ln>
-            <a:solidFill>
-              <a:srgbClr val="2E2B26"/>
-            </a:solidFill>
-          </a:ln>
-        </p:spPr>
-        <p:style>
-          <a:lnRef idx="1">
-            <a:schemeClr val="accent1"/>
-          </a:lnRef>
-          <a:fillRef idx="3">
-            <a:schemeClr val="accent1"/>
-          </a:fillRef>
-          <a:effectRef idx="2">
-            <a:schemeClr val="accent1"/>
-          </a:effectRef>
-          <a:fontRef idx="minor">
-            <a:schemeClr val="lt1"/>
-          </a:fontRef>
-        </p:style>
-        <p:txBody>
-          <a:bodyPr rtlCol="0" anchor="ctr" wrap="square" lIns="228600" tIns="228600"/>
-          <a:lstStyle/>
-          <a:p>
-            <a:pPr algn="ctr">
-              <a:defRPr sz="2800" b="1">
-                <a:solidFill>
-                  <a:srgbClr val="4FB37E"/>
-                </a:solidFill>
-                <a:latin typeface="Georgia"/>
-              </a:defRPr>
-            </a:pPr>
-            <a:r>
-              <a:t>1.0</a:t>
-            </a:r>
-          </a:p>
-          <a:p>
-            <a:pPr>
-              <a:spcBef>
-                <a:spcPts val="400"/>
-              </a:spcBef>
-              <a:defRPr sz="1300" b="1">
-                <a:solidFill>
-                  <a:srgbClr val="EDE6D6"/>
-                </a:solidFill>
-                <a:latin typeface="Segoe UI"/>
-              </a:defRPr>
-            </a:pPr>
-            <a:r>
-              <a:t>Recall@5 Precision</a:t>
-            </a:r>
-          </a:p>
-          <a:p>
-            <a:pPr>
-              <a:spcBef>
-                <a:spcPts val="200"/>
-              </a:spcBef>
-              <a:defRPr sz="1100">
-                <a:solidFill>
-                  <a:srgbClr val="8A8477"/>
-                </a:solidFill>
-                <a:latin typeface="Segoe UI"/>
-              </a:defRPr>
-            </a:pPr>
-            <a:r>
-              <a:t>Top 5 retrieved candidates captured 100% of ground-truth test units.</a:t>
-            </a:r>
-          </a:p>
-        </p:txBody>
-      </p:sp>
-      <p:sp>
-        <p:nvSpPr>
-          <p:cNvPr id="8" name="Rounded Rectangle 7"/>
-          <p:cNvSpPr/>
-          <p:nvPr/>
-        </p:nvSpPr>
-        <p:spPr>
-          <a:xfrm>
-            <a:off x="4343400" y="4114800"/>
-            <a:ext cx="3429000" cy="1828800"/>
-          </a:xfrm>
-          <a:prstGeom prst="roundRect">
-            <a:avLst/>
-          </a:prstGeom>
-          <a:solidFill>
-            <a:srgbClr val="161512"/>
-          </a:solidFill>
-          <a:ln>
-            <a:solidFill>
-              <a:srgbClr val="2E2B26"/>
-            </a:solidFill>
-          </a:ln>
-        </p:spPr>
-        <p:style>
-          <a:lnRef idx="1">
-            <a:schemeClr val="accent1"/>
-          </a:lnRef>
-          <a:fillRef idx="3">
-            <a:schemeClr val="accent1"/>
-          </a:fillRef>
-          <a:effectRef idx="2">
-            <a:schemeClr val="accent1"/>
-          </a:effectRef>
-          <a:fontRef idx="minor">
-            <a:schemeClr val="lt1"/>
-          </a:fontRef>
-        </p:style>
-        <p:txBody>
-          <a:bodyPr rtlCol="0" anchor="ctr" wrap="square" lIns="228600" tIns="228600"/>
-          <a:lstStyle/>
-          <a:p>
-            <a:pPr algn="ctr">
-              <a:defRPr sz="2800" b="1">
-                <a:solidFill>
-                  <a:srgbClr val="4FB37E"/>
-                </a:solidFill>
-                <a:latin typeface="Georgia"/>
-              </a:defRPr>
-            </a:pPr>
-            <a:r>
-              <a:t>566 ms</a:t>
-            </a:r>
-          </a:p>
-          <a:p>
-            <a:pPr>
-              <a:spcBef>
-                <a:spcPts val="400"/>
-              </a:spcBef>
-              <a:defRPr sz="1300" b="1">
-                <a:solidFill>
-                  <a:srgbClr val="EDE6D6"/>
-                </a:solidFill>
-                <a:latin typeface="Segoe UI"/>
-              </a:defRPr>
-            </a:pPr>
-            <a:r>
-              <a:t>Recall Latency (p50)</a:t>
-            </a:r>
-          </a:p>
-          <a:p>
-            <a:pPr>
-              <a:spcBef>
-                <a:spcPts val="200"/>
-              </a:spcBef>
-              <a:defRPr sz="1100">
-                <a:solidFill>
-                  <a:srgbClr val="8A8477"/>
-                </a:solidFill>
-                <a:latin typeface="Segoe UI"/>
-              </a:defRPr>
-            </a:pPr>
-            <a:r>
-              <a:t>Cold-path recall including query vector embedding and multi-channel rank fusion.</a:t>
-            </a:r>
-          </a:p>
-        </p:txBody>
-      </p:sp>
-      <p:sp>
-        <p:nvSpPr>
-          <p:cNvPr id="9" name="Rounded Rectangle 8"/>
-          <p:cNvSpPr/>
-          <p:nvPr/>
-        </p:nvSpPr>
-        <p:spPr>
-          <a:xfrm>
-            <a:off x="7955280" y="4114800"/>
-            <a:ext cx="3429000" cy="1828800"/>
-          </a:xfrm>
-          <a:prstGeom prst="roundRect">
-            <a:avLst/>
-          </a:prstGeom>
-          <a:solidFill>
-            <a:srgbClr val="161512"/>
-          </a:solidFill>
-          <a:ln>
-            <a:solidFill>
-              <a:srgbClr val="2E2B26"/>
-            </a:solidFill>
-          </a:ln>
-        </p:spPr>
-        <p:style>
-          <a:lnRef idx="1">
-            <a:schemeClr val="accent1"/>
-          </a:lnRef>
-          <a:fillRef idx="3">
-            <a:schemeClr val="accent1"/>
-          </a:fillRef>
-          <a:effectRef idx="2">
-            <a:schemeClr val="accent1"/>
-          </a:effectRef>
-          <a:fontRef idx="minor">
-            <a:schemeClr val="lt1"/>
-          </a:fontRef>
-        </p:style>
-        <p:txBody>
-          <a:bodyPr rtlCol="0" anchor="ctr" wrap="square" lIns="228600" tIns="228600"/>
-          <a:lstStyle/>
-          <a:p>
-            <a:pPr algn="ctr">
-              <a:defRPr sz="2800" b="1">
-                <a:solidFill>
-                  <a:srgbClr val="4FB37E"/>
-                </a:solidFill>
-                <a:latin typeface="Georgia"/>
-              </a:defRPr>
-            </a:pPr>
-            <a:r>
-              <a:t>1.96 s</a:t>
-            </a:r>
-          </a:p>
-          <a:p>
-            <a:pPr>
-              <a:spcBef>
-                <a:spcPts val="400"/>
-              </a:spcBef>
-              <a:defRPr sz="1300" b="1">
-                <a:solidFill>
-                  <a:srgbClr val="EDE6D6"/>
-                </a:solidFill>
-                <a:latin typeface="Segoe UI"/>
-              </a:defRPr>
-            </a:pPr>
-            <a:r>
-              <a:t>First Memory Write (p50)</a:t>
-            </a:r>
-          </a:p>
-          <a:p>
-            <a:pPr>
-              <a:spcBef>
-                <a:spcPts val="200"/>
-              </a:spcBef>
-              <a:defRPr sz="1100">
-                <a:solidFill>
-                  <a:srgbClr val="8A8477"/>
-                </a:solidFill>
-                <a:latin typeface="Segoe UI"/>
-              </a:defRPr>
-            </a:pPr>
-            <a:r>
-              <a:t>From completion of chat stream to committed event in MongoDB change stream.</a:t>
-            </a:r>
-          </a:p>
-        </p:txBody>
-      </p:sp>
-    </p:spTree>
-  </p:cSld>
-  <p:clrMapOvr>
-    <a:masterClrMapping/>
-  </p:clrMapOvr>
-</p:sld>
-</file>
-
-<file path=ppt/slides/slide11.xml><?xml version="1.0" encoding="utf-8"?>
-<p:sld xmlns:a="http://schemas.openxmlformats.org/drawingml/2006/main" xmlns:p="http://schemas.openxmlformats.org/presentationml/2006/main" xmlns:r="http://schemas.openxmlformats.org/officeDocument/2006/relationships">
-  <p:cSld>
-    <p:spTree>
-      <p:nvGrpSpPr>
-        <p:cNvPr id="1" name=""/>
-        <p:cNvGrpSpPr/>
-        <p:nvPr/>
-      </p:nvGrpSpPr>
-      <p:grpSpPr/>
-      <p:sp>
-        <p:nvSpPr>
-          <p:cNvPr id="2" name="Rectangle 1"/>
-          <p:cNvSpPr/>
-          <p:nvPr/>
-        </p:nvSpPr>
-        <p:spPr>
-          <a:xfrm>
-            <a:off x="0" y="0"/>
-            <a:ext cx="12191695" cy="6858000"/>
-          </a:xfrm>
-          <a:prstGeom prst="rect">
-            <a:avLst/>
-          </a:prstGeom>
-          <a:solidFill>
-            <a:srgbClr val="0E0D0B"/>
-          </a:solidFill>
-          <a:ln>
-            <a:noFill/>
-          </a:ln>
-        </p:spPr>
-        <p:style>
-          <a:lnRef idx="1">
-            <a:schemeClr val="accent1"/>
-          </a:lnRef>
-          <a:fillRef idx="3">
-            <a:schemeClr val="accent1"/>
-          </a:fillRef>
-          <a:effectRef idx="2">
-            <a:schemeClr val="accent1"/>
-          </a:effectRef>
-          <a:fontRef idx="minor">
-            <a:schemeClr val="lt1"/>
-          </a:fontRef>
-        </p:style>
-        <p:txBody>
-          <a:bodyPr rtlCol="0" anchor="ctr"/>
-          <a:lstStyle/>
-          <a:p>
-            <a:pPr algn="ctr"/>
-          </a:p>
-        </p:txBody>
-      </p:sp>
-      <p:sp>
-        <p:nvSpPr>
-          <p:cNvPr id="3" name="TextBox 2"/>
-          <p:cNvSpPr txBox="1"/>
-          <p:nvPr/>
-        </p:nvSpPr>
-        <p:spPr>
-          <a:xfrm>
-            <a:off x="731520" y="457200"/>
-            <a:ext cx="10728655" cy="1097280"/>
-          </a:xfrm>
-          <a:prstGeom prst="rect">
-            <a:avLst/>
-          </a:prstGeom>
-          <a:noFill/>
-        </p:spPr>
-        <p:txBody>
-          <a:bodyPr wrap="square" lIns="0" tIns="0" rIns="0" bIns="0">
-            <a:spAutoFit/>
-          </a:bodyPr>
-          <a:lstStyle/>
-          <a:p>
-            <a:pPr>
-              <a:defRPr sz="1100" b="1">
-                <a:solidFill>
-                  <a:srgbClr val="F2C12E"/>
-                </a:solidFill>
-                <a:latin typeface="Consolas"/>
-              </a:defRPr>
-            </a:pPr>
-            <a:r>
-              <a:t>10 / ROADMAP</a:t>
-            </a:r>
-          </a:p>
-          <a:p>
-            <a:pPr>
-              <a:spcBef>
-                <a:spcPts val="400"/>
-              </a:spcBef>
-              <a:defRPr sz="2600" b="1">
-                <a:solidFill>
-                  <a:srgbClr val="EDE6D6"/>
-                </a:solidFill>
-                <a:latin typeface="Georgia"/>
-              </a:defRPr>
-            </a:pPr>
-            <a:r>
-              <a:t>Honest evaluation today and clear enterprise architecture tomorrow.</a:t>
-            </a:r>
-          </a:p>
-        </p:txBody>
-      </p:sp>
-      <p:sp>
-        <p:nvSpPr>
-          <p:cNvPr id="4" name="Rounded Rectangle 3"/>
-          <p:cNvSpPr/>
-          <p:nvPr/>
-        </p:nvSpPr>
-        <p:spPr>
-          <a:xfrm>
-            <a:off x="731520" y="1828800"/>
-            <a:ext cx="5212080" cy="4389120"/>
-          </a:xfrm>
-          <a:prstGeom prst="roundRect">
-            <a:avLst/>
-          </a:prstGeom>
-          <a:solidFill>
-            <a:srgbClr val="161512"/>
-          </a:solidFill>
-          <a:ln>
-            <a:solidFill>
-              <a:srgbClr val="2E2B26"/>
-            </a:solidFill>
-          </a:ln>
-        </p:spPr>
-        <p:style>
-          <a:lnRef idx="1">
-            <a:schemeClr val="accent1"/>
-          </a:lnRef>
-          <a:fillRef idx="3">
-            <a:schemeClr val="accent1"/>
-          </a:fillRef>
-          <a:effectRef idx="2">
-            <a:schemeClr val="accent1"/>
-          </a:effectRef>
-          <a:fontRef idx="minor">
-            <a:schemeClr val="lt1"/>
-          </a:fontRef>
-        </p:style>
-        <p:txBody>
-          <a:bodyPr rtlCol="0" anchor="ctr" wrap="square" lIns="274320" tIns="274320"/>
-          <a:lstStyle/>
-          <a:p>
-            <a:pPr algn="ctr">
-              <a:defRPr sz="1700" b="1">
-                <a:solidFill>
-                  <a:srgbClr val="F08A24"/>
-                </a:solidFill>
-                <a:latin typeface="Georgia"/>
-              </a:defRPr>
-            </a:pPr>
-            <a:r>
-              <a:t>Current Limitations (Free Tier)</a:t>
-            </a:r>
-          </a:p>
-          <a:p>
-            <a:pPr>
-              <a:spcBef>
-                <a:spcPts val="1000"/>
-              </a:spcBef>
-              <a:defRPr sz="1300" b="1">
-                <a:solidFill>
-                  <a:srgbClr val="EDE6D6"/>
-                </a:solidFill>
-                <a:latin typeface="Segoe UI"/>
-              </a:defRPr>
-            </a:pPr>
-            <a:r>
-              <a:t>Quota Boundaries</a:t>
-            </a:r>
-          </a:p>
-          <a:p>
-            <a:pPr>
-              <a:defRPr sz="1100">
-                <a:solidFill>
-                  <a:srgbClr val="B8B1A2"/>
-                </a:solidFill>
-                <a:latin typeface="Segoe UI"/>
-              </a:defRPr>
-            </a:pPr>
-            <a:r>
-              <a:t>Gemini free tier has rate limits. Mitigated with resilient multi-model hedging (3.6 Flash -&gt; Groq GPT-OSS 120B -&gt; 3.5 Flash-Lite).</a:t>
-            </a:r>
-          </a:p>
-          <a:p>
-            <a:pPr>
-              <a:spcBef>
-                <a:spcPts val="1000"/>
-              </a:spcBef>
-              <a:defRPr sz="1300" b="1">
-                <a:solidFill>
-                  <a:srgbClr val="EDE6D6"/>
-                </a:solidFill>
-                <a:latin typeface="Segoe UI"/>
-              </a:defRPr>
-            </a:pPr>
-            <a:r>
-              <a:t>Probabilistic Extraction</a:t>
-            </a:r>
-          </a:p>
-          <a:p>
-            <a:pPr>
-              <a:defRPr sz="1100">
-                <a:solidFill>
-                  <a:srgbClr val="B8B1A2"/>
-                </a:solidFill>
-                <a:latin typeface="Segoe UI"/>
-              </a:defRPr>
-            </a:pPr>
-            <a:r>
-              <a:t>LLMs can miss subtle nuances; mitigated by making every memory visible, editable, and reversible in the UI.</a:t>
-            </a:r>
-          </a:p>
-          <a:p>
-            <a:pPr>
-              <a:spcBef>
-                <a:spcPts val="1000"/>
-              </a:spcBef>
-              <a:defRPr sz="1300" b="1">
-                <a:solidFill>
-                  <a:srgbClr val="EDE6D6"/>
-                </a:solidFill>
-                <a:latin typeface="Segoe UI"/>
-              </a:defRPr>
-            </a:pPr>
-            <a:r>
-              <a:t>Guest Lifetime</a:t>
-            </a:r>
-          </a:p>
-          <a:p>
-            <a:pPr>
-              <a:defRPr sz="1100">
-                <a:solidFill>
-                  <a:srgbClr val="B8B1A2"/>
-                </a:solidFill>
-                <a:latin typeface="Segoe UI"/>
-              </a:defRPr>
-            </a:pPr>
-            <a:r>
-              <a:t>Anonymous demo sessions expire in 7 days unless linked to a Google account.</a:t>
-            </a:r>
-          </a:p>
-        </p:txBody>
-      </p:sp>
-      <p:sp>
-        <p:nvSpPr>
-          <p:cNvPr id="5" name="Rounded Rectangle 4"/>
-          <p:cNvSpPr/>
-          <p:nvPr/>
-        </p:nvSpPr>
-        <p:spPr>
-          <a:xfrm>
-            <a:off x="6217920" y="1828800"/>
-            <a:ext cx="5212080" cy="4389120"/>
-          </a:xfrm>
-          <a:prstGeom prst="roundRect">
-            <a:avLst/>
-          </a:prstGeom>
-          <a:solidFill>
-            <a:srgbClr val="161512"/>
-          </a:solidFill>
-          <a:ln>
-            <a:solidFill>
-              <a:srgbClr val="2E2B26"/>
-            </a:solidFill>
-          </a:ln>
-        </p:spPr>
-        <p:style>
-          <a:lnRef idx="1">
-            <a:schemeClr val="accent1"/>
-          </a:lnRef>
-          <a:fillRef idx="3">
-            <a:schemeClr val="accent1"/>
-          </a:fillRef>
-          <a:effectRef idx="2">
-            <a:schemeClr val="accent1"/>
-          </a:effectRef>
-          <a:fontRef idx="minor">
-            <a:schemeClr val="lt1"/>
-          </a:fontRef>
-        </p:style>
-        <p:txBody>
-          <a:bodyPr rtlCol="0" anchor="ctr" wrap="square" lIns="274320" tIns="274320"/>
-          <a:lstStyle/>
-          <a:p>
-            <a:pPr algn="ctr">
-              <a:defRPr sz="1700" b="1">
-                <a:solidFill>
-                  <a:srgbClr val="4FB37E"/>
-                </a:solidFill>
-                <a:latin typeface="Georgia"/>
-              </a:defRPr>
-            </a:pPr>
-            <a:r>
-              <a:t>Enterprise Scale Architecture</a:t>
-            </a:r>
-          </a:p>
-          <a:p>
-            <a:pPr>
-              <a:spcBef>
-                <a:spcPts val="1000"/>
-              </a:spcBef>
-              <a:defRPr sz="1300" b="1">
-                <a:solidFill>
-                  <a:srgbClr val="EDE6D6"/>
-                </a:solidFill>
-                <a:latin typeface="Segoe UI"/>
-              </a:defRPr>
-            </a:pPr>
-            <a:r>
-              <a:t>Horizontal Sharding on ownerId</a:t>
-            </a:r>
-          </a:p>
-          <a:p>
-            <a:pPr>
-              <a:defRPr sz="1100">
-                <a:solidFill>
-                  <a:srgbClr val="B8B1A2"/>
-                </a:solidFill>
-                <a:latin typeface="Segoe UI"/>
-              </a:defRPr>
-            </a:pPr>
-            <a:r>
-              <a:t>Because every query is strictly scoped by ownerId, 100% of user queries target a single shard without cross-node fanout.</a:t>
-            </a:r>
-          </a:p>
-          <a:p>
-            <a:pPr>
-              <a:spcBef>
-                <a:spcPts val="1000"/>
-              </a:spcBef>
-              <a:defRPr sz="1300" b="1">
-                <a:solidFill>
-                  <a:srgbClr val="EDE6D6"/>
-                </a:solidFill>
-                <a:latin typeface="Segoe UI"/>
-              </a:defRPr>
-            </a:pPr>
-            <a:r>
-              <a:t>Dedicated Search Nodes</a:t>
-            </a:r>
-          </a:p>
-          <a:p>
-            <a:pPr>
-              <a:defRPr sz="1100">
-                <a:solidFill>
-                  <a:srgbClr val="B8B1A2"/>
-                </a:solidFill>
-                <a:latin typeface="Segoe UI"/>
-              </a:defRPr>
-            </a:pPr>
-            <a:r>
-              <a:t>Separates vector and full-text indexing from core transactional nodes for sub-50ms latency under high load.</a:t>
-            </a:r>
-          </a:p>
-          <a:p>
-            <a:pPr>
-              <a:spcBef>
-                <a:spcPts val="1000"/>
-              </a:spcBef>
-              <a:defRPr sz="1300" b="1">
-                <a:solidFill>
-                  <a:srgbClr val="EDE6D6"/>
-                </a:solidFill>
-                <a:latin typeface="Segoe UI"/>
-              </a:defRPr>
-            </a:pPr>
-            <a:r>
-              <a:t>Vector Quantization</a:t>
-            </a:r>
-          </a:p>
-          <a:p>
-            <a:pPr>
-              <a:defRPr sz="1100">
-                <a:solidFill>
-                  <a:srgbClr val="B8B1A2"/>
-                </a:solidFill>
-                <a:latin typeface="Segoe UI"/>
-              </a:defRPr>
-            </a:pPr>
-            <a:r>
-              <a:t>Scalar/int8 quantization reduces index RAM by 75%, scaling to millions of memories per cluster.</a:t>
-            </a:r>
-          </a:p>
-        </p:txBody>
-      </p:sp>
-    </p:spTree>
-  </p:cSld>
-  <p:clrMapOvr>
-    <a:masterClrMapping/>
-  </p:clrMapOvr>
-</p:sld>
-</file>
-
-<file path=ppt/slides/slide12.xml><?xml version="1.0" encoding="utf-8"?>
-<p:sld xmlns:a="http://schemas.openxmlformats.org/drawingml/2006/main" xmlns:p="http://schemas.openxmlformats.org/presentationml/2006/main" xmlns:r="http://schemas.openxmlformats.org/officeDocument/2006/relationships">
-  <p:cSld>
-    <p:spTree>
-      <p:nvGrpSpPr>
-        <p:cNvPr id="1" name=""/>
-        <p:cNvGrpSpPr/>
-        <p:nvPr/>
-      </p:nvGrpSpPr>
-      <p:grpSpPr/>
-      <p:sp>
-        <p:nvSpPr>
-          <p:cNvPr id="2" name="Rectangle 1"/>
-          <p:cNvSpPr/>
-          <p:nvPr/>
-        </p:nvSpPr>
-        <p:spPr>
-          <a:xfrm>
-            <a:off x="0" y="0"/>
-            <a:ext cx="12191695" cy="6858000"/>
-          </a:xfrm>
-          <a:prstGeom prst="rect">
-            <a:avLst/>
-          </a:prstGeom>
-          <a:solidFill>
-            <a:srgbClr val="0E0D0B"/>
-          </a:solidFill>
-          <a:ln>
-            <a:noFill/>
-          </a:ln>
-        </p:spPr>
-        <p:style>
-          <a:lnRef idx="1">
-            <a:schemeClr val="accent1"/>
-          </a:lnRef>
-          <a:fillRef idx="3">
-            <a:schemeClr val="accent1"/>
-          </a:fillRef>
-          <a:effectRef idx="2">
-            <a:schemeClr val="accent1"/>
-          </a:effectRef>
-          <a:fontRef idx="minor">
-            <a:schemeClr val="lt1"/>
-          </a:fontRef>
-        </p:style>
-        <p:txBody>
-          <a:bodyPr rtlCol="0" anchor="ctr"/>
-          <a:lstStyle/>
-          <a:p>
-            <a:pPr algn="ctr"/>
-          </a:p>
-        </p:txBody>
-      </p:sp>
-      <p:sp>
-        <p:nvSpPr>
-          <p:cNvPr id="3" name="TextBox 2"/>
-          <p:cNvSpPr txBox="1"/>
-          <p:nvPr/>
-        </p:nvSpPr>
-        <p:spPr>
-          <a:xfrm>
-            <a:off x="731520" y="457200"/>
-            <a:ext cx="10728655" cy="1097280"/>
-          </a:xfrm>
-          <a:prstGeom prst="rect">
-            <a:avLst/>
-          </a:prstGeom>
-          <a:noFill/>
-        </p:spPr>
-        <p:txBody>
-          <a:bodyPr wrap="square" lIns="0" tIns="0" rIns="0" bIns="0">
-            <a:spAutoFit/>
-          </a:bodyPr>
-          <a:lstStyle/>
-          <a:p>
-            <a:pPr>
-              <a:defRPr sz="1100" b="1">
-                <a:solidFill>
-                  <a:srgbClr val="F2C12E"/>
-                </a:solidFill>
-                <a:latin typeface="Consolas"/>
-              </a:defRPr>
-            </a:pPr>
-            <a:r>
-              <a:t>11 / TEAM &amp; AGENTS</a:t>
-            </a:r>
-          </a:p>
-          <a:p>
-            <a:pPr>
-              <a:spcBef>
-                <a:spcPts val="400"/>
-              </a:spcBef>
-              <a:defRPr sz="2600" b="1">
-                <a:solidFill>
-                  <a:srgbClr val="EDE6D6"/>
-                </a:solidFill>
-                <a:latin typeface="Georgia"/>
-              </a:defRPr>
-            </a:pPr>
-            <a:r>
-              <a:t>Built in 24 hours for UNCHARTED 2026 by three humans and three agents.</a:t>
-            </a:r>
-          </a:p>
-        </p:txBody>
-      </p:sp>
-      <p:sp>
-        <p:nvSpPr>
-          <p:cNvPr id="4" name="Rounded Rectangle 3"/>
-          <p:cNvSpPr/>
-          <p:nvPr/>
-        </p:nvSpPr>
-        <p:spPr>
-          <a:xfrm>
-            <a:off x="731520" y="1828800"/>
-            <a:ext cx="10728655" cy="4389120"/>
-          </a:xfrm>
-          <a:prstGeom prst="roundRect">
-            <a:avLst/>
-          </a:prstGeom>
-          <a:solidFill>
-            <a:srgbClr val="161512"/>
-          </a:solidFill>
-          <a:ln>
-            <a:solidFill>
-              <a:srgbClr val="2E2B26"/>
-            </a:solidFill>
-          </a:ln>
-        </p:spPr>
-        <p:style>
-          <a:lnRef idx="1">
-            <a:schemeClr val="accent1"/>
-          </a:lnRef>
-          <a:fillRef idx="3">
-            <a:schemeClr val="accent1"/>
-          </a:fillRef>
-          <a:effectRef idx="2">
-            <a:schemeClr val="accent1"/>
-          </a:effectRef>
-          <a:fontRef idx="minor">
-            <a:schemeClr val="lt1"/>
-          </a:fontRef>
-        </p:style>
-        <p:txBody>
-          <a:bodyPr rtlCol="0" anchor="ctr" wrap="square" lIns="365760" tIns="365760"/>
-          <a:lstStyle/>
-          <a:p>
-            <a:pPr algn="ctr">
-              <a:defRPr sz="1800" b="1">
-                <a:solidFill>
-                  <a:srgbClr val="F2C12E"/>
-                </a:solidFill>
-                <a:latin typeface="Georgia"/>
-              </a:defRPr>
-            </a:pPr>
-            <a:r>
-              <a:t>HUMAN BUILDERS: Vaibhav &amp; Teammates</a:t>
+              <a:t>Measured on production</a:t>
             </a:r>
           </a:p>
           <a:p>
@@ -4508,29 +3857,569 @@
               </a:defRPr>
             </a:pPr>
             <a:r>
-              <a:t>Product direction, MongoDB schema design, eval benchmark harness, and end-to-end judge validation.</a:t>
+              <a:t>20/20 live memory tests · 31/31 rule checks · recall@5 1.0 · 0 secrets stored · recall ≈ 0.5 s.</a:t>
+            </a:r>
+          </a:p>
+        </p:txBody>
+      </p:sp>
+      <p:sp>
+        <p:nvSpPr>
+          <p:cNvPr id="4" name="Rectangle 3"/>
+          <p:cNvSpPr/>
+          <p:nvPr/>
+        </p:nvSpPr>
+        <p:spPr>
+          <a:xfrm>
+            <a:off x="731520" y="1664208"/>
+            <a:ext cx="100584" cy="100584"/>
+          </a:xfrm>
+          <a:prstGeom prst="rect">
+            <a:avLst/>
+          </a:prstGeom>
+          <a:solidFill>
+            <a:srgbClr val="E7DCC3"/>
+          </a:solidFill>
+          <a:ln>
+            <a:noFill/>
+          </a:ln>
+        </p:spPr>
+        <p:style>
+          <a:lnRef idx="1">
+            <a:schemeClr val="accent1"/>
+          </a:lnRef>
+          <a:fillRef idx="3">
+            <a:schemeClr val="accent1"/>
+          </a:fillRef>
+          <a:effectRef idx="2">
+            <a:schemeClr val="accent1"/>
+          </a:effectRef>
+          <a:fontRef idx="minor">
+            <a:schemeClr val="lt1"/>
+          </a:fontRef>
+        </p:style>
+        <p:txBody>
+          <a:bodyPr rtlCol="0" anchor="ctr"/>
+          <a:lstStyle/>
+          <a:p>
+            <a:pPr algn="ctr"/>
+          </a:p>
+        </p:txBody>
+      </p:sp>
+      <p:sp>
+        <p:nvSpPr>
+          <p:cNvPr id="5" name="Rectangle 4"/>
+          <p:cNvSpPr/>
+          <p:nvPr/>
+        </p:nvSpPr>
+        <p:spPr>
+          <a:xfrm>
+            <a:off x="877824" y="1664208"/>
+            <a:ext cx="100584" cy="100584"/>
+          </a:xfrm>
+          <a:prstGeom prst="rect">
+            <a:avLst/>
+          </a:prstGeom>
+          <a:solidFill>
+            <a:srgbClr val="F2C12E"/>
+          </a:solidFill>
+          <a:ln>
+            <a:noFill/>
+          </a:ln>
+        </p:spPr>
+        <p:style>
+          <a:lnRef idx="1">
+            <a:schemeClr val="accent1"/>
+          </a:lnRef>
+          <a:fillRef idx="3">
+            <a:schemeClr val="accent1"/>
+          </a:fillRef>
+          <a:effectRef idx="2">
+            <a:schemeClr val="accent1"/>
+          </a:effectRef>
+          <a:fontRef idx="minor">
+            <a:schemeClr val="lt1"/>
+          </a:fontRef>
+        </p:style>
+        <p:txBody>
+          <a:bodyPr rtlCol="0" anchor="ctr"/>
+          <a:lstStyle/>
+          <a:p>
+            <a:pPr algn="ctr"/>
+          </a:p>
+        </p:txBody>
+      </p:sp>
+      <p:sp>
+        <p:nvSpPr>
+          <p:cNvPr id="6" name="Rectangle 5"/>
+          <p:cNvSpPr/>
+          <p:nvPr/>
+        </p:nvSpPr>
+        <p:spPr>
+          <a:xfrm>
+            <a:off x="1024128" y="1664208"/>
+            <a:ext cx="100584" cy="100584"/>
+          </a:xfrm>
+          <a:prstGeom prst="rect">
+            <a:avLst/>
+          </a:prstGeom>
+          <a:solidFill>
+            <a:srgbClr val="3A63D8"/>
+          </a:solidFill>
+          <a:ln>
+            <a:noFill/>
+          </a:ln>
+        </p:spPr>
+        <p:style>
+          <a:lnRef idx="1">
+            <a:schemeClr val="accent1"/>
+          </a:lnRef>
+          <a:fillRef idx="3">
+            <a:schemeClr val="accent1"/>
+          </a:fillRef>
+          <a:effectRef idx="2">
+            <a:schemeClr val="accent1"/>
+          </a:effectRef>
+          <a:fontRef idx="minor">
+            <a:schemeClr val="lt1"/>
+          </a:fontRef>
+        </p:style>
+        <p:txBody>
+          <a:bodyPr rtlCol="0" anchor="ctr"/>
+          <a:lstStyle/>
+          <a:p>
+            <a:pPr algn="ctr"/>
+          </a:p>
+        </p:txBody>
+      </p:sp>
+      <p:sp>
+        <p:nvSpPr>
+          <p:cNvPr id="7" name="Rectangle 6"/>
+          <p:cNvSpPr/>
+          <p:nvPr/>
+        </p:nvSpPr>
+        <p:spPr>
+          <a:xfrm>
+            <a:off x="1170432" y="1664208"/>
+            <a:ext cx="100584" cy="100584"/>
+          </a:xfrm>
+          <a:prstGeom prst="rect">
+            <a:avLst/>
+          </a:prstGeom>
+          <a:solidFill>
+            <a:srgbClr val="F08A24"/>
+          </a:solidFill>
+          <a:ln>
+            <a:noFill/>
+          </a:ln>
+        </p:spPr>
+        <p:style>
+          <a:lnRef idx="1">
+            <a:schemeClr val="accent1"/>
+          </a:lnRef>
+          <a:fillRef idx="3">
+            <a:schemeClr val="accent1"/>
+          </a:fillRef>
+          <a:effectRef idx="2">
+            <a:schemeClr val="accent1"/>
+          </a:effectRef>
+          <a:fontRef idx="minor">
+            <a:schemeClr val="lt1"/>
+          </a:fontRef>
+        </p:style>
+        <p:txBody>
+          <a:bodyPr rtlCol="0" anchor="ctr"/>
+          <a:lstStyle/>
+          <a:p>
+            <a:pPr algn="ctr"/>
+          </a:p>
+        </p:txBody>
+      </p:sp>
+      <p:sp>
+        <p:nvSpPr>
+          <p:cNvPr id="8" name="Rectangle 7"/>
+          <p:cNvSpPr/>
+          <p:nvPr/>
+        </p:nvSpPr>
+        <p:spPr>
+          <a:xfrm>
+            <a:off x="1316736" y="1664208"/>
+            <a:ext cx="100584" cy="100584"/>
+          </a:xfrm>
+          <a:prstGeom prst="rect">
+            <a:avLst/>
+          </a:prstGeom>
+          <a:solidFill>
+            <a:srgbClr val="D8432F"/>
+          </a:solidFill>
+          <a:ln>
+            <a:noFill/>
+          </a:ln>
+        </p:spPr>
+        <p:style>
+          <a:lnRef idx="1">
+            <a:schemeClr val="accent1"/>
+          </a:lnRef>
+          <a:fillRef idx="3">
+            <a:schemeClr val="accent1"/>
+          </a:fillRef>
+          <a:effectRef idx="2">
+            <a:schemeClr val="accent1"/>
+          </a:effectRef>
+          <a:fontRef idx="minor">
+            <a:schemeClr val="lt1"/>
+          </a:fontRef>
+        </p:style>
+        <p:txBody>
+          <a:bodyPr rtlCol="0" anchor="ctr"/>
+          <a:lstStyle/>
+          <a:p>
+            <a:pPr algn="ctr"/>
+          </a:p>
+        </p:txBody>
+      </p:sp>
+      <p:sp>
+        <p:nvSpPr>
+          <p:cNvPr id="9" name="Rectangle 8"/>
+          <p:cNvSpPr/>
+          <p:nvPr/>
+        </p:nvSpPr>
+        <p:spPr>
+          <a:xfrm>
+            <a:off x="1463040" y="1664208"/>
+            <a:ext cx="100584" cy="100584"/>
+          </a:xfrm>
+          <a:prstGeom prst="rect">
+            <a:avLst/>
+          </a:prstGeom>
+          <a:solidFill>
+            <a:srgbClr val="B23A7A"/>
+          </a:solidFill>
+          <a:ln>
+            <a:noFill/>
+          </a:ln>
+        </p:spPr>
+        <p:style>
+          <a:lnRef idx="1">
+            <a:schemeClr val="accent1"/>
+          </a:lnRef>
+          <a:fillRef idx="3">
+            <a:schemeClr val="accent1"/>
+          </a:fillRef>
+          <a:effectRef idx="2">
+            <a:schemeClr val="accent1"/>
+          </a:effectRef>
+          <a:fontRef idx="minor">
+            <a:schemeClr val="lt1"/>
+          </a:fontRef>
+        </p:style>
+        <p:txBody>
+          <a:bodyPr rtlCol="0" anchor="ctr"/>
+          <a:lstStyle/>
+          <a:p>
+            <a:pPr algn="ctr"/>
+          </a:p>
+        </p:txBody>
+      </p:sp>
+      <p:sp>
+        <p:nvSpPr>
+          <p:cNvPr id="10" name="Rectangle 9"/>
+          <p:cNvSpPr/>
+          <p:nvPr/>
+        </p:nvSpPr>
+        <p:spPr>
+          <a:xfrm>
+            <a:off x="1609344" y="1664208"/>
+            <a:ext cx="100584" cy="100584"/>
+          </a:xfrm>
+          <a:prstGeom prst="rect">
+            <a:avLst/>
+          </a:prstGeom>
+          <a:solidFill>
+            <a:srgbClr val="2E9E6B"/>
+          </a:solidFill>
+          <a:ln>
+            <a:noFill/>
+          </a:ln>
+        </p:spPr>
+        <p:style>
+          <a:lnRef idx="1">
+            <a:schemeClr val="accent1"/>
+          </a:lnRef>
+          <a:fillRef idx="3">
+            <a:schemeClr val="accent1"/>
+          </a:fillRef>
+          <a:effectRef idx="2">
+            <a:schemeClr val="accent1"/>
+          </a:effectRef>
+          <a:fontRef idx="minor">
+            <a:schemeClr val="lt1"/>
+          </a:fontRef>
+        </p:style>
+        <p:txBody>
+          <a:bodyPr rtlCol="0" anchor="ctr"/>
+          <a:lstStyle/>
+          <a:p>
+            <a:pPr algn="ctr"/>
+          </a:p>
+        </p:txBody>
+      </p:sp>
+      <p:sp>
+        <p:nvSpPr>
+          <p:cNvPr id="11" name="Rectangle 10"/>
+          <p:cNvSpPr/>
+          <p:nvPr/>
+        </p:nvSpPr>
+        <p:spPr>
+          <a:xfrm>
+            <a:off x="1755648" y="1664208"/>
+            <a:ext cx="100584" cy="100584"/>
+          </a:xfrm>
+          <a:prstGeom prst="rect">
+            <a:avLst/>
+          </a:prstGeom>
+          <a:solidFill>
+            <a:srgbClr val="74B8E0"/>
+          </a:solidFill>
+          <a:ln>
+            <a:noFill/>
+          </a:ln>
+        </p:spPr>
+        <p:style>
+          <a:lnRef idx="1">
+            <a:schemeClr val="accent1"/>
+          </a:lnRef>
+          <a:fillRef idx="3">
+            <a:schemeClr val="accent1"/>
+          </a:fillRef>
+          <a:effectRef idx="2">
+            <a:schemeClr val="accent1"/>
+          </a:effectRef>
+          <a:fontRef idx="minor">
+            <a:schemeClr val="lt1"/>
+          </a:fontRef>
+        </p:style>
+        <p:txBody>
+          <a:bodyPr rtlCol="0" anchor="ctr"/>
+          <a:lstStyle/>
+          <a:p>
+            <a:pPr algn="ctr"/>
+          </a:p>
+        </p:txBody>
+      </p:sp>
+      <p:sp>
+        <p:nvSpPr>
+          <p:cNvPr id="12" name="Rectangle 11"/>
+          <p:cNvSpPr/>
+          <p:nvPr/>
+        </p:nvSpPr>
+        <p:spPr>
+          <a:xfrm>
+            <a:off x="1901952" y="1664208"/>
+            <a:ext cx="100584" cy="100584"/>
+          </a:xfrm>
+          <a:prstGeom prst="rect">
+            <a:avLst/>
+          </a:prstGeom>
+          <a:solidFill>
+            <a:srgbClr val="6B4BC2"/>
+          </a:solidFill>
+          <a:ln>
+            <a:noFill/>
+          </a:ln>
+        </p:spPr>
+        <p:style>
+          <a:lnRef idx="1">
+            <a:schemeClr val="accent1"/>
+          </a:lnRef>
+          <a:fillRef idx="3">
+            <a:schemeClr val="accent1"/>
+          </a:fillRef>
+          <a:effectRef idx="2">
+            <a:schemeClr val="accent1"/>
+          </a:effectRef>
+          <a:fontRef idx="minor">
+            <a:schemeClr val="lt1"/>
+          </a:fontRef>
+        </p:style>
+        <p:txBody>
+          <a:bodyPr rtlCol="0" anchor="ctr"/>
+          <a:lstStyle/>
+          <a:p>
+            <a:pPr algn="ctr"/>
+          </a:p>
+        </p:txBody>
+      </p:sp>
+      <p:sp>
+        <p:nvSpPr>
+          <p:cNvPr id="13" name="Rectangle 12"/>
+          <p:cNvSpPr/>
+          <p:nvPr/>
+        </p:nvSpPr>
+        <p:spPr>
+          <a:xfrm>
+            <a:off x="2048256" y="1664208"/>
+            <a:ext cx="100584" cy="100584"/>
+          </a:xfrm>
+          <a:prstGeom prst="rect">
+            <a:avLst/>
+          </a:prstGeom>
+          <a:solidFill>
+            <a:srgbClr val="A7A23C"/>
+          </a:solidFill>
+          <a:ln>
+            <a:noFill/>
+          </a:ln>
+        </p:spPr>
+        <p:style>
+          <a:lnRef idx="1">
+            <a:schemeClr val="accent1"/>
+          </a:lnRef>
+          <a:fillRef idx="3">
+            <a:schemeClr val="accent1"/>
+          </a:fillRef>
+          <a:effectRef idx="2">
+            <a:schemeClr val="accent1"/>
+          </a:effectRef>
+          <a:fontRef idx="minor">
+            <a:schemeClr val="lt1"/>
+          </a:fontRef>
+        </p:style>
+        <p:txBody>
+          <a:bodyPr rtlCol="0" anchor="ctr"/>
+          <a:lstStyle/>
+          <a:p>
+            <a:pPr algn="ctr"/>
+          </a:p>
+        </p:txBody>
+      </p:sp>
+      <p:sp>
+        <p:nvSpPr>
+          <p:cNvPr id="14" name="Rounded Rectangle 13"/>
+          <p:cNvSpPr/>
+          <p:nvPr/>
+        </p:nvSpPr>
+        <p:spPr>
+          <a:xfrm>
+            <a:off x="731520" y="2011680"/>
+            <a:ext cx="3429000" cy="1417320"/>
+          </a:xfrm>
+          <a:prstGeom prst="roundRect">
+            <a:avLst/>
+          </a:prstGeom>
+          <a:solidFill>
+            <a:srgbClr val="161512"/>
+          </a:solidFill>
+          <a:ln>
+            <a:solidFill>
+              <a:srgbClr val="2A2722"/>
+            </a:solidFill>
+          </a:ln>
+        </p:spPr>
+        <p:style>
+          <a:lnRef idx="1">
+            <a:schemeClr val="accent1"/>
+          </a:lnRef>
+          <a:fillRef idx="3">
+            <a:schemeClr val="accent1"/>
+          </a:fillRef>
+          <a:effectRef idx="2">
+            <a:schemeClr val="accent1"/>
+          </a:effectRef>
+          <a:fontRef idx="minor">
+            <a:schemeClr val="lt1"/>
+          </a:fontRef>
+        </p:style>
+        <p:txBody>
+          <a:bodyPr rtlCol="0" anchor="ctr" wrap="square" lIns="182880" tIns="182880"/>
+          <a:lstStyle/>
+          <a:p>
+            <a:pPr algn="ctr">
+              <a:defRPr sz="2800" b="1">
+                <a:solidFill>
+                  <a:srgbClr val="2E9E6B"/>
+                </a:solidFill>
+                <a:latin typeface="Consolas"/>
+              </a:defRPr>
+            </a:pPr>
+            <a:r>
+              <a:t>20 / 20</a:t>
             </a:r>
           </a:p>
           <a:p>
             <a:pPr>
               <a:spcBef>
-                <a:spcPts val="1600"/>
+                <a:spcPts val="400"/>
               </a:spcBef>
-              <a:defRPr sz="1300" b="1">
-                <a:solidFill>
-                  <a:srgbClr val="EDE6D6"/>
+              <a:defRPr sz="1200">
+                <a:solidFill>
+                  <a:srgbClr val="B8B1A2"/>
+                </a:solidFill>
+                <a:latin typeface="Segoe UI"/>
+              </a:defRPr>
+            </a:pPr>
+            <a:r>
+              <a:t>Live memory tests passed</a:t>
+            </a:r>
+          </a:p>
+        </p:txBody>
+      </p:sp>
+      <p:sp>
+        <p:nvSpPr>
+          <p:cNvPr id="15" name="Rounded Rectangle 14"/>
+          <p:cNvSpPr/>
+          <p:nvPr/>
+        </p:nvSpPr>
+        <p:spPr>
+          <a:xfrm>
+            <a:off x="4343400" y="2011680"/>
+            <a:ext cx="3429000" cy="1417320"/>
+          </a:xfrm>
+          <a:prstGeom prst="roundRect">
+            <a:avLst/>
+          </a:prstGeom>
+          <a:solidFill>
+            <a:srgbClr val="161512"/>
+          </a:solidFill>
+          <a:ln>
+            <a:solidFill>
+              <a:srgbClr val="2A2722"/>
+            </a:solidFill>
+          </a:ln>
+        </p:spPr>
+        <p:style>
+          <a:lnRef idx="1">
+            <a:schemeClr val="accent1"/>
+          </a:lnRef>
+          <a:fillRef idx="3">
+            <a:schemeClr val="accent1"/>
+          </a:fillRef>
+          <a:effectRef idx="2">
+            <a:schemeClr val="accent1"/>
+          </a:effectRef>
+          <a:fontRef idx="minor">
+            <a:schemeClr val="lt1"/>
+          </a:fontRef>
+        </p:style>
+        <p:txBody>
+          <a:bodyPr rtlCol="0" anchor="ctr" wrap="square" lIns="182880" tIns="182880"/>
+          <a:lstStyle/>
+          <a:p>
+            <a:pPr algn="ctr">
+              <a:defRPr sz="2800" b="1">
+                <a:solidFill>
+                  <a:srgbClr val="2E9E6B"/>
                 </a:solidFill>
                 <a:latin typeface="Consolas"/>
               </a:defRPr>
             </a:pPr>
             <a:r>
-              <a:t>THREE-AGENT PAIR PROGRAMMING COLLABORATION:</a:t>
+              <a:t>31 / 31</a:t>
             </a:r>
           </a:p>
           <a:p>
             <a:pPr>
               <a:spcBef>
-                <a:spcPts val="600"/>
+                <a:spcPts val="400"/>
               </a:spcBef>
               <a:defRPr sz="1200">
                 <a:solidFill>
@@ -4540,13 +4429,68 @@
               </a:defRPr>
             </a:pPr>
             <a:r>
-              <a:t>Claude Code (Lead):  App Router architecture, chat orchestration, Better Auth, and integration merges.</a:t>
+              <a:t>Rule &amp; security checks passed</a:t>
+            </a:r>
+          </a:p>
+        </p:txBody>
+      </p:sp>
+      <p:sp>
+        <p:nvSpPr>
+          <p:cNvPr id="16" name="Rounded Rectangle 15"/>
+          <p:cNvSpPr/>
+          <p:nvPr/>
+        </p:nvSpPr>
+        <p:spPr>
+          <a:xfrm>
+            <a:off x="7955280" y="2011680"/>
+            <a:ext cx="3429000" cy="1417320"/>
+          </a:xfrm>
+          <a:prstGeom prst="roundRect">
+            <a:avLst/>
+          </a:prstGeom>
+          <a:solidFill>
+            <a:srgbClr val="161512"/>
+          </a:solidFill>
+          <a:ln>
+            <a:solidFill>
+              <a:srgbClr val="2A2722"/>
+            </a:solidFill>
+          </a:ln>
+        </p:spPr>
+        <p:style>
+          <a:lnRef idx="1">
+            <a:schemeClr val="accent1"/>
+          </a:lnRef>
+          <a:fillRef idx="3">
+            <a:schemeClr val="accent1"/>
+          </a:fillRef>
+          <a:effectRef idx="2">
+            <a:schemeClr val="accent1"/>
+          </a:effectRef>
+          <a:fontRef idx="minor">
+            <a:schemeClr val="lt1"/>
+          </a:fontRef>
+        </p:style>
+        <p:txBody>
+          <a:bodyPr rtlCol="0" anchor="ctr" wrap="square" lIns="182880" tIns="182880"/>
+          <a:lstStyle/>
+          <a:p>
+            <a:pPr algn="ctr">
+              <a:defRPr sz="2800" b="1">
+                <a:solidFill>
+                  <a:srgbClr val="2E9E6B"/>
+                </a:solidFill>
+                <a:latin typeface="Consolas"/>
+              </a:defRPr>
+            </a:pPr>
+            <a:r>
+              <a:t>1.0</a:t>
             </a:r>
           </a:p>
           <a:p>
             <a:pPr>
               <a:spcBef>
-                <a:spcPts val="600"/>
+                <a:spcPts val="400"/>
               </a:spcBef>
               <a:defRPr sz="1200">
                 <a:solidFill>
@@ -4556,13 +4500,68 @@
               </a:defRPr>
             </a:pPr>
             <a:r>
-              <a:t>Codex (Engine):  Memory engine, privacy gate, 4-channel recall, scoring algorithm, reflection pipelines, and eval harness.</a:t>
+              <a:t>Recall@5 precision</a:t>
+            </a:r>
+          </a:p>
+        </p:txBody>
+      </p:sp>
+      <p:sp>
+        <p:nvSpPr>
+          <p:cNvPr id="17" name="Rounded Rectangle 16"/>
+          <p:cNvSpPr/>
+          <p:nvPr/>
+        </p:nvSpPr>
+        <p:spPr>
+          <a:xfrm>
+            <a:off x="731520" y="3657600"/>
+            <a:ext cx="3429000" cy="1417320"/>
+          </a:xfrm>
+          <a:prstGeom prst="roundRect">
+            <a:avLst/>
+          </a:prstGeom>
+          <a:solidFill>
+            <a:srgbClr val="161512"/>
+          </a:solidFill>
+          <a:ln>
+            <a:solidFill>
+              <a:srgbClr val="2A2722"/>
+            </a:solidFill>
+          </a:ln>
+        </p:spPr>
+        <p:style>
+          <a:lnRef idx="1">
+            <a:schemeClr val="accent1"/>
+          </a:lnRef>
+          <a:fillRef idx="3">
+            <a:schemeClr val="accent1"/>
+          </a:fillRef>
+          <a:effectRef idx="2">
+            <a:schemeClr val="accent1"/>
+          </a:effectRef>
+          <a:fontRef idx="minor">
+            <a:schemeClr val="lt1"/>
+          </a:fontRef>
+        </p:style>
+        <p:txBody>
+          <a:bodyPr rtlCol="0" anchor="ctr" wrap="square" lIns="182880" tIns="182880"/>
+          <a:lstStyle/>
+          <a:p>
+            <a:pPr algn="ctr">
+              <a:defRPr sz="2800" b="1">
+                <a:solidFill>
+                  <a:srgbClr val="2E9E6B"/>
+                </a:solidFill>
+                <a:latin typeface="Consolas"/>
+              </a:defRPr>
+            </a:pPr>
+            <a:r>
+              <a:t>0</a:t>
             </a:r>
           </a:p>
           <a:p>
             <a:pPr>
               <a:spcBef>
-                <a:spcPts val="600"/>
+                <a:spcPts val="400"/>
               </a:spcBef>
               <a:defRPr sz="1200">
                 <a:solidFill>
@@ -4572,23 +4571,220 @@
               </a:defRPr>
             </a:pPr>
             <a:r>
-              <a:t>Antigravity (Experience):  Public landing page, real production screenshots, Review/Activity/Settings polish, presentation deck, and demo video kit.</a:t>
+              <a:t>Secrets stored or leaked</a:t>
+            </a:r>
+          </a:p>
+        </p:txBody>
+      </p:sp>
+      <p:sp>
+        <p:nvSpPr>
+          <p:cNvPr id="18" name="Rounded Rectangle 17"/>
+          <p:cNvSpPr/>
+          <p:nvPr/>
+        </p:nvSpPr>
+        <p:spPr>
+          <a:xfrm>
+            <a:off x="4343400" y="3657600"/>
+            <a:ext cx="3429000" cy="1417320"/>
+          </a:xfrm>
+          <a:prstGeom prst="roundRect">
+            <a:avLst/>
+          </a:prstGeom>
+          <a:solidFill>
+            <a:srgbClr val="161512"/>
+          </a:solidFill>
+          <a:ln>
+            <a:solidFill>
+              <a:srgbClr val="2A2722"/>
+            </a:solidFill>
+          </a:ln>
+        </p:spPr>
+        <p:style>
+          <a:lnRef idx="1">
+            <a:schemeClr val="accent1"/>
+          </a:lnRef>
+          <a:fillRef idx="3">
+            <a:schemeClr val="accent1"/>
+          </a:fillRef>
+          <a:effectRef idx="2">
+            <a:schemeClr val="accent1"/>
+          </a:effectRef>
+          <a:fontRef idx="minor">
+            <a:schemeClr val="lt1"/>
+          </a:fontRef>
+        </p:style>
+        <p:txBody>
+          <a:bodyPr rtlCol="0" anchor="ctr" wrap="square" lIns="182880" tIns="182880"/>
+          <a:lstStyle/>
+          <a:p>
+            <a:pPr algn="ctr">
+              <a:defRPr sz="2800" b="1">
+                <a:solidFill>
+                  <a:srgbClr val="2E9E6B"/>
+                </a:solidFill>
+                <a:latin typeface="Consolas"/>
+              </a:defRPr>
+            </a:pPr>
+            <a:r>
+              <a:t>≈ 0.5 s</a:t>
             </a:r>
           </a:p>
           <a:p>
             <a:pPr>
               <a:spcBef>
-                <a:spcPts val="1600"/>
+                <a:spcPts val="400"/>
               </a:spcBef>
               <a:defRPr sz="1200">
                 <a:solidFill>
-                  <a:srgbClr val="4FB37E"/>
+                  <a:srgbClr val="B8B1A2"/>
+                </a:solidFill>
+                <a:latin typeface="Segoe UI"/>
+              </a:defRPr>
+            </a:pPr>
+            <a:r>
+              <a:t>Recall latency (p50: 566 ms)</a:t>
+            </a:r>
+          </a:p>
+        </p:txBody>
+      </p:sp>
+      <p:sp>
+        <p:nvSpPr>
+          <p:cNvPr id="19" name="Rounded Rectangle 18"/>
+          <p:cNvSpPr/>
+          <p:nvPr/>
+        </p:nvSpPr>
+        <p:spPr>
+          <a:xfrm>
+            <a:off x="7955280" y="3657600"/>
+            <a:ext cx="3429000" cy="1417320"/>
+          </a:xfrm>
+          <a:prstGeom prst="roundRect">
+            <a:avLst/>
+          </a:prstGeom>
+          <a:solidFill>
+            <a:srgbClr val="161512"/>
+          </a:solidFill>
+          <a:ln>
+            <a:solidFill>
+              <a:srgbClr val="2A2722"/>
+            </a:solidFill>
+          </a:ln>
+        </p:spPr>
+        <p:style>
+          <a:lnRef idx="1">
+            <a:schemeClr val="accent1"/>
+          </a:lnRef>
+          <a:fillRef idx="3">
+            <a:schemeClr val="accent1"/>
+          </a:fillRef>
+          <a:effectRef idx="2">
+            <a:schemeClr val="accent1"/>
+          </a:effectRef>
+          <a:fontRef idx="minor">
+            <a:schemeClr val="lt1"/>
+          </a:fontRef>
+        </p:style>
+        <p:txBody>
+          <a:bodyPr rtlCol="0" anchor="ctr" wrap="square" lIns="182880" tIns="182880"/>
+          <a:lstStyle/>
+          <a:p>
+            <a:pPr algn="ctr">
+              <a:defRPr sz="2800" b="1">
+                <a:solidFill>
+                  <a:srgbClr val="2E9E6B"/>
                 </a:solidFill>
                 <a:latin typeface="Consolas"/>
               </a:defRPr>
             </a:pPr>
             <a:r>
-              <a:t>LIVE PRODUCT: https://radahn-ai.vercel.app  ·  REPO: https://github.com/vaibhavcodesx/radahn</a:t>
+              <a:t>≈ 2.0 s</a:t>
+            </a:r>
+          </a:p>
+          <a:p>
+            <a:pPr>
+              <a:spcBef>
+                <a:spcPts val="400"/>
+              </a:spcBef>
+              <a:defRPr sz="1200">
+                <a:solidFill>
+                  <a:srgbClr val="B8B1A2"/>
+                </a:solidFill>
+                <a:latin typeface="Segoe UI"/>
+              </a:defRPr>
+            </a:pPr>
+            <a:r>
+              <a:t>First memory saved (p50: 1.96 s)</a:t>
+            </a:r>
+          </a:p>
+        </p:txBody>
+      </p:sp>
+      <p:sp>
+        <p:nvSpPr>
+          <p:cNvPr id="20" name="Rounded Rectangle 19"/>
+          <p:cNvSpPr/>
+          <p:nvPr/>
+        </p:nvSpPr>
+        <p:spPr>
+          <a:xfrm>
+            <a:off x="731520" y="5440680"/>
+            <a:ext cx="10728655" cy="960120"/>
+          </a:xfrm>
+          <a:prstGeom prst="roundRect">
+            <a:avLst/>
+          </a:prstGeom>
+          <a:solidFill>
+            <a:srgbClr val="161512"/>
+          </a:solidFill>
+          <a:ln>
+            <a:solidFill>
+              <a:srgbClr val="2A2722"/>
+            </a:solidFill>
+          </a:ln>
+        </p:spPr>
+        <p:style>
+          <a:lnRef idx="1">
+            <a:schemeClr val="accent1"/>
+          </a:lnRef>
+          <a:fillRef idx="3">
+            <a:schemeClr val="accent1"/>
+          </a:fillRef>
+          <a:effectRef idx="2">
+            <a:schemeClr val="accent1"/>
+          </a:effectRef>
+          <a:fontRef idx="minor">
+            <a:schemeClr val="lt1"/>
+          </a:fontRef>
+        </p:style>
+        <p:txBody>
+          <a:bodyPr rtlCol="0" anchor="ctr" wrap="square" lIns="164592" tIns="164592"/>
+          <a:lstStyle/>
+          <a:p>
+            <a:pPr algn="ctr">
+              <a:defRPr sz="1050">
+                <a:solidFill>
+                  <a:srgbClr val="8A8477"/>
+                </a:solidFill>
+                <a:latin typeface="Consolas"/>
+              </a:defRPr>
+            </a:pPr>
+            <a:r>
+              <a:t>LIMITATIONS: Free tiers; LLM extraction can err (everything is visible &amp; reversible).  NEXT: Dedicated search nodes, team memory.</a:t>
+            </a:r>
+          </a:p>
+          <a:p>
+            <a:pPr>
+              <a:spcBef>
+                <a:spcPts val="400"/>
+              </a:spcBef>
+              <a:defRPr sz="1100" b="1">
+                <a:solidFill>
+                  <a:srgbClr val="F2C12E"/>
+                </a:solidFill>
+                <a:latin typeface="Consolas"/>
+              </a:defRPr>
+            </a:pPr>
+            <a:r>
+              <a:t>TEAM: Vaibhav &amp; teammates  ·  Built with Claude Code, Codex, and Antigravity  ·  TRY IT: radahn-ai.vercel.app</a:t>
             </a:r>
           </a:p>
         </p:txBody>
@@ -4662,8 +4858,8 @@
         </p:nvSpPr>
         <p:spPr>
           <a:xfrm>
-            <a:off x="731520" y="457200"/>
-            <a:ext cx="10728655" cy="1097280"/>
+            <a:off x="731520" y="411480"/>
+            <a:ext cx="10728655" cy="1188720"/>
           </a:xfrm>
           <a:prstGeom prst="rect">
             <a:avLst/>
@@ -4679,13 +4875,29 @@
             <a:pPr>
               <a:defRPr sz="1100" b="1">
                 <a:solidFill>
-                  <a:srgbClr val="F2C12E"/>
+                  <a:srgbClr val="8A8477"/>
                 </a:solidFill>
                 <a:latin typeface="Consolas"/>
               </a:defRPr>
             </a:pPr>
             <a:r>
-              <a:t>01 / THE PROBLEM</a:t>
+              <a:t>02</a:t>
+            </a:r>
+          </a:p>
+          <a:p>
+            <a:pPr>
+              <a:spcBef>
+                <a:spcPts val="300"/>
+              </a:spcBef>
+              <a:defRPr sz="2800" b="1">
+                <a:solidFill>
+                  <a:srgbClr val="EDE6D6"/>
+                </a:solidFill>
+                <a:latin typeface="Georgia"/>
+              </a:defRPr>
+            </a:pPr>
+            <a:r>
+              <a:t>Assistants remember you. Invisibly.</a:t>
             </a:r>
           </a:p>
           <a:p>
@@ -4693,22 +4905,452 @@
               <a:spcBef>
                 <a:spcPts val="400"/>
               </a:spcBef>
-              <a:defRPr sz="2600" b="1">
-                <a:solidFill>
-                  <a:srgbClr val="EDE6D6"/>
-                </a:solidFill>
-                <a:latin typeface="Georgia"/>
+              <a:defRPr sz="1300">
+                <a:solidFill>
+                  <a:srgbClr val="B8B1A2"/>
+                </a:solidFill>
+                <a:latin typeface="Segoe UI"/>
               </a:defRPr>
             </a:pPr>
             <a:r>
-              <a:t>Most assistants forget you between tabs. The rest remember you in secret.</a:t>
-            </a:r>
-          </a:p>
-        </p:txBody>
-      </p:sp>
-      <p:sp>
-        <p:nvSpPr>
-          <p:cNvPr id="4" name="Rounded Rectangle 3"/>
+              <a:t>You can't see what they kept, why it shaped an answer, or fix one wrong fact without starting over.</a:t>
+            </a:r>
+          </a:p>
+        </p:txBody>
+      </p:sp>
+      <p:sp>
+        <p:nvSpPr>
+          <p:cNvPr id="4" name="Rectangle 3"/>
+          <p:cNvSpPr/>
+          <p:nvPr/>
+        </p:nvSpPr>
+        <p:spPr>
+          <a:xfrm>
+            <a:off x="731520" y="1664208"/>
+            <a:ext cx="100584" cy="100584"/>
+          </a:xfrm>
+          <a:prstGeom prst="rect">
+            <a:avLst/>
+          </a:prstGeom>
+          <a:solidFill>
+            <a:srgbClr val="E7DCC3"/>
+          </a:solidFill>
+          <a:ln>
+            <a:noFill/>
+          </a:ln>
+        </p:spPr>
+        <p:style>
+          <a:lnRef idx="1">
+            <a:schemeClr val="accent1"/>
+          </a:lnRef>
+          <a:fillRef idx="3">
+            <a:schemeClr val="accent1"/>
+          </a:fillRef>
+          <a:effectRef idx="2">
+            <a:schemeClr val="accent1"/>
+          </a:effectRef>
+          <a:fontRef idx="minor">
+            <a:schemeClr val="lt1"/>
+          </a:fontRef>
+        </p:style>
+        <p:txBody>
+          <a:bodyPr rtlCol="0" anchor="ctr"/>
+          <a:lstStyle/>
+          <a:p>
+            <a:pPr algn="ctr"/>
+          </a:p>
+        </p:txBody>
+      </p:sp>
+      <p:sp>
+        <p:nvSpPr>
+          <p:cNvPr id="5" name="Rectangle 4"/>
+          <p:cNvSpPr/>
+          <p:nvPr/>
+        </p:nvSpPr>
+        <p:spPr>
+          <a:xfrm>
+            <a:off x="877824" y="1664208"/>
+            <a:ext cx="100584" cy="100584"/>
+          </a:xfrm>
+          <a:prstGeom prst="rect">
+            <a:avLst/>
+          </a:prstGeom>
+          <a:solidFill>
+            <a:srgbClr val="F2C12E"/>
+          </a:solidFill>
+          <a:ln>
+            <a:noFill/>
+          </a:ln>
+        </p:spPr>
+        <p:style>
+          <a:lnRef idx="1">
+            <a:schemeClr val="accent1"/>
+          </a:lnRef>
+          <a:fillRef idx="3">
+            <a:schemeClr val="accent1"/>
+          </a:fillRef>
+          <a:effectRef idx="2">
+            <a:schemeClr val="accent1"/>
+          </a:effectRef>
+          <a:fontRef idx="minor">
+            <a:schemeClr val="lt1"/>
+          </a:fontRef>
+        </p:style>
+        <p:txBody>
+          <a:bodyPr rtlCol="0" anchor="ctr"/>
+          <a:lstStyle/>
+          <a:p>
+            <a:pPr algn="ctr"/>
+          </a:p>
+        </p:txBody>
+      </p:sp>
+      <p:sp>
+        <p:nvSpPr>
+          <p:cNvPr id="6" name="Rectangle 5"/>
+          <p:cNvSpPr/>
+          <p:nvPr/>
+        </p:nvSpPr>
+        <p:spPr>
+          <a:xfrm>
+            <a:off x="1024128" y="1664208"/>
+            <a:ext cx="100584" cy="100584"/>
+          </a:xfrm>
+          <a:prstGeom prst="rect">
+            <a:avLst/>
+          </a:prstGeom>
+          <a:solidFill>
+            <a:srgbClr val="3A63D8"/>
+          </a:solidFill>
+          <a:ln>
+            <a:noFill/>
+          </a:ln>
+        </p:spPr>
+        <p:style>
+          <a:lnRef idx="1">
+            <a:schemeClr val="accent1"/>
+          </a:lnRef>
+          <a:fillRef idx="3">
+            <a:schemeClr val="accent1"/>
+          </a:fillRef>
+          <a:effectRef idx="2">
+            <a:schemeClr val="accent1"/>
+          </a:effectRef>
+          <a:fontRef idx="minor">
+            <a:schemeClr val="lt1"/>
+          </a:fontRef>
+        </p:style>
+        <p:txBody>
+          <a:bodyPr rtlCol="0" anchor="ctr"/>
+          <a:lstStyle/>
+          <a:p>
+            <a:pPr algn="ctr"/>
+          </a:p>
+        </p:txBody>
+      </p:sp>
+      <p:sp>
+        <p:nvSpPr>
+          <p:cNvPr id="7" name="Rectangle 6"/>
+          <p:cNvSpPr/>
+          <p:nvPr/>
+        </p:nvSpPr>
+        <p:spPr>
+          <a:xfrm>
+            <a:off x="1170432" y="1664208"/>
+            <a:ext cx="100584" cy="100584"/>
+          </a:xfrm>
+          <a:prstGeom prst="rect">
+            <a:avLst/>
+          </a:prstGeom>
+          <a:solidFill>
+            <a:srgbClr val="F08A24"/>
+          </a:solidFill>
+          <a:ln>
+            <a:noFill/>
+          </a:ln>
+        </p:spPr>
+        <p:style>
+          <a:lnRef idx="1">
+            <a:schemeClr val="accent1"/>
+          </a:lnRef>
+          <a:fillRef idx="3">
+            <a:schemeClr val="accent1"/>
+          </a:fillRef>
+          <a:effectRef idx="2">
+            <a:schemeClr val="accent1"/>
+          </a:effectRef>
+          <a:fontRef idx="minor">
+            <a:schemeClr val="lt1"/>
+          </a:fontRef>
+        </p:style>
+        <p:txBody>
+          <a:bodyPr rtlCol="0" anchor="ctr"/>
+          <a:lstStyle/>
+          <a:p>
+            <a:pPr algn="ctr"/>
+          </a:p>
+        </p:txBody>
+      </p:sp>
+      <p:sp>
+        <p:nvSpPr>
+          <p:cNvPr id="8" name="Rectangle 7"/>
+          <p:cNvSpPr/>
+          <p:nvPr/>
+        </p:nvSpPr>
+        <p:spPr>
+          <a:xfrm>
+            <a:off x="1316736" y="1664208"/>
+            <a:ext cx="100584" cy="100584"/>
+          </a:xfrm>
+          <a:prstGeom prst="rect">
+            <a:avLst/>
+          </a:prstGeom>
+          <a:solidFill>
+            <a:srgbClr val="D8432F"/>
+          </a:solidFill>
+          <a:ln>
+            <a:noFill/>
+          </a:ln>
+        </p:spPr>
+        <p:style>
+          <a:lnRef idx="1">
+            <a:schemeClr val="accent1"/>
+          </a:lnRef>
+          <a:fillRef idx="3">
+            <a:schemeClr val="accent1"/>
+          </a:fillRef>
+          <a:effectRef idx="2">
+            <a:schemeClr val="accent1"/>
+          </a:effectRef>
+          <a:fontRef idx="minor">
+            <a:schemeClr val="lt1"/>
+          </a:fontRef>
+        </p:style>
+        <p:txBody>
+          <a:bodyPr rtlCol="0" anchor="ctr"/>
+          <a:lstStyle/>
+          <a:p>
+            <a:pPr algn="ctr"/>
+          </a:p>
+        </p:txBody>
+      </p:sp>
+      <p:sp>
+        <p:nvSpPr>
+          <p:cNvPr id="9" name="Rectangle 8"/>
+          <p:cNvSpPr/>
+          <p:nvPr/>
+        </p:nvSpPr>
+        <p:spPr>
+          <a:xfrm>
+            <a:off x="1463040" y="1664208"/>
+            <a:ext cx="100584" cy="100584"/>
+          </a:xfrm>
+          <a:prstGeom prst="rect">
+            <a:avLst/>
+          </a:prstGeom>
+          <a:solidFill>
+            <a:srgbClr val="B23A7A"/>
+          </a:solidFill>
+          <a:ln>
+            <a:noFill/>
+          </a:ln>
+        </p:spPr>
+        <p:style>
+          <a:lnRef idx="1">
+            <a:schemeClr val="accent1"/>
+          </a:lnRef>
+          <a:fillRef idx="3">
+            <a:schemeClr val="accent1"/>
+          </a:fillRef>
+          <a:effectRef idx="2">
+            <a:schemeClr val="accent1"/>
+          </a:effectRef>
+          <a:fontRef idx="minor">
+            <a:schemeClr val="lt1"/>
+          </a:fontRef>
+        </p:style>
+        <p:txBody>
+          <a:bodyPr rtlCol="0" anchor="ctr"/>
+          <a:lstStyle/>
+          <a:p>
+            <a:pPr algn="ctr"/>
+          </a:p>
+        </p:txBody>
+      </p:sp>
+      <p:sp>
+        <p:nvSpPr>
+          <p:cNvPr id="10" name="Rectangle 9"/>
+          <p:cNvSpPr/>
+          <p:nvPr/>
+        </p:nvSpPr>
+        <p:spPr>
+          <a:xfrm>
+            <a:off x="1609344" y="1664208"/>
+            <a:ext cx="100584" cy="100584"/>
+          </a:xfrm>
+          <a:prstGeom prst="rect">
+            <a:avLst/>
+          </a:prstGeom>
+          <a:solidFill>
+            <a:srgbClr val="2E9E6B"/>
+          </a:solidFill>
+          <a:ln>
+            <a:noFill/>
+          </a:ln>
+        </p:spPr>
+        <p:style>
+          <a:lnRef idx="1">
+            <a:schemeClr val="accent1"/>
+          </a:lnRef>
+          <a:fillRef idx="3">
+            <a:schemeClr val="accent1"/>
+          </a:fillRef>
+          <a:effectRef idx="2">
+            <a:schemeClr val="accent1"/>
+          </a:effectRef>
+          <a:fontRef idx="minor">
+            <a:schemeClr val="lt1"/>
+          </a:fontRef>
+        </p:style>
+        <p:txBody>
+          <a:bodyPr rtlCol="0" anchor="ctr"/>
+          <a:lstStyle/>
+          <a:p>
+            <a:pPr algn="ctr"/>
+          </a:p>
+        </p:txBody>
+      </p:sp>
+      <p:sp>
+        <p:nvSpPr>
+          <p:cNvPr id="11" name="Rectangle 10"/>
+          <p:cNvSpPr/>
+          <p:nvPr/>
+        </p:nvSpPr>
+        <p:spPr>
+          <a:xfrm>
+            <a:off x="1755648" y="1664208"/>
+            <a:ext cx="100584" cy="100584"/>
+          </a:xfrm>
+          <a:prstGeom prst="rect">
+            <a:avLst/>
+          </a:prstGeom>
+          <a:solidFill>
+            <a:srgbClr val="74B8E0"/>
+          </a:solidFill>
+          <a:ln>
+            <a:noFill/>
+          </a:ln>
+        </p:spPr>
+        <p:style>
+          <a:lnRef idx="1">
+            <a:schemeClr val="accent1"/>
+          </a:lnRef>
+          <a:fillRef idx="3">
+            <a:schemeClr val="accent1"/>
+          </a:fillRef>
+          <a:effectRef idx="2">
+            <a:schemeClr val="accent1"/>
+          </a:effectRef>
+          <a:fontRef idx="minor">
+            <a:schemeClr val="lt1"/>
+          </a:fontRef>
+        </p:style>
+        <p:txBody>
+          <a:bodyPr rtlCol="0" anchor="ctr"/>
+          <a:lstStyle/>
+          <a:p>
+            <a:pPr algn="ctr"/>
+          </a:p>
+        </p:txBody>
+      </p:sp>
+      <p:sp>
+        <p:nvSpPr>
+          <p:cNvPr id="12" name="Rectangle 11"/>
+          <p:cNvSpPr/>
+          <p:nvPr/>
+        </p:nvSpPr>
+        <p:spPr>
+          <a:xfrm>
+            <a:off x="1901952" y="1664208"/>
+            <a:ext cx="100584" cy="100584"/>
+          </a:xfrm>
+          <a:prstGeom prst="rect">
+            <a:avLst/>
+          </a:prstGeom>
+          <a:solidFill>
+            <a:srgbClr val="6B4BC2"/>
+          </a:solidFill>
+          <a:ln>
+            <a:noFill/>
+          </a:ln>
+        </p:spPr>
+        <p:style>
+          <a:lnRef idx="1">
+            <a:schemeClr val="accent1"/>
+          </a:lnRef>
+          <a:fillRef idx="3">
+            <a:schemeClr val="accent1"/>
+          </a:fillRef>
+          <a:effectRef idx="2">
+            <a:schemeClr val="accent1"/>
+          </a:effectRef>
+          <a:fontRef idx="minor">
+            <a:schemeClr val="lt1"/>
+          </a:fontRef>
+        </p:style>
+        <p:txBody>
+          <a:bodyPr rtlCol="0" anchor="ctr"/>
+          <a:lstStyle/>
+          <a:p>
+            <a:pPr algn="ctr"/>
+          </a:p>
+        </p:txBody>
+      </p:sp>
+      <p:sp>
+        <p:nvSpPr>
+          <p:cNvPr id="13" name="Rectangle 12"/>
+          <p:cNvSpPr/>
+          <p:nvPr/>
+        </p:nvSpPr>
+        <p:spPr>
+          <a:xfrm>
+            <a:off x="2048256" y="1664208"/>
+            <a:ext cx="100584" cy="100584"/>
+          </a:xfrm>
+          <a:prstGeom prst="rect">
+            <a:avLst/>
+          </a:prstGeom>
+          <a:solidFill>
+            <a:srgbClr val="A7A23C"/>
+          </a:solidFill>
+          <a:ln>
+            <a:noFill/>
+          </a:ln>
+        </p:spPr>
+        <p:style>
+          <a:lnRef idx="1">
+            <a:schemeClr val="accent1"/>
+          </a:lnRef>
+          <a:fillRef idx="3">
+            <a:schemeClr val="accent1"/>
+          </a:fillRef>
+          <a:effectRef idx="2">
+            <a:schemeClr val="accent1"/>
+          </a:effectRef>
+          <a:fontRef idx="minor">
+            <a:schemeClr val="lt1"/>
+          </a:fontRef>
+        </p:style>
+        <p:txBody>
+          <a:bodyPr rtlCol="0" anchor="ctr"/>
+          <a:lstStyle/>
+          <a:p>
+            <a:pPr algn="ctr"/>
+          </a:p>
+        </p:txBody>
+      </p:sp>
+      <p:sp>
+        <p:nvSpPr>
+          <p:cNvPr id="14" name="Rounded Rectangle 13"/>
           <p:cNvSpPr/>
           <p:nvPr/>
         </p:nvSpPr>
@@ -4725,7 +5367,7 @@
           </a:solidFill>
           <a:ln>
             <a:solidFill>
-              <a:srgbClr val="2E2B26"/>
+              <a:srgbClr val="2A2722"/>
             </a:solidFill>
           </a:ln>
         </p:spPr>
@@ -4744,25 +5386,25 @@
           </a:fontRef>
         </p:style>
         <p:txBody>
-          <a:bodyPr rtlCol="0" anchor="ctr" wrap="square" lIns="274320" tIns="274320"/>
+          <a:bodyPr rtlCol="0" anchor="ctr" wrap="square" lIns="320040" tIns="320040"/>
           <a:lstStyle/>
           <a:p>
             <a:pPr algn="ctr">
               <a:defRPr sz="1800" b="1">
                 <a:solidFill>
-                  <a:srgbClr val="E2553A"/>
+                  <a:srgbClr val="EDE6D6"/>
                 </a:solidFill>
                 <a:latin typeface="Georgia"/>
               </a:defRPr>
             </a:pPr>
             <a:r>
-              <a:t>Amnesia by Default</a:t>
+              <a:t>   Amnesia by default</a:t>
             </a:r>
           </a:p>
           <a:p>
             <a:pPr>
               <a:spcBef>
-                <a:spcPts val="1400"/>
+                <a:spcPts val="1600"/>
               </a:spcBef>
               <a:defRPr sz="1300">
                 <a:solidFill>
@@ -4772,14 +5414,57 @@
               </a:defRPr>
             </a:pPr>
             <a:r>
-              <a:t>Standard AI chats start from scratch every conversation. Users repeat their preferences, stack constraints, and deadlines endlessly. Context windows are temporary.</a:t>
-            </a:r>
-          </a:p>
-        </p:txBody>
-      </p:sp>
-      <p:sp>
-        <p:nvSpPr>
-          <p:cNvPr id="5" name="Rounded Rectangle 4"/>
+              <a:t>Standard assistants wipe context between tabs. You re-explain preferences, constraints, and project rules endlessly.</a:t>
+            </a:r>
+          </a:p>
+        </p:txBody>
+      </p:sp>
+      <p:sp>
+        <p:nvSpPr>
+          <p:cNvPr id="15" name="Rectangle 14"/>
+          <p:cNvSpPr/>
+          <p:nvPr/>
+        </p:nvSpPr>
+        <p:spPr>
+          <a:xfrm>
+            <a:off x="1051560" y="2331720"/>
+            <a:ext cx="128016" cy="128016"/>
+          </a:xfrm>
+          <a:prstGeom prst="rect">
+            <a:avLst/>
+          </a:prstGeom>
+          <a:solidFill>
+            <a:srgbClr val="D8432F"/>
+          </a:solidFill>
+          <a:ln>
+            <a:noFill/>
+          </a:ln>
+        </p:spPr>
+        <p:style>
+          <a:lnRef idx="1">
+            <a:schemeClr val="accent1"/>
+          </a:lnRef>
+          <a:fillRef idx="3">
+            <a:schemeClr val="accent1"/>
+          </a:fillRef>
+          <a:effectRef idx="2">
+            <a:schemeClr val="accent1"/>
+          </a:effectRef>
+          <a:fontRef idx="minor">
+            <a:schemeClr val="lt1"/>
+          </a:fontRef>
+        </p:style>
+        <p:txBody>
+          <a:bodyPr rtlCol="0" anchor="ctr"/>
+          <a:lstStyle/>
+          <a:p>
+            <a:pPr algn="ctr"/>
+          </a:p>
+        </p:txBody>
+      </p:sp>
+      <p:sp>
+        <p:nvSpPr>
+          <p:cNvPr id="16" name="Rounded Rectangle 15"/>
           <p:cNvSpPr/>
           <p:nvPr/>
         </p:nvSpPr>
@@ -4796,7 +5481,7 @@
           </a:solidFill>
           <a:ln>
             <a:solidFill>
-              <a:srgbClr val="2E2B26"/>
+              <a:srgbClr val="2A2722"/>
             </a:solidFill>
           </a:ln>
         </p:spPr>
@@ -4815,25 +5500,25 @@
           </a:fontRef>
         </p:style>
         <p:txBody>
-          <a:bodyPr rtlCol="0" anchor="ctr" wrap="square" lIns="274320" tIns="274320"/>
+          <a:bodyPr rtlCol="0" anchor="ctr" wrap="square" lIns="320040" tIns="320040"/>
           <a:lstStyle/>
           <a:p>
             <a:pPr algn="ctr">
               <a:defRPr sz="1800" b="1">
                 <a:solidFill>
-                  <a:srgbClr val="F08A24"/>
+                  <a:srgbClr val="EDE6D6"/>
                 </a:solidFill>
                 <a:latin typeface="Georgia"/>
               </a:defRPr>
             </a:pPr>
             <a:r>
-              <a:t>The Black Box of Memory</a:t>
+              <a:t>   Invisible black box</a:t>
             </a:r>
           </a:p>
           <a:p>
             <a:pPr>
               <a:spcBef>
-                <a:spcPts val="1400"/>
+                <a:spcPts val="1600"/>
               </a:spcBef>
               <a:defRPr sz="1300">
                 <a:solidFill>
@@ -4843,14 +5528,57 @@
               </a:defRPr>
             </a:pPr>
             <a:r>
-              <a:t>When memory is bolted onto agents, it happens invisibly in prompt caches. Users cannot see what was stored, cannot inspect why an answer changed, and cannot remove stale assumptions.</a:t>
-            </a:r>
-          </a:p>
-        </p:txBody>
-      </p:sp>
-      <p:sp>
-        <p:nvSpPr>
-          <p:cNvPr id="6" name="Rounded Rectangle 5"/>
+              <a:t>When memory is added, facts sit hidden in prompt caches. You cannot inspect what was kept or why an answer changed.</a:t>
+            </a:r>
+          </a:p>
+        </p:txBody>
+      </p:sp>
+      <p:sp>
+        <p:nvSpPr>
+          <p:cNvPr id="17" name="Rectangle 16"/>
+          <p:cNvSpPr/>
+          <p:nvPr/>
+        </p:nvSpPr>
+        <p:spPr>
+          <a:xfrm>
+            <a:off x="4709160" y="2331720"/>
+            <a:ext cx="128016" cy="128016"/>
+          </a:xfrm>
+          <a:prstGeom prst="rect">
+            <a:avLst/>
+          </a:prstGeom>
+          <a:solidFill>
+            <a:srgbClr val="D8432F"/>
+          </a:solidFill>
+          <a:ln>
+            <a:noFill/>
+          </a:ln>
+        </p:spPr>
+        <p:style>
+          <a:lnRef idx="1">
+            <a:schemeClr val="accent1"/>
+          </a:lnRef>
+          <a:fillRef idx="3">
+            <a:schemeClr val="accent1"/>
+          </a:fillRef>
+          <a:effectRef idx="2">
+            <a:schemeClr val="accent1"/>
+          </a:effectRef>
+          <a:fontRef idx="minor">
+            <a:schemeClr val="lt1"/>
+          </a:fontRef>
+        </p:style>
+        <p:txBody>
+          <a:bodyPr rtlCol="0" anchor="ctr"/>
+          <a:lstStyle/>
+          <a:p>
+            <a:pPr algn="ctr"/>
+          </a:p>
+        </p:txBody>
+      </p:sp>
+      <p:sp>
+        <p:nvSpPr>
+          <p:cNvPr id="18" name="Rounded Rectangle 17"/>
           <p:cNvSpPr/>
           <p:nvPr/>
         </p:nvSpPr>
@@ -4867,7 +5595,7 @@
           </a:solidFill>
           <a:ln>
             <a:solidFill>
-              <a:srgbClr val="2E2B26"/>
+              <a:srgbClr val="2A2722"/>
             </a:solidFill>
           </a:ln>
         </p:spPr>
@@ -4886,25 +5614,25 @@
           </a:fontRef>
         </p:style>
         <p:txBody>
-          <a:bodyPr rtlCol="0" anchor="ctr" wrap="square" lIns="274320" tIns="274320"/>
+          <a:bodyPr rtlCol="0" anchor="ctr" wrap="square" lIns="320040" tIns="320040"/>
           <a:lstStyle/>
           <a:p>
             <a:pPr algn="ctr">
               <a:defRPr sz="1800" b="1">
                 <a:solidFill>
-                  <a:srgbClr val="F2C12E"/>
+                  <a:srgbClr val="EDE6D6"/>
                 </a:solidFill>
                 <a:latin typeface="Georgia"/>
               </a:defRPr>
             </a:pPr>
             <a:r>
-              <a:t>The Missing Contract</a:t>
+              <a:t>   Zero steerability</a:t>
             </a:r>
           </a:p>
           <a:p>
             <a:pPr>
               <a:spcBef>
-                <a:spcPts val="1400"/>
+                <a:spcPts val="1600"/>
               </a:spcBef>
               <a:defRPr sz="1300">
                 <a:solidFill>
@@ -4914,8 +5642,51 @@
               </a:defRPr>
             </a:pPr>
             <a:r>
-              <a:t>Production-grade agentic memory requires transparency: visible inline citations, inspectable recall scores, and total user steerability (correct, expire, forget).</a:t>
-            </a:r>
+              <a:t>No way to correct a stale assumption or delete a private belief without wiping everything and starting over.</a:t>
+            </a:r>
+          </a:p>
+        </p:txBody>
+      </p:sp>
+      <p:sp>
+        <p:nvSpPr>
+          <p:cNvPr id="19" name="Rectangle 18"/>
+          <p:cNvSpPr/>
+          <p:nvPr/>
+        </p:nvSpPr>
+        <p:spPr>
+          <a:xfrm>
+            <a:off x="8366760" y="2331720"/>
+            <a:ext cx="128016" cy="128016"/>
+          </a:xfrm>
+          <a:prstGeom prst="rect">
+            <a:avLst/>
+          </a:prstGeom>
+          <a:solidFill>
+            <a:srgbClr val="D8432F"/>
+          </a:solidFill>
+          <a:ln>
+            <a:noFill/>
+          </a:ln>
+        </p:spPr>
+        <p:style>
+          <a:lnRef idx="1">
+            <a:schemeClr val="accent1"/>
+          </a:lnRef>
+          <a:fillRef idx="3">
+            <a:schemeClr val="accent1"/>
+          </a:fillRef>
+          <a:effectRef idx="2">
+            <a:schemeClr val="accent1"/>
+          </a:effectRef>
+          <a:fontRef idx="minor">
+            <a:schemeClr val="lt1"/>
+          </a:fontRef>
+        </p:style>
+        <p:txBody>
+          <a:bodyPr rtlCol="0" anchor="ctr"/>
+          <a:lstStyle/>
+          <a:p>
+            <a:pPr algn="ctr"/>
           </a:p>
         </p:txBody>
       </p:sp>
@@ -4988,8 +5759,8 @@
         </p:nvSpPr>
         <p:spPr>
           <a:xfrm>
-            <a:off x="731520" y="457200"/>
-            <a:ext cx="10728655" cy="1097280"/>
+            <a:off x="731520" y="411480"/>
+            <a:ext cx="10728655" cy="1188720"/>
           </a:xfrm>
           <a:prstGeom prst="rect">
             <a:avLst/>
@@ -5005,13 +5776,29 @@
             <a:pPr>
               <a:defRPr sz="1100" b="1">
                 <a:solidFill>
-                  <a:srgbClr val="F2C12E"/>
+                  <a:srgbClr val="8A8477"/>
                 </a:solidFill>
                 <a:latin typeface="Consolas"/>
               </a:defRPr>
             </a:pPr>
             <a:r>
-              <a:t>02 / THE SOLUTION</a:t>
+              <a:t>03</a:t>
+            </a:r>
+          </a:p>
+          <a:p>
+            <a:pPr>
+              <a:spcBef>
+                <a:spcPts val="300"/>
+              </a:spcBef>
+              <a:defRPr sz="2800" b="1">
+                <a:solidFill>
+                  <a:srgbClr val="EDE6D6"/>
+                </a:solidFill>
+                <a:latin typeface="Georgia"/>
+              </a:defRPr>
+            </a:pPr>
+            <a:r>
+              <a:t>Every answer shows its receipts</a:t>
             </a:r>
           </a:p>
           <a:p>
@@ -5019,22 +5806,452 @@
               <a:spcBef>
                 <a:spcPts val="400"/>
               </a:spcBef>
-              <a:defRPr sz="2600" b="1">
-                <a:solidFill>
-                  <a:srgbClr val="EDE6D6"/>
-                </a:solidFill>
-                <a:latin typeface="Georgia"/>
+              <a:defRPr sz="1300">
+                <a:solidFill>
+                  <a:srgbClr val="B8B1A2"/>
+                </a:solidFill>
+                <a:latin typeface="Segoe UI"/>
               </a:defRPr>
             </a:pPr>
             <a:r>
-              <a:t>An agent with visible, steerable long-term memory on MongoDB Atlas.</a:t>
-            </a:r>
+              <a:t>Citations per memory · the scores behind each pick · one click to answer again without memory.</a:t>
+            </a:r>
+          </a:p>
+        </p:txBody>
+      </p:sp>
+      <p:sp>
+        <p:nvSpPr>
+          <p:cNvPr id="4" name="Rectangle 3"/>
+          <p:cNvSpPr/>
+          <p:nvPr/>
+        </p:nvSpPr>
+        <p:spPr>
+          <a:xfrm>
+            <a:off x="731520" y="1664208"/>
+            <a:ext cx="100584" cy="100584"/>
+          </a:xfrm>
+          <a:prstGeom prst="rect">
+            <a:avLst/>
+          </a:prstGeom>
+          <a:solidFill>
+            <a:srgbClr val="E7DCC3"/>
+          </a:solidFill>
+          <a:ln>
+            <a:noFill/>
+          </a:ln>
+        </p:spPr>
+        <p:style>
+          <a:lnRef idx="1">
+            <a:schemeClr val="accent1"/>
+          </a:lnRef>
+          <a:fillRef idx="3">
+            <a:schemeClr val="accent1"/>
+          </a:fillRef>
+          <a:effectRef idx="2">
+            <a:schemeClr val="accent1"/>
+          </a:effectRef>
+          <a:fontRef idx="minor">
+            <a:schemeClr val="lt1"/>
+          </a:fontRef>
+        </p:style>
+        <p:txBody>
+          <a:bodyPr rtlCol="0" anchor="ctr"/>
+          <a:lstStyle/>
+          <a:p>
+            <a:pPr algn="ctr"/>
+          </a:p>
+        </p:txBody>
+      </p:sp>
+      <p:sp>
+        <p:nvSpPr>
+          <p:cNvPr id="5" name="Rectangle 4"/>
+          <p:cNvSpPr/>
+          <p:nvPr/>
+        </p:nvSpPr>
+        <p:spPr>
+          <a:xfrm>
+            <a:off x="877824" y="1664208"/>
+            <a:ext cx="100584" cy="100584"/>
+          </a:xfrm>
+          <a:prstGeom prst="rect">
+            <a:avLst/>
+          </a:prstGeom>
+          <a:solidFill>
+            <a:srgbClr val="F2C12E"/>
+          </a:solidFill>
+          <a:ln>
+            <a:noFill/>
+          </a:ln>
+        </p:spPr>
+        <p:style>
+          <a:lnRef idx="1">
+            <a:schemeClr val="accent1"/>
+          </a:lnRef>
+          <a:fillRef idx="3">
+            <a:schemeClr val="accent1"/>
+          </a:fillRef>
+          <a:effectRef idx="2">
+            <a:schemeClr val="accent1"/>
+          </a:effectRef>
+          <a:fontRef idx="minor">
+            <a:schemeClr val="lt1"/>
+          </a:fontRef>
+        </p:style>
+        <p:txBody>
+          <a:bodyPr rtlCol="0" anchor="ctr"/>
+          <a:lstStyle/>
+          <a:p>
+            <a:pPr algn="ctr"/>
+          </a:p>
+        </p:txBody>
+      </p:sp>
+      <p:sp>
+        <p:nvSpPr>
+          <p:cNvPr id="6" name="Rectangle 5"/>
+          <p:cNvSpPr/>
+          <p:nvPr/>
+        </p:nvSpPr>
+        <p:spPr>
+          <a:xfrm>
+            <a:off x="1024128" y="1664208"/>
+            <a:ext cx="100584" cy="100584"/>
+          </a:xfrm>
+          <a:prstGeom prst="rect">
+            <a:avLst/>
+          </a:prstGeom>
+          <a:solidFill>
+            <a:srgbClr val="3A63D8"/>
+          </a:solidFill>
+          <a:ln>
+            <a:noFill/>
+          </a:ln>
+        </p:spPr>
+        <p:style>
+          <a:lnRef idx="1">
+            <a:schemeClr val="accent1"/>
+          </a:lnRef>
+          <a:fillRef idx="3">
+            <a:schemeClr val="accent1"/>
+          </a:fillRef>
+          <a:effectRef idx="2">
+            <a:schemeClr val="accent1"/>
+          </a:effectRef>
+          <a:fontRef idx="minor">
+            <a:schemeClr val="lt1"/>
+          </a:fontRef>
+        </p:style>
+        <p:txBody>
+          <a:bodyPr rtlCol="0" anchor="ctr"/>
+          <a:lstStyle/>
+          <a:p>
+            <a:pPr algn="ctr"/>
+          </a:p>
+        </p:txBody>
+      </p:sp>
+      <p:sp>
+        <p:nvSpPr>
+          <p:cNvPr id="7" name="Rectangle 6"/>
+          <p:cNvSpPr/>
+          <p:nvPr/>
+        </p:nvSpPr>
+        <p:spPr>
+          <a:xfrm>
+            <a:off x="1170432" y="1664208"/>
+            <a:ext cx="100584" cy="100584"/>
+          </a:xfrm>
+          <a:prstGeom prst="rect">
+            <a:avLst/>
+          </a:prstGeom>
+          <a:solidFill>
+            <a:srgbClr val="F08A24"/>
+          </a:solidFill>
+          <a:ln>
+            <a:noFill/>
+          </a:ln>
+        </p:spPr>
+        <p:style>
+          <a:lnRef idx="1">
+            <a:schemeClr val="accent1"/>
+          </a:lnRef>
+          <a:fillRef idx="3">
+            <a:schemeClr val="accent1"/>
+          </a:fillRef>
+          <a:effectRef idx="2">
+            <a:schemeClr val="accent1"/>
+          </a:effectRef>
+          <a:fontRef idx="minor">
+            <a:schemeClr val="lt1"/>
+          </a:fontRef>
+        </p:style>
+        <p:txBody>
+          <a:bodyPr rtlCol="0" anchor="ctr"/>
+          <a:lstStyle/>
+          <a:p>
+            <a:pPr algn="ctr"/>
+          </a:p>
+        </p:txBody>
+      </p:sp>
+      <p:sp>
+        <p:nvSpPr>
+          <p:cNvPr id="8" name="Rectangle 7"/>
+          <p:cNvSpPr/>
+          <p:nvPr/>
+        </p:nvSpPr>
+        <p:spPr>
+          <a:xfrm>
+            <a:off x="1316736" y="1664208"/>
+            <a:ext cx="100584" cy="100584"/>
+          </a:xfrm>
+          <a:prstGeom prst="rect">
+            <a:avLst/>
+          </a:prstGeom>
+          <a:solidFill>
+            <a:srgbClr val="D8432F"/>
+          </a:solidFill>
+          <a:ln>
+            <a:noFill/>
+          </a:ln>
+        </p:spPr>
+        <p:style>
+          <a:lnRef idx="1">
+            <a:schemeClr val="accent1"/>
+          </a:lnRef>
+          <a:fillRef idx="3">
+            <a:schemeClr val="accent1"/>
+          </a:fillRef>
+          <a:effectRef idx="2">
+            <a:schemeClr val="accent1"/>
+          </a:effectRef>
+          <a:fontRef idx="minor">
+            <a:schemeClr val="lt1"/>
+          </a:fontRef>
+        </p:style>
+        <p:txBody>
+          <a:bodyPr rtlCol="0" anchor="ctr"/>
+          <a:lstStyle/>
+          <a:p>
+            <a:pPr algn="ctr"/>
+          </a:p>
+        </p:txBody>
+      </p:sp>
+      <p:sp>
+        <p:nvSpPr>
+          <p:cNvPr id="9" name="Rectangle 8"/>
+          <p:cNvSpPr/>
+          <p:nvPr/>
+        </p:nvSpPr>
+        <p:spPr>
+          <a:xfrm>
+            <a:off x="1463040" y="1664208"/>
+            <a:ext cx="100584" cy="100584"/>
+          </a:xfrm>
+          <a:prstGeom prst="rect">
+            <a:avLst/>
+          </a:prstGeom>
+          <a:solidFill>
+            <a:srgbClr val="B23A7A"/>
+          </a:solidFill>
+          <a:ln>
+            <a:noFill/>
+          </a:ln>
+        </p:spPr>
+        <p:style>
+          <a:lnRef idx="1">
+            <a:schemeClr val="accent1"/>
+          </a:lnRef>
+          <a:fillRef idx="3">
+            <a:schemeClr val="accent1"/>
+          </a:fillRef>
+          <a:effectRef idx="2">
+            <a:schemeClr val="accent1"/>
+          </a:effectRef>
+          <a:fontRef idx="minor">
+            <a:schemeClr val="lt1"/>
+          </a:fontRef>
+        </p:style>
+        <p:txBody>
+          <a:bodyPr rtlCol="0" anchor="ctr"/>
+          <a:lstStyle/>
+          <a:p>
+            <a:pPr algn="ctr"/>
+          </a:p>
+        </p:txBody>
+      </p:sp>
+      <p:sp>
+        <p:nvSpPr>
+          <p:cNvPr id="10" name="Rectangle 9"/>
+          <p:cNvSpPr/>
+          <p:nvPr/>
+        </p:nvSpPr>
+        <p:spPr>
+          <a:xfrm>
+            <a:off x="1609344" y="1664208"/>
+            <a:ext cx="100584" cy="100584"/>
+          </a:xfrm>
+          <a:prstGeom prst="rect">
+            <a:avLst/>
+          </a:prstGeom>
+          <a:solidFill>
+            <a:srgbClr val="2E9E6B"/>
+          </a:solidFill>
+          <a:ln>
+            <a:noFill/>
+          </a:ln>
+        </p:spPr>
+        <p:style>
+          <a:lnRef idx="1">
+            <a:schemeClr val="accent1"/>
+          </a:lnRef>
+          <a:fillRef idx="3">
+            <a:schemeClr val="accent1"/>
+          </a:fillRef>
+          <a:effectRef idx="2">
+            <a:schemeClr val="accent1"/>
+          </a:effectRef>
+          <a:fontRef idx="minor">
+            <a:schemeClr val="lt1"/>
+          </a:fontRef>
+        </p:style>
+        <p:txBody>
+          <a:bodyPr rtlCol="0" anchor="ctr"/>
+          <a:lstStyle/>
+          <a:p>
+            <a:pPr algn="ctr"/>
+          </a:p>
+        </p:txBody>
+      </p:sp>
+      <p:sp>
+        <p:nvSpPr>
+          <p:cNvPr id="11" name="Rectangle 10"/>
+          <p:cNvSpPr/>
+          <p:nvPr/>
+        </p:nvSpPr>
+        <p:spPr>
+          <a:xfrm>
+            <a:off x="1755648" y="1664208"/>
+            <a:ext cx="100584" cy="100584"/>
+          </a:xfrm>
+          <a:prstGeom prst="rect">
+            <a:avLst/>
+          </a:prstGeom>
+          <a:solidFill>
+            <a:srgbClr val="74B8E0"/>
+          </a:solidFill>
+          <a:ln>
+            <a:noFill/>
+          </a:ln>
+        </p:spPr>
+        <p:style>
+          <a:lnRef idx="1">
+            <a:schemeClr val="accent1"/>
+          </a:lnRef>
+          <a:fillRef idx="3">
+            <a:schemeClr val="accent1"/>
+          </a:fillRef>
+          <a:effectRef idx="2">
+            <a:schemeClr val="accent1"/>
+          </a:effectRef>
+          <a:fontRef idx="minor">
+            <a:schemeClr val="lt1"/>
+          </a:fontRef>
+        </p:style>
+        <p:txBody>
+          <a:bodyPr rtlCol="0" anchor="ctr"/>
+          <a:lstStyle/>
+          <a:p>
+            <a:pPr algn="ctr"/>
+          </a:p>
+        </p:txBody>
+      </p:sp>
+      <p:sp>
+        <p:nvSpPr>
+          <p:cNvPr id="12" name="Rectangle 11"/>
+          <p:cNvSpPr/>
+          <p:nvPr/>
+        </p:nvSpPr>
+        <p:spPr>
+          <a:xfrm>
+            <a:off x="1901952" y="1664208"/>
+            <a:ext cx="100584" cy="100584"/>
+          </a:xfrm>
+          <a:prstGeom prst="rect">
+            <a:avLst/>
+          </a:prstGeom>
+          <a:solidFill>
+            <a:srgbClr val="6B4BC2"/>
+          </a:solidFill>
+          <a:ln>
+            <a:noFill/>
+          </a:ln>
+        </p:spPr>
+        <p:style>
+          <a:lnRef idx="1">
+            <a:schemeClr val="accent1"/>
+          </a:lnRef>
+          <a:fillRef idx="3">
+            <a:schemeClr val="accent1"/>
+          </a:fillRef>
+          <a:effectRef idx="2">
+            <a:schemeClr val="accent1"/>
+          </a:effectRef>
+          <a:fontRef idx="minor">
+            <a:schemeClr val="lt1"/>
+          </a:fontRef>
+        </p:style>
+        <p:txBody>
+          <a:bodyPr rtlCol="0" anchor="ctr"/>
+          <a:lstStyle/>
+          <a:p>
+            <a:pPr algn="ctr"/>
+          </a:p>
+        </p:txBody>
+      </p:sp>
+      <p:sp>
+        <p:nvSpPr>
+          <p:cNvPr id="13" name="Rectangle 12"/>
+          <p:cNvSpPr/>
+          <p:nvPr/>
+        </p:nvSpPr>
+        <p:spPr>
+          <a:xfrm>
+            <a:off x="2048256" y="1664208"/>
+            <a:ext cx="100584" cy="100584"/>
+          </a:xfrm>
+          <a:prstGeom prst="rect">
+            <a:avLst/>
+          </a:prstGeom>
+          <a:solidFill>
+            <a:srgbClr val="A7A23C"/>
+          </a:solidFill>
+          <a:ln>
+            <a:noFill/>
+          </a:ln>
+        </p:spPr>
+        <p:style>
+          <a:lnRef idx="1">
+            <a:schemeClr val="accent1"/>
+          </a:lnRef>
+          <a:fillRef idx="3">
+            <a:schemeClr val="accent1"/>
+          </a:fillRef>
+          <a:effectRef idx="2">
+            <a:schemeClr val="accent1"/>
+          </a:effectRef>
+          <a:fontRef idx="minor">
+            <a:schemeClr val="lt1"/>
+          </a:fontRef>
+        </p:style>
+        <p:txBody>
+          <a:bodyPr rtlCol="0" anchor="ctr"/>
+          <a:lstStyle/>
+          <a:p>
+            <a:pPr algn="ctr"/>
           </a:p>
         </p:txBody>
       </p:sp>
       <p:pic>
         <p:nvPicPr>
-          <p:cNvPr id="4" name="Picture 3" descr="image.png"/>
+          <p:cNvPr id="14" name="Picture 13" descr="image.png"/>
           <p:cNvPicPr>
             <a:picLocks noChangeAspect="1"/>
           </p:cNvPicPr>
@@ -5048,8 +6265,8 @@
         </p:blipFill>
         <p:spPr>
           <a:xfrm>
-            <a:off x="731520" y="1828800"/>
-            <a:ext cx="6583680" cy="4114800"/>
+            <a:off x="731520" y="1920240"/>
+            <a:ext cx="6949440" cy="3909060"/>
           </a:xfrm>
           <a:prstGeom prst="rect">
             <a:avLst/>
@@ -5058,14 +6275,14 @@
       </p:pic>
       <p:sp>
         <p:nvSpPr>
-          <p:cNvPr id="5" name="TextBox 4"/>
+          <p:cNvPr id="15" name="TextBox 14"/>
           <p:cNvSpPr txBox="1"/>
           <p:nvPr/>
         </p:nvSpPr>
         <p:spPr>
           <a:xfrm>
-            <a:off x="7589520" y="1828800"/>
-            <a:ext cx="3840480" cy="4389120"/>
+            <a:off x="7955279" y="1920240"/>
+            <a:ext cx="3474720" cy="4389120"/>
           </a:xfrm>
           <a:prstGeom prst="rect">
             <a:avLst/>
@@ -5073,7 +6290,7 @@
           <a:noFill/>
         </p:spPr>
         <p:txBody>
-          <a:bodyPr wrap="square">
+          <a:bodyPr wrap="square" lIns="0" tIns="0">
             <a:spAutoFit/>
           </a:bodyPr>
           <a:lstStyle/>
@@ -5087,7 +6304,7 @@
               </a:defRPr>
             </a:pPr>
             <a:r>
-              <a:t>Visible Citations</a:t>
+              <a:t>Inline Citations</a:t>
             </a:r>
           </a:p>
           <a:p>
@@ -5103,23 +6320,23 @@
               </a:defRPr>
             </a:pPr>
             <a:r>
-              <a:t>Every reply cites exact memories that shaped it. Click citations to inspect underlying units and multi-channel score breakdowns.</a:t>
+              <a:t>Every fact cites its underlying memory with a clickable token.</a:t>
             </a:r>
           </a:p>
           <a:p>
             <a:pPr>
               <a:spcBef>
-                <a:spcPts val="1600"/>
+                <a:spcPts val="2000"/>
               </a:spcBef>
               <a:defRPr sz="1600" b="1">
                 <a:solidFill>
-                  <a:srgbClr val="4FB37E"/>
+                  <a:srgbClr val="2E9E6B"/>
                 </a:solidFill>
                 <a:latin typeface="Georgia"/>
               </a:defRPr>
             </a:pPr>
             <a:r>
-              <a:t>Complete Steerability</a:t>
+              <a:t>Live Score Trace</a:t>
             </a:r>
           </a:p>
           <a:p>
@@ -5135,23 +6352,23 @@
               </a:defRPr>
             </a:pPr>
             <a:r>
-              <a:t>Review held items, correct facts with automatic superseding history, set minute-level TTL expiry, or permanently forget on command.</a:t>
+              <a:t>Inspect exact relevance, recency decay, and type boost in the Memory Lens.</a:t>
             </a:r>
           </a:p>
           <a:p>
             <a:pPr>
               <a:spcBef>
-                <a:spcPts val="1600"/>
+                <a:spcPts val="2000"/>
               </a:spcBef>
               <a:defRPr sz="1600" b="1">
                 <a:solidFill>
-                  <a:srgbClr val="EDE6D6"/>
+                  <a:srgbClr val="6B4BC2"/>
                 </a:solidFill>
                 <a:latin typeface="Georgia"/>
               </a:defRPr>
             </a:pPr>
             <a:r>
-              <a:t>Database-Enforced Truth</a:t>
+              <a:t>Ghost Diff Proof</a:t>
             </a:r>
           </a:p>
           <a:p>
@@ -5167,7 +6384,7 @@
               </a:defRPr>
             </a:pPr>
             <a:r>
-              <a:t>Atlas unique indexes guarantee single source of truth; pre-scan gates intercept secrets before storage; zero hallucinated recall.</a:t>
+              <a:t>Click 'Without memory' to see the instant word-by-word diff proving memory altered the answer.</a:t>
             </a:r>
           </a:p>
         </p:txBody>
@@ -5241,8 +6458,8 @@
         </p:nvSpPr>
         <p:spPr>
           <a:xfrm>
-            <a:off x="731520" y="457200"/>
-            <a:ext cx="10728655" cy="1097280"/>
+            <a:off x="731520" y="411480"/>
+            <a:ext cx="10728655" cy="1188720"/>
           </a:xfrm>
           <a:prstGeom prst="rect">
             <a:avLst/>
@@ -5258,13 +6475,29 @@
             <a:pPr>
               <a:defRPr sz="1100" b="1">
                 <a:solidFill>
-                  <a:srgbClr val="F2C12E"/>
+                  <a:srgbClr val="8A8477"/>
                 </a:solidFill>
                 <a:latin typeface="Consolas"/>
               </a:defRPr>
             </a:pPr>
             <a:r>
-              <a:t>03 / DEMO RUN</a:t>
+              <a:t>04</a:t>
+            </a:r>
+          </a:p>
+          <a:p>
+            <a:pPr>
+              <a:spcBef>
+                <a:spcPts val="300"/>
+              </a:spcBef>
+              <a:defRPr sz="2800" b="1">
+                <a:solidFill>
+                  <a:srgbClr val="EDE6D6"/>
+                </a:solidFill>
+                <a:latin typeface="Georgia"/>
+              </a:defRPr>
+            </a:pPr>
+            <a:r>
+              <a:t>The four things it does</a:t>
             </a:r>
           </a:p>
           <a:p>
@@ -5272,92 +6505,522 @@
               <a:spcBef>
                 <a:spcPts val="400"/>
               </a:spcBef>
-              <a:defRPr sz="2600" b="1">
-                <a:solidFill>
-                  <a:srgbClr val="EDE6D6"/>
-                </a:solidFill>
-                <a:latin typeface="Georgia"/>
+              <a:defRPr sz="1300">
+                <a:solidFill>
+                  <a:srgbClr val="B8B1A2"/>
+                </a:solidFill>
+                <a:latin typeface="Segoe UI"/>
               </a:defRPr>
             </a:pPr>
             <a:r>
-              <a:t>Tested live with Aarav Mehta — building Kestrel with two friends.</a:t>
+              <a:t>Remembers · Recalls and explains · Corrects with history · Forgets for real.</a:t>
+            </a:r>
+          </a:p>
+        </p:txBody>
+      </p:sp>
+      <p:sp>
+        <p:nvSpPr>
+          <p:cNvPr id="4" name="Rectangle 3"/>
+          <p:cNvSpPr/>
+          <p:nvPr/>
+        </p:nvSpPr>
+        <p:spPr>
+          <a:xfrm>
+            <a:off x="731520" y="1664208"/>
+            <a:ext cx="100584" cy="100584"/>
+          </a:xfrm>
+          <a:prstGeom prst="rect">
+            <a:avLst/>
+          </a:prstGeom>
+          <a:solidFill>
+            <a:srgbClr val="E7DCC3"/>
+          </a:solidFill>
+          <a:ln>
+            <a:noFill/>
+          </a:ln>
+        </p:spPr>
+        <p:style>
+          <a:lnRef idx="1">
+            <a:schemeClr val="accent1"/>
+          </a:lnRef>
+          <a:fillRef idx="3">
+            <a:schemeClr val="accent1"/>
+          </a:fillRef>
+          <a:effectRef idx="2">
+            <a:schemeClr val="accent1"/>
+          </a:effectRef>
+          <a:fontRef idx="minor">
+            <a:schemeClr val="lt1"/>
+          </a:fontRef>
+        </p:style>
+        <p:txBody>
+          <a:bodyPr rtlCol="0" anchor="ctr"/>
+          <a:lstStyle/>
+          <a:p>
+            <a:pPr algn="ctr"/>
+          </a:p>
+        </p:txBody>
+      </p:sp>
+      <p:sp>
+        <p:nvSpPr>
+          <p:cNvPr id="5" name="Rectangle 4"/>
+          <p:cNvSpPr/>
+          <p:nvPr/>
+        </p:nvSpPr>
+        <p:spPr>
+          <a:xfrm>
+            <a:off x="877824" y="1664208"/>
+            <a:ext cx="100584" cy="100584"/>
+          </a:xfrm>
+          <a:prstGeom prst="rect">
+            <a:avLst/>
+          </a:prstGeom>
+          <a:solidFill>
+            <a:srgbClr val="F2C12E"/>
+          </a:solidFill>
+          <a:ln>
+            <a:noFill/>
+          </a:ln>
+        </p:spPr>
+        <p:style>
+          <a:lnRef idx="1">
+            <a:schemeClr val="accent1"/>
+          </a:lnRef>
+          <a:fillRef idx="3">
+            <a:schemeClr val="accent1"/>
+          </a:fillRef>
+          <a:effectRef idx="2">
+            <a:schemeClr val="accent1"/>
+          </a:effectRef>
+          <a:fontRef idx="minor">
+            <a:schemeClr val="lt1"/>
+          </a:fontRef>
+        </p:style>
+        <p:txBody>
+          <a:bodyPr rtlCol="0" anchor="ctr"/>
+          <a:lstStyle/>
+          <a:p>
+            <a:pPr algn="ctr"/>
+          </a:p>
+        </p:txBody>
+      </p:sp>
+      <p:sp>
+        <p:nvSpPr>
+          <p:cNvPr id="6" name="Rectangle 5"/>
+          <p:cNvSpPr/>
+          <p:nvPr/>
+        </p:nvSpPr>
+        <p:spPr>
+          <a:xfrm>
+            <a:off x="1024128" y="1664208"/>
+            <a:ext cx="100584" cy="100584"/>
+          </a:xfrm>
+          <a:prstGeom prst="rect">
+            <a:avLst/>
+          </a:prstGeom>
+          <a:solidFill>
+            <a:srgbClr val="3A63D8"/>
+          </a:solidFill>
+          <a:ln>
+            <a:noFill/>
+          </a:ln>
+        </p:spPr>
+        <p:style>
+          <a:lnRef idx="1">
+            <a:schemeClr val="accent1"/>
+          </a:lnRef>
+          <a:fillRef idx="3">
+            <a:schemeClr val="accent1"/>
+          </a:fillRef>
+          <a:effectRef idx="2">
+            <a:schemeClr val="accent1"/>
+          </a:effectRef>
+          <a:fontRef idx="minor">
+            <a:schemeClr val="lt1"/>
+          </a:fontRef>
+        </p:style>
+        <p:txBody>
+          <a:bodyPr rtlCol="0" anchor="ctr"/>
+          <a:lstStyle/>
+          <a:p>
+            <a:pPr algn="ctr"/>
+          </a:p>
+        </p:txBody>
+      </p:sp>
+      <p:sp>
+        <p:nvSpPr>
+          <p:cNvPr id="7" name="Rectangle 6"/>
+          <p:cNvSpPr/>
+          <p:nvPr/>
+        </p:nvSpPr>
+        <p:spPr>
+          <a:xfrm>
+            <a:off x="1170432" y="1664208"/>
+            <a:ext cx="100584" cy="100584"/>
+          </a:xfrm>
+          <a:prstGeom prst="rect">
+            <a:avLst/>
+          </a:prstGeom>
+          <a:solidFill>
+            <a:srgbClr val="F08A24"/>
+          </a:solidFill>
+          <a:ln>
+            <a:noFill/>
+          </a:ln>
+        </p:spPr>
+        <p:style>
+          <a:lnRef idx="1">
+            <a:schemeClr val="accent1"/>
+          </a:lnRef>
+          <a:fillRef idx="3">
+            <a:schemeClr val="accent1"/>
+          </a:fillRef>
+          <a:effectRef idx="2">
+            <a:schemeClr val="accent1"/>
+          </a:effectRef>
+          <a:fontRef idx="minor">
+            <a:schemeClr val="lt1"/>
+          </a:fontRef>
+        </p:style>
+        <p:txBody>
+          <a:bodyPr rtlCol="0" anchor="ctr"/>
+          <a:lstStyle/>
+          <a:p>
+            <a:pPr algn="ctr"/>
+          </a:p>
+        </p:txBody>
+      </p:sp>
+      <p:sp>
+        <p:nvSpPr>
+          <p:cNvPr id="8" name="Rectangle 7"/>
+          <p:cNvSpPr/>
+          <p:nvPr/>
+        </p:nvSpPr>
+        <p:spPr>
+          <a:xfrm>
+            <a:off x="1316736" y="1664208"/>
+            <a:ext cx="100584" cy="100584"/>
+          </a:xfrm>
+          <a:prstGeom prst="rect">
+            <a:avLst/>
+          </a:prstGeom>
+          <a:solidFill>
+            <a:srgbClr val="D8432F"/>
+          </a:solidFill>
+          <a:ln>
+            <a:noFill/>
+          </a:ln>
+        </p:spPr>
+        <p:style>
+          <a:lnRef idx="1">
+            <a:schemeClr val="accent1"/>
+          </a:lnRef>
+          <a:fillRef idx="3">
+            <a:schemeClr val="accent1"/>
+          </a:fillRef>
+          <a:effectRef idx="2">
+            <a:schemeClr val="accent1"/>
+          </a:effectRef>
+          <a:fontRef idx="minor">
+            <a:schemeClr val="lt1"/>
+          </a:fontRef>
+        </p:style>
+        <p:txBody>
+          <a:bodyPr rtlCol="0" anchor="ctr"/>
+          <a:lstStyle/>
+          <a:p>
+            <a:pPr algn="ctr"/>
+          </a:p>
+        </p:txBody>
+      </p:sp>
+      <p:sp>
+        <p:nvSpPr>
+          <p:cNvPr id="9" name="Rectangle 8"/>
+          <p:cNvSpPr/>
+          <p:nvPr/>
+        </p:nvSpPr>
+        <p:spPr>
+          <a:xfrm>
+            <a:off x="1463040" y="1664208"/>
+            <a:ext cx="100584" cy="100584"/>
+          </a:xfrm>
+          <a:prstGeom prst="rect">
+            <a:avLst/>
+          </a:prstGeom>
+          <a:solidFill>
+            <a:srgbClr val="B23A7A"/>
+          </a:solidFill>
+          <a:ln>
+            <a:noFill/>
+          </a:ln>
+        </p:spPr>
+        <p:style>
+          <a:lnRef idx="1">
+            <a:schemeClr val="accent1"/>
+          </a:lnRef>
+          <a:fillRef idx="3">
+            <a:schemeClr val="accent1"/>
+          </a:fillRef>
+          <a:effectRef idx="2">
+            <a:schemeClr val="accent1"/>
+          </a:effectRef>
+          <a:fontRef idx="minor">
+            <a:schemeClr val="lt1"/>
+          </a:fontRef>
+        </p:style>
+        <p:txBody>
+          <a:bodyPr rtlCol="0" anchor="ctr"/>
+          <a:lstStyle/>
+          <a:p>
+            <a:pPr algn="ctr"/>
+          </a:p>
+        </p:txBody>
+      </p:sp>
+      <p:sp>
+        <p:nvSpPr>
+          <p:cNvPr id="10" name="Rectangle 9"/>
+          <p:cNvSpPr/>
+          <p:nvPr/>
+        </p:nvSpPr>
+        <p:spPr>
+          <a:xfrm>
+            <a:off x="1609344" y="1664208"/>
+            <a:ext cx="100584" cy="100584"/>
+          </a:xfrm>
+          <a:prstGeom prst="rect">
+            <a:avLst/>
+          </a:prstGeom>
+          <a:solidFill>
+            <a:srgbClr val="2E9E6B"/>
+          </a:solidFill>
+          <a:ln>
+            <a:noFill/>
+          </a:ln>
+        </p:spPr>
+        <p:style>
+          <a:lnRef idx="1">
+            <a:schemeClr val="accent1"/>
+          </a:lnRef>
+          <a:fillRef idx="3">
+            <a:schemeClr val="accent1"/>
+          </a:fillRef>
+          <a:effectRef idx="2">
+            <a:schemeClr val="accent1"/>
+          </a:effectRef>
+          <a:fontRef idx="minor">
+            <a:schemeClr val="lt1"/>
+          </a:fontRef>
+        </p:style>
+        <p:txBody>
+          <a:bodyPr rtlCol="0" anchor="ctr"/>
+          <a:lstStyle/>
+          <a:p>
+            <a:pPr algn="ctr"/>
+          </a:p>
+        </p:txBody>
+      </p:sp>
+      <p:sp>
+        <p:nvSpPr>
+          <p:cNvPr id="11" name="Rectangle 10"/>
+          <p:cNvSpPr/>
+          <p:nvPr/>
+        </p:nvSpPr>
+        <p:spPr>
+          <a:xfrm>
+            <a:off x="1755648" y="1664208"/>
+            <a:ext cx="100584" cy="100584"/>
+          </a:xfrm>
+          <a:prstGeom prst="rect">
+            <a:avLst/>
+          </a:prstGeom>
+          <a:solidFill>
+            <a:srgbClr val="74B8E0"/>
+          </a:solidFill>
+          <a:ln>
+            <a:noFill/>
+          </a:ln>
+        </p:spPr>
+        <p:style>
+          <a:lnRef idx="1">
+            <a:schemeClr val="accent1"/>
+          </a:lnRef>
+          <a:fillRef idx="3">
+            <a:schemeClr val="accent1"/>
+          </a:fillRef>
+          <a:effectRef idx="2">
+            <a:schemeClr val="accent1"/>
+          </a:effectRef>
+          <a:fontRef idx="minor">
+            <a:schemeClr val="lt1"/>
+          </a:fontRef>
+        </p:style>
+        <p:txBody>
+          <a:bodyPr rtlCol="0" anchor="ctr"/>
+          <a:lstStyle/>
+          <a:p>
+            <a:pPr algn="ctr"/>
+          </a:p>
+        </p:txBody>
+      </p:sp>
+      <p:sp>
+        <p:nvSpPr>
+          <p:cNvPr id="12" name="Rectangle 11"/>
+          <p:cNvSpPr/>
+          <p:nvPr/>
+        </p:nvSpPr>
+        <p:spPr>
+          <a:xfrm>
+            <a:off x="1901952" y="1664208"/>
+            <a:ext cx="100584" cy="100584"/>
+          </a:xfrm>
+          <a:prstGeom prst="rect">
+            <a:avLst/>
+          </a:prstGeom>
+          <a:solidFill>
+            <a:srgbClr val="6B4BC2"/>
+          </a:solidFill>
+          <a:ln>
+            <a:noFill/>
+          </a:ln>
+        </p:spPr>
+        <p:style>
+          <a:lnRef idx="1">
+            <a:schemeClr val="accent1"/>
+          </a:lnRef>
+          <a:fillRef idx="3">
+            <a:schemeClr val="accent1"/>
+          </a:fillRef>
+          <a:effectRef idx="2">
+            <a:schemeClr val="accent1"/>
+          </a:effectRef>
+          <a:fontRef idx="minor">
+            <a:schemeClr val="lt1"/>
+          </a:fontRef>
+        </p:style>
+        <p:txBody>
+          <a:bodyPr rtlCol="0" anchor="ctr"/>
+          <a:lstStyle/>
+          <a:p>
+            <a:pPr algn="ctr"/>
+          </a:p>
+        </p:txBody>
+      </p:sp>
+      <p:sp>
+        <p:nvSpPr>
+          <p:cNvPr id="13" name="Rectangle 12"/>
+          <p:cNvSpPr/>
+          <p:nvPr/>
+        </p:nvSpPr>
+        <p:spPr>
+          <a:xfrm>
+            <a:off x="2048256" y="1664208"/>
+            <a:ext cx="100584" cy="100584"/>
+          </a:xfrm>
+          <a:prstGeom prst="rect">
+            <a:avLst/>
+          </a:prstGeom>
+          <a:solidFill>
+            <a:srgbClr val="A7A23C"/>
+          </a:solidFill>
+          <a:ln>
+            <a:noFill/>
+          </a:ln>
+        </p:spPr>
+        <p:style>
+          <a:lnRef idx="1">
+            <a:schemeClr val="accent1"/>
+          </a:lnRef>
+          <a:fillRef idx="3">
+            <a:schemeClr val="accent1"/>
+          </a:fillRef>
+          <a:effectRef idx="2">
+            <a:schemeClr val="accent1"/>
+          </a:effectRef>
+          <a:fontRef idx="minor">
+            <a:schemeClr val="lt1"/>
+          </a:fontRef>
+        </p:style>
+        <p:txBody>
+          <a:bodyPr rtlCol="0" anchor="ctr"/>
+          <a:lstStyle/>
+          <a:p>
+            <a:pPr algn="ctr"/>
+          </a:p>
+        </p:txBody>
+      </p:sp>
+      <p:sp>
+        <p:nvSpPr>
+          <p:cNvPr id="14" name="Rounded Rectangle 13"/>
+          <p:cNvSpPr/>
+          <p:nvPr/>
+        </p:nvSpPr>
+        <p:spPr>
+          <a:xfrm>
+            <a:off x="731520" y="2011680"/>
+            <a:ext cx="2514600" cy="4114800"/>
+          </a:xfrm>
+          <a:prstGeom prst="roundRect">
+            <a:avLst/>
+          </a:prstGeom>
+          <a:solidFill>
+            <a:srgbClr val="161512"/>
+          </a:solidFill>
+          <a:ln>
+            <a:solidFill>
+              <a:srgbClr val="2A2722"/>
+            </a:solidFill>
+          </a:ln>
+        </p:spPr>
+        <p:style>
+          <a:lnRef idx="1">
+            <a:schemeClr val="accent1"/>
+          </a:lnRef>
+          <a:fillRef idx="3">
+            <a:schemeClr val="accent1"/>
+          </a:fillRef>
+          <a:effectRef idx="2">
+            <a:schemeClr val="accent1"/>
+          </a:effectRef>
+          <a:fontRef idx="minor">
+            <a:schemeClr val="lt1"/>
+          </a:fontRef>
+        </p:style>
+        <p:txBody>
+          <a:bodyPr rtlCol="0" anchor="ctr" wrap="square" lIns="228600" tIns="228600"/>
+          <a:lstStyle/>
+          <a:p>
+            <a:pPr algn="ctr">
+              <a:defRPr sz="2400" b="1">
+                <a:solidFill>
+                  <a:srgbClr val="F2C12E"/>
+                </a:solidFill>
+                <a:latin typeface="Consolas"/>
+              </a:defRPr>
+            </a:pPr>
+            <a:r>
+              <a:t>01</a:t>
             </a:r>
           </a:p>
           <a:p>
             <a:pPr>
               <a:spcBef>
-                <a:spcPts val="300"/>
+                <a:spcPts val="1200"/>
               </a:spcBef>
-              <a:defRPr sz="1300">
-                <a:solidFill>
-                  <a:srgbClr val="8A8477"/>
-                </a:solidFill>
-                <a:latin typeface="Segoe UI"/>
+              <a:defRPr sz="1500" b="1">
+                <a:solidFill>
+                  <a:srgbClr val="EDE6D6"/>
+                </a:solidFill>
+                <a:latin typeface="Georgia"/>
               </a:defRPr>
             </a:pPr>
             <a:r>
-              <a:t>The four-beat evaluation path tested seamlessly on production.</a:t>
-            </a:r>
-          </a:p>
-        </p:txBody>
-      </p:sp>
-      <p:sp>
-        <p:nvSpPr>
-          <p:cNvPr id="4" name="Rounded Rectangle 3"/>
-          <p:cNvSpPr/>
-          <p:nvPr/>
-        </p:nvSpPr>
-        <p:spPr>
-          <a:xfrm>
-            <a:off x="731520" y="2011680"/>
-            <a:ext cx="5120640" cy="1920240"/>
-          </a:xfrm>
-          <a:prstGeom prst="roundRect">
-            <a:avLst/>
-          </a:prstGeom>
-          <a:solidFill>
-            <a:srgbClr val="161512"/>
-          </a:solidFill>
-          <a:ln>
-            <a:solidFill>
-              <a:srgbClr val="2E2B26"/>
-            </a:solidFill>
-          </a:ln>
-        </p:spPr>
-        <p:style>
-          <a:lnRef idx="1">
-            <a:schemeClr val="accent1"/>
-          </a:lnRef>
-          <a:fillRef idx="3">
-            <a:schemeClr val="accent1"/>
-          </a:fillRef>
-          <a:effectRef idx="2">
-            <a:schemeClr val="accent1"/>
-          </a:effectRef>
-          <a:fontRef idx="minor">
-            <a:schemeClr val="lt1"/>
-          </a:fontRef>
-        </p:style>
-        <p:txBody>
-          <a:bodyPr rtlCol="0" anchor="ctr" wrap="square" lIns="274320" tIns="274320"/>
-          <a:lstStyle/>
-          <a:p>
-            <a:pPr algn="ctr">
-              <a:defRPr sz="1600" b="1">
-                <a:solidFill>
-                  <a:srgbClr val="F2C12E"/>
-                </a:solidFill>
-                <a:latin typeface="Georgia"/>
-              </a:defRPr>
-            </a:pPr>
-            <a:r>
-              <a:t>Beat 1: Instant Entry &amp; Demo Seeding</a:t>
+              <a:t>REMEMBERS</a:t>
             </a:r>
           </a:p>
           <a:p>
             <a:pPr>
               <a:spcBef>
-                <a:spcPts val="800"/>
+                <a:spcPts val="1200"/>
               </a:spcBef>
               <a:defRPr sz="1200">
                 <a:solidFill>
@@ -5367,21 +7030,21 @@
               </a:defRPr>
             </a:pPr>
             <a:r>
-              <a:t>Enter as guest -&gt; Load demo memories. Seeds 38 typed memories across Kestrel, Personal, and Internships spaces with 768-d vector embeddings.</a:t>
-            </a:r>
-          </a:p>
-        </p:txBody>
-      </p:sp>
-      <p:sp>
-        <p:nvSpPr>
-          <p:cNvPr id="5" name="Rounded Rectangle 4"/>
-          <p:cNvSpPr/>
-          <p:nvPr/>
-        </p:nvSpPr>
-        <p:spPr>
-          <a:xfrm>
-            <a:off x="6126480" y="2011680"/>
-            <a:ext cx="5120640" cy="1920240"/>
+              <a:t>Atomic extraction from conversation stream, typed with Whitney blocks.</a:t>
+            </a:r>
+          </a:p>
+        </p:txBody>
+      </p:sp>
+      <p:sp>
+        <p:nvSpPr>
+          <p:cNvPr id="15" name="Rounded Rectangle 14"/>
+          <p:cNvSpPr/>
+          <p:nvPr/>
+        </p:nvSpPr>
+        <p:spPr>
+          <a:xfrm>
+            <a:off x="3474720" y="2011680"/>
+            <a:ext cx="2514600" cy="4114800"/>
           </a:xfrm>
           <a:prstGeom prst="roundRect">
             <a:avLst/>
@@ -5391,7 +7054,7 @@
           </a:solidFill>
           <a:ln>
             <a:solidFill>
-              <a:srgbClr val="2E2B26"/>
+              <a:srgbClr val="2A2722"/>
             </a:solidFill>
           </a:ln>
         </p:spPr>
@@ -5410,25 +7073,41 @@
           </a:fontRef>
         </p:style>
         <p:txBody>
-          <a:bodyPr rtlCol="0" anchor="ctr" wrap="square" lIns="274320" tIns="274320"/>
+          <a:bodyPr rtlCol="0" anchor="ctr" wrap="square" lIns="228600" tIns="228600"/>
           <a:lstStyle/>
           <a:p>
             <a:pPr algn="ctr">
-              <a:defRPr sz="1600" b="1">
-                <a:solidFill>
-                  <a:srgbClr val="4FB37E"/>
-                </a:solidFill>
-                <a:latin typeface="Georgia"/>
+              <a:defRPr sz="2400" b="1">
+                <a:solidFill>
+                  <a:srgbClr val="2E9E6B"/>
+                </a:solidFill>
+                <a:latin typeface="Consolas"/>
               </a:defRPr>
             </a:pPr>
             <a:r>
-              <a:t>Beat 2: Recall &amp; The Ghost Diff</a:t>
+              <a:t>02</a:t>
             </a:r>
           </a:p>
           <a:p>
             <a:pPr>
               <a:spcBef>
-                <a:spcPts val="800"/>
+                <a:spcPts val="1200"/>
+              </a:spcBef>
+              <a:defRPr sz="1500" b="1">
+                <a:solidFill>
+                  <a:srgbClr val="EDE6D6"/>
+                </a:solidFill>
+                <a:latin typeface="Georgia"/>
+              </a:defRPr>
+            </a:pPr>
+            <a:r>
+              <a:t>RECALLS &amp; EXPLAINS</a:t>
+            </a:r>
+          </a:p>
+          <a:p>
+            <a:pPr>
+              <a:spcBef>
+                <a:spcPts val="1200"/>
               </a:spcBef>
               <a:defRPr sz="1200">
                 <a:solidFill>
@@ -5438,21 +7117,21 @@
               </a:defRPr>
             </a:pPr>
             <a:r>
-              <a:t>Prompt: 'What is our launch plan for Kestrel?' Radahn cites Kestrel's 7 Nov 9 PM IST beta constraint, Aarav's 5-bullet preference, and 500 pilots goal. 'Without memory' shows live word-level diff.</a:t>
-            </a:r>
-          </a:p>
-        </p:txBody>
-      </p:sp>
-      <p:sp>
-        <p:nvSpPr>
-          <p:cNvPr id="6" name="Rounded Rectangle 5"/>
-          <p:cNvSpPr/>
-          <p:nvPr/>
-        </p:nvSpPr>
-        <p:spPr>
-          <a:xfrm>
-            <a:off x="731520" y="4206240"/>
-            <a:ext cx="5120640" cy="1920240"/>
+              <a:t>Four-channel fusion re-ranked by score; top 8 injected with audit trace.</a:t>
+            </a:r>
+          </a:p>
+        </p:txBody>
+      </p:sp>
+      <p:sp>
+        <p:nvSpPr>
+          <p:cNvPr id="16" name="Rounded Rectangle 15"/>
+          <p:cNvSpPr/>
+          <p:nvPr/>
+        </p:nvSpPr>
+        <p:spPr>
+          <a:xfrm>
+            <a:off x="6217920" y="2011680"/>
+            <a:ext cx="2514600" cy="4114800"/>
           </a:xfrm>
           <a:prstGeom prst="roundRect">
             <a:avLst/>
@@ -5462,7 +7141,7 @@
           </a:solidFill>
           <a:ln>
             <a:solidFill>
-              <a:srgbClr val="2E2B26"/>
+              <a:srgbClr val="2A2722"/>
             </a:solidFill>
           </a:ln>
         </p:spPr>
@@ -5481,25 +7160,41 @@
           </a:fontRef>
         </p:style>
         <p:txBody>
-          <a:bodyPr rtlCol="0" anchor="ctr" wrap="square" lIns="274320" tIns="274320"/>
+          <a:bodyPr rtlCol="0" anchor="ctr" wrap="square" lIns="228600" tIns="228600"/>
           <a:lstStyle/>
           <a:p>
             <a:pPr algn="ctr">
-              <a:defRPr sz="1600" b="1">
+              <a:defRPr sz="2400" b="1">
                 <a:solidFill>
                   <a:srgbClr val="F08A24"/>
                 </a:solidFill>
-                <a:latin typeface="Georgia"/>
+                <a:latin typeface="Consolas"/>
               </a:defRPr>
             </a:pPr>
             <a:r>
-              <a:t>Beat 3: Hard Cases Handled Live</a:t>
+              <a:t>03</a:t>
             </a:r>
           </a:p>
           <a:p>
             <a:pPr>
               <a:spcBef>
-                <a:spcPts val="800"/>
+                <a:spcPts val="1200"/>
+              </a:spcBef>
+              <a:defRPr sz="1500" b="1">
+                <a:solidFill>
+                  <a:srgbClr val="EDE6D6"/>
+                </a:solidFill>
+                <a:latin typeface="Georgia"/>
+              </a:defRPr>
+            </a:pPr>
+            <a:r>
+              <a:t>CORRECTS WITH HISTORY</a:t>
+            </a:r>
+          </a:p>
+          <a:p>
+            <a:pPr>
+              <a:spcBef>
+                <a:spcPts val="1200"/>
               </a:spcBef>
               <a:defRPr sz="1200">
                 <a:solidFill>
@@ -5509,21 +7204,21 @@
               </a:defRPr>
             </a:pPr>
             <a:r>
-              <a:t>Correction: 'Actually, the beta launch moved to 10 PM.' (Superseded with history chain). Sensitive memory held in Review. Credentials blocked by privacy gate.</a:t>
-            </a:r>
-          </a:p>
-        </p:txBody>
-      </p:sp>
-      <p:sp>
-        <p:nvSpPr>
-          <p:cNvPr id="7" name="Rounded Rectangle 6"/>
-          <p:cNvSpPr/>
-          <p:nvPr/>
-        </p:nvSpPr>
-        <p:spPr>
-          <a:xfrm>
-            <a:off x="6126480" y="4206240"/>
-            <a:ext cx="5120640" cy="1920240"/>
+              <a:t>Single source of truth in Atlas supersedes outdated records with full audit log.</a:t>
+            </a:r>
+          </a:p>
+        </p:txBody>
+      </p:sp>
+      <p:sp>
+        <p:nvSpPr>
+          <p:cNvPr id="17" name="Rounded Rectangle 16"/>
+          <p:cNvSpPr/>
+          <p:nvPr/>
+        </p:nvSpPr>
+        <p:spPr>
+          <a:xfrm>
+            <a:off x="8961120" y="2011680"/>
+            <a:ext cx="2514600" cy="4114800"/>
           </a:xfrm>
           <a:prstGeom prst="roundRect">
             <a:avLst/>
@@ -5533,7 +7228,7 @@
           </a:solidFill>
           <a:ln>
             <a:solidFill>
-              <a:srgbClr val="2E2B26"/>
+              <a:srgbClr val="2A2722"/>
             </a:solidFill>
           </a:ln>
         </p:spPr>
@@ -5552,25 +7247,41 @@
           </a:fontRef>
         </p:style>
         <p:txBody>
-          <a:bodyPr rtlCol="0" anchor="ctr" wrap="square" lIns="274320" tIns="274320"/>
+          <a:bodyPr rtlCol="0" anchor="ctr" wrap="square" lIns="228600" tIns="228600"/>
           <a:lstStyle/>
           <a:p>
             <a:pPr algn="ctr">
-              <a:defRPr sz="1600" b="1">
-                <a:solidFill>
-                  <a:srgbClr val="EDE6D6"/>
-                </a:solidFill>
-                <a:latin typeface="Georgia"/>
+              <a:defRPr sz="2400" b="1">
+                <a:solidFill>
+                  <a:srgbClr val="D8432F"/>
+                </a:solidFill>
+                <a:latin typeface="Consolas"/>
               </a:defRPr>
             </a:pPr>
             <a:r>
-              <a:t>Beat 4: Atlas &amp; Realtime Reflection</a:t>
+              <a:t>04</a:t>
             </a:r>
           </a:p>
           <a:p>
             <a:pPr>
               <a:spcBef>
-                <a:spcPts val="800"/>
+                <a:spcPts val="1200"/>
+              </a:spcBef>
+              <a:defRPr sz="1500" b="1">
+                <a:solidFill>
+                  <a:srgbClr val="EDE6D6"/>
+                </a:solidFill>
+                <a:latin typeface="Georgia"/>
+              </a:defRPr>
+            </a:pPr>
+            <a:r>
+              <a:t>FORGETS FOR REAL</a:t>
+            </a:r>
+          </a:p>
+          <a:p>
+            <a:pPr>
+              <a:spcBef>
+                <a:spcPts val="1200"/>
               </a:spcBef>
               <a:defRPr sz="1200">
                 <a:solidFill>
@@ -5580,7 +7291,7 @@
               </a:defRPr>
             </a:pPr>
             <a:r>
-              <a:t>Explore memories in Atlas with 'As of' time travel. Watch live SSE change stream events in Activity, and trigger 'Reflect now' to consolidate feedback into strategies.</a:t>
+              <a:t>Physical hard delete of statement and vector; only empty tombstone remains.</a:t>
             </a:r>
           </a:p>
         </p:txBody>
@@ -5654,8 +7365,8 @@
         </p:nvSpPr>
         <p:spPr>
           <a:xfrm>
-            <a:off x="731520" y="457200"/>
-            <a:ext cx="10728655" cy="1097280"/>
+            <a:off x="731520" y="411480"/>
+            <a:ext cx="10728655" cy="1188720"/>
           </a:xfrm>
           <a:prstGeom prst="rect">
             <a:avLst/>
@@ -5671,13 +7382,29 @@
             <a:pPr>
               <a:defRPr sz="1100" b="1">
                 <a:solidFill>
-                  <a:srgbClr val="F2C12E"/>
+                  <a:srgbClr val="8A8477"/>
                 </a:solidFill>
                 <a:latin typeface="Consolas"/>
               </a:defRPr>
             </a:pPr>
             <a:r>
-              <a:t>04 / ARCHITECTURE</a:t>
+              <a:t>05</a:t>
+            </a:r>
+          </a:p>
+          <a:p>
+            <a:pPr>
+              <a:spcBef>
+                <a:spcPts val="300"/>
+              </a:spcBef>
+              <a:defRPr sz="2800" b="1">
+                <a:solidFill>
+                  <a:srgbClr val="EDE6D6"/>
+                </a:solidFill>
+                <a:latin typeface="Georgia"/>
+              </a:defRPr>
+            </a:pPr>
+            <a:r>
+              <a:t>How a memory is written</a:t>
             </a:r>
           </a:p>
           <a:p>
@@ -5685,70 +7412,500 @@
               <a:spcBef>
                 <a:spcPts val="400"/>
               </a:spcBef>
-              <a:defRPr sz="2600" b="1">
-                <a:solidFill>
-                  <a:srgbClr val="EDE6D6"/>
+              <a:defRPr sz="1300">
+                <a:solidFill>
+                  <a:srgbClr val="B8B1A2"/>
+                </a:solidFill>
+                <a:latin typeface="Segoe UI"/>
+              </a:defRPr>
+            </a:pPr>
+            <a:r>
+              <a:t>Privacy pre-scan → extract → policy gate → reconcile (add · confirm · supersede · skip) → transaction → live event.</a:t>
+            </a:r>
+          </a:p>
+        </p:txBody>
+      </p:sp>
+      <p:sp>
+        <p:nvSpPr>
+          <p:cNvPr id="4" name="Rectangle 3"/>
+          <p:cNvSpPr/>
+          <p:nvPr/>
+        </p:nvSpPr>
+        <p:spPr>
+          <a:xfrm>
+            <a:off x="731520" y="1664208"/>
+            <a:ext cx="100584" cy="100584"/>
+          </a:xfrm>
+          <a:prstGeom prst="rect">
+            <a:avLst/>
+          </a:prstGeom>
+          <a:solidFill>
+            <a:srgbClr val="E7DCC3"/>
+          </a:solidFill>
+          <a:ln>
+            <a:noFill/>
+          </a:ln>
+        </p:spPr>
+        <p:style>
+          <a:lnRef idx="1">
+            <a:schemeClr val="accent1"/>
+          </a:lnRef>
+          <a:fillRef idx="3">
+            <a:schemeClr val="accent1"/>
+          </a:fillRef>
+          <a:effectRef idx="2">
+            <a:schemeClr val="accent1"/>
+          </a:effectRef>
+          <a:fontRef idx="minor">
+            <a:schemeClr val="lt1"/>
+          </a:fontRef>
+        </p:style>
+        <p:txBody>
+          <a:bodyPr rtlCol="0" anchor="ctr"/>
+          <a:lstStyle/>
+          <a:p>
+            <a:pPr algn="ctr"/>
+          </a:p>
+        </p:txBody>
+      </p:sp>
+      <p:sp>
+        <p:nvSpPr>
+          <p:cNvPr id="5" name="Rectangle 4"/>
+          <p:cNvSpPr/>
+          <p:nvPr/>
+        </p:nvSpPr>
+        <p:spPr>
+          <a:xfrm>
+            <a:off x="877824" y="1664208"/>
+            <a:ext cx="100584" cy="100584"/>
+          </a:xfrm>
+          <a:prstGeom prst="rect">
+            <a:avLst/>
+          </a:prstGeom>
+          <a:solidFill>
+            <a:srgbClr val="F2C12E"/>
+          </a:solidFill>
+          <a:ln>
+            <a:noFill/>
+          </a:ln>
+        </p:spPr>
+        <p:style>
+          <a:lnRef idx="1">
+            <a:schemeClr val="accent1"/>
+          </a:lnRef>
+          <a:fillRef idx="3">
+            <a:schemeClr val="accent1"/>
+          </a:fillRef>
+          <a:effectRef idx="2">
+            <a:schemeClr val="accent1"/>
+          </a:effectRef>
+          <a:fontRef idx="minor">
+            <a:schemeClr val="lt1"/>
+          </a:fontRef>
+        </p:style>
+        <p:txBody>
+          <a:bodyPr rtlCol="0" anchor="ctr"/>
+          <a:lstStyle/>
+          <a:p>
+            <a:pPr algn="ctr"/>
+          </a:p>
+        </p:txBody>
+      </p:sp>
+      <p:sp>
+        <p:nvSpPr>
+          <p:cNvPr id="6" name="Rectangle 5"/>
+          <p:cNvSpPr/>
+          <p:nvPr/>
+        </p:nvSpPr>
+        <p:spPr>
+          <a:xfrm>
+            <a:off x="1024128" y="1664208"/>
+            <a:ext cx="100584" cy="100584"/>
+          </a:xfrm>
+          <a:prstGeom prst="rect">
+            <a:avLst/>
+          </a:prstGeom>
+          <a:solidFill>
+            <a:srgbClr val="3A63D8"/>
+          </a:solidFill>
+          <a:ln>
+            <a:noFill/>
+          </a:ln>
+        </p:spPr>
+        <p:style>
+          <a:lnRef idx="1">
+            <a:schemeClr val="accent1"/>
+          </a:lnRef>
+          <a:fillRef idx="3">
+            <a:schemeClr val="accent1"/>
+          </a:fillRef>
+          <a:effectRef idx="2">
+            <a:schemeClr val="accent1"/>
+          </a:effectRef>
+          <a:fontRef idx="minor">
+            <a:schemeClr val="lt1"/>
+          </a:fontRef>
+        </p:style>
+        <p:txBody>
+          <a:bodyPr rtlCol="0" anchor="ctr"/>
+          <a:lstStyle/>
+          <a:p>
+            <a:pPr algn="ctr"/>
+          </a:p>
+        </p:txBody>
+      </p:sp>
+      <p:sp>
+        <p:nvSpPr>
+          <p:cNvPr id="7" name="Rectangle 6"/>
+          <p:cNvSpPr/>
+          <p:nvPr/>
+        </p:nvSpPr>
+        <p:spPr>
+          <a:xfrm>
+            <a:off x="1170432" y="1664208"/>
+            <a:ext cx="100584" cy="100584"/>
+          </a:xfrm>
+          <a:prstGeom prst="rect">
+            <a:avLst/>
+          </a:prstGeom>
+          <a:solidFill>
+            <a:srgbClr val="F08A24"/>
+          </a:solidFill>
+          <a:ln>
+            <a:noFill/>
+          </a:ln>
+        </p:spPr>
+        <p:style>
+          <a:lnRef idx="1">
+            <a:schemeClr val="accent1"/>
+          </a:lnRef>
+          <a:fillRef idx="3">
+            <a:schemeClr val="accent1"/>
+          </a:fillRef>
+          <a:effectRef idx="2">
+            <a:schemeClr val="accent1"/>
+          </a:effectRef>
+          <a:fontRef idx="minor">
+            <a:schemeClr val="lt1"/>
+          </a:fontRef>
+        </p:style>
+        <p:txBody>
+          <a:bodyPr rtlCol="0" anchor="ctr"/>
+          <a:lstStyle/>
+          <a:p>
+            <a:pPr algn="ctr"/>
+          </a:p>
+        </p:txBody>
+      </p:sp>
+      <p:sp>
+        <p:nvSpPr>
+          <p:cNvPr id="8" name="Rectangle 7"/>
+          <p:cNvSpPr/>
+          <p:nvPr/>
+        </p:nvSpPr>
+        <p:spPr>
+          <a:xfrm>
+            <a:off x="1316736" y="1664208"/>
+            <a:ext cx="100584" cy="100584"/>
+          </a:xfrm>
+          <a:prstGeom prst="rect">
+            <a:avLst/>
+          </a:prstGeom>
+          <a:solidFill>
+            <a:srgbClr val="D8432F"/>
+          </a:solidFill>
+          <a:ln>
+            <a:noFill/>
+          </a:ln>
+        </p:spPr>
+        <p:style>
+          <a:lnRef idx="1">
+            <a:schemeClr val="accent1"/>
+          </a:lnRef>
+          <a:fillRef idx="3">
+            <a:schemeClr val="accent1"/>
+          </a:fillRef>
+          <a:effectRef idx="2">
+            <a:schemeClr val="accent1"/>
+          </a:effectRef>
+          <a:fontRef idx="minor">
+            <a:schemeClr val="lt1"/>
+          </a:fontRef>
+        </p:style>
+        <p:txBody>
+          <a:bodyPr rtlCol="0" anchor="ctr"/>
+          <a:lstStyle/>
+          <a:p>
+            <a:pPr algn="ctr"/>
+          </a:p>
+        </p:txBody>
+      </p:sp>
+      <p:sp>
+        <p:nvSpPr>
+          <p:cNvPr id="9" name="Rectangle 8"/>
+          <p:cNvSpPr/>
+          <p:nvPr/>
+        </p:nvSpPr>
+        <p:spPr>
+          <a:xfrm>
+            <a:off x="1463040" y="1664208"/>
+            <a:ext cx="100584" cy="100584"/>
+          </a:xfrm>
+          <a:prstGeom prst="rect">
+            <a:avLst/>
+          </a:prstGeom>
+          <a:solidFill>
+            <a:srgbClr val="B23A7A"/>
+          </a:solidFill>
+          <a:ln>
+            <a:noFill/>
+          </a:ln>
+        </p:spPr>
+        <p:style>
+          <a:lnRef idx="1">
+            <a:schemeClr val="accent1"/>
+          </a:lnRef>
+          <a:fillRef idx="3">
+            <a:schemeClr val="accent1"/>
+          </a:fillRef>
+          <a:effectRef idx="2">
+            <a:schemeClr val="accent1"/>
+          </a:effectRef>
+          <a:fontRef idx="minor">
+            <a:schemeClr val="lt1"/>
+          </a:fontRef>
+        </p:style>
+        <p:txBody>
+          <a:bodyPr rtlCol="0" anchor="ctr"/>
+          <a:lstStyle/>
+          <a:p>
+            <a:pPr algn="ctr"/>
+          </a:p>
+        </p:txBody>
+      </p:sp>
+      <p:sp>
+        <p:nvSpPr>
+          <p:cNvPr id="10" name="Rectangle 9"/>
+          <p:cNvSpPr/>
+          <p:nvPr/>
+        </p:nvSpPr>
+        <p:spPr>
+          <a:xfrm>
+            <a:off x="1609344" y="1664208"/>
+            <a:ext cx="100584" cy="100584"/>
+          </a:xfrm>
+          <a:prstGeom prst="rect">
+            <a:avLst/>
+          </a:prstGeom>
+          <a:solidFill>
+            <a:srgbClr val="2E9E6B"/>
+          </a:solidFill>
+          <a:ln>
+            <a:noFill/>
+          </a:ln>
+        </p:spPr>
+        <p:style>
+          <a:lnRef idx="1">
+            <a:schemeClr val="accent1"/>
+          </a:lnRef>
+          <a:fillRef idx="3">
+            <a:schemeClr val="accent1"/>
+          </a:fillRef>
+          <a:effectRef idx="2">
+            <a:schemeClr val="accent1"/>
+          </a:effectRef>
+          <a:fontRef idx="minor">
+            <a:schemeClr val="lt1"/>
+          </a:fontRef>
+        </p:style>
+        <p:txBody>
+          <a:bodyPr rtlCol="0" anchor="ctr"/>
+          <a:lstStyle/>
+          <a:p>
+            <a:pPr algn="ctr"/>
+          </a:p>
+        </p:txBody>
+      </p:sp>
+      <p:sp>
+        <p:nvSpPr>
+          <p:cNvPr id="11" name="Rectangle 10"/>
+          <p:cNvSpPr/>
+          <p:nvPr/>
+        </p:nvSpPr>
+        <p:spPr>
+          <a:xfrm>
+            <a:off x="1755648" y="1664208"/>
+            <a:ext cx="100584" cy="100584"/>
+          </a:xfrm>
+          <a:prstGeom prst="rect">
+            <a:avLst/>
+          </a:prstGeom>
+          <a:solidFill>
+            <a:srgbClr val="74B8E0"/>
+          </a:solidFill>
+          <a:ln>
+            <a:noFill/>
+          </a:ln>
+        </p:spPr>
+        <p:style>
+          <a:lnRef idx="1">
+            <a:schemeClr val="accent1"/>
+          </a:lnRef>
+          <a:fillRef idx="3">
+            <a:schemeClr val="accent1"/>
+          </a:fillRef>
+          <a:effectRef idx="2">
+            <a:schemeClr val="accent1"/>
+          </a:effectRef>
+          <a:fontRef idx="minor">
+            <a:schemeClr val="lt1"/>
+          </a:fontRef>
+        </p:style>
+        <p:txBody>
+          <a:bodyPr rtlCol="0" anchor="ctr"/>
+          <a:lstStyle/>
+          <a:p>
+            <a:pPr algn="ctr"/>
+          </a:p>
+        </p:txBody>
+      </p:sp>
+      <p:sp>
+        <p:nvSpPr>
+          <p:cNvPr id="12" name="Rectangle 11"/>
+          <p:cNvSpPr/>
+          <p:nvPr/>
+        </p:nvSpPr>
+        <p:spPr>
+          <a:xfrm>
+            <a:off x="1901952" y="1664208"/>
+            <a:ext cx="100584" cy="100584"/>
+          </a:xfrm>
+          <a:prstGeom prst="rect">
+            <a:avLst/>
+          </a:prstGeom>
+          <a:solidFill>
+            <a:srgbClr val="6B4BC2"/>
+          </a:solidFill>
+          <a:ln>
+            <a:noFill/>
+          </a:ln>
+        </p:spPr>
+        <p:style>
+          <a:lnRef idx="1">
+            <a:schemeClr val="accent1"/>
+          </a:lnRef>
+          <a:fillRef idx="3">
+            <a:schemeClr val="accent1"/>
+          </a:fillRef>
+          <a:effectRef idx="2">
+            <a:schemeClr val="accent1"/>
+          </a:effectRef>
+          <a:fontRef idx="minor">
+            <a:schemeClr val="lt1"/>
+          </a:fontRef>
+        </p:style>
+        <p:txBody>
+          <a:bodyPr rtlCol="0" anchor="ctr"/>
+          <a:lstStyle/>
+          <a:p>
+            <a:pPr algn="ctr"/>
+          </a:p>
+        </p:txBody>
+      </p:sp>
+      <p:sp>
+        <p:nvSpPr>
+          <p:cNvPr id="13" name="Rectangle 12"/>
+          <p:cNvSpPr/>
+          <p:nvPr/>
+        </p:nvSpPr>
+        <p:spPr>
+          <a:xfrm>
+            <a:off x="2048256" y="1664208"/>
+            <a:ext cx="100584" cy="100584"/>
+          </a:xfrm>
+          <a:prstGeom prst="rect">
+            <a:avLst/>
+          </a:prstGeom>
+          <a:solidFill>
+            <a:srgbClr val="A7A23C"/>
+          </a:solidFill>
+          <a:ln>
+            <a:noFill/>
+          </a:ln>
+        </p:spPr>
+        <p:style>
+          <a:lnRef idx="1">
+            <a:schemeClr val="accent1"/>
+          </a:lnRef>
+          <a:fillRef idx="3">
+            <a:schemeClr val="accent1"/>
+          </a:fillRef>
+          <a:effectRef idx="2">
+            <a:schemeClr val="accent1"/>
+          </a:effectRef>
+          <a:fontRef idx="minor">
+            <a:schemeClr val="lt1"/>
+          </a:fontRef>
+        </p:style>
+        <p:txBody>
+          <a:bodyPr rtlCol="0" anchor="ctr"/>
+          <a:lstStyle/>
+          <a:p>
+            <a:pPr algn="ctr"/>
+          </a:p>
+        </p:txBody>
+      </p:sp>
+      <p:sp>
+        <p:nvSpPr>
+          <p:cNvPr id="14" name="Rounded Rectangle 13"/>
+          <p:cNvSpPr/>
+          <p:nvPr/>
+        </p:nvSpPr>
+        <p:spPr>
+          <a:xfrm>
+            <a:off x="731520" y="1920240"/>
+            <a:ext cx="10728655" cy="1005840"/>
+          </a:xfrm>
+          <a:prstGeom prst="roundRect">
+            <a:avLst/>
+          </a:prstGeom>
+          <a:solidFill>
+            <a:srgbClr val="161512"/>
+          </a:solidFill>
+          <a:ln>
+            <a:solidFill>
+              <a:srgbClr val="2A2722"/>
+            </a:solidFill>
+          </a:ln>
+        </p:spPr>
+        <p:style>
+          <a:lnRef idx="1">
+            <a:schemeClr val="accent1"/>
+          </a:lnRef>
+          <a:fillRef idx="3">
+            <a:schemeClr val="accent1"/>
+          </a:fillRef>
+          <a:effectRef idx="2">
+            <a:schemeClr val="accent1"/>
+          </a:effectRef>
+          <a:fontRef idx="minor">
+            <a:schemeClr val="lt1"/>
+          </a:fontRef>
+        </p:style>
+        <p:txBody>
+          <a:bodyPr rtlCol="0" anchor="ctr" wrap="square" lIns="228600" tIns="228600"/>
+          <a:lstStyle/>
+          <a:p>
+            <a:pPr algn="ctr">
+              <a:defRPr sz="1600" b="1">
+                <a:solidFill>
+                  <a:srgbClr val="D8432F"/>
                 </a:solidFill>
                 <a:latin typeface="Georgia"/>
               </a:defRPr>
             </a:pPr>
             <a:r>
-              <a:t>Atomic extraction, deterministic privacy gates, and transactional reconcile.</a:t>
-            </a:r>
-          </a:p>
-        </p:txBody>
-      </p:sp>
-      <p:sp>
-        <p:nvSpPr>
-          <p:cNvPr id="4" name="Rounded Rectangle 3"/>
-          <p:cNvSpPr/>
-          <p:nvPr/>
-        </p:nvSpPr>
-        <p:spPr>
-          <a:xfrm>
-            <a:off x="731520" y="1828800"/>
-            <a:ext cx="10728655" cy="1005840"/>
-          </a:xfrm>
-          <a:prstGeom prst="roundRect">
-            <a:avLst/>
-          </a:prstGeom>
-          <a:solidFill>
-            <a:srgbClr val="161512"/>
-          </a:solidFill>
-          <a:ln>
-            <a:solidFill>
-              <a:srgbClr val="2E2B26"/>
-            </a:solidFill>
-          </a:ln>
-        </p:spPr>
-        <p:style>
-          <a:lnRef idx="1">
-            <a:schemeClr val="accent1"/>
-          </a:lnRef>
-          <a:fillRef idx="3">
-            <a:schemeClr val="accent1"/>
-          </a:fillRef>
-          <a:effectRef idx="2">
-            <a:schemeClr val="accent1"/>
-          </a:effectRef>
-          <a:fontRef idx="minor">
-            <a:schemeClr val="lt1"/>
-          </a:fontRef>
-        </p:style>
-        <p:txBody>
-          <a:bodyPr rtlCol="0" anchor="ctr" wrap="square" lIns="228600" tIns="228600"/>
-          <a:lstStyle/>
-          <a:p>
-            <a:pPr algn="ctr">
-              <a:defRPr sz="1500" b="1">
-                <a:solidFill>
-                  <a:srgbClr val="E2553A"/>
-                </a:solidFill>
-                <a:latin typeface="Georgia"/>
-              </a:defRPr>
-            </a:pPr>
-            <a:r>
-              <a:t>1. Stream &amp; Gate</a:t>
+              <a:t>   1. Privacy Pre-Scan</a:t>
             </a:r>
           </a:p>
           <a:p>
@@ -5764,20 +7921,63 @@
               </a:defRPr>
             </a:pPr>
             <a:r>
-              <a:t>User turn streams from client. Deterministic regex &amp; Shannon entropy pre-scan gate blocks keys/passwords before LLM or DB ingestion.</a:t>
-            </a:r>
-          </a:p>
-        </p:txBody>
-      </p:sp>
-      <p:sp>
-        <p:nvSpPr>
-          <p:cNvPr id="5" name="Rounded Rectangle 4"/>
-          <p:cNvSpPr/>
-          <p:nvPr/>
-        </p:nvSpPr>
-        <p:spPr>
-          <a:xfrm>
-            <a:off x="731520" y="2971800"/>
+              <a:t>   Regex and Shannon entropy pre-scan blocks API keys, credentials, and cards before LLM or DB ingestion.</a:t>
+            </a:r>
+          </a:p>
+        </p:txBody>
+      </p:sp>
+      <p:sp>
+        <p:nvSpPr>
+          <p:cNvPr id="15" name="Rectangle 14"/>
+          <p:cNvSpPr/>
+          <p:nvPr/>
+        </p:nvSpPr>
+        <p:spPr>
+          <a:xfrm>
+            <a:off x="960120" y="2148840"/>
+            <a:ext cx="128016" cy="128016"/>
+          </a:xfrm>
+          <a:prstGeom prst="rect">
+            <a:avLst/>
+          </a:prstGeom>
+          <a:solidFill>
+            <a:srgbClr val="D8432F"/>
+          </a:solidFill>
+          <a:ln>
+            <a:noFill/>
+          </a:ln>
+        </p:spPr>
+        <p:style>
+          <a:lnRef idx="1">
+            <a:schemeClr val="accent1"/>
+          </a:lnRef>
+          <a:fillRef idx="3">
+            <a:schemeClr val="accent1"/>
+          </a:fillRef>
+          <a:effectRef idx="2">
+            <a:schemeClr val="accent1"/>
+          </a:effectRef>
+          <a:fontRef idx="minor">
+            <a:schemeClr val="lt1"/>
+          </a:fontRef>
+        </p:style>
+        <p:txBody>
+          <a:bodyPr rtlCol="0" anchor="ctr"/>
+          <a:lstStyle/>
+          <a:p>
+            <a:pPr algn="ctr"/>
+          </a:p>
+        </p:txBody>
+      </p:sp>
+      <p:sp>
+        <p:nvSpPr>
+          <p:cNvPr id="16" name="Rounded Rectangle 15"/>
+          <p:cNvSpPr/>
+          <p:nvPr/>
+        </p:nvSpPr>
+        <p:spPr>
+          <a:xfrm>
+            <a:off x="731520" y="3063240"/>
             <a:ext cx="10728655" cy="1005840"/>
           </a:xfrm>
           <a:prstGeom prst="roundRect">
@@ -5788,7 +7988,7 @@
           </a:solidFill>
           <a:ln>
             <a:solidFill>
-              <a:srgbClr val="2E2B26"/>
+              <a:srgbClr val="2A2722"/>
             </a:solidFill>
           </a:ln>
         </p:spPr>
@@ -5811,15 +8011,15 @@
           <a:lstStyle/>
           <a:p>
             <a:pPr algn="ctr">
-              <a:defRPr sz="1500" b="1">
-                <a:solidFill>
-                  <a:srgbClr val="F08A24"/>
+              <a:defRPr sz="1600" b="1">
+                <a:solidFill>
+                  <a:srgbClr val="F2C12E"/>
                 </a:solidFill>
                 <a:latin typeface="Georgia"/>
               </a:defRPr>
             </a:pPr>
             <a:r>
-              <a:t>2. Atomic Extraction</a:t>
+              <a:t>   2. Atomic Extraction</a:t>
             </a:r>
           </a:p>
           <a:p>
@@ -5835,20 +8035,63 @@
               </a:defRPr>
             </a:pPr>
             <a:r>
-              <a:t>Gemini 3.5 Flash-Lite extracts atomic candidate statements with typed Whitney block metadata (kind, space, confidence, slot).</a:t>
-            </a:r>
-          </a:p>
-        </p:txBody>
-      </p:sp>
-      <p:sp>
-        <p:nvSpPr>
-          <p:cNvPr id="6" name="Rounded Rectangle 5"/>
-          <p:cNvSpPr/>
-          <p:nvPr/>
-        </p:nvSpPr>
-        <p:spPr>
-          <a:xfrm>
-            <a:off x="731520" y="4114800"/>
+              <a:t>   Gemini 3.5 Flash-Lite extracts concise candidate statements with Whitney block type classification.</a:t>
+            </a:r>
+          </a:p>
+        </p:txBody>
+      </p:sp>
+      <p:sp>
+        <p:nvSpPr>
+          <p:cNvPr id="17" name="Rectangle 16"/>
+          <p:cNvSpPr/>
+          <p:nvPr/>
+        </p:nvSpPr>
+        <p:spPr>
+          <a:xfrm>
+            <a:off x="960120" y="3291840"/>
+            <a:ext cx="128016" cy="128016"/>
+          </a:xfrm>
+          <a:prstGeom prst="rect">
+            <a:avLst/>
+          </a:prstGeom>
+          <a:solidFill>
+            <a:srgbClr val="F2C12E"/>
+          </a:solidFill>
+          <a:ln>
+            <a:noFill/>
+          </a:ln>
+        </p:spPr>
+        <p:style>
+          <a:lnRef idx="1">
+            <a:schemeClr val="accent1"/>
+          </a:lnRef>
+          <a:fillRef idx="3">
+            <a:schemeClr val="accent1"/>
+          </a:fillRef>
+          <a:effectRef idx="2">
+            <a:schemeClr val="accent1"/>
+          </a:effectRef>
+          <a:fontRef idx="minor">
+            <a:schemeClr val="lt1"/>
+          </a:fontRef>
+        </p:style>
+        <p:txBody>
+          <a:bodyPr rtlCol="0" anchor="ctr"/>
+          <a:lstStyle/>
+          <a:p>
+            <a:pPr algn="ctr"/>
+          </a:p>
+        </p:txBody>
+      </p:sp>
+      <p:sp>
+        <p:nvSpPr>
+          <p:cNvPr id="18" name="Rounded Rectangle 17"/>
+          <p:cNvSpPr/>
+          <p:nvPr/>
+        </p:nvSpPr>
+        <p:spPr>
+          <a:xfrm>
+            <a:off x="731520" y="4206240"/>
             <a:ext cx="10728655" cy="1005840"/>
           </a:xfrm>
           <a:prstGeom prst="roundRect">
@@ -5859,7 +8102,7 @@
           </a:solidFill>
           <a:ln>
             <a:solidFill>
-              <a:srgbClr val="2E2B26"/>
+              <a:srgbClr val="2A2722"/>
             </a:solidFill>
           </a:ln>
         </p:spPr>
@@ -5882,15 +8125,15 @@
           <a:lstStyle/>
           <a:p>
             <a:pPr algn="ctr">
-              <a:defRPr sz="1500" b="1">
-                <a:solidFill>
-                  <a:srgbClr val="F2C12E"/>
+              <a:defRPr sz="1600" b="1">
+                <a:solidFill>
+                  <a:srgbClr val="F08A24"/>
                 </a:solidFill>
                 <a:latin typeface="Georgia"/>
               </a:defRPr>
             </a:pPr>
             <a:r>
-              <a:t>3. Reconcile Engine</a:t>
+              <a:t>   3. Reconcile Policy</a:t>
             </a:r>
           </a:p>
           <a:p>
@@ -5906,20 +8149,63 @@
               </a:defRPr>
             </a:pPr>
             <a:r>
-              <a:t>ADD (new fact) · CONFIRM (log boost) · SUPERSEDE (points old to new) · SKIP (deduplicates). Sensitive facts held for review.</a:t>
-            </a:r>
-          </a:p>
-        </p:txBody>
-      </p:sp>
-      <p:sp>
-        <p:nvSpPr>
-          <p:cNvPr id="7" name="Rounded Rectangle 6"/>
-          <p:cNvSpPr/>
-          <p:nvPr/>
-        </p:nvSpPr>
-        <p:spPr>
-          <a:xfrm>
-            <a:off x="731520" y="5257800"/>
+              <a:t>   ADD (new fact) · CONFIRM (log boost) · SUPERSEDE (points old to new) · SKIP (deduplicates).</a:t>
+            </a:r>
+          </a:p>
+        </p:txBody>
+      </p:sp>
+      <p:sp>
+        <p:nvSpPr>
+          <p:cNvPr id="19" name="Rectangle 18"/>
+          <p:cNvSpPr/>
+          <p:nvPr/>
+        </p:nvSpPr>
+        <p:spPr>
+          <a:xfrm>
+            <a:off x="960120" y="4434840"/>
+            <a:ext cx="128016" cy="128016"/>
+          </a:xfrm>
+          <a:prstGeom prst="rect">
+            <a:avLst/>
+          </a:prstGeom>
+          <a:solidFill>
+            <a:srgbClr val="F08A24"/>
+          </a:solidFill>
+          <a:ln>
+            <a:noFill/>
+          </a:ln>
+        </p:spPr>
+        <p:style>
+          <a:lnRef idx="1">
+            <a:schemeClr val="accent1"/>
+          </a:lnRef>
+          <a:fillRef idx="3">
+            <a:schemeClr val="accent1"/>
+          </a:fillRef>
+          <a:effectRef idx="2">
+            <a:schemeClr val="accent1"/>
+          </a:effectRef>
+          <a:fontRef idx="minor">
+            <a:schemeClr val="lt1"/>
+          </a:fontRef>
+        </p:style>
+        <p:txBody>
+          <a:bodyPr rtlCol="0" anchor="ctr"/>
+          <a:lstStyle/>
+          <a:p>
+            <a:pPr algn="ctr"/>
+          </a:p>
+        </p:txBody>
+      </p:sp>
+      <p:sp>
+        <p:nvSpPr>
+          <p:cNvPr id="20" name="Rounded Rectangle 19"/>
+          <p:cNvSpPr/>
+          <p:nvPr/>
+        </p:nvSpPr>
+        <p:spPr>
+          <a:xfrm>
+            <a:off x="731520" y="5349240"/>
             <a:ext cx="10728655" cy="1005840"/>
           </a:xfrm>
           <a:prstGeom prst="roundRect">
@@ -5930,7 +8216,7 @@
           </a:solidFill>
           <a:ln>
             <a:solidFill>
-              <a:srgbClr val="2E2B26"/>
+              <a:srgbClr val="2A2722"/>
             </a:solidFill>
           </a:ln>
         </p:spPr>
@@ -5953,15 +8239,15 @@
           <a:lstStyle/>
           <a:p>
             <a:pPr algn="ctr">
-              <a:defRPr sz="1500" b="1">
-                <a:solidFill>
-                  <a:srgbClr val="4FB37E"/>
+              <a:defRPr sz="1600" b="1">
+                <a:solidFill>
+                  <a:srgbClr val="2E9E6B"/>
                 </a:solidFill>
                 <a:latin typeface="Georgia"/>
               </a:defRPr>
             </a:pPr>
             <a:r>
-              <a:t>4. Atlas Transaction</a:t>
+              <a:t>   4. Atlas Transaction &amp; Event</a:t>
             </a:r>
           </a:p>
           <a:p>
@@ -5977,8 +8263,51 @@
               </a:defRPr>
             </a:pPr>
             <a:r>
-              <a:t>Multi-document ACID transaction writes to `memories` and emits to `memory_events`. MongoDB Change Streams notify UI via SSE.</a:t>
-            </a:r>
+              <a:t>   Multi-document ACID transaction writes to memories and emits to memory_events via Change Streams.</a:t>
+            </a:r>
+          </a:p>
+        </p:txBody>
+      </p:sp>
+      <p:sp>
+        <p:nvSpPr>
+          <p:cNvPr id="21" name="Rectangle 20"/>
+          <p:cNvSpPr/>
+          <p:nvPr/>
+        </p:nvSpPr>
+        <p:spPr>
+          <a:xfrm>
+            <a:off x="960120" y="5577840"/>
+            <a:ext cx="128016" cy="128016"/>
+          </a:xfrm>
+          <a:prstGeom prst="rect">
+            <a:avLst/>
+          </a:prstGeom>
+          <a:solidFill>
+            <a:srgbClr val="2E9E6B"/>
+          </a:solidFill>
+          <a:ln>
+            <a:noFill/>
+          </a:ln>
+        </p:spPr>
+        <p:style>
+          <a:lnRef idx="1">
+            <a:schemeClr val="accent1"/>
+          </a:lnRef>
+          <a:fillRef idx="3">
+            <a:schemeClr val="accent1"/>
+          </a:fillRef>
+          <a:effectRef idx="2">
+            <a:schemeClr val="accent1"/>
+          </a:effectRef>
+          <a:fontRef idx="minor">
+            <a:schemeClr val="lt1"/>
+          </a:fontRef>
+        </p:style>
+        <p:txBody>
+          <a:bodyPr rtlCol="0" anchor="ctr"/>
+          <a:lstStyle/>
+          <a:p>
+            <a:pPr algn="ctr"/>
           </a:p>
         </p:txBody>
       </p:sp>
@@ -6051,8 +8380,8 @@
         </p:nvSpPr>
         <p:spPr>
           <a:xfrm>
-            <a:off x="731520" y="457200"/>
-            <a:ext cx="10728655" cy="1097280"/>
+            <a:off x="731520" y="411480"/>
+            <a:ext cx="10728655" cy="1188720"/>
           </a:xfrm>
           <a:prstGeom prst="rect">
             <a:avLst/>
@@ -6068,13 +8397,29 @@
             <a:pPr>
               <a:defRPr sz="1100" b="1">
                 <a:solidFill>
-                  <a:srgbClr val="F2C12E"/>
+                  <a:srgbClr val="8A8477"/>
                 </a:solidFill>
                 <a:latin typeface="Consolas"/>
               </a:defRPr>
             </a:pPr>
             <a:r>
-              <a:t>05 / RECALL ENGINE</a:t>
+              <a:t>06</a:t>
+            </a:r>
+          </a:p>
+          <a:p>
+            <a:pPr>
+              <a:spcBef>
+                <a:spcPts val="300"/>
+              </a:spcBef>
+              <a:defRPr sz="2800" b="1">
+                <a:solidFill>
+                  <a:srgbClr val="EDE6D6"/>
+                </a:solidFill>
+                <a:latin typeface="Georgia"/>
+              </a:defRPr>
+            </a:pPr>
+            <a:r>
+              <a:t>How a memory is found</a:t>
             </a:r>
           </a:p>
           <a:p>
@@ -6082,29 +8427,459 @@
               <a:spcBef>
                 <a:spcPts val="400"/>
               </a:spcBef>
-              <a:defRPr sz="2600" b="1">
-                <a:solidFill>
-                  <a:srgbClr val="EDE6D6"/>
-                </a:solidFill>
-                <a:latin typeface="Georgia"/>
+              <a:defRPr sz="1300">
+                <a:solidFill>
+                  <a:srgbClr val="B8B1A2"/>
+                </a:solidFill>
+                <a:latin typeface="Segoe UI"/>
               </a:defRPr>
             </a:pPr>
             <a:r>
-              <a:t>Four parallel channels fused by rank, re-scored transparently, budgeted to 8.</a:t>
-            </a:r>
-          </a:p>
-        </p:txBody>
-      </p:sp>
-      <p:sp>
-        <p:nvSpPr>
-          <p:cNvPr id="4" name="Rounded Rectangle 3"/>
-          <p:cNvSpPr/>
-          <p:nvPr/>
-        </p:nvSpPr>
-        <p:spPr>
-          <a:xfrm>
-            <a:off x="731520" y="1828800"/>
-            <a:ext cx="5212080" cy="4389120"/>
+              <a:t>4 searches (meaning · keywords · time · links) → fused → scored → top 8.</a:t>
+            </a:r>
+          </a:p>
+        </p:txBody>
+      </p:sp>
+      <p:sp>
+        <p:nvSpPr>
+          <p:cNvPr id="4" name="Rectangle 3"/>
+          <p:cNvSpPr/>
+          <p:nvPr/>
+        </p:nvSpPr>
+        <p:spPr>
+          <a:xfrm>
+            <a:off x="731520" y="1664208"/>
+            <a:ext cx="100584" cy="100584"/>
+          </a:xfrm>
+          <a:prstGeom prst="rect">
+            <a:avLst/>
+          </a:prstGeom>
+          <a:solidFill>
+            <a:srgbClr val="E7DCC3"/>
+          </a:solidFill>
+          <a:ln>
+            <a:noFill/>
+          </a:ln>
+        </p:spPr>
+        <p:style>
+          <a:lnRef idx="1">
+            <a:schemeClr val="accent1"/>
+          </a:lnRef>
+          <a:fillRef idx="3">
+            <a:schemeClr val="accent1"/>
+          </a:fillRef>
+          <a:effectRef idx="2">
+            <a:schemeClr val="accent1"/>
+          </a:effectRef>
+          <a:fontRef idx="minor">
+            <a:schemeClr val="lt1"/>
+          </a:fontRef>
+        </p:style>
+        <p:txBody>
+          <a:bodyPr rtlCol="0" anchor="ctr"/>
+          <a:lstStyle/>
+          <a:p>
+            <a:pPr algn="ctr"/>
+          </a:p>
+        </p:txBody>
+      </p:sp>
+      <p:sp>
+        <p:nvSpPr>
+          <p:cNvPr id="5" name="Rectangle 4"/>
+          <p:cNvSpPr/>
+          <p:nvPr/>
+        </p:nvSpPr>
+        <p:spPr>
+          <a:xfrm>
+            <a:off x="877824" y="1664208"/>
+            <a:ext cx="100584" cy="100584"/>
+          </a:xfrm>
+          <a:prstGeom prst="rect">
+            <a:avLst/>
+          </a:prstGeom>
+          <a:solidFill>
+            <a:srgbClr val="F2C12E"/>
+          </a:solidFill>
+          <a:ln>
+            <a:noFill/>
+          </a:ln>
+        </p:spPr>
+        <p:style>
+          <a:lnRef idx="1">
+            <a:schemeClr val="accent1"/>
+          </a:lnRef>
+          <a:fillRef idx="3">
+            <a:schemeClr val="accent1"/>
+          </a:fillRef>
+          <a:effectRef idx="2">
+            <a:schemeClr val="accent1"/>
+          </a:effectRef>
+          <a:fontRef idx="minor">
+            <a:schemeClr val="lt1"/>
+          </a:fontRef>
+        </p:style>
+        <p:txBody>
+          <a:bodyPr rtlCol="0" anchor="ctr"/>
+          <a:lstStyle/>
+          <a:p>
+            <a:pPr algn="ctr"/>
+          </a:p>
+        </p:txBody>
+      </p:sp>
+      <p:sp>
+        <p:nvSpPr>
+          <p:cNvPr id="6" name="Rectangle 5"/>
+          <p:cNvSpPr/>
+          <p:nvPr/>
+        </p:nvSpPr>
+        <p:spPr>
+          <a:xfrm>
+            <a:off x="1024128" y="1664208"/>
+            <a:ext cx="100584" cy="100584"/>
+          </a:xfrm>
+          <a:prstGeom prst="rect">
+            <a:avLst/>
+          </a:prstGeom>
+          <a:solidFill>
+            <a:srgbClr val="3A63D8"/>
+          </a:solidFill>
+          <a:ln>
+            <a:noFill/>
+          </a:ln>
+        </p:spPr>
+        <p:style>
+          <a:lnRef idx="1">
+            <a:schemeClr val="accent1"/>
+          </a:lnRef>
+          <a:fillRef idx="3">
+            <a:schemeClr val="accent1"/>
+          </a:fillRef>
+          <a:effectRef idx="2">
+            <a:schemeClr val="accent1"/>
+          </a:effectRef>
+          <a:fontRef idx="minor">
+            <a:schemeClr val="lt1"/>
+          </a:fontRef>
+        </p:style>
+        <p:txBody>
+          <a:bodyPr rtlCol="0" anchor="ctr"/>
+          <a:lstStyle/>
+          <a:p>
+            <a:pPr algn="ctr"/>
+          </a:p>
+        </p:txBody>
+      </p:sp>
+      <p:sp>
+        <p:nvSpPr>
+          <p:cNvPr id="7" name="Rectangle 6"/>
+          <p:cNvSpPr/>
+          <p:nvPr/>
+        </p:nvSpPr>
+        <p:spPr>
+          <a:xfrm>
+            <a:off x="1170432" y="1664208"/>
+            <a:ext cx="100584" cy="100584"/>
+          </a:xfrm>
+          <a:prstGeom prst="rect">
+            <a:avLst/>
+          </a:prstGeom>
+          <a:solidFill>
+            <a:srgbClr val="F08A24"/>
+          </a:solidFill>
+          <a:ln>
+            <a:noFill/>
+          </a:ln>
+        </p:spPr>
+        <p:style>
+          <a:lnRef idx="1">
+            <a:schemeClr val="accent1"/>
+          </a:lnRef>
+          <a:fillRef idx="3">
+            <a:schemeClr val="accent1"/>
+          </a:fillRef>
+          <a:effectRef idx="2">
+            <a:schemeClr val="accent1"/>
+          </a:effectRef>
+          <a:fontRef idx="minor">
+            <a:schemeClr val="lt1"/>
+          </a:fontRef>
+        </p:style>
+        <p:txBody>
+          <a:bodyPr rtlCol="0" anchor="ctr"/>
+          <a:lstStyle/>
+          <a:p>
+            <a:pPr algn="ctr"/>
+          </a:p>
+        </p:txBody>
+      </p:sp>
+      <p:sp>
+        <p:nvSpPr>
+          <p:cNvPr id="8" name="Rectangle 7"/>
+          <p:cNvSpPr/>
+          <p:nvPr/>
+        </p:nvSpPr>
+        <p:spPr>
+          <a:xfrm>
+            <a:off x="1316736" y="1664208"/>
+            <a:ext cx="100584" cy="100584"/>
+          </a:xfrm>
+          <a:prstGeom prst="rect">
+            <a:avLst/>
+          </a:prstGeom>
+          <a:solidFill>
+            <a:srgbClr val="D8432F"/>
+          </a:solidFill>
+          <a:ln>
+            <a:noFill/>
+          </a:ln>
+        </p:spPr>
+        <p:style>
+          <a:lnRef idx="1">
+            <a:schemeClr val="accent1"/>
+          </a:lnRef>
+          <a:fillRef idx="3">
+            <a:schemeClr val="accent1"/>
+          </a:fillRef>
+          <a:effectRef idx="2">
+            <a:schemeClr val="accent1"/>
+          </a:effectRef>
+          <a:fontRef idx="minor">
+            <a:schemeClr val="lt1"/>
+          </a:fontRef>
+        </p:style>
+        <p:txBody>
+          <a:bodyPr rtlCol="0" anchor="ctr"/>
+          <a:lstStyle/>
+          <a:p>
+            <a:pPr algn="ctr"/>
+          </a:p>
+        </p:txBody>
+      </p:sp>
+      <p:sp>
+        <p:nvSpPr>
+          <p:cNvPr id="9" name="Rectangle 8"/>
+          <p:cNvSpPr/>
+          <p:nvPr/>
+        </p:nvSpPr>
+        <p:spPr>
+          <a:xfrm>
+            <a:off x="1463040" y="1664208"/>
+            <a:ext cx="100584" cy="100584"/>
+          </a:xfrm>
+          <a:prstGeom prst="rect">
+            <a:avLst/>
+          </a:prstGeom>
+          <a:solidFill>
+            <a:srgbClr val="B23A7A"/>
+          </a:solidFill>
+          <a:ln>
+            <a:noFill/>
+          </a:ln>
+        </p:spPr>
+        <p:style>
+          <a:lnRef idx="1">
+            <a:schemeClr val="accent1"/>
+          </a:lnRef>
+          <a:fillRef idx="3">
+            <a:schemeClr val="accent1"/>
+          </a:fillRef>
+          <a:effectRef idx="2">
+            <a:schemeClr val="accent1"/>
+          </a:effectRef>
+          <a:fontRef idx="minor">
+            <a:schemeClr val="lt1"/>
+          </a:fontRef>
+        </p:style>
+        <p:txBody>
+          <a:bodyPr rtlCol="0" anchor="ctr"/>
+          <a:lstStyle/>
+          <a:p>
+            <a:pPr algn="ctr"/>
+          </a:p>
+        </p:txBody>
+      </p:sp>
+      <p:sp>
+        <p:nvSpPr>
+          <p:cNvPr id="10" name="Rectangle 9"/>
+          <p:cNvSpPr/>
+          <p:nvPr/>
+        </p:nvSpPr>
+        <p:spPr>
+          <a:xfrm>
+            <a:off x="1609344" y="1664208"/>
+            <a:ext cx="100584" cy="100584"/>
+          </a:xfrm>
+          <a:prstGeom prst="rect">
+            <a:avLst/>
+          </a:prstGeom>
+          <a:solidFill>
+            <a:srgbClr val="2E9E6B"/>
+          </a:solidFill>
+          <a:ln>
+            <a:noFill/>
+          </a:ln>
+        </p:spPr>
+        <p:style>
+          <a:lnRef idx="1">
+            <a:schemeClr val="accent1"/>
+          </a:lnRef>
+          <a:fillRef idx="3">
+            <a:schemeClr val="accent1"/>
+          </a:fillRef>
+          <a:effectRef idx="2">
+            <a:schemeClr val="accent1"/>
+          </a:effectRef>
+          <a:fontRef idx="minor">
+            <a:schemeClr val="lt1"/>
+          </a:fontRef>
+        </p:style>
+        <p:txBody>
+          <a:bodyPr rtlCol="0" anchor="ctr"/>
+          <a:lstStyle/>
+          <a:p>
+            <a:pPr algn="ctr"/>
+          </a:p>
+        </p:txBody>
+      </p:sp>
+      <p:sp>
+        <p:nvSpPr>
+          <p:cNvPr id="11" name="Rectangle 10"/>
+          <p:cNvSpPr/>
+          <p:nvPr/>
+        </p:nvSpPr>
+        <p:spPr>
+          <a:xfrm>
+            <a:off x="1755648" y="1664208"/>
+            <a:ext cx="100584" cy="100584"/>
+          </a:xfrm>
+          <a:prstGeom prst="rect">
+            <a:avLst/>
+          </a:prstGeom>
+          <a:solidFill>
+            <a:srgbClr val="74B8E0"/>
+          </a:solidFill>
+          <a:ln>
+            <a:noFill/>
+          </a:ln>
+        </p:spPr>
+        <p:style>
+          <a:lnRef idx="1">
+            <a:schemeClr val="accent1"/>
+          </a:lnRef>
+          <a:fillRef idx="3">
+            <a:schemeClr val="accent1"/>
+          </a:fillRef>
+          <a:effectRef idx="2">
+            <a:schemeClr val="accent1"/>
+          </a:effectRef>
+          <a:fontRef idx="minor">
+            <a:schemeClr val="lt1"/>
+          </a:fontRef>
+        </p:style>
+        <p:txBody>
+          <a:bodyPr rtlCol="0" anchor="ctr"/>
+          <a:lstStyle/>
+          <a:p>
+            <a:pPr algn="ctr"/>
+          </a:p>
+        </p:txBody>
+      </p:sp>
+      <p:sp>
+        <p:nvSpPr>
+          <p:cNvPr id="12" name="Rectangle 11"/>
+          <p:cNvSpPr/>
+          <p:nvPr/>
+        </p:nvSpPr>
+        <p:spPr>
+          <a:xfrm>
+            <a:off x="1901952" y="1664208"/>
+            <a:ext cx="100584" cy="100584"/>
+          </a:xfrm>
+          <a:prstGeom prst="rect">
+            <a:avLst/>
+          </a:prstGeom>
+          <a:solidFill>
+            <a:srgbClr val="6B4BC2"/>
+          </a:solidFill>
+          <a:ln>
+            <a:noFill/>
+          </a:ln>
+        </p:spPr>
+        <p:style>
+          <a:lnRef idx="1">
+            <a:schemeClr val="accent1"/>
+          </a:lnRef>
+          <a:fillRef idx="3">
+            <a:schemeClr val="accent1"/>
+          </a:fillRef>
+          <a:effectRef idx="2">
+            <a:schemeClr val="accent1"/>
+          </a:effectRef>
+          <a:fontRef idx="minor">
+            <a:schemeClr val="lt1"/>
+          </a:fontRef>
+        </p:style>
+        <p:txBody>
+          <a:bodyPr rtlCol="0" anchor="ctr"/>
+          <a:lstStyle/>
+          <a:p>
+            <a:pPr algn="ctr"/>
+          </a:p>
+        </p:txBody>
+      </p:sp>
+      <p:sp>
+        <p:nvSpPr>
+          <p:cNvPr id="13" name="Rectangle 12"/>
+          <p:cNvSpPr/>
+          <p:nvPr/>
+        </p:nvSpPr>
+        <p:spPr>
+          <a:xfrm>
+            <a:off x="2048256" y="1664208"/>
+            <a:ext cx="100584" cy="100584"/>
+          </a:xfrm>
+          <a:prstGeom prst="rect">
+            <a:avLst/>
+          </a:prstGeom>
+          <a:solidFill>
+            <a:srgbClr val="A7A23C"/>
+          </a:solidFill>
+          <a:ln>
+            <a:noFill/>
+          </a:ln>
+        </p:spPr>
+        <p:style>
+          <a:lnRef idx="1">
+            <a:schemeClr val="accent1"/>
+          </a:lnRef>
+          <a:fillRef idx="3">
+            <a:schemeClr val="accent1"/>
+          </a:fillRef>
+          <a:effectRef idx="2">
+            <a:schemeClr val="accent1"/>
+          </a:effectRef>
+          <a:fontRef idx="minor">
+            <a:schemeClr val="lt1"/>
+          </a:fontRef>
+        </p:style>
+        <p:txBody>
+          <a:bodyPr rtlCol="0" anchor="ctr"/>
+          <a:lstStyle/>
+          <a:p>
+            <a:pPr algn="ctr"/>
+          </a:p>
+        </p:txBody>
+      </p:sp>
+      <p:sp>
+        <p:nvSpPr>
+          <p:cNvPr id="14" name="Rounded Rectangle 13"/>
+          <p:cNvSpPr/>
+          <p:nvPr/>
+        </p:nvSpPr>
+        <p:spPr>
+          <a:xfrm>
+            <a:off x="731520" y="1920240"/>
+            <a:ext cx="5303520" cy="4389120"/>
           </a:xfrm>
           <a:prstGeom prst="roundRect">
             <a:avLst/>
@@ -6114,7 +8889,7 @@
           </a:solidFill>
           <a:ln>
             <a:solidFill>
-              <a:srgbClr val="2E2B26"/>
+              <a:srgbClr val="2A2722"/>
             </a:solidFill>
           </a:ln>
         </p:spPr>
@@ -6145,7 +8920,23 @@
               </a:defRPr>
             </a:pPr>
             <a:r>
-              <a:t>Four Parallel Recall Channels</a:t>
+              <a:t>Multi-Channel Fused Scoring</a:t>
+            </a:r>
+          </a:p>
+          <a:p>
+            <a:pPr>
+              <a:spcBef>
+                <a:spcPts val="1000"/>
+              </a:spcBef>
+              <a:defRPr sz="1100" b="1">
+                <a:solidFill>
+                  <a:srgbClr val="2E9E6B"/>
+                </a:solidFill>
+                <a:latin typeface="Consolas"/>
+              </a:defRPr>
+            </a:pPr>
+            <a:r>
+              <a:t>0.55 · relevance + 0.15 · recency + 0.15 · importance + 0.10 · confidence</a:t>
             </a:r>
           </a:p>
           <a:p>
@@ -6161,7 +8952,7 @@
               </a:defRPr>
             </a:pPr>
             <a:r>
-              <a:t>1. Atlas Vector Search</a:t>
+              <a:t>1. Meaning</a:t>
             </a:r>
           </a:p>
           <a:p>
@@ -6174,7 +8965,7 @@
               </a:defRPr>
             </a:pPr>
             <a:r>
-              <a:t>768-d cosine vector search (gemini-embedding-2), pre-filtered by ownerId, spaceKey, and active status.</a:t>
+              <a:t>Atlas Vector Search with 768-d cosine similarity pre-filtered on ownerId, space, and active status.</a:t>
             </a:r>
           </a:p>
           <a:p>
@@ -6190,7 +8981,7 @@
               </a:defRPr>
             </a:pPr>
             <a:r>
-              <a:t>2. Atlas Search (Lexical)</a:t>
+              <a:t>2. Keywords</a:t>
             </a:r>
           </a:p>
           <a:p>
@@ -6203,7 +8994,7 @@
               </a:defRPr>
             </a:pPr>
             <a:r>
-              <a:t>Full-text Lucene search for exact keywords, acronyms, and codes ('Next.js', 'Vercel', 'Kestrel').</a:t>
+              <a:t>Atlas Search full-text Lucene for exact tokens, codes, and acronyms.</a:t>
             </a:r>
           </a:p>
           <a:p>
@@ -6219,7 +9010,7 @@
               </a:defRPr>
             </a:pPr>
             <a:r>
-              <a:t>3. Temporal Recency Window</a:t>
+              <a:t>3. Time</a:t>
             </a:r>
           </a:p>
           <a:p>
@@ -6248,7 +9039,7 @@
               </a:defRPr>
             </a:pPr>
             <a:r>
-              <a:t>4. Linked Entities Graph</a:t>
+              <a:t>4. Links</a:t>
             </a:r>
           </a:p>
           <a:p>
@@ -6266,193 +9057,30 @@
           </a:p>
         </p:txBody>
       </p:sp>
-      <p:sp>
-        <p:nvSpPr>
-          <p:cNvPr id="5" name="Rounded Rectangle 4"/>
-          <p:cNvSpPr/>
-          <p:nvPr/>
-        </p:nvSpPr>
-        <p:spPr>
-          <a:xfrm>
-            <a:off x="6217920" y="1828800"/>
-            <a:ext cx="5212080" cy="4389120"/>
-          </a:xfrm>
-          <a:prstGeom prst="roundRect">
-            <a:avLst/>
-          </a:prstGeom>
-          <a:solidFill>
-            <a:srgbClr val="161512"/>
-          </a:solidFill>
-          <a:ln>
-            <a:solidFill>
-              <a:srgbClr val="2E2B26"/>
-            </a:solidFill>
-          </a:ln>
-        </p:spPr>
-        <p:style>
-          <a:lnRef idx="1">
-            <a:schemeClr val="accent1"/>
-          </a:lnRef>
-          <a:fillRef idx="3">
-            <a:schemeClr val="accent1"/>
-          </a:fillRef>
-          <a:effectRef idx="2">
-            <a:schemeClr val="accent1"/>
-          </a:effectRef>
-          <a:fontRef idx="minor">
-            <a:schemeClr val="lt1"/>
-          </a:fontRef>
-        </p:style>
-        <p:txBody>
-          <a:bodyPr rtlCol="0" anchor="ctr" wrap="square" lIns="274320" tIns="274320"/>
-          <a:lstStyle/>
-          <a:p>
-            <a:pPr algn="ctr">
-              <a:defRPr sz="1700" b="1">
-                <a:solidFill>
-                  <a:srgbClr val="4FB37E"/>
-                </a:solidFill>
-                <a:latin typeface="Georgia"/>
-              </a:defRPr>
-            </a:pPr>
-            <a:r>
-              <a:t>Scoring Formula &amp; Budgeting</a:t>
-            </a:r>
-          </a:p>
-          <a:p>
-            <a:pPr>
-              <a:spcBef>
-                <a:spcPts val="1000"/>
-              </a:spcBef>
-              <a:defRPr sz="1100">
-                <a:solidFill>
-                  <a:srgbClr val="F2C12E"/>
-                </a:solidFill>
-                <a:latin typeface="Consolas"/>
-              </a:defRPr>
-            </a:pPr>
-            <a:r>
-              <a:t>final = 0.55 * relevance(RRF) + 0.15 * recency + 0.15 * importance + 0.10 * confidence + type_boost</a:t>
-            </a:r>
-          </a:p>
-          <a:p>
-            <a:pPr>
-              <a:spcBef>
-                <a:spcPts val="800"/>
-              </a:spcBef>
-              <a:defRPr sz="1300" b="1">
-                <a:solidFill>
-                  <a:srgbClr val="EDE6D6"/>
-                </a:solidFill>
-                <a:latin typeface="Segoe UI"/>
-              </a:defRPr>
-            </a:pPr>
-            <a:r>
-              <a:t>Reciprocal Rank Fusion (RRF)</a:t>
-            </a:r>
-          </a:p>
-          <a:p>
-            <a:pPr>
-              <a:defRPr sz="1100">
-                <a:solidFill>
-                  <a:srgbClr val="B8B1A2"/>
-                </a:solidFill>
-                <a:latin typeface="Segoe UI"/>
-              </a:defRPr>
-            </a:pPr>
-            <a:r>
-              <a:t>Fuses rank positions across all 4 channels without scale bias.</a:t>
-            </a:r>
-          </a:p>
-          <a:p>
-            <a:pPr>
-              <a:spcBef>
-                <a:spcPts val="800"/>
-              </a:spcBef>
-              <a:defRPr sz="1300" b="1">
-                <a:solidFill>
-                  <a:srgbClr val="EDE6D6"/>
-                </a:solidFill>
-                <a:latin typeface="Segoe UI"/>
-              </a:defRPr>
-            </a:pPr>
-            <a:r>
-              <a:t>MMR Re-Ranking</a:t>
-            </a:r>
-          </a:p>
-          <a:p>
-            <a:pPr>
-              <a:defRPr sz="1100">
-                <a:solidFill>
-                  <a:srgbClr val="B8B1A2"/>
-                </a:solidFill>
-                <a:latin typeface="Segoe UI"/>
-              </a:defRPr>
-            </a:pPr>
-            <a:r>
-              <a:t>Maximal Marginal Relevance (lambda = 0.7) eliminates near-duplicate candidates.</a:t>
-            </a:r>
-          </a:p>
-          <a:p>
-            <a:pPr>
-              <a:spcBef>
-                <a:spcPts val="800"/>
-              </a:spcBef>
-              <a:defRPr sz="1300" b="1">
-                <a:solidFill>
-                  <a:srgbClr val="EDE6D6"/>
-                </a:solidFill>
-                <a:latin typeface="Segoe UI"/>
-              </a:defRPr>
-            </a:pPr>
-            <a:r>
-              <a:t>Strict Budgeting</a:t>
-            </a:r>
-          </a:p>
-          <a:p>
-            <a:pPr>
-              <a:defRPr sz="1100">
-                <a:solidFill>
-                  <a:srgbClr val="B8B1A2"/>
-                </a:solidFill>
-                <a:latin typeface="Segoe UI"/>
-              </a:defRPr>
-            </a:pPr>
-            <a:r>
-              <a:t>Threshold at 0.35; capped at top 8 memories injected into system prompt.</a:t>
-            </a:r>
-          </a:p>
-          <a:p>
-            <a:pPr>
-              <a:spcBef>
-                <a:spcPts val="800"/>
-              </a:spcBef>
-              <a:defRPr sz="1300" b="1">
-                <a:solidFill>
-                  <a:srgbClr val="EDE6D6"/>
-                </a:solidFill>
-                <a:latin typeface="Segoe UI"/>
-              </a:defRPr>
-            </a:pPr>
-            <a:r>
-              <a:t>Complete Audit Trace</a:t>
-            </a:r>
-          </a:p>
-          <a:p>
-            <a:pPr>
-              <a:defRPr sz="1100">
-                <a:solidFill>
-                  <a:srgbClr val="B8B1A2"/>
-                </a:solidFill>
-                <a:latin typeface="Segoe UI"/>
-              </a:defRPr>
-            </a:pPr>
-            <a:r>
-              <a:t>Every candidate score, channel contribution, and decision saved to DB for inspection.</a:t>
-            </a:r>
-          </a:p>
-        </p:txBody>
-      </p:sp>
+      <p:pic>
+        <p:nvPicPr>
+          <p:cNvPr id="15" name="Picture 14" descr="image.png"/>
+          <p:cNvPicPr>
+            <a:picLocks noChangeAspect="1"/>
+          </p:cNvPicPr>
+          <p:nvPr/>
+        </p:nvPicPr>
+        <p:blipFill>
+          <a:blip r:embed="rId2"/>
+          <a:stretch>
+            <a:fillRect/>
+          </a:stretch>
+        </p:blipFill>
+        <p:spPr>
+          <a:xfrm>
+            <a:off x="6309360" y="1920240"/>
+            <a:ext cx="5120640" cy="2880360"/>
+          </a:xfrm>
+          <a:prstGeom prst="rect">
+            <a:avLst/>
+          </a:prstGeom>
+        </p:spPr>
+      </p:pic>
     </p:spTree>
   </p:cSld>
   <p:clrMapOvr>
@@ -6522,8 +9150,8 @@
         </p:nvSpPr>
         <p:spPr>
           <a:xfrm>
-            <a:off x="731520" y="457200"/>
-            <a:ext cx="10728655" cy="1097280"/>
+            <a:off x="731520" y="411480"/>
+            <a:ext cx="10728655" cy="1188720"/>
           </a:xfrm>
           <a:prstGeom prst="rect">
             <a:avLst/>
@@ -6539,13 +9167,29 @@
             <a:pPr>
               <a:defRPr sz="1100" b="1">
                 <a:solidFill>
-                  <a:srgbClr val="F2C12E"/>
+                  <a:srgbClr val="8A8477"/>
                 </a:solidFill>
                 <a:latin typeface="Consolas"/>
               </a:defRPr>
             </a:pPr>
             <a:r>
-              <a:t>06 / RELIABILITY</a:t>
+              <a:t>07</a:t>
+            </a:r>
+          </a:p>
+          <a:p>
+            <a:pPr>
+              <a:spcBef>
+                <a:spcPts val="300"/>
+              </a:spcBef>
+              <a:defRPr sz="2800" b="1">
+                <a:solidFill>
+                  <a:srgbClr val="EDE6D6"/>
+                </a:solidFill>
+                <a:latin typeface="Georgia"/>
+              </a:defRPr>
+            </a:pPr>
+            <a:r>
+              <a:t>Hard cases, handled</a:t>
             </a:r>
           </a:p>
           <a:p>
@@ -6553,374 +9197,734 @@
               <a:spcBef>
                 <a:spcPts val="400"/>
               </a:spcBef>
-              <a:defRPr sz="2600" b="1">
-                <a:solidFill>
-                  <a:srgbClr val="EDE6D6"/>
+              <a:defRPr sz="1300">
+                <a:solidFill>
+                  <a:srgbClr val="B8B1A2"/>
+                </a:solidFill>
+                <a:latin typeface="Segoe UI"/>
+              </a:defRPr>
+            </a:pPr>
+            <a:r>
+              <a:t>Correction with history · contradictions put to you · expiry · hard forget · secrets blocked.</a:t>
+            </a:r>
+          </a:p>
+        </p:txBody>
+      </p:sp>
+      <p:sp>
+        <p:nvSpPr>
+          <p:cNvPr id="4" name="Rectangle 3"/>
+          <p:cNvSpPr/>
+          <p:nvPr/>
+        </p:nvSpPr>
+        <p:spPr>
+          <a:xfrm>
+            <a:off x="731520" y="1664208"/>
+            <a:ext cx="100584" cy="100584"/>
+          </a:xfrm>
+          <a:prstGeom prst="rect">
+            <a:avLst/>
+          </a:prstGeom>
+          <a:solidFill>
+            <a:srgbClr val="E7DCC3"/>
+          </a:solidFill>
+          <a:ln>
+            <a:noFill/>
+          </a:ln>
+        </p:spPr>
+        <p:style>
+          <a:lnRef idx="1">
+            <a:schemeClr val="accent1"/>
+          </a:lnRef>
+          <a:fillRef idx="3">
+            <a:schemeClr val="accent1"/>
+          </a:fillRef>
+          <a:effectRef idx="2">
+            <a:schemeClr val="accent1"/>
+          </a:effectRef>
+          <a:fontRef idx="minor">
+            <a:schemeClr val="lt1"/>
+          </a:fontRef>
+        </p:style>
+        <p:txBody>
+          <a:bodyPr rtlCol="0" anchor="ctr"/>
+          <a:lstStyle/>
+          <a:p>
+            <a:pPr algn="ctr"/>
+          </a:p>
+        </p:txBody>
+      </p:sp>
+      <p:sp>
+        <p:nvSpPr>
+          <p:cNvPr id="5" name="Rectangle 4"/>
+          <p:cNvSpPr/>
+          <p:nvPr/>
+        </p:nvSpPr>
+        <p:spPr>
+          <a:xfrm>
+            <a:off x="877824" y="1664208"/>
+            <a:ext cx="100584" cy="100584"/>
+          </a:xfrm>
+          <a:prstGeom prst="rect">
+            <a:avLst/>
+          </a:prstGeom>
+          <a:solidFill>
+            <a:srgbClr val="F2C12E"/>
+          </a:solidFill>
+          <a:ln>
+            <a:noFill/>
+          </a:ln>
+        </p:spPr>
+        <p:style>
+          <a:lnRef idx="1">
+            <a:schemeClr val="accent1"/>
+          </a:lnRef>
+          <a:fillRef idx="3">
+            <a:schemeClr val="accent1"/>
+          </a:fillRef>
+          <a:effectRef idx="2">
+            <a:schemeClr val="accent1"/>
+          </a:effectRef>
+          <a:fontRef idx="minor">
+            <a:schemeClr val="lt1"/>
+          </a:fontRef>
+        </p:style>
+        <p:txBody>
+          <a:bodyPr rtlCol="0" anchor="ctr"/>
+          <a:lstStyle/>
+          <a:p>
+            <a:pPr algn="ctr"/>
+          </a:p>
+        </p:txBody>
+      </p:sp>
+      <p:sp>
+        <p:nvSpPr>
+          <p:cNvPr id="6" name="Rectangle 5"/>
+          <p:cNvSpPr/>
+          <p:nvPr/>
+        </p:nvSpPr>
+        <p:spPr>
+          <a:xfrm>
+            <a:off x="1024128" y="1664208"/>
+            <a:ext cx="100584" cy="100584"/>
+          </a:xfrm>
+          <a:prstGeom prst="rect">
+            <a:avLst/>
+          </a:prstGeom>
+          <a:solidFill>
+            <a:srgbClr val="3A63D8"/>
+          </a:solidFill>
+          <a:ln>
+            <a:noFill/>
+          </a:ln>
+        </p:spPr>
+        <p:style>
+          <a:lnRef idx="1">
+            <a:schemeClr val="accent1"/>
+          </a:lnRef>
+          <a:fillRef idx="3">
+            <a:schemeClr val="accent1"/>
+          </a:fillRef>
+          <a:effectRef idx="2">
+            <a:schemeClr val="accent1"/>
+          </a:effectRef>
+          <a:fontRef idx="minor">
+            <a:schemeClr val="lt1"/>
+          </a:fontRef>
+        </p:style>
+        <p:txBody>
+          <a:bodyPr rtlCol="0" anchor="ctr"/>
+          <a:lstStyle/>
+          <a:p>
+            <a:pPr algn="ctr"/>
+          </a:p>
+        </p:txBody>
+      </p:sp>
+      <p:sp>
+        <p:nvSpPr>
+          <p:cNvPr id="7" name="Rectangle 6"/>
+          <p:cNvSpPr/>
+          <p:nvPr/>
+        </p:nvSpPr>
+        <p:spPr>
+          <a:xfrm>
+            <a:off x="1170432" y="1664208"/>
+            <a:ext cx="100584" cy="100584"/>
+          </a:xfrm>
+          <a:prstGeom prst="rect">
+            <a:avLst/>
+          </a:prstGeom>
+          <a:solidFill>
+            <a:srgbClr val="F08A24"/>
+          </a:solidFill>
+          <a:ln>
+            <a:noFill/>
+          </a:ln>
+        </p:spPr>
+        <p:style>
+          <a:lnRef idx="1">
+            <a:schemeClr val="accent1"/>
+          </a:lnRef>
+          <a:fillRef idx="3">
+            <a:schemeClr val="accent1"/>
+          </a:fillRef>
+          <a:effectRef idx="2">
+            <a:schemeClr val="accent1"/>
+          </a:effectRef>
+          <a:fontRef idx="minor">
+            <a:schemeClr val="lt1"/>
+          </a:fontRef>
+        </p:style>
+        <p:txBody>
+          <a:bodyPr rtlCol="0" anchor="ctr"/>
+          <a:lstStyle/>
+          <a:p>
+            <a:pPr algn="ctr"/>
+          </a:p>
+        </p:txBody>
+      </p:sp>
+      <p:sp>
+        <p:nvSpPr>
+          <p:cNvPr id="8" name="Rectangle 7"/>
+          <p:cNvSpPr/>
+          <p:nvPr/>
+        </p:nvSpPr>
+        <p:spPr>
+          <a:xfrm>
+            <a:off x="1316736" y="1664208"/>
+            <a:ext cx="100584" cy="100584"/>
+          </a:xfrm>
+          <a:prstGeom prst="rect">
+            <a:avLst/>
+          </a:prstGeom>
+          <a:solidFill>
+            <a:srgbClr val="D8432F"/>
+          </a:solidFill>
+          <a:ln>
+            <a:noFill/>
+          </a:ln>
+        </p:spPr>
+        <p:style>
+          <a:lnRef idx="1">
+            <a:schemeClr val="accent1"/>
+          </a:lnRef>
+          <a:fillRef idx="3">
+            <a:schemeClr val="accent1"/>
+          </a:fillRef>
+          <a:effectRef idx="2">
+            <a:schemeClr val="accent1"/>
+          </a:effectRef>
+          <a:fontRef idx="minor">
+            <a:schemeClr val="lt1"/>
+          </a:fontRef>
+        </p:style>
+        <p:txBody>
+          <a:bodyPr rtlCol="0" anchor="ctr"/>
+          <a:lstStyle/>
+          <a:p>
+            <a:pPr algn="ctr"/>
+          </a:p>
+        </p:txBody>
+      </p:sp>
+      <p:sp>
+        <p:nvSpPr>
+          <p:cNvPr id="9" name="Rectangle 8"/>
+          <p:cNvSpPr/>
+          <p:nvPr/>
+        </p:nvSpPr>
+        <p:spPr>
+          <a:xfrm>
+            <a:off x="1463040" y="1664208"/>
+            <a:ext cx="100584" cy="100584"/>
+          </a:xfrm>
+          <a:prstGeom prst="rect">
+            <a:avLst/>
+          </a:prstGeom>
+          <a:solidFill>
+            <a:srgbClr val="B23A7A"/>
+          </a:solidFill>
+          <a:ln>
+            <a:noFill/>
+          </a:ln>
+        </p:spPr>
+        <p:style>
+          <a:lnRef idx="1">
+            <a:schemeClr val="accent1"/>
+          </a:lnRef>
+          <a:fillRef idx="3">
+            <a:schemeClr val="accent1"/>
+          </a:fillRef>
+          <a:effectRef idx="2">
+            <a:schemeClr val="accent1"/>
+          </a:effectRef>
+          <a:fontRef idx="minor">
+            <a:schemeClr val="lt1"/>
+          </a:fontRef>
+        </p:style>
+        <p:txBody>
+          <a:bodyPr rtlCol="0" anchor="ctr"/>
+          <a:lstStyle/>
+          <a:p>
+            <a:pPr algn="ctr"/>
+          </a:p>
+        </p:txBody>
+      </p:sp>
+      <p:sp>
+        <p:nvSpPr>
+          <p:cNvPr id="10" name="Rectangle 9"/>
+          <p:cNvSpPr/>
+          <p:nvPr/>
+        </p:nvSpPr>
+        <p:spPr>
+          <a:xfrm>
+            <a:off x="1609344" y="1664208"/>
+            <a:ext cx="100584" cy="100584"/>
+          </a:xfrm>
+          <a:prstGeom prst="rect">
+            <a:avLst/>
+          </a:prstGeom>
+          <a:solidFill>
+            <a:srgbClr val="2E9E6B"/>
+          </a:solidFill>
+          <a:ln>
+            <a:noFill/>
+          </a:ln>
+        </p:spPr>
+        <p:style>
+          <a:lnRef idx="1">
+            <a:schemeClr val="accent1"/>
+          </a:lnRef>
+          <a:fillRef idx="3">
+            <a:schemeClr val="accent1"/>
+          </a:fillRef>
+          <a:effectRef idx="2">
+            <a:schemeClr val="accent1"/>
+          </a:effectRef>
+          <a:fontRef idx="minor">
+            <a:schemeClr val="lt1"/>
+          </a:fontRef>
+        </p:style>
+        <p:txBody>
+          <a:bodyPr rtlCol="0" anchor="ctr"/>
+          <a:lstStyle/>
+          <a:p>
+            <a:pPr algn="ctr"/>
+          </a:p>
+        </p:txBody>
+      </p:sp>
+      <p:sp>
+        <p:nvSpPr>
+          <p:cNvPr id="11" name="Rectangle 10"/>
+          <p:cNvSpPr/>
+          <p:nvPr/>
+        </p:nvSpPr>
+        <p:spPr>
+          <a:xfrm>
+            <a:off x="1755648" y="1664208"/>
+            <a:ext cx="100584" cy="100584"/>
+          </a:xfrm>
+          <a:prstGeom prst="rect">
+            <a:avLst/>
+          </a:prstGeom>
+          <a:solidFill>
+            <a:srgbClr val="74B8E0"/>
+          </a:solidFill>
+          <a:ln>
+            <a:noFill/>
+          </a:ln>
+        </p:spPr>
+        <p:style>
+          <a:lnRef idx="1">
+            <a:schemeClr val="accent1"/>
+          </a:lnRef>
+          <a:fillRef idx="3">
+            <a:schemeClr val="accent1"/>
+          </a:fillRef>
+          <a:effectRef idx="2">
+            <a:schemeClr val="accent1"/>
+          </a:effectRef>
+          <a:fontRef idx="minor">
+            <a:schemeClr val="lt1"/>
+          </a:fontRef>
+        </p:style>
+        <p:txBody>
+          <a:bodyPr rtlCol="0" anchor="ctr"/>
+          <a:lstStyle/>
+          <a:p>
+            <a:pPr algn="ctr"/>
+          </a:p>
+        </p:txBody>
+      </p:sp>
+      <p:sp>
+        <p:nvSpPr>
+          <p:cNvPr id="12" name="Rectangle 11"/>
+          <p:cNvSpPr/>
+          <p:nvPr/>
+        </p:nvSpPr>
+        <p:spPr>
+          <a:xfrm>
+            <a:off x="1901952" y="1664208"/>
+            <a:ext cx="100584" cy="100584"/>
+          </a:xfrm>
+          <a:prstGeom prst="rect">
+            <a:avLst/>
+          </a:prstGeom>
+          <a:solidFill>
+            <a:srgbClr val="6B4BC2"/>
+          </a:solidFill>
+          <a:ln>
+            <a:noFill/>
+          </a:ln>
+        </p:spPr>
+        <p:style>
+          <a:lnRef idx="1">
+            <a:schemeClr val="accent1"/>
+          </a:lnRef>
+          <a:fillRef idx="3">
+            <a:schemeClr val="accent1"/>
+          </a:fillRef>
+          <a:effectRef idx="2">
+            <a:schemeClr val="accent1"/>
+          </a:effectRef>
+          <a:fontRef idx="minor">
+            <a:schemeClr val="lt1"/>
+          </a:fontRef>
+        </p:style>
+        <p:txBody>
+          <a:bodyPr rtlCol="0" anchor="ctr"/>
+          <a:lstStyle/>
+          <a:p>
+            <a:pPr algn="ctr"/>
+          </a:p>
+        </p:txBody>
+      </p:sp>
+      <p:sp>
+        <p:nvSpPr>
+          <p:cNvPr id="13" name="Rectangle 12"/>
+          <p:cNvSpPr/>
+          <p:nvPr/>
+        </p:nvSpPr>
+        <p:spPr>
+          <a:xfrm>
+            <a:off x="2048256" y="1664208"/>
+            <a:ext cx="100584" cy="100584"/>
+          </a:xfrm>
+          <a:prstGeom prst="rect">
+            <a:avLst/>
+          </a:prstGeom>
+          <a:solidFill>
+            <a:srgbClr val="A7A23C"/>
+          </a:solidFill>
+          <a:ln>
+            <a:noFill/>
+          </a:ln>
+        </p:spPr>
+        <p:style>
+          <a:lnRef idx="1">
+            <a:schemeClr val="accent1"/>
+          </a:lnRef>
+          <a:fillRef idx="3">
+            <a:schemeClr val="accent1"/>
+          </a:fillRef>
+          <a:effectRef idx="2">
+            <a:schemeClr val="accent1"/>
+          </a:effectRef>
+          <a:fontRef idx="minor">
+            <a:schemeClr val="lt1"/>
+          </a:fontRef>
+        </p:style>
+        <p:txBody>
+          <a:bodyPr rtlCol="0" anchor="ctr"/>
+          <a:lstStyle/>
+          <a:p>
+            <a:pPr algn="ctr"/>
+          </a:p>
+        </p:txBody>
+      </p:sp>
+      <p:sp>
+        <p:nvSpPr>
+          <p:cNvPr id="14" name="Rounded Rectangle 13"/>
+          <p:cNvSpPr/>
+          <p:nvPr/>
+        </p:nvSpPr>
+        <p:spPr>
+          <a:xfrm>
+            <a:off x="731520" y="1920240"/>
+            <a:ext cx="3413455" cy="4389120"/>
+          </a:xfrm>
+          <a:prstGeom prst="roundRect">
+            <a:avLst/>
+          </a:prstGeom>
+          <a:solidFill>
+            <a:srgbClr val="161512"/>
+          </a:solidFill>
+          <a:ln>
+            <a:solidFill>
+              <a:srgbClr val="2A2722"/>
+            </a:solidFill>
+          </a:ln>
+        </p:spPr>
+        <p:style>
+          <a:lnRef idx="1">
+            <a:schemeClr val="accent1"/>
+          </a:lnRef>
+          <a:fillRef idx="3">
+            <a:schemeClr val="accent1"/>
+          </a:fillRef>
+          <a:effectRef idx="2">
+            <a:schemeClr val="accent1"/>
+          </a:effectRef>
+          <a:fontRef idx="minor">
+            <a:schemeClr val="lt1"/>
+          </a:fontRef>
+        </p:style>
+        <p:txBody>
+          <a:bodyPr rtlCol="0" anchor="ctr" wrap="square" lIns="182880" tIns="182880"/>
+          <a:lstStyle/>
+          <a:p>
+            <a:pPr algn="ctr">
+              <a:defRPr sz="1500" b="1">
+                <a:solidFill>
+                  <a:srgbClr val="F2C12E"/>
                 </a:solidFill>
                 <a:latin typeface="Georgia"/>
               </a:defRPr>
             </a:pPr>
             <a:r>
-              <a:t>Enforced with database guarantees rather than prompt suggestions.</a:t>
-            </a:r>
-          </a:p>
-        </p:txBody>
-      </p:sp>
-      <p:sp>
-        <p:nvSpPr>
-          <p:cNvPr id="4" name="Rounded Rectangle 3"/>
-          <p:cNvSpPr/>
-          <p:nvPr/>
-        </p:nvSpPr>
-        <p:spPr>
-          <a:xfrm>
-            <a:off x="731520" y="1828800"/>
-            <a:ext cx="10728655" cy="822960"/>
-          </a:xfrm>
-          <a:prstGeom prst="roundRect">
-            <a:avLst/>
-          </a:prstGeom>
-          <a:solidFill>
-            <a:srgbClr val="161512"/>
-          </a:solidFill>
-          <a:ln>
-            <a:solidFill>
-              <a:srgbClr val="2E2B26"/>
-            </a:solidFill>
-          </a:ln>
-        </p:spPr>
-        <p:style>
-          <a:lnRef idx="1">
-            <a:schemeClr val="accent1"/>
-          </a:lnRef>
-          <a:fillRef idx="3">
-            <a:schemeClr val="accent1"/>
-          </a:fillRef>
-          <a:effectRef idx="2">
-            <a:schemeClr val="accent1"/>
-          </a:effectRef>
-          <a:fontRef idx="minor">
-            <a:schemeClr val="lt1"/>
-          </a:fontRef>
-        </p:style>
-        <p:txBody>
-          <a:bodyPr rtlCol="0" anchor="ctr" wrap="square" lIns="182880" tIns="182880"/>
-          <a:lstStyle/>
-          <a:p>
-            <a:pPr algn="ctr">
-              <a:defRPr sz="1300" b="1">
-                <a:solidFill>
-                  <a:srgbClr val="EDE6D6"/>
-                </a:solidFill>
-                <a:latin typeface="Segoe UI"/>
-              </a:defRPr>
-            </a:pPr>
-            <a:r>
-              <a:t>CORRECTION:  Beta launch moved to 10 PM. Reconcile engine marks old record outdated, writes active replacement.</a:t>
+              <a:t>Correction with History</a:t>
             </a:r>
           </a:p>
           <a:p>
             <a:pPr>
               <a:spcBef>
-                <a:spcPts val="200"/>
+                <a:spcPts val="22000"/>
               </a:spcBef>
               <a:defRPr sz="1100">
                 <a:solidFill>
+                  <a:srgbClr val="B8B1A2"/>
+                </a:solidFill>
+                <a:latin typeface="Segoe UI"/>
+              </a:defRPr>
+            </a:pPr>
+            <a:r>
+              <a:t>Supersedes old 9 PM belief; preserves history chain.</a:t>
+            </a:r>
+          </a:p>
+        </p:txBody>
+      </p:sp>
+      <p:pic>
+        <p:nvPicPr>
+          <p:cNvPr id="15" name="Picture 14" descr="image.png"/>
+          <p:cNvPicPr>
+            <a:picLocks noChangeAspect="1"/>
+          </p:cNvPicPr>
+          <p:nvPr/>
+        </p:nvPicPr>
+        <p:blipFill>
+          <a:blip r:embed="rId2"/>
+          <a:stretch>
+            <a:fillRect/>
+          </a:stretch>
+        </p:blipFill>
+        <p:spPr>
+          <a:xfrm>
+            <a:off x="868680" y="2377440"/>
+            <a:ext cx="3139135" cy="1765763"/>
+          </a:xfrm>
+          <a:prstGeom prst="rect">
+            <a:avLst/>
+          </a:prstGeom>
+        </p:spPr>
+      </p:pic>
+      <p:sp>
+        <p:nvSpPr>
+          <p:cNvPr id="16" name="Rounded Rectangle 15"/>
+          <p:cNvSpPr/>
+          <p:nvPr/>
+        </p:nvSpPr>
+        <p:spPr>
+          <a:xfrm>
+            <a:off x="4389120" y="1920240"/>
+            <a:ext cx="3413455" cy="4389120"/>
+          </a:xfrm>
+          <a:prstGeom prst="roundRect">
+            <a:avLst/>
+          </a:prstGeom>
+          <a:solidFill>
+            <a:srgbClr val="161512"/>
+          </a:solidFill>
+          <a:ln>
+            <a:solidFill>
+              <a:srgbClr val="2A2722"/>
+            </a:solidFill>
+          </a:ln>
+        </p:spPr>
+        <p:style>
+          <a:lnRef idx="1">
+            <a:schemeClr val="accent1"/>
+          </a:lnRef>
+          <a:fillRef idx="3">
+            <a:schemeClr val="accent1"/>
+          </a:fillRef>
+          <a:effectRef idx="2">
+            <a:schemeClr val="accent1"/>
+          </a:effectRef>
+          <a:fontRef idx="minor">
+            <a:schemeClr val="lt1"/>
+          </a:fontRef>
+        </p:style>
+        <p:txBody>
+          <a:bodyPr rtlCol="0" anchor="ctr" wrap="square" lIns="182880" tIns="182880"/>
+          <a:lstStyle/>
+          <a:p>
+            <a:pPr algn="ctr">
+              <a:defRPr sz="1500" b="1">
+                <a:solidFill>
                   <a:srgbClr val="F2C12E"/>
                 </a:solidFill>
-                <a:latin typeface="Consolas"/>
+                <a:latin typeface="Georgia"/>
               </a:defRPr>
             </a:pPr>
             <a:r>
-              <a:t>MongoDB Enforcer: Partial unique index {ownerId, spaceKey, slotKey} active. Guaranteed single truth.</a:t>
-            </a:r>
-          </a:p>
-        </p:txBody>
-      </p:sp>
-      <p:sp>
-        <p:nvSpPr>
-          <p:cNvPr id="5" name="Rounded Rectangle 4"/>
-          <p:cNvSpPr/>
-          <p:nvPr/>
-        </p:nvSpPr>
-        <p:spPr>
-          <a:xfrm>
-            <a:off x="731520" y="2743200"/>
-            <a:ext cx="10728655" cy="822960"/>
-          </a:xfrm>
-          <a:prstGeom prst="roundRect">
-            <a:avLst/>
-          </a:prstGeom>
-          <a:solidFill>
-            <a:srgbClr val="161512"/>
-          </a:solidFill>
-          <a:ln>
-            <a:solidFill>
-              <a:srgbClr val="2E2B26"/>
-            </a:solidFill>
-          </a:ln>
-        </p:spPr>
-        <p:style>
-          <a:lnRef idx="1">
-            <a:schemeClr val="accent1"/>
-          </a:lnRef>
-          <a:fillRef idx="3">
-            <a:schemeClr val="accent1"/>
-          </a:fillRef>
-          <a:effectRef idx="2">
-            <a:schemeClr val="accent1"/>
-          </a:effectRef>
-          <a:fontRef idx="minor">
-            <a:schemeClr val="lt1"/>
-          </a:fontRef>
-        </p:style>
-        <p:txBody>
-          <a:bodyPr rtlCol="0" anchor="ctr" wrap="square" lIns="182880" tIns="182880"/>
-          <a:lstStyle/>
-          <a:p>
-            <a:pPr algn="ctr">
-              <a:defRPr sz="1300" b="1">
-                <a:solidFill>
-                  <a:srgbClr val="EDE6D6"/>
-                </a:solidFill>
-                <a:latin typeface="Segoe UI"/>
-              </a:defRPr>
-            </a:pPr>
-            <a:r>
-              <a:t>EXPIRY:  Remind me before Monday. Stops recalling past expiresAt, purged by background cleaner.</a:t>
+              <a:t>Contradiction Card</a:t>
             </a:r>
           </a:p>
           <a:p>
             <a:pPr>
               <a:spcBef>
-                <a:spcPts val="200"/>
+                <a:spcPts val="22000"/>
               </a:spcBef>
               <a:defRPr sz="1100">
                 <a:solidFill>
+                  <a:srgbClr val="B8B1A2"/>
+                </a:solidFill>
+                <a:latin typeface="Segoe UI"/>
+              </a:defRPr>
+            </a:pPr>
+            <a:r>
+              <a:t>Review inbox asks 'Which is current?' when facts conflict.</a:t>
+            </a:r>
+          </a:p>
+        </p:txBody>
+      </p:sp>
+      <p:pic>
+        <p:nvPicPr>
+          <p:cNvPr id="17" name="Picture 16" descr="image.png"/>
+          <p:cNvPicPr>
+            <a:picLocks noChangeAspect="1"/>
+          </p:cNvPicPr>
+          <p:nvPr/>
+        </p:nvPicPr>
+        <p:blipFill>
+          <a:blip r:embed="rId3"/>
+          <a:stretch>
+            <a:fillRect/>
+          </a:stretch>
+        </p:blipFill>
+        <p:spPr>
+          <a:xfrm>
+            <a:off x="4526280" y="2377440"/>
+            <a:ext cx="3139135" cy="1765763"/>
+          </a:xfrm>
+          <a:prstGeom prst="rect">
+            <a:avLst/>
+          </a:prstGeom>
+        </p:spPr>
+      </p:pic>
+      <p:sp>
+        <p:nvSpPr>
+          <p:cNvPr id="18" name="Rounded Rectangle 17"/>
+          <p:cNvSpPr/>
+          <p:nvPr/>
+        </p:nvSpPr>
+        <p:spPr>
+          <a:xfrm>
+            <a:off x="8046720" y="1920240"/>
+            <a:ext cx="3413455" cy="4389120"/>
+          </a:xfrm>
+          <a:prstGeom prst="roundRect">
+            <a:avLst/>
+          </a:prstGeom>
+          <a:solidFill>
+            <a:srgbClr val="161512"/>
+          </a:solidFill>
+          <a:ln>
+            <a:solidFill>
+              <a:srgbClr val="2A2722"/>
+            </a:solidFill>
+          </a:ln>
+        </p:spPr>
+        <p:style>
+          <a:lnRef idx="1">
+            <a:schemeClr val="accent1"/>
+          </a:lnRef>
+          <a:fillRef idx="3">
+            <a:schemeClr val="accent1"/>
+          </a:fillRef>
+          <a:effectRef idx="2">
+            <a:schemeClr val="accent1"/>
+          </a:effectRef>
+          <a:fontRef idx="minor">
+            <a:schemeClr val="lt1"/>
+          </a:fontRef>
+        </p:style>
+        <p:txBody>
+          <a:bodyPr rtlCol="0" anchor="ctr" wrap="square" lIns="182880" tIns="182880"/>
+          <a:lstStyle/>
+          <a:p>
+            <a:pPr algn="ctr">
+              <a:defRPr sz="1500" b="1">
+                <a:solidFill>
                   <a:srgbClr val="F2C12E"/>
                 </a:solidFill>
-                <a:latin typeface="Consolas"/>
+                <a:latin typeface="Georgia"/>
               </a:defRPr>
             </a:pPr>
             <a:r>
-              <a:t>MongoDB Enforcer: TTL index on purgeAt. Automatic physical cleanup without custom cron infrastructure.</a:t>
-            </a:r>
-          </a:p>
-        </p:txBody>
-      </p:sp>
-      <p:sp>
-        <p:nvSpPr>
-          <p:cNvPr id="6" name="Rounded Rectangle 5"/>
-          <p:cNvSpPr/>
-          <p:nvPr/>
-        </p:nvSpPr>
-        <p:spPr>
-          <a:xfrm>
-            <a:off x="731520" y="3657600"/>
-            <a:ext cx="10728655" cy="822960"/>
-          </a:xfrm>
-          <a:prstGeom prst="roundRect">
-            <a:avLst/>
-          </a:prstGeom>
-          <a:solidFill>
-            <a:srgbClr val="161512"/>
-          </a:solidFill>
-          <a:ln>
-            <a:solidFill>
-              <a:srgbClr val="2E2B26"/>
-            </a:solidFill>
-          </a:ln>
-        </p:spPr>
-        <p:style>
-          <a:lnRef idx="1">
-            <a:schemeClr val="accent1"/>
-          </a:lnRef>
-          <a:fillRef idx="3">
-            <a:schemeClr val="accent1"/>
-          </a:fillRef>
-          <a:effectRef idx="2">
-            <a:schemeClr val="accent1"/>
-          </a:effectRef>
-          <a:fontRef idx="minor">
-            <a:schemeClr val="lt1"/>
-          </a:fontRef>
-        </p:style>
-        <p:txBody>
-          <a:bodyPr rtlCol="0" anchor="ctr" wrap="square" lIns="182880" tIns="182880"/>
-          <a:lstStyle/>
-          <a:p>
-            <a:pPr algn="ctr">
-              <a:defRPr sz="1300" b="1">
-                <a:solidFill>
-                  <a:srgbClr val="EDE6D6"/>
-                </a:solidFill>
-                <a:latin typeface="Segoe UI"/>
-              </a:defRPr>
-            </a:pPr>
-            <a:r>
-              <a:t>FORGET:  Forget my dietary preferences. Hard delete of statement and vector embedding.</a:t>
+              <a:t>Credentials Blocked</a:t>
             </a:r>
           </a:p>
           <a:p>
             <a:pPr>
               <a:spcBef>
-                <a:spcPts val="200"/>
+                <a:spcPts val="22000"/>
               </a:spcBef>
               <a:defRPr sz="1100">
                 <a:solidFill>
-                  <a:srgbClr val="F2C12E"/>
-                </a:solidFill>
-                <a:latin typeface="Consolas"/>
+                  <a:srgbClr val="B8B1A2"/>
+                </a:solidFill>
+                <a:latin typeface="Segoe UI"/>
               </a:defRPr>
             </a:pPr>
             <a:r>
-              <a:t>MongoDB Enforcer: deleteOne on memories collection + content-free audit tombstone in memory_events.</a:t>
-            </a:r>
-          </a:p>
-        </p:txBody>
-      </p:sp>
-      <p:sp>
-        <p:nvSpPr>
-          <p:cNvPr id="7" name="Rounded Rectangle 6"/>
-          <p:cNvSpPr/>
-          <p:nvPr/>
-        </p:nvSpPr>
-        <p:spPr>
-          <a:xfrm>
-            <a:off x="731520" y="4572000"/>
-            <a:ext cx="10728655" cy="822960"/>
-          </a:xfrm>
-          <a:prstGeom prst="roundRect">
-            <a:avLst/>
-          </a:prstGeom>
-          <a:solidFill>
-            <a:srgbClr val="161512"/>
-          </a:solidFill>
-          <a:ln>
-            <a:solidFill>
-              <a:srgbClr val="2E2B26"/>
-            </a:solidFill>
-          </a:ln>
-        </p:spPr>
-        <p:style>
-          <a:lnRef idx="1">
-            <a:schemeClr val="accent1"/>
-          </a:lnRef>
-          <a:fillRef idx="3">
-            <a:schemeClr val="accent1"/>
-          </a:fillRef>
-          <a:effectRef idx="2">
-            <a:schemeClr val="accent1"/>
-          </a:effectRef>
-          <a:fontRef idx="minor">
-            <a:schemeClr val="lt1"/>
-          </a:fontRef>
-        </p:style>
-        <p:txBody>
-          <a:bodyPr rtlCol="0" anchor="ctr" wrap="square" lIns="182880" tIns="182880"/>
-          <a:lstStyle/>
-          <a:p>
-            <a:pPr algn="ctr">
-              <a:defRPr sz="1300" b="1">
-                <a:solidFill>
-                  <a:srgbClr val="EDE6D6"/>
-                </a:solidFill>
-                <a:latin typeface="Segoe UI"/>
-              </a:defRPr>
-            </a:pPr>
-            <a:r>
-              <a:t>CONTRADICTIONS:  Disagreeing statements detected during ingestion. Review page presents options side by side.</a:t>
-            </a:r>
-          </a:p>
-          <a:p>
-            <a:pPr>
-              <a:spcBef>
-                <a:spcPts val="200"/>
-              </a:spcBef>
-              <a:defRPr sz="1100">
-                <a:solidFill>
-                  <a:srgbClr val="F2C12E"/>
-                </a:solidFill>
-                <a:latin typeface="Consolas"/>
-              </a:defRPr>
-            </a:pPr>
-            <a:r>
-              <a:t>MongoDB Enforcer: Recommendation Card UI lets user pick winning memory; winner supersedes loser.</a:t>
-            </a:r>
-          </a:p>
-        </p:txBody>
-      </p:sp>
-      <p:sp>
-        <p:nvSpPr>
-          <p:cNvPr id="8" name="Rounded Rectangle 7"/>
-          <p:cNvSpPr/>
-          <p:nvPr/>
-        </p:nvSpPr>
-        <p:spPr>
-          <a:xfrm>
-            <a:off x="731520" y="5486400"/>
-            <a:ext cx="10728655" cy="822960"/>
-          </a:xfrm>
-          <a:prstGeom prst="roundRect">
-            <a:avLst/>
-          </a:prstGeom>
-          <a:solidFill>
-            <a:srgbClr val="161512"/>
-          </a:solidFill>
-          <a:ln>
-            <a:solidFill>
-              <a:srgbClr val="2E2B26"/>
-            </a:solidFill>
-          </a:ln>
-        </p:spPr>
-        <p:style>
-          <a:lnRef idx="1">
-            <a:schemeClr val="accent1"/>
-          </a:lnRef>
-          <a:fillRef idx="3">
-            <a:schemeClr val="accent1"/>
-          </a:fillRef>
-          <a:effectRef idx="2">
-            <a:schemeClr val="accent1"/>
-          </a:effectRef>
-          <a:fontRef idx="minor">
-            <a:schemeClr val="lt1"/>
-          </a:fontRef>
-        </p:style>
-        <p:txBody>
-          <a:bodyPr rtlCol="0" anchor="ctr" wrap="square" lIns="182880" tIns="182880"/>
-          <a:lstStyle/>
-          <a:p>
-            <a:pPr algn="ctr">
-              <a:defRPr sz="1300" b="1">
-                <a:solidFill>
-                  <a:srgbClr val="EDE6D6"/>
-                </a:solidFill>
-                <a:latin typeface="Segoe UI"/>
-              </a:defRPr>
-            </a:pPr>
-            <a:r>
-              <a:t>PRIVACY INTERCEPT:  Catches simulated API keys, passwords, OTPs before LLM or DB ingestion.</a:t>
-            </a:r>
-          </a:p>
-          <a:p>
-            <a:pPr>
-              <a:spcBef>
-                <a:spcPts val="200"/>
-              </a:spcBef>
-              <a:defRPr sz="1100">
-                <a:solidFill>
-                  <a:srgbClr val="F2C12E"/>
-                </a:solidFill>
-                <a:latin typeface="Consolas"/>
-              </a:defRPr>
-            </a:pPr>
-            <a:r>
-              <a:t>MongoDB Enforcer: Regex and Shannon entropy pre-scan gate; sensitive items routed to Review queue.</a:t>
-            </a:r>
-          </a:p>
-        </p:txBody>
-      </p:sp>
+              <a:t>Shannon entropy gate blocks keys before storage.</a:t>
+            </a:r>
+          </a:p>
+        </p:txBody>
+      </p:sp>
+      <p:pic>
+        <p:nvPicPr>
+          <p:cNvPr id="19" name="Picture 18" descr="image.png"/>
+          <p:cNvPicPr>
+            <a:picLocks noChangeAspect="1"/>
+          </p:cNvPicPr>
+          <p:nvPr/>
+        </p:nvPicPr>
+        <p:blipFill>
+          <a:blip r:embed="rId4"/>
+          <a:stretch>
+            <a:fillRect/>
+          </a:stretch>
+        </p:blipFill>
+        <p:spPr>
+          <a:xfrm>
+            <a:off x="8183880" y="2377440"/>
+            <a:ext cx="3139135" cy="1765763"/>
+          </a:xfrm>
+          <a:prstGeom prst="rect">
+            <a:avLst/>
+          </a:prstGeom>
+        </p:spPr>
+      </p:pic>
     </p:spTree>
   </p:cSld>
   <p:clrMapOvr>
@@ -6990,8 +9994,8 @@
         </p:nvSpPr>
         <p:spPr>
           <a:xfrm>
-            <a:off x="731520" y="457200"/>
-            <a:ext cx="10728655" cy="1097280"/>
+            <a:off x="731520" y="411480"/>
+            <a:ext cx="10728655" cy="1188720"/>
           </a:xfrm>
           <a:prstGeom prst="rect">
             <a:avLst/>
@@ -7007,13 +10011,29 @@
             <a:pPr>
               <a:defRPr sz="1100" b="1">
                 <a:solidFill>
-                  <a:srgbClr val="F2C12E"/>
+                  <a:srgbClr val="8A8477"/>
                 </a:solidFill>
                 <a:latin typeface="Consolas"/>
               </a:defRPr>
             </a:pPr>
             <a:r>
-              <a:t>07 / LEARNING</a:t>
+              <a:t>08</a:t>
+            </a:r>
+          </a:p>
+          <a:p>
+            <a:pPr>
+              <a:spcBef>
+                <a:spcPts val="300"/>
+              </a:spcBef>
+              <a:defRPr sz="2800" b="1">
+                <a:solidFill>
+                  <a:srgbClr val="EDE6D6"/>
+                </a:solidFill>
+                <a:latin typeface="Georgia"/>
+              </a:defRPr>
+            </a:pPr>
+            <a:r>
+              <a:t>It learns how you like answers</a:t>
             </a:r>
           </a:p>
           <a:p>
@@ -7021,328 +10041,585 @@
               <a:spcBef>
                 <a:spcPts val="400"/>
               </a:spcBef>
-              <a:defRPr sz="2600" b="1">
-                <a:solidFill>
-                  <a:srgbClr val="EDE6D6"/>
+              <a:defRPr sz="1300">
+                <a:solidFill>
+                  <a:srgbClr val="B8B1A2"/>
+                </a:solidFill>
+                <a:latin typeface="Segoe UI"/>
+              </a:defRPr>
+            </a:pPr>
+            <a:r>
+              <a:t>Repeated feedback → a strategy with evidence → shorter, time-boxed plans.</a:t>
+            </a:r>
+          </a:p>
+        </p:txBody>
+      </p:sp>
+      <p:sp>
+        <p:nvSpPr>
+          <p:cNvPr id="4" name="Rectangle 3"/>
+          <p:cNvSpPr/>
+          <p:nvPr/>
+        </p:nvSpPr>
+        <p:spPr>
+          <a:xfrm>
+            <a:off x="731520" y="1664208"/>
+            <a:ext cx="100584" cy="100584"/>
+          </a:xfrm>
+          <a:prstGeom prst="rect">
+            <a:avLst/>
+          </a:prstGeom>
+          <a:solidFill>
+            <a:srgbClr val="E7DCC3"/>
+          </a:solidFill>
+          <a:ln>
+            <a:noFill/>
+          </a:ln>
+        </p:spPr>
+        <p:style>
+          <a:lnRef idx="1">
+            <a:schemeClr val="accent1"/>
+          </a:lnRef>
+          <a:fillRef idx="3">
+            <a:schemeClr val="accent1"/>
+          </a:fillRef>
+          <a:effectRef idx="2">
+            <a:schemeClr val="accent1"/>
+          </a:effectRef>
+          <a:fontRef idx="minor">
+            <a:schemeClr val="lt1"/>
+          </a:fontRef>
+        </p:style>
+        <p:txBody>
+          <a:bodyPr rtlCol="0" anchor="ctr"/>
+          <a:lstStyle/>
+          <a:p>
+            <a:pPr algn="ctr"/>
+          </a:p>
+        </p:txBody>
+      </p:sp>
+      <p:sp>
+        <p:nvSpPr>
+          <p:cNvPr id="5" name="Rectangle 4"/>
+          <p:cNvSpPr/>
+          <p:nvPr/>
+        </p:nvSpPr>
+        <p:spPr>
+          <a:xfrm>
+            <a:off x="877824" y="1664208"/>
+            <a:ext cx="100584" cy="100584"/>
+          </a:xfrm>
+          <a:prstGeom prst="rect">
+            <a:avLst/>
+          </a:prstGeom>
+          <a:solidFill>
+            <a:srgbClr val="F2C12E"/>
+          </a:solidFill>
+          <a:ln>
+            <a:noFill/>
+          </a:ln>
+        </p:spPr>
+        <p:style>
+          <a:lnRef idx="1">
+            <a:schemeClr val="accent1"/>
+          </a:lnRef>
+          <a:fillRef idx="3">
+            <a:schemeClr val="accent1"/>
+          </a:fillRef>
+          <a:effectRef idx="2">
+            <a:schemeClr val="accent1"/>
+          </a:effectRef>
+          <a:fontRef idx="minor">
+            <a:schemeClr val="lt1"/>
+          </a:fontRef>
+        </p:style>
+        <p:txBody>
+          <a:bodyPr rtlCol="0" anchor="ctr"/>
+          <a:lstStyle/>
+          <a:p>
+            <a:pPr algn="ctr"/>
+          </a:p>
+        </p:txBody>
+      </p:sp>
+      <p:sp>
+        <p:nvSpPr>
+          <p:cNvPr id="6" name="Rectangle 5"/>
+          <p:cNvSpPr/>
+          <p:nvPr/>
+        </p:nvSpPr>
+        <p:spPr>
+          <a:xfrm>
+            <a:off x="1024128" y="1664208"/>
+            <a:ext cx="100584" cy="100584"/>
+          </a:xfrm>
+          <a:prstGeom prst="rect">
+            <a:avLst/>
+          </a:prstGeom>
+          <a:solidFill>
+            <a:srgbClr val="3A63D8"/>
+          </a:solidFill>
+          <a:ln>
+            <a:noFill/>
+          </a:ln>
+        </p:spPr>
+        <p:style>
+          <a:lnRef idx="1">
+            <a:schemeClr val="accent1"/>
+          </a:lnRef>
+          <a:fillRef idx="3">
+            <a:schemeClr val="accent1"/>
+          </a:fillRef>
+          <a:effectRef idx="2">
+            <a:schemeClr val="accent1"/>
+          </a:effectRef>
+          <a:fontRef idx="minor">
+            <a:schemeClr val="lt1"/>
+          </a:fontRef>
+        </p:style>
+        <p:txBody>
+          <a:bodyPr rtlCol="0" anchor="ctr"/>
+          <a:lstStyle/>
+          <a:p>
+            <a:pPr algn="ctr"/>
+          </a:p>
+        </p:txBody>
+      </p:sp>
+      <p:sp>
+        <p:nvSpPr>
+          <p:cNvPr id="7" name="Rectangle 6"/>
+          <p:cNvSpPr/>
+          <p:nvPr/>
+        </p:nvSpPr>
+        <p:spPr>
+          <a:xfrm>
+            <a:off x="1170432" y="1664208"/>
+            <a:ext cx="100584" cy="100584"/>
+          </a:xfrm>
+          <a:prstGeom prst="rect">
+            <a:avLst/>
+          </a:prstGeom>
+          <a:solidFill>
+            <a:srgbClr val="F08A24"/>
+          </a:solidFill>
+          <a:ln>
+            <a:noFill/>
+          </a:ln>
+        </p:spPr>
+        <p:style>
+          <a:lnRef idx="1">
+            <a:schemeClr val="accent1"/>
+          </a:lnRef>
+          <a:fillRef idx="3">
+            <a:schemeClr val="accent1"/>
+          </a:fillRef>
+          <a:effectRef idx="2">
+            <a:schemeClr val="accent1"/>
+          </a:effectRef>
+          <a:fontRef idx="minor">
+            <a:schemeClr val="lt1"/>
+          </a:fontRef>
+        </p:style>
+        <p:txBody>
+          <a:bodyPr rtlCol="0" anchor="ctr"/>
+          <a:lstStyle/>
+          <a:p>
+            <a:pPr algn="ctr"/>
+          </a:p>
+        </p:txBody>
+      </p:sp>
+      <p:sp>
+        <p:nvSpPr>
+          <p:cNvPr id="8" name="Rectangle 7"/>
+          <p:cNvSpPr/>
+          <p:nvPr/>
+        </p:nvSpPr>
+        <p:spPr>
+          <a:xfrm>
+            <a:off x="1316736" y="1664208"/>
+            <a:ext cx="100584" cy="100584"/>
+          </a:xfrm>
+          <a:prstGeom prst="rect">
+            <a:avLst/>
+          </a:prstGeom>
+          <a:solidFill>
+            <a:srgbClr val="D8432F"/>
+          </a:solidFill>
+          <a:ln>
+            <a:noFill/>
+          </a:ln>
+        </p:spPr>
+        <p:style>
+          <a:lnRef idx="1">
+            <a:schemeClr val="accent1"/>
+          </a:lnRef>
+          <a:fillRef idx="3">
+            <a:schemeClr val="accent1"/>
+          </a:fillRef>
+          <a:effectRef idx="2">
+            <a:schemeClr val="accent1"/>
+          </a:effectRef>
+          <a:fontRef idx="minor">
+            <a:schemeClr val="lt1"/>
+          </a:fontRef>
+        </p:style>
+        <p:txBody>
+          <a:bodyPr rtlCol="0" anchor="ctr"/>
+          <a:lstStyle/>
+          <a:p>
+            <a:pPr algn="ctr"/>
+          </a:p>
+        </p:txBody>
+      </p:sp>
+      <p:sp>
+        <p:nvSpPr>
+          <p:cNvPr id="9" name="Rectangle 8"/>
+          <p:cNvSpPr/>
+          <p:nvPr/>
+        </p:nvSpPr>
+        <p:spPr>
+          <a:xfrm>
+            <a:off x="1463040" y="1664208"/>
+            <a:ext cx="100584" cy="100584"/>
+          </a:xfrm>
+          <a:prstGeom prst="rect">
+            <a:avLst/>
+          </a:prstGeom>
+          <a:solidFill>
+            <a:srgbClr val="B23A7A"/>
+          </a:solidFill>
+          <a:ln>
+            <a:noFill/>
+          </a:ln>
+        </p:spPr>
+        <p:style>
+          <a:lnRef idx="1">
+            <a:schemeClr val="accent1"/>
+          </a:lnRef>
+          <a:fillRef idx="3">
+            <a:schemeClr val="accent1"/>
+          </a:fillRef>
+          <a:effectRef idx="2">
+            <a:schemeClr val="accent1"/>
+          </a:effectRef>
+          <a:fontRef idx="minor">
+            <a:schemeClr val="lt1"/>
+          </a:fontRef>
+        </p:style>
+        <p:txBody>
+          <a:bodyPr rtlCol="0" anchor="ctr"/>
+          <a:lstStyle/>
+          <a:p>
+            <a:pPr algn="ctr"/>
+          </a:p>
+        </p:txBody>
+      </p:sp>
+      <p:sp>
+        <p:nvSpPr>
+          <p:cNvPr id="10" name="Rectangle 9"/>
+          <p:cNvSpPr/>
+          <p:nvPr/>
+        </p:nvSpPr>
+        <p:spPr>
+          <a:xfrm>
+            <a:off x="1609344" y="1664208"/>
+            <a:ext cx="100584" cy="100584"/>
+          </a:xfrm>
+          <a:prstGeom prst="rect">
+            <a:avLst/>
+          </a:prstGeom>
+          <a:solidFill>
+            <a:srgbClr val="2E9E6B"/>
+          </a:solidFill>
+          <a:ln>
+            <a:noFill/>
+          </a:ln>
+        </p:spPr>
+        <p:style>
+          <a:lnRef idx="1">
+            <a:schemeClr val="accent1"/>
+          </a:lnRef>
+          <a:fillRef idx="3">
+            <a:schemeClr val="accent1"/>
+          </a:fillRef>
+          <a:effectRef idx="2">
+            <a:schemeClr val="accent1"/>
+          </a:effectRef>
+          <a:fontRef idx="minor">
+            <a:schemeClr val="lt1"/>
+          </a:fontRef>
+        </p:style>
+        <p:txBody>
+          <a:bodyPr rtlCol="0" anchor="ctr"/>
+          <a:lstStyle/>
+          <a:p>
+            <a:pPr algn="ctr"/>
+          </a:p>
+        </p:txBody>
+      </p:sp>
+      <p:sp>
+        <p:nvSpPr>
+          <p:cNvPr id="11" name="Rectangle 10"/>
+          <p:cNvSpPr/>
+          <p:nvPr/>
+        </p:nvSpPr>
+        <p:spPr>
+          <a:xfrm>
+            <a:off x="1755648" y="1664208"/>
+            <a:ext cx="100584" cy="100584"/>
+          </a:xfrm>
+          <a:prstGeom prst="rect">
+            <a:avLst/>
+          </a:prstGeom>
+          <a:solidFill>
+            <a:srgbClr val="74B8E0"/>
+          </a:solidFill>
+          <a:ln>
+            <a:noFill/>
+          </a:ln>
+        </p:spPr>
+        <p:style>
+          <a:lnRef idx="1">
+            <a:schemeClr val="accent1"/>
+          </a:lnRef>
+          <a:fillRef idx="3">
+            <a:schemeClr val="accent1"/>
+          </a:fillRef>
+          <a:effectRef idx="2">
+            <a:schemeClr val="accent1"/>
+          </a:effectRef>
+          <a:fontRef idx="minor">
+            <a:schemeClr val="lt1"/>
+          </a:fontRef>
+        </p:style>
+        <p:txBody>
+          <a:bodyPr rtlCol="0" anchor="ctr"/>
+          <a:lstStyle/>
+          <a:p>
+            <a:pPr algn="ctr"/>
+          </a:p>
+        </p:txBody>
+      </p:sp>
+      <p:sp>
+        <p:nvSpPr>
+          <p:cNvPr id="12" name="Rectangle 11"/>
+          <p:cNvSpPr/>
+          <p:nvPr/>
+        </p:nvSpPr>
+        <p:spPr>
+          <a:xfrm>
+            <a:off x="1901952" y="1664208"/>
+            <a:ext cx="100584" cy="100584"/>
+          </a:xfrm>
+          <a:prstGeom prst="rect">
+            <a:avLst/>
+          </a:prstGeom>
+          <a:solidFill>
+            <a:srgbClr val="6B4BC2"/>
+          </a:solidFill>
+          <a:ln>
+            <a:noFill/>
+          </a:ln>
+        </p:spPr>
+        <p:style>
+          <a:lnRef idx="1">
+            <a:schemeClr val="accent1"/>
+          </a:lnRef>
+          <a:fillRef idx="3">
+            <a:schemeClr val="accent1"/>
+          </a:fillRef>
+          <a:effectRef idx="2">
+            <a:schemeClr val="accent1"/>
+          </a:effectRef>
+          <a:fontRef idx="minor">
+            <a:schemeClr val="lt1"/>
+          </a:fontRef>
+        </p:style>
+        <p:txBody>
+          <a:bodyPr rtlCol="0" anchor="ctr"/>
+          <a:lstStyle/>
+          <a:p>
+            <a:pPr algn="ctr"/>
+          </a:p>
+        </p:txBody>
+      </p:sp>
+      <p:sp>
+        <p:nvSpPr>
+          <p:cNvPr id="13" name="Rectangle 12"/>
+          <p:cNvSpPr/>
+          <p:nvPr/>
+        </p:nvSpPr>
+        <p:spPr>
+          <a:xfrm>
+            <a:off x="2048256" y="1664208"/>
+            <a:ext cx="100584" cy="100584"/>
+          </a:xfrm>
+          <a:prstGeom prst="rect">
+            <a:avLst/>
+          </a:prstGeom>
+          <a:solidFill>
+            <a:srgbClr val="A7A23C"/>
+          </a:solidFill>
+          <a:ln>
+            <a:noFill/>
+          </a:ln>
+        </p:spPr>
+        <p:style>
+          <a:lnRef idx="1">
+            <a:schemeClr val="accent1"/>
+          </a:lnRef>
+          <a:fillRef idx="3">
+            <a:schemeClr val="accent1"/>
+          </a:fillRef>
+          <a:effectRef idx="2">
+            <a:schemeClr val="accent1"/>
+          </a:effectRef>
+          <a:fontRef idx="minor">
+            <a:schemeClr val="lt1"/>
+          </a:fontRef>
+        </p:style>
+        <p:txBody>
+          <a:bodyPr rtlCol="0" anchor="ctr"/>
+          <a:lstStyle/>
+          <a:p>
+            <a:pPr algn="ctr"/>
+          </a:p>
+        </p:txBody>
+      </p:sp>
+      <p:pic>
+        <p:nvPicPr>
+          <p:cNvPr id="14" name="Picture 13" descr="image.png"/>
+          <p:cNvPicPr>
+            <a:picLocks noChangeAspect="1"/>
+          </p:cNvPicPr>
+          <p:nvPr/>
+        </p:nvPicPr>
+        <p:blipFill>
+          <a:blip r:embed="rId2"/>
+          <a:stretch>
+            <a:fillRect/>
+          </a:stretch>
+        </p:blipFill>
+        <p:spPr>
+          <a:xfrm>
+            <a:off x="731520" y="1920240"/>
+            <a:ext cx="6217920" cy="3497580"/>
+          </a:xfrm>
+          <a:prstGeom prst="rect">
+            <a:avLst/>
+          </a:prstGeom>
+        </p:spPr>
+      </p:pic>
+      <p:sp>
+        <p:nvSpPr>
+          <p:cNvPr id="15" name="TextBox 14"/>
+          <p:cNvSpPr txBox="1"/>
+          <p:nvPr/>
+        </p:nvSpPr>
+        <p:spPr>
+          <a:xfrm>
+            <a:off x="7223760" y="1920240"/>
+            <a:ext cx="4206240" cy="4389120"/>
+          </a:xfrm>
+          <a:prstGeom prst="rect">
+            <a:avLst/>
+          </a:prstGeom>
+          <a:noFill/>
+        </p:spPr>
+        <p:txBody>
+          <a:bodyPr wrap="square" lIns="0" tIns="0">
+            <a:spAutoFit/>
+          </a:bodyPr>
+          <a:lstStyle/>
+          <a:p>
+            <a:pPr>
+              <a:defRPr sz="1600" b="1">
+                <a:solidFill>
+                  <a:srgbClr val="F2C12E"/>
                 </a:solidFill>
                 <a:latin typeface="Georgia"/>
               </a:defRPr>
             </a:pPr>
             <a:r>
-              <a:t>Turning conversation history into learned agent behaviours.</a:t>
-            </a:r>
-          </a:p>
-        </p:txBody>
-      </p:sp>
-      <p:sp>
-        <p:nvSpPr>
-          <p:cNvPr id="4" name="Rounded Rectangle 3"/>
-          <p:cNvSpPr/>
-          <p:nvPr/>
-        </p:nvSpPr>
-        <p:spPr>
-          <a:xfrm>
-            <a:off x="731520" y="1828800"/>
-            <a:ext cx="5212080" cy="4389120"/>
-          </a:xfrm>
-          <a:prstGeom prst="roundRect">
-            <a:avLst/>
-          </a:prstGeom>
-          <a:solidFill>
-            <a:srgbClr val="161512"/>
-          </a:solidFill>
-          <a:ln>
-            <a:solidFill>
-              <a:srgbClr val="2E2B26"/>
-            </a:solidFill>
-          </a:ln>
-        </p:spPr>
-        <p:style>
-          <a:lnRef idx="1">
-            <a:schemeClr val="accent1"/>
-          </a:lnRef>
-          <a:fillRef idx="3">
-            <a:schemeClr val="accent1"/>
-          </a:fillRef>
-          <a:effectRef idx="2">
-            <a:schemeClr val="accent1"/>
-          </a:effectRef>
-          <a:fontRef idx="minor">
-            <a:schemeClr val="lt1"/>
-          </a:fontRef>
-        </p:style>
-        <p:txBody>
-          <a:bodyPr rtlCol="0" anchor="ctr" wrap="square" lIns="274320" tIns="274320"/>
-          <a:lstStyle/>
-          <a:p>
-            <a:pPr algn="ctr">
-              <a:defRPr sz="1700" b="1">
-                <a:solidFill>
-                  <a:srgbClr val="F2C12E"/>
-                </a:solidFill>
-                <a:latin typeface="Georgia"/>
-              </a:defRPr>
-            </a:pPr>
-            <a:r>
-              <a:t>Reflection Pipeline</a:t>
+              <a:t>Background Consolidation</a:t>
             </a:r>
           </a:p>
           <a:p>
             <a:pPr>
               <a:spcBef>
-                <a:spcPts val="800"/>
+                <a:spcPts val="400"/>
               </a:spcBef>
-              <a:defRPr sz="1300" b="1">
-                <a:solidFill>
-                  <a:srgbClr val="EDE6D6"/>
+              <a:defRPr sz="1200">
+                <a:solidFill>
+                  <a:srgbClr val="B8B1A2"/>
                 </a:solidFill>
                 <a:latin typeface="Segoe UI"/>
               </a:defRPr>
             </a:pPr>
             <a:r>
-              <a:t>1. Gather Unreflected Feedback</a:t>
-            </a:r>
-          </a:p>
-          <a:p>
-            <a:pPr>
-              <a:defRPr sz="1100">
-                <a:solidFill>
-                  <a:srgbClr val="B8B1A2"/>
-                </a:solidFill>
-                <a:latin typeface="Segoe UI"/>
-              </a:defRPr>
-            </a:pPr>
-            <a:r>
-              <a:t>Collects raw feedback, corrections, and explicit preferences since last checkpoint.</a:t>
+              <a:t>Gathers feedback across conversations and clusters observations into high-level rules.</a:t>
             </a:r>
           </a:p>
           <a:p>
             <a:pPr>
               <a:spcBef>
-                <a:spcPts val="800"/>
+                <a:spcPts val="1800"/>
               </a:spcBef>
-              <a:defRPr sz="1300" b="1">
-                <a:solidFill>
-                  <a:srgbClr val="EDE6D6"/>
-                </a:solidFill>
-                <a:latin typeface="Segoe UI"/>
+              <a:defRPr sz="1600" b="1">
+                <a:solidFill>
+                  <a:srgbClr val="6B4BC2"/>
+                </a:solidFill>
+                <a:latin typeface="Georgia"/>
               </a:defRPr>
             </a:pPr>
             <a:r>
-              <a:t>2. Topic Clustering</a:t>
-            </a:r>
-          </a:p>
-          <a:p>
-            <a:pPr>
-              <a:defRPr sz="1100">
-                <a:solidFill>
-                  <a:srgbClr val="B8B1A2"/>
-                </a:solidFill>
-                <a:latin typeface="Segoe UI"/>
-              </a:defRPr>
-            </a:pPr>
-            <a:r>
-              <a:t>Groups observations by task domain (e.g. planning, formatting, coding).</a:t>
+              <a:t>Visible Strategy Card</a:t>
             </a:r>
           </a:p>
           <a:p>
             <a:pPr>
               <a:spcBef>
-                <a:spcPts val="800"/>
+                <a:spcPts val="400"/>
               </a:spcBef>
-              <a:defRPr sz="1300" b="1">
-                <a:solidFill>
-                  <a:srgbClr val="EDE6D6"/>
+              <a:defRPr sz="1200">
+                <a:solidFill>
+                  <a:srgbClr val="B8B1A2"/>
                 </a:solidFill>
                 <a:latin typeface="Segoe UI"/>
               </a:defRPr>
             </a:pPr>
             <a:r>
-              <a:t>3. Synthesis &amp; Consolidation</a:t>
-            </a:r>
-          </a:p>
-          <a:p>
-            <a:pPr>
-              <a:defRPr sz="1100">
-                <a:solidFill>
-                  <a:srgbClr val="B8B1A2"/>
-                </a:solidFill>
-                <a:latin typeface="Segoe UI"/>
-              </a:defRPr>
-            </a:pPr>
-            <a:r>
-              <a:t>Synthesizes recurring guidance into generalized behavioural rules.</a:t>
+              <a:t>"When Aarav asks for a plan, give at most 5 bullets, each with a time box."</a:t>
             </a:r>
           </a:p>
           <a:p>
             <a:pPr>
               <a:spcBef>
-                <a:spcPts val="800"/>
+                <a:spcPts val="1800"/>
               </a:spcBef>
-              <a:defRPr sz="1300" b="1">
-                <a:solidFill>
-                  <a:srgbClr val="EDE6D6"/>
-                </a:solidFill>
-                <a:latin typeface="Segoe UI"/>
+              <a:defRPr sz="1600" b="1">
+                <a:solidFill>
+                  <a:srgbClr val="2E9E6B"/>
+                </a:solidFill>
+                <a:latin typeface="Georgia"/>
               </a:defRPr>
             </a:pPr>
             <a:r>
-              <a:t>4. Write Learned Strategies</a:t>
-            </a:r>
-          </a:p>
-          <a:p>
-            <a:pPr>
-              <a:defRPr sz="1100">
-                <a:solidFill>
-                  <a:srgbClr val="B8B1A2"/>
-                </a:solidFill>
-                <a:latin typeface="Segoe UI"/>
-              </a:defRPr>
-            </a:pPr>
-            <a:r>
-              <a:t>Stores high-level strategies in memories with vector embeddings.</a:t>
-            </a:r>
-          </a:p>
-        </p:txBody>
-      </p:sp>
-      <p:sp>
-        <p:nvSpPr>
-          <p:cNvPr id="5" name="Rounded Rectangle 4"/>
-          <p:cNvSpPr/>
-          <p:nvPr/>
-        </p:nvSpPr>
-        <p:spPr>
-          <a:xfrm>
-            <a:off x="6217920" y="1828800"/>
-            <a:ext cx="5212080" cy="4389120"/>
-          </a:xfrm>
-          <a:prstGeom prst="roundRect">
-            <a:avLst/>
-          </a:prstGeom>
-          <a:solidFill>
-            <a:srgbClr val="161512"/>
-          </a:solidFill>
-          <a:ln>
-            <a:solidFill>
-              <a:srgbClr val="2E2B26"/>
-            </a:solidFill>
-          </a:ln>
-        </p:spPr>
-        <p:style>
-          <a:lnRef idx="1">
-            <a:schemeClr val="accent1"/>
-          </a:lnRef>
-          <a:fillRef idx="3">
-            <a:schemeClr val="accent1"/>
-          </a:fillRef>
-          <a:effectRef idx="2">
-            <a:schemeClr val="accent1"/>
-          </a:effectRef>
-          <a:fontRef idx="minor">
-            <a:schemeClr val="lt1"/>
-          </a:fontRef>
-        </p:style>
-        <p:txBody>
-          <a:bodyPr rtlCol="0" anchor="ctr" wrap="square" lIns="274320" tIns="274320"/>
-          <a:lstStyle/>
-          <a:p>
-            <a:pPr algn="ctr">
-              <a:defRPr sz="1700" b="1">
-                <a:solidFill>
-                  <a:srgbClr val="4FB37E"/>
-                </a:solidFill>
-                <a:latin typeface="Georgia"/>
-              </a:defRPr>
-            </a:pPr>
-            <a:r>
-              <a:t>Learned Strategy in Production</a:t>
+              <a:t>Learned Adaptation</a:t>
             </a:r>
           </a:p>
           <a:p>
             <a:pPr>
               <a:spcBef>
-                <a:spcPts val="1200"/>
+                <a:spcPts val="400"/>
               </a:spcBef>
-              <a:defRPr sz="1300" b="1">
-                <a:solidFill>
-                  <a:srgbClr val="EDE6D6"/>
+              <a:defRPr sz="1200">
+                <a:solidFill>
+                  <a:srgbClr val="B8B1A2"/>
                 </a:solidFill>
                 <a:latin typeface="Segoe UI"/>
               </a:defRPr>
             </a:pPr>
             <a:r>
-              <a:t>Observed User Feedback</a:t>
-            </a:r>
-          </a:p>
-          <a:p>
-            <a:pPr>
-              <a:defRPr sz="1200">
-                <a:solidFill>
-                  <a:srgbClr val="B8B1A2"/>
-                </a:solidFill>
-                <a:latin typeface="Segoe UI"/>
-              </a:defRPr>
-            </a:pPr>
-            <a:r>
-              <a:t>User repeatedly asks: 'keep it concise', 'bullet points only', 'shorter plans'.</a:t>
-            </a:r>
-          </a:p>
-          <a:p>
-            <a:pPr>
-              <a:spcBef>
-                <a:spcPts val="1200"/>
-              </a:spcBef>
-              <a:defRPr sz="1300" b="1">
-                <a:solidFill>
-                  <a:srgbClr val="EDE6D6"/>
-                </a:solidFill>
-                <a:latin typeface="Segoe UI"/>
-              </a:defRPr>
-            </a:pPr>
-            <a:r>
-              <a:t>Synthesized Strategy</a:t>
-            </a:r>
-          </a:p>
-          <a:p>
-            <a:pPr>
-              <a:defRPr sz="1200">
-                <a:solidFill>
-                  <a:srgbClr val="F2C12E"/>
-                </a:solidFill>
-                <a:latin typeface="Segoe UI"/>
-              </a:defRPr>
-            </a:pPr>
-            <a:r>
-              <a:t>"When Aarav asks for a plan, give at most 5 bullets, each with a time box."</a:t>
-            </a:r>
-          </a:p>
-          <a:p>
-            <a:pPr>
-              <a:spcBef>
-                <a:spcPts val="1200"/>
-              </a:spcBef>
-              <a:defRPr sz="1300" b="1">
-                <a:solidFill>
-                  <a:srgbClr val="EDE6D6"/>
-                </a:solidFill>
-                <a:latin typeface="Segoe UI"/>
-              </a:defRPr>
-            </a:pPr>
-            <a:r>
-              <a:t>Live Agent Adaptation</a:t>
-            </a:r>
-          </a:p>
-          <a:p>
-            <a:pPr>
-              <a:defRPr sz="1200">
-                <a:solidFill>
-                  <a:srgbClr val="B8B1A2"/>
-                </a:solidFill>
-                <a:latin typeface="Segoe UI"/>
-              </a:defRPr>
-            </a:pPr>
-            <a:r>
-              <a:t>Automatically recalled in future planning queries. Directly governs the Kestrel launch roadmap without prompting.</a:t>
+              <a:t>Future replies respect the learned strategy without requiring prompt engineering.</a:t>
             </a:r>
           </a:p>
         </p:txBody>
@@ -7416,8 +10693,8 @@
         </p:nvSpPr>
         <p:spPr>
           <a:xfrm>
-            <a:off x="731520" y="457200"/>
-            <a:ext cx="10728655" cy="1097280"/>
+            <a:off x="731520" y="411480"/>
+            <a:ext cx="10728655" cy="1188720"/>
           </a:xfrm>
           <a:prstGeom prst="rect">
             <a:avLst/>
@@ -7433,13 +10710,29 @@
             <a:pPr>
               <a:defRPr sz="1100" b="1">
                 <a:solidFill>
-                  <a:srgbClr val="F2C12E"/>
+                  <a:srgbClr val="8A8477"/>
                 </a:solidFill>
                 <a:latin typeface="Consolas"/>
               </a:defRPr>
             </a:pPr>
             <a:r>
-              <a:t>08 / MONGODB STACK</a:t>
+              <a:t>09</a:t>
+            </a:r>
+          </a:p>
+          <a:p>
+            <a:pPr>
+              <a:spcBef>
+                <a:spcPts val="300"/>
+              </a:spcBef>
+              <a:defRPr sz="2800" b="1">
+                <a:solidFill>
+                  <a:srgbClr val="EDE6D6"/>
+                </a:solidFill>
+                <a:latin typeface="Georgia"/>
+              </a:defRPr>
+            </a:pPr>
+            <a:r>
+              <a:t>Built on MongoDB Atlas</a:t>
             </a:r>
           </a:p>
           <a:p>
@@ -7447,29 +10740,459 @@
               <a:spcBef>
                 <a:spcPts val="400"/>
               </a:spcBef>
-              <a:defRPr sz="2600" b="1">
-                <a:solidFill>
-                  <a:srgbClr val="EDE6D6"/>
-                </a:solidFill>
-                <a:latin typeface="Georgia"/>
+              <a:defRPr sz="1300">
+                <a:solidFill>
+                  <a:srgbClr val="B8B1A2"/>
+                </a:solidFill>
+                <a:latin typeface="Segoe UI"/>
               </a:defRPr>
             </a:pPr>
             <a:r>
-              <a:t>Eight native MongoDB Atlas capabilities powering a zero-infrastructure backend.</a:t>
-            </a:r>
-          </a:p>
-        </p:txBody>
-      </p:sp>
-      <p:sp>
-        <p:nvSpPr>
-          <p:cNvPr id="4" name="Rounded Rectangle 3"/>
-          <p:cNvSpPr/>
-          <p:nvPr/>
-        </p:nvSpPr>
-        <p:spPr>
-          <a:xfrm>
-            <a:off x="731520" y="1828800"/>
-            <a:ext cx="5120640" cy="1005840"/>
+              <a:t>Vector Search with filters · Atlas Search · TTL · transactions · partial unique index · change streams · aggregations.</a:t>
+            </a:r>
+          </a:p>
+        </p:txBody>
+      </p:sp>
+      <p:sp>
+        <p:nvSpPr>
+          <p:cNvPr id="4" name="Rectangle 3"/>
+          <p:cNvSpPr/>
+          <p:nvPr/>
+        </p:nvSpPr>
+        <p:spPr>
+          <a:xfrm>
+            <a:off x="731520" y="1664208"/>
+            <a:ext cx="100584" cy="100584"/>
+          </a:xfrm>
+          <a:prstGeom prst="rect">
+            <a:avLst/>
+          </a:prstGeom>
+          <a:solidFill>
+            <a:srgbClr val="E7DCC3"/>
+          </a:solidFill>
+          <a:ln>
+            <a:noFill/>
+          </a:ln>
+        </p:spPr>
+        <p:style>
+          <a:lnRef idx="1">
+            <a:schemeClr val="accent1"/>
+          </a:lnRef>
+          <a:fillRef idx="3">
+            <a:schemeClr val="accent1"/>
+          </a:fillRef>
+          <a:effectRef idx="2">
+            <a:schemeClr val="accent1"/>
+          </a:effectRef>
+          <a:fontRef idx="minor">
+            <a:schemeClr val="lt1"/>
+          </a:fontRef>
+        </p:style>
+        <p:txBody>
+          <a:bodyPr rtlCol="0" anchor="ctr"/>
+          <a:lstStyle/>
+          <a:p>
+            <a:pPr algn="ctr"/>
+          </a:p>
+        </p:txBody>
+      </p:sp>
+      <p:sp>
+        <p:nvSpPr>
+          <p:cNvPr id="5" name="Rectangle 4"/>
+          <p:cNvSpPr/>
+          <p:nvPr/>
+        </p:nvSpPr>
+        <p:spPr>
+          <a:xfrm>
+            <a:off x="877824" y="1664208"/>
+            <a:ext cx="100584" cy="100584"/>
+          </a:xfrm>
+          <a:prstGeom prst="rect">
+            <a:avLst/>
+          </a:prstGeom>
+          <a:solidFill>
+            <a:srgbClr val="F2C12E"/>
+          </a:solidFill>
+          <a:ln>
+            <a:noFill/>
+          </a:ln>
+        </p:spPr>
+        <p:style>
+          <a:lnRef idx="1">
+            <a:schemeClr val="accent1"/>
+          </a:lnRef>
+          <a:fillRef idx="3">
+            <a:schemeClr val="accent1"/>
+          </a:fillRef>
+          <a:effectRef idx="2">
+            <a:schemeClr val="accent1"/>
+          </a:effectRef>
+          <a:fontRef idx="minor">
+            <a:schemeClr val="lt1"/>
+          </a:fontRef>
+        </p:style>
+        <p:txBody>
+          <a:bodyPr rtlCol="0" anchor="ctr"/>
+          <a:lstStyle/>
+          <a:p>
+            <a:pPr algn="ctr"/>
+          </a:p>
+        </p:txBody>
+      </p:sp>
+      <p:sp>
+        <p:nvSpPr>
+          <p:cNvPr id="6" name="Rectangle 5"/>
+          <p:cNvSpPr/>
+          <p:nvPr/>
+        </p:nvSpPr>
+        <p:spPr>
+          <a:xfrm>
+            <a:off x="1024128" y="1664208"/>
+            <a:ext cx="100584" cy="100584"/>
+          </a:xfrm>
+          <a:prstGeom prst="rect">
+            <a:avLst/>
+          </a:prstGeom>
+          <a:solidFill>
+            <a:srgbClr val="3A63D8"/>
+          </a:solidFill>
+          <a:ln>
+            <a:noFill/>
+          </a:ln>
+        </p:spPr>
+        <p:style>
+          <a:lnRef idx="1">
+            <a:schemeClr val="accent1"/>
+          </a:lnRef>
+          <a:fillRef idx="3">
+            <a:schemeClr val="accent1"/>
+          </a:fillRef>
+          <a:effectRef idx="2">
+            <a:schemeClr val="accent1"/>
+          </a:effectRef>
+          <a:fontRef idx="minor">
+            <a:schemeClr val="lt1"/>
+          </a:fontRef>
+        </p:style>
+        <p:txBody>
+          <a:bodyPr rtlCol="0" anchor="ctr"/>
+          <a:lstStyle/>
+          <a:p>
+            <a:pPr algn="ctr"/>
+          </a:p>
+        </p:txBody>
+      </p:sp>
+      <p:sp>
+        <p:nvSpPr>
+          <p:cNvPr id="7" name="Rectangle 6"/>
+          <p:cNvSpPr/>
+          <p:nvPr/>
+        </p:nvSpPr>
+        <p:spPr>
+          <a:xfrm>
+            <a:off x="1170432" y="1664208"/>
+            <a:ext cx="100584" cy="100584"/>
+          </a:xfrm>
+          <a:prstGeom prst="rect">
+            <a:avLst/>
+          </a:prstGeom>
+          <a:solidFill>
+            <a:srgbClr val="F08A24"/>
+          </a:solidFill>
+          <a:ln>
+            <a:noFill/>
+          </a:ln>
+        </p:spPr>
+        <p:style>
+          <a:lnRef idx="1">
+            <a:schemeClr val="accent1"/>
+          </a:lnRef>
+          <a:fillRef idx="3">
+            <a:schemeClr val="accent1"/>
+          </a:fillRef>
+          <a:effectRef idx="2">
+            <a:schemeClr val="accent1"/>
+          </a:effectRef>
+          <a:fontRef idx="minor">
+            <a:schemeClr val="lt1"/>
+          </a:fontRef>
+        </p:style>
+        <p:txBody>
+          <a:bodyPr rtlCol="0" anchor="ctr"/>
+          <a:lstStyle/>
+          <a:p>
+            <a:pPr algn="ctr"/>
+          </a:p>
+        </p:txBody>
+      </p:sp>
+      <p:sp>
+        <p:nvSpPr>
+          <p:cNvPr id="8" name="Rectangle 7"/>
+          <p:cNvSpPr/>
+          <p:nvPr/>
+        </p:nvSpPr>
+        <p:spPr>
+          <a:xfrm>
+            <a:off x="1316736" y="1664208"/>
+            <a:ext cx="100584" cy="100584"/>
+          </a:xfrm>
+          <a:prstGeom prst="rect">
+            <a:avLst/>
+          </a:prstGeom>
+          <a:solidFill>
+            <a:srgbClr val="D8432F"/>
+          </a:solidFill>
+          <a:ln>
+            <a:noFill/>
+          </a:ln>
+        </p:spPr>
+        <p:style>
+          <a:lnRef idx="1">
+            <a:schemeClr val="accent1"/>
+          </a:lnRef>
+          <a:fillRef idx="3">
+            <a:schemeClr val="accent1"/>
+          </a:fillRef>
+          <a:effectRef idx="2">
+            <a:schemeClr val="accent1"/>
+          </a:effectRef>
+          <a:fontRef idx="minor">
+            <a:schemeClr val="lt1"/>
+          </a:fontRef>
+        </p:style>
+        <p:txBody>
+          <a:bodyPr rtlCol="0" anchor="ctr"/>
+          <a:lstStyle/>
+          <a:p>
+            <a:pPr algn="ctr"/>
+          </a:p>
+        </p:txBody>
+      </p:sp>
+      <p:sp>
+        <p:nvSpPr>
+          <p:cNvPr id="9" name="Rectangle 8"/>
+          <p:cNvSpPr/>
+          <p:nvPr/>
+        </p:nvSpPr>
+        <p:spPr>
+          <a:xfrm>
+            <a:off x="1463040" y="1664208"/>
+            <a:ext cx="100584" cy="100584"/>
+          </a:xfrm>
+          <a:prstGeom prst="rect">
+            <a:avLst/>
+          </a:prstGeom>
+          <a:solidFill>
+            <a:srgbClr val="B23A7A"/>
+          </a:solidFill>
+          <a:ln>
+            <a:noFill/>
+          </a:ln>
+        </p:spPr>
+        <p:style>
+          <a:lnRef idx="1">
+            <a:schemeClr val="accent1"/>
+          </a:lnRef>
+          <a:fillRef idx="3">
+            <a:schemeClr val="accent1"/>
+          </a:fillRef>
+          <a:effectRef idx="2">
+            <a:schemeClr val="accent1"/>
+          </a:effectRef>
+          <a:fontRef idx="minor">
+            <a:schemeClr val="lt1"/>
+          </a:fontRef>
+        </p:style>
+        <p:txBody>
+          <a:bodyPr rtlCol="0" anchor="ctr"/>
+          <a:lstStyle/>
+          <a:p>
+            <a:pPr algn="ctr"/>
+          </a:p>
+        </p:txBody>
+      </p:sp>
+      <p:sp>
+        <p:nvSpPr>
+          <p:cNvPr id="10" name="Rectangle 9"/>
+          <p:cNvSpPr/>
+          <p:nvPr/>
+        </p:nvSpPr>
+        <p:spPr>
+          <a:xfrm>
+            <a:off x="1609344" y="1664208"/>
+            <a:ext cx="100584" cy="100584"/>
+          </a:xfrm>
+          <a:prstGeom prst="rect">
+            <a:avLst/>
+          </a:prstGeom>
+          <a:solidFill>
+            <a:srgbClr val="2E9E6B"/>
+          </a:solidFill>
+          <a:ln>
+            <a:noFill/>
+          </a:ln>
+        </p:spPr>
+        <p:style>
+          <a:lnRef idx="1">
+            <a:schemeClr val="accent1"/>
+          </a:lnRef>
+          <a:fillRef idx="3">
+            <a:schemeClr val="accent1"/>
+          </a:fillRef>
+          <a:effectRef idx="2">
+            <a:schemeClr val="accent1"/>
+          </a:effectRef>
+          <a:fontRef idx="minor">
+            <a:schemeClr val="lt1"/>
+          </a:fontRef>
+        </p:style>
+        <p:txBody>
+          <a:bodyPr rtlCol="0" anchor="ctr"/>
+          <a:lstStyle/>
+          <a:p>
+            <a:pPr algn="ctr"/>
+          </a:p>
+        </p:txBody>
+      </p:sp>
+      <p:sp>
+        <p:nvSpPr>
+          <p:cNvPr id="11" name="Rectangle 10"/>
+          <p:cNvSpPr/>
+          <p:nvPr/>
+        </p:nvSpPr>
+        <p:spPr>
+          <a:xfrm>
+            <a:off x="1755648" y="1664208"/>
+            <a:ext cx="100584" cy="100584"/>
+          </a:xfrm>
+          <a:prstGeom prst="rect">
+            <a:avLst/>
+          </a:prstGeom>
+          <a:solidFill>
+            <a:srgbClr val="74B8E0"/>
+          </a:solidFill>
+          <a:ln>
+            <a:noFill/>
+          </a:ln>
+        </p:spPr>
+        <p:style>
+          <a:lnRef idx="1">
+            <a:schemeClr val="accent1"/>
+          </a:lnRef>
+          <a:fillRef idx="3">
+            <a:schemeClr val="accent1"/>
+          </a:fillRef>
+          <a:effectRef idx="2">
+            <a:schemeClr val="accent1"/>
+          </a:effectRef>
+          <a:fontRef idx="minor">
+            <a:schemeClr val="lt1"/>
+          </a:fontRef>
+        </p:style>
+        <p:txBody>
+          <a:bodyPr rtlCol="0" anchor="ctr"/>
+          <a:lstStyle/>
+          <a:p>
+            <a:pPr algn="ctr"/>
+          </a:p>
+        </p:txBody>
+      </p:sp>
+      <p:sp>
+        <p:nvSpPr>
+          <p:cNvPr id="12" name="Rectangle 11"/>
+          <p:cNvSpPr/>
+          <p:nvPr/>
+        </p:nvSpPr>
+        <p:spPr>
+          <a:xfrm>
+            <a:off x="1901952" y="1664208"/>
+            <a:ext cx="100584" cy="100584"/>
+          </a:xfrm>
+          <a:prstGeom prst="rect">
+            <a:avLst/>
+          </a:prstGeom>
+          <a:solidFill>
+            <a:srgbClr val="6B4BC2"/>
+          </a:solidFill>
+          <a:ln>
+            <a:noFill/>
+          </a:ln>
+        </p:spPr>
+        <p:style>
+          <a:lnRef idx="1">
+            <a:schemeClr val="accent1"/>
+          </a:lnRef>
+          <a:fillRef idx="3">
+            <a:schemeClr val="accent1"/>
+          </a:fillRef>
+          <a:effectRef idx="2">
+            <a:schemeClr val="accent1"/>
+          </a:effectRef>
+          <a:fontRef idx="minor">
+            <a:schemeClr val="lt1"/>
+          </a:fontRef>
+        </p:style>
+        <p:txBody>
+          <a:bodyPr rtlCol="0" anchor="ctr"/>
+          <a:lstStyle/>
+          <a:p>
+            <a:pPr algn="ctr"/>
+          </a:p>
+        </p:txBody>
+      </p:sp>
+      <p:sp>
+        <p:nvSpPr>
+          <p:cNvPr id="13" name="Rectangle 12"/>
+          <p:cNvSpPr/>
+          <p:nvPr/>
+        </p:nvSpPr>
+        <p:spPr>
+          <a:xfrm>
+            <a:off x="2048256" y="1664208"/>
+            <a:ext cx="100584" cy="100584"/>
+          </a:xfrm>
+          <a:prstGeom prst="rect">
+            <a:avLst/>
+          </a:prstGeom>
+          <a:solidFill>
+            <a:srgbClr val="A7A23C"/>
+          </a:solidFill>
+          <a:ln>
+            <a:noFill/>
+          </a:ln>
+        </p:spPr>
+        <p:style>
+          <a:lnRef idx="1">
+            <a:schemeClr val="accent1"/>
+          </a:lnRef>
+          <a:fillRef idx="3">
+            <a:schemeClr val="accent1"/>
+          </a:fillRef>
+          <a:effectRef idx="2">
+            <a:schemeClr val="accent1"/>
+          </a:effectRef>
+          <a:fontRef idx="minor">
+            <a:schemeClr val="lt1"/>
+          </a:fontRef>
+        </p:style>
+        <p:txBody>
+          <a:bodyPr rtlCol="0" anchor="ctr"/>
+          <a:lstStyle/>
+          <a:p>
+            <a:pPr algn="ctr"/>
+          </a:p>
+        </p:txBody>
+      </p:sp>
+      <p:sp>
+        <p:nvSpPr>
+          <p:cNvPr id="14" name="Rounded Rectangle 13"/>
+          <p:cNvSpPr/>
+          <p:nvPr/>
+        </p:nvSpPr>
+        <p:spPr>
+          <a:xfrm>
+            <a:off x="731520" y="1920240"/>
+            <a:ext cx="5120640" cy="868680"/>
           </a:xfrm>
           <a:prstGeom prst="roundRect">
             <a:avLst/>
@@ -7479,7 +11202,7 @@
           </a:solidFill>
           <a:ln>
             <a:solidFill>
-              <a:srgbClr val="2E2B26"/>
+              <a:srgbClr val="2A2722"/>
             </a:solidFill>
           </a:ln>
         </p:spPr>
@@ -7510,7 +11233,7 @@
               </a:defRPr>
             </a:pPr>
             <a:r>
-              <a:t>Document Model &amp; $jsonSchema</a:t>
+              <a:t>Vector Search with filters</a:t>
             </a:r>
           </a:p>
           <a:p>
@@ -7526,21 +11249,21 @@
               </a:defRPr>
             </a:pPr>
             <a:r>
-              <a:t>Typed memories, confidence scores, and lifecycle states in a strictly validated schema.</a:t>
-            </a:r>
-          </a:p>
-        </p:txBody>
-      </p:sp>
-      <p:sp>
-        <p:nvSpPr>
-          <p:cNvPr id="5" name="Rounded Rectangle 4"/>
-          <p:cNvSpPr/>
-          <p:nvPr/>
-        </p:nvSpPr>
-        <p:spPr>
-          <a:xfrm>
-            <a:off x="6126480" y="1828800"/>
-            <a:ext cx="5120640" cy="1005840"/>
+              <a:t>768-d vector similarity pre-filtered by ownerId and spaceKey.</a:t>
+            </a:r>
+          </a:p>
+        </p:txBody>
+      </p:sp>
+      <p:sp>
+        <p:nvSpPr>
+          <p:cNvPr id="15" name="Rounded Rectangle 14"/>
+          <p:cNvSpPr/>
+          <p:nvPr/>
+        </p:nvSpPr>
+        <p:spPr>
+          <a:xfrm>
+            <a:off x="6126480" y="1920240"/>
+            <a:ext cx="5120640" cy="868680"/>
           </a:xfrm>
           <a:prstGeom prst="roundRect">
             <a:avLst/>
@@ -7550,7 +11273,7 @@
           </a:solidFill>
           <a:ln>
             <a:solidFill>
-              <a:srgbClr val="2E2B26"/>
+              <a:srgbClr val="2A2722"/>
             </a:solidFill>
           </a:ln>
         </p:spPr>
@@ -7581,7 +11304,7 @@
               </a:defRPr>
             </a:pPr>
             <a:r>
-              <a:t>Atlas Vector Search</a:t>
+              <a:t>Atlas Search (Lucene)</a:t>
             </a:r>
           </a:p>
           <a:p>
@@ -7597,21 +11320,21 @@
               </a:defRPr>
             </a:pPr>
             <a:r>
-              <a:t>768-d vector index with pre-filters on ownerId, spaceKey, status, and type.</a:t>
-            </a:r>
-          </a:p>
-        </p:txBody>
-      </p:sp>
-      <p:sp>
-        <p:nvSpPr>
-          <p:cNvPr id="6" name="Rounded Rectangle 5"/>
-          <p:cNvSpPr/>
-          <p:nvPr/>
-        </p:nvSpPr>
-        <p:spPr>
-          <a:xfrm>
-            <a:off x="731520" y="2971800"/>
-            <a:ext cx="5120640" cy="1005840"/>
+              <a:t>Full-text lexical search capturing exact keywords and codes.</a:t>
+            </a:r>
+          </a:p>
+        </p:txBody>
+      </p:sp>
+      <p:sp>
+        <p:nvSpPr>
+          <p:cNvPr id="16" name="Rounded Rectangle 15"/>
+          <p:cNvSpPr/>
+          <p:nvPr/>
+        </p:nvSpPr>
+        <p:spPr>
+          <a:xfrm>
+            <a:off x="731520" y="2880360"/>
+            <a:ext cx="5120640" cy="868680"/>
           </a:xfrm>
           <a:prstGeom prst="roundRect">
             <a:avLst/>
@@ -7621,7 +11344,7 @@
           </a:solidFill>
           <a:ln>
             <a:solidFill>
-              <a:srgbClr val="2E2B26"/>
+              <a:srgbClr val="2A2722"/>
             </a:solidFill>
           </a:ln>
         </p:spPr>
@@ -7652,7 +11375,7 @@
               </a:defRPr>
             </a:pPr>
             <a:r>
-              <a:t>Atlas Search (Lucene)</a:t>
+              <a:t>TTL Indexes</a:t>
             </a:r>
           </a:p>
           <a:p>
@@ -7668,21 +11391,21 @@
               </a:defRPr>
             </a:pPr>
             <a:r>
-              <a:t>Full-text lexical search capturing exact tokens that vector embeddings miss.</a:t>
-            </a:r>
-          </a:p>
-        </p:txBody>
-      </p:sp>
-      <p:sp>
-        <p:nvSpPr>
-          <p:cNvPr id="7" name="Rounded Rectangle 6"/>
-          <p:cNvSpPr/>
-          <p:nvPr/>
-        </p:nvSpPr>
-        <p:spPr>
-          <a:xfrm>
-            <a:off x="6126480" y="2971800"/>
-            <a:ext cx="5120640" cy="1005840"/>
+              <a:t>Automatic physical expiration on purgeAt without custom cron jobs.</a:t>
+            </a:r>
+          </a:p>
+        </p:txBody>
+      </p:sp>
+      <p:sp>
+        <p:nvSpPr>
+          <p:cNvPr id="17" name="Rounded Rectangle 16"/>
+          <p:cNvSpPr/>
+          <p:nvPr/>
+        </p:nvSpPr>
+        <p:spPr>
+          <a:xfrm>
+            <a:off x="6126480" y="2880360"/>
+            <a:ext cx="5120640" cy="868680"/>
           </a:xfrm>
           <a:prstGeom prst="roundRect">
             <a:avLst/>
@@ -7692,7 +11415,7 @@
           </a:solidFill>
           <a:ln>
             <a:solidFill>
-              <a:srgbClr val="2E2B26"/>
+              <a:srgbClr val="2A2722"/>
             </a:solidFill>
           </a:ln>
         </p:spPr>
@@ -7723,7 +11446,7 @@
               </a:defRPr>
             </a:pPr>
             <a:r>
-              <a:t>TTL Indexes</a:t>
+              <a:t>Partial Unique Index</a:t>
             </a:r>
           </a:p>
           <a:p>
@@ -7739,21 +11462,21 @@
               </a:defRPr>
             </a:pPr>
             <a:r>
-              <a:t>Automatic physical expiration on purgeAt without custom cron jobs.</a:t>
-            </a:r>
-          </a:p>
-        </p:txBody>
-      </p:sp>
-      <p:sp>
-        <p:nvSpPr>
-          <p:cNvPr id="8" name="Rounded Rectangle 7"/>
-          <p:cNvSpPr/>
-          <p:nvPr/>
-        </p:nvSpPr>
-        <p:spPr>
-          <a:xfrm>
-            <a:off x="731520" y="4114800"/>
-            <a:ext cx="5120640" cy="1005840"/>
+              <a:t>{ownerId, spaceKey, slotKey} guarantees 1 active truth in DB.</a:t>
+            </a:r>
+          </a:p>
+        </p:txBody>
+      </p:sp>
+      <p:sp>
+        <p:nvSpPr>
+          <p:cNvPr id="18" name="Rounded Rectangle 17"/>
+          <p:cNvSpPr/>
+          <p:nvPr/>
+        </p:nvSpPr>
+        <p:spPr>
+          <a:xfrm>
+            <a:off x="731520" y="3840480"/>
+            <a:ext cx="5120640" cy="868680"/>
           </a:xfrm>
           <a:prstGeom prst="roundRect">
             <a:avLst/>
@@ -7763,7 +11486,7 @@
           </a:solidFill>
           <a:ln>
             <a:solidFill>
-              <a:srgbClr val="2E2B26"/>
+              <a:srgbClr val="2A2722"/>
             </a:solidFill>
           </a:ln>
         </p:spPr>
@@ -7794,7 +11517,7 @@
               </a:defRPr>
             </a:pPr>
             <a:r>
-              <a:t>Partial Unique Index</a:t>
+              <a:t>ACID Transactions</a:t>
             </a:r>
           </a:p>
           <a:p>
@@ -7810,21 +11533,21 @@
               </a:defRPr>
             </a:pPr>
             <a:r>
-              <a:t>{ownerId, spaceKey, slotKey} active guarantees one source of truth under concurrent writes.</a:t>
-            </a:r>
-          </a:p>
-        </p:txBody>
-      </p:sp>
-      <p:sp>
-        <p:nvSpPr>
-          <p:cNvPr id="9" name="Rounded Rectangle 8"/>
-          <p:cNvSpPr/>
-          <p:nvPr/>
-        </p:nvSpPr>
-        <p:spPr>
-          <a:xfrm>
-            <a:off x="6126480" y="4114800"/>
-            <a:ext cx="5120640" cy="1005840"/>
+              <a:t>Multi-document updates across memories and memory_events.</a:t>
+            </a:r>
+          </a:p>
+        </p:txBody>
+      </p:sp>
+      <p:sp>
+        <p:nvSpPr>
+          <p:cNvPr id="19" name="Rounded Rectangle 18"/>
+          <p:cNvSpPr/>
+          <p:nvPr/>
+        </p:nvSpPr>
+        <p:spPr>
+          <a:xfrm>
+            <a:off x="6126480" y="3840480"/>
+            <a:ext cx="5120640" cy="868680"/>
           </a:xfrm>
           <a:prstGeom prst="roundRect">
             <a:avLst/>
@@ -7834,7 +11557,7 @@
           </a:solidFill>
           <a:ln>
             <a:solidFill>
-              <a:srgbClr val="2E2B26"/>
+              <a:srgbClr val="2A2722"/>
             </a:solidFill>
           </a:ln>
         </p:spPr>
@@ -7865,7 +11588,7 @@
               </a:defRPr>
             </a:pPr>
             <a:r>
-              <a:t>Multi-Document Transactions</a:t>
+              <a:t>Change Streams</a:t>
             </a:r>
           </a:p>
           <a:p>
@@ -7881,21 +11604,21 @@
               </a:defRPr>
             </a:pPr>
             <a:r>
-              <a:t>Atomic updates across memories and memory_events ensure zero corrupted state.</a:t>
-            </a:r>
-          </a:p>
-        </p:txBody>
-      </p:sp>
-      <p:sp>
-        <p:nvSpPr>
-          <p:cNvPr id="10" name="Rounded Rectangle 9"/>
-          <p:cNvSpPr/>
-          <p:nvPr/>
-        </p:nvSpPr>
-        <p:spPr>
-          <a:xfrm>
-            <a:off x="731520" y="5257800"/>
-            <a:ext cx="5120640" cy="1005840"/>
+              <a:t>Watches memory_events to stream real-time SSE updates.</a:t>
+            </a:r>
+          </a:p>
+        </p:txBody>
+      </p:sp>
+      <p:sp>
+        <p:nvSpPr>
+          <p:cNvPr id="20" name="Rounded Rectangle 19"/>
+          <p:cNvSpPr/>
+          <p:nvPr/>
+        </p:nvSpPr>
+        <p:spPr>
+          <a:xfrm>
+            <a:off x="731520" y="4800600"/>
+            <a:ext cx="5120640" cy="868680"/>
           </a:xfrm>
           <a:prstGeom prst="roundRect">
             <a:avLst/>
@@ -7905,7 +11628,7 @@
           </a:solidFill>
           <a:ln>
             <a:solidFill>
-              <a:srgbClr val="2E2B26"/>
+              <a:srgbClr val="2A2722"/>
             </a:solidFill>
           </a:ln>
         </p:spPr>
@@ -7936,7 +11659,7 @@
               </a:defRPr>
             </a:pPr>
             <a:r>
-              <a:t>Change Streams</a:t>
+              <a:t>Aggregation Pipelines</a:t>
             </a:r>
           </a:p>
           <a:p>
@@ -7952,21 +11675,21 @@
               </a:defRPr>
             </a:pPr>
             <a:r>
-              <a:t>Watches memory_events to stream real-time SSE to browser write chips and Activity feed.</a:t>
-            </a:r>
-          </a:p>
-        </p:txBody>
-      </p:sp>
-      <p:sp>
-        <p:nvSpPr>
-          <p:cNvPr id="11" name="Rounded Rectangle 10"/>
-          <p:cNvSpPr/>
-          <p:nvPr/>
-        </p:nvSpPr>
-        <p:spPr>
-          <a:xfrm>
-            <a:off x="6126480" y="5257800"/>
-            <a:ext cx="5120640" cy="1005840"/>
+              <a:t>Real-time analytics for memory distribution, recall rate, and counts.</a:t>
+            </a:r>
+          </a:p>
+        </p:txBody>
+      </p:sp>
+      <p:sp>
+        <p:nvSpPr>
+          <p:cNvPr id="21" name="Rounded Rectangle 20"/>
+          <p:cNvSpPr/>
+          <p:nvPr/>
+        </p:nvSpPr>
+        <p:spPr>
+          <a:xfrm>
+            <a:off x="731520" y="5806440"/>
+            <a:ext cx="10728655" cy="594360"/>
           </a:xfrm>
           <a:prstGeom prst="roundRect">
             <a:avLst/>
@@ -7976,7 +11699,7 @@
           </a:solidFill>
           <a:ln>
             <a:solidFill>
-              <a:srgbClr val="2E2B26"/>
+              <a:srgbClr val="2A2722"/>
             </a:solidFill>
           </a:ln>
         </p:spPr>
@@ -7995,35 +11718,19 @@
           </a:fontRef>
         </p:style>
         <p:txBody>
-          <a:bodyPr rtlCol="0" anchor="ctr" wrap="square" lIns="182880" tIns="182880"/>
+          <a:bodyPr rtlCol="0" anchor="ctr" wrap="square"/>
           <a:lstStyle/>
           <a:p>
             <a:pPr algn="ctr">
-              <a:defRPr sz="1400" b="1">
-                <a:solidFill>
-                  <a:srgbClr val="F2C12E"/>
-                </a:solidFill>
-                <a:latin typeface="Georgia"/>
+              <a:defRPr sz="1100">
+                <a:solidFill>
+                  <a:srgbClr val="2E9E6B"/>
+                </a:solidFill>
+                <a:latin typeface="Consolas"/>
               </a:defRPr>
             </a:pPr>
             <a:r>
-              <a:t>Aggregation Pipelines</a:t>
-            </a:r>
-          </a:p>
-          <a:p>
-            <a:pPr>
-              <a:spcBef>
-                <a:spcPts val="200"/>
-              </a:spcBef>
-              <a:defRPr sz="1100">
-                <a:solidFill>
-                  <a:srgbClr val="B8B1A2"/>
-                </a:solidFill>
-                <a:latin typeface="Segoe UI"/>
-              </a:defRPr>
-            </a:pPr>
-            <a:r>
-              <a:t>Real-time analytics for memory distribution, recall hit rates, and weekly corrections.</a:t>
+              <a:t>ARCHITECTURE: Next.js 16 (Vercel)  ──►  MongoDB Atlas (Storage, Vectors, Events)  ──►  Gemini 3.5/3.6 / Groq</a:t>
             </a:r>
           </a:p>
         </p:txBody>
